--- a/LabBook_20_Nadia.pptx
+++ b/LabBook_20_Nadia.pptx
@@ -5,10 +5,10 @@
     <p:sldMasterId id="2147483648" r:id="rId1"/>
   </p:sldMasterIdLst>
   <p:notesMasterIdLst>
-    <p:notesMasterId r:id="rId19"/>
+    <p:notesMasterId r:id="rId21"/>
   </p:notesMasterIdLst>
   <p:handoutMasterIdLst>
-    <p:handoutMasterId r:id="rId20"/>
+    <p:handoutMasterId r:id="rId22"/>
   </p:handoutMasterIdLst>
   <p:sldIdLst>
     <p:sldId id="256" r:id="rId2"/>
@@ -23,11 +23,13 @@
     <p:sldId id="299" r:id="rId11"/>
     <p:sldId id="300" r:id="rId12"/>
     <p:sldId id="301" r:id="rId13"/>
-    <p:sldId id="297" r:id="rId14"/>
-    <p:sldId id="290" r:id="rId15"/>
-    <p:sldId id="292" r:id="rId16"/>
-    <p:sldId id="298" r:id="rId17"/>
-    <p:sldId id="288" r:id="rId18"/>
+    <p:sldId id="305" r:id="rId14"/>
+    <p:sldId id="306" r:id="rId15"/>
+    <p:sldId id="297" r:id="rId16"/>
+    <p:sldId id="290" r:id="rId17"/>
+    <p:sldId id="292" r:id="rId18"/>
+    <p:sldId id="298" r:id="rId19"/>
+    <p:sldId id="288" r:id="rId20"/>
   </p:sldIdLst>
   <p:sldSz cx="12192000" cy="6858000"/>
   <p:notesSz cx="12192000" cy="6858000"/>
@@ -1378,6 +1380,198 @@
         <p:cNvPr id="1" name="">
           <a:extLst>
             <a:ext uri="{FF2B5EF4-FFF2-40B4-BE49-F238E27FC236}">
+              <a16:creationId xmlns:a16="http://schemas.microsoft.com/office/drawing/2014/main" id="{1AC9112F-7FB7-4F49-F4F6-C1D0DC6ADBEE}"/>
+            </a:ext>
+          </a:extLst>
+        </p:cNvPr>
+        <p:cNvGrpSpPr/>
+        <p:nvPr/>
+      </p:nvGrpSpPr>
+      <p:grpSpPr>
+        <a:xfrm>
+          <a:off x="0" y="0"/>
+          <a:ext cx="0" cy="0"/>
+          <a:chOff x="0" y="0"/>
+          <a:chExt cx="0" cy="0"/>
+        </a:xfrm>
+      </p:grpSpPr>
+      <p:sp>
+        <p:nvSpPr>
+          <p:cNvPr id="2" name="Marcador de imagen de diapositiva 1">
+            <a:extLst>
+              <a:ext uri="{FF2B5EF4-FFF2-40B4-BE49-F238E27FC236}">
+                <a16:creationId xmlns:a16="http://schemas.microsoft.com/office/drawing/2014/main" id="{5190F532-536D-B583-3561-FD0C56234D42}"/>
+              </a:ext>
+            </a:extLst>
+          </p:cNvPr>
+          <p:cNvSpPr>
+            <a:spLocks noGrp="1" noRot="1" noChangeAspect="1"/>
+          </p:cNvSpPr>
+          <p:nvPr>
+            <p:ph type="sldImg"/>
+          </p:nvPr>
+        </p:nvSpPr>
+        <p:spPr/>
+      </p:sp>
+      <p:sp>
+        <p:nvSpPr>
+          <p:cNvPr id="3" name="Marcador de notas 2">
+            <a:extLst>
+              <a:ext uri="{FF2B5EF4-FFF2-40B4-BE49-F238E27FC236}">
+                <a16:creationId xmlns:a16="http://schemas.microsoft.com/office/drawing/2014/main" id="{CC233B1A-142E-BC7B-FE19-6D22CE4082B2}"/>
+              </a:ext>
+            </a:extLst>
+          </p:cNvPr>
+          <p:cNvSpPr>
+            <a:spLocks noGrp="1"/>
+          </p:cNvSpPr>
+          <p:nvPr>
+            <p:ph type="body" idx="1"/>
+          </p:nvPr>
+        </p:nvSpPr>
+        <p:spPr/>
+        <p:txBody>
+          <a:bodyPr/>
+          <a:lstStyle/>
+          <a:p>
+            <a:endParaRPr lang="es-ES" dirty="0"/>
+          </a:p>
+        </p:txBody>
+      </p:sp>
+      <p:sp>
+        <p:nvSpPr>
+          <p:cNvPr id="4" name="Marcador de número de diapositiva 3">
+            <a:extLst>
+              <a:ext uri="{FF2B5EF4-FFF2-40B4-BE49-F238E27FC236}">
+                <a16:creationId xmlns:a16="http://schemas.microsoft.com/office/drawing/2014/main" id="{685087E6-8FC6-B2E3-2D74-B3C5168F5568}"/>
+              </a:ext>
+            </a:extLst>
+          </p:cNvPr>
+          <p:cNvSpPr>
+            <a:spLocks noGrp="1"/>
+          </p:cNvSpPr>
+          <p:nvPr>
+            <p:ph type="sldNum" sz="quarter" idx="5"/>
+          </p:nvPr>
+        </p:nvSpPr>
+        <p:spPr/>
+        <p:txBody>
+          <a:bodyPr/>
+          <a:lstStyle/>
+          <a:p>
+            <a:fld id="{676223B9-C868-4436-87D9-1A3152E1157A}" type="slidenum">
+              <a:rPr lang="es-ES" smtClean="0"/>
+              <a:t>15</a:t>
+            </a:fld>
+            <a:endParaRPr lang="es-ES"/>
+          </a:p>
+        </p:txBody>
+      </p:sp>
+    </p:spTree>
+    <p:extLst>
+      <p:ext uri="{BB962C8B-B14F-4D97-AF65-F5344CB8AC3E}">
+        <p14:creationId xmlns:p14="http://schemas.microsoft.com/office/powerpoint/2010/main" val="1581859005"/>
+      </p:ext>
+    </p:extLst>
+  </p:cSld>
+  <p:clrMapOvr>
+    <a:masterClrMapping/>
+  </p:clrMapOvr>
+</p:notes>
+</file>
+
+<file path=ppt/notesSlides/notesSlide11.xml><?xml version="1.0" encoding="utf-8"?>
+<p:notes xmlns:a="http://schemas.openxmlformats.org/drawingml/2006/main" xmlns:r="http://schemas.openxmlformats.org/officeDocument/2006/relationships" xmlns:p="http://schemas.openxmlformats.org/presentationml/2006/main">
+  <p:cSld>
+    <p:spTree>
+      <p:nvGrpSpPr>
+        <p:cNvPr id="1" name=""/>
+        <p:cNvGrpSpPr/>
+        <p:nvPr/>
+      </p:nvGrpSpPr>
+      <p:grpSpPr>
+        <a:xfrm>
+          <a:off x="0" y="0"/>
+          <a:ext cx="0" cy="0"/>
+          <a:chOff x="0" y="0"/>
+          <a:chExt cx="0" cy="0"/>
+        </a:xfrm>
+      </p:grpSpPr>
+      <p:sp>
+        <p:nvSpPr>
+          <p:cNvPr id="2" name="Marcador de imagen de diapositiva 1"/>
+          <p:cNvSpPr>
+            <a:spLocks noGrp="1" noRot="1" noChangeAspect="1"/>
+          </p:cNvSpPr>
+          <p:nvPr>
+            <p:ph type="sldImg"/>
+          </p:nvPr>
+        </p:nvSpPr>
+        <p:spPr/>
+      </p:sp>
+      <p:sp>
+        <p:nvSpPr>
+          <p:cNvPr id="3" name="Marcador de notas 2"/>
+          <p:cNvSpPr>
+            <a:spLocks noGrp="1"/>
+          </p:cNvSpPr>
+          <p:nvPr>
+            <p:ph type="body" idx="1"/>
+          </p:nvPr>
+        </p:nvSpPr>
+        <p:spPr/>
+        <p:txBody>
+          <a:bodyPr/>
+          <a:lstStyle/>
+          <a:p>
+            <a:endParaRPr lang="es-ES" dirty="0"/>
+          </a:p>
+        </p:txBody>
+      </p:sp>
+      <p:sp>
+        <p:nvSpPr>
+          <p:cNvPr id="4" name="Marcador de número de diapositiva 3"/>
+          <p:cNvSpPr>
+            <a:spLocks noGrp="1"/>
+          </p:cNvSpPr>
+          <p:nvPr>
+            <p:ph type="sldNum" sz="quarter" idx="5"/>
+          </p:nvPr>
+        </p:nvSpPr>
+        <p:spPr/>
+        <p:txBody>
+          <a:bodyPr/>
+          <a:lstStyle/>
+          <a:p>
+            <a:fld id="{676223B9-C868-4436-87D9-1A3152E1157A}" type="slidenum">
+              <a:rPr lang="es-ES" smtClean="0"/>
+              <a:t>16</a:t>
+            </a:fld>
+            <a:endParaRPr lang="es-ES"/>
+          </a:p>
+        </p:txBody>
+      </p:sp>
+    </p:spTree>
+    <p:extLst>
+      <p:ext uri="{BB962C8B-B14F-4D97-AF65-F5344CB8AC3E}">
+        <p14:creationId xmlns:p14="http://schemas.microsoft.com/office/powerpoint/2010/main" val="942232946"/>
+      </p:ext>
+    </p:extLst>
+  </p:cSld>
+  <p:clrMapOvr>
+    <a:masterClrMapping/>
+  </p:clrMapOvr>
+</p:notes>
+</file>
+
+<file path=ppt/notesSlides/notesSlide12.xml><?xml version="1.0" encoding="utf-8"?>
+<p:notes xmlns:a="http://schemas.openxmlformats.org/drawingml/2006/main" xmlns:r="http://schemas.openxmlformats.org/officeDocument/2006/relationships" xmlns:p="http://schemas.openxmlformats.org/presentationml/2006/main">
+  <p:cSld>
+    <p:spTree>
+      <p:nvGrpSpPr>
+        <p:cNvPr id="1" name="">
+          <a:extLst>
+            <a:ext uri="{FF2B5EF4-FFF2-40B4-BE49-F238E27FC236}">
               <a16:creationId xmlns:a16="http://schemas.microsoft.com/office/drawing/2014/main" id="{95993BBE-3704-D894-1C10-5488EE611F08}"/>
             </a:ext>
           </a:extLst>
@@ -1459,7 +1653,7 @@
           <a:p>
             <a:fld id="{676223B9-C868-4436-87D9-1A3152E1157A}" type="slidenum">
               <a:rPr lang="es-ES" smtClean="0"/>
-              <a:t>15</a:t>
+              <a:t>17</a:t>
             </a:fld>
             <a:endParaRPr lang="es-ES"/>
           </a:p>
@@ -1478,7 +1672,7 @@
 </p:notes>
 </file>
 
-<file path=ppt/notesSlides/notesSlide11.xml><?xml version="1.0" encoding="utf-8"?>
+<file path=ppt/notesSlides/notesSlide13.xml><?xml version="1.0" encoding="utf-8"?>
 <p:notes xmlns:a="http://schemas.openxmlformats.org/drawingml/2006/main" xmlns:r="http://schemas.openxmlformats.org/officeDocument/2006/relationships" xmlns:p="http://schemas.openxmlformats.org/presentationml/2006/main">
   <p:cSld>
     <p:spTree>
@@ -1567,7 +1761,7 @@
           <a:p>
             <a:fld id="{676223B9-C868-4436-87D9-1A3152E1157A}" type="slidenum">
               <a:rPr lang="es-ES" smtClean="0"/>
-              <a:t>16</a:t>
+              <a:t>18</a:t>
             </a:fld>
             <a:endParaRPr lang="es-ES"/>
           </a:p>
@@ -2242,7 +2436,7 @@
         <p:cNvPr id="1" name="">
           <a:extLst>
             <a:ext uri="{FF2B5EF4-FFF2-40B4-BE49-F238E27FC236}">
-              <a16:creationId xmlns:a16="http://schemas.microsoft.com/office/drawing/2014/main" id="{1AC9112F-7FB7-4F49-F4F6-C1D0DC6ADBEE}"/>
+              <a16:creationId xmlns:a16="http://schemas.microsoft.com/office/drawing/2014/main" id="{6F918B0B-1527-F1CE-B7C6-3A4EEEE44FB1}"/>
             </a:ext>
           </a:extLst>
         </p:cNvPr>
@@ -2262,7 +2456,7 @@
           <p:cNvPr id="2" name="Marcador de imagen de diapositiva 1">
             <a:extLst>
               <a:ext uri="{FF2B5EF4-FFF2-40B4-BE49-F238E27FC236}">
-                <a16:creationId xmlns:a16="http://schemas.microsoft.com/office/drawing/2014/main" id="{5190F532-536D-B583-3561-FD0C56234D42}"/>
+                <a16:creationId xmlns:a16="http://schemas.microsoft.com/office/drawing/2014/main" id="{BD26890C-BFDE-EB57-C86A-5199A0D96212}"/>
               </a:ext>
             </a:extLst>
           </p:cNvPr>
@@ -2280,7 +2474,7 @@
           <p:cNvPr id="3" name="Marcador de notas 2">
             <a:extLst>
               <a:ext uri="{FF2B5EF4-FFF2-40B4-BE49-F238E27FC236}">
-                <a16:creationId xmlns:a16="http://schemas.microsoft.com/office/drawing/2014/main" id="{CC233B1A-142E-BC7B-FE19-6D22CE4082B2}"/>
+                <a16:creationId xmlns:a16="http://schemas.microsoft.com/office/drawing/2014/main" id="{2EEF1C62-7FB2-EC14-4109-CC2B3204CEBD}"/>
               </a:ext>
             </a:extLst>
           </p:cNvPr>
@@ -2305,7 +2499,7 @@
           <p:cNvPr id="4" name="Marcador de número de diapositiva 3">
             <a:extLst>
               <a:ext uri="{FF2B5EF4-FFF2-40B4-BE49-F238E27FC236}">
-                <a16:creationId xmlns:a16="http://schemas.microsoft.com/office/drawing/2014/main" id="{685087E6-8FC6-B2E3-2D74-B3C5168F5568}"/>
+                <a16:creationId xmlns:a16="http://schemas.microsoft.com/office/drawing/2014/main" id="{388CFB6A-4B50-8F81-53B5-44C94D279BC8}"/>
               </a:ext>
             </a:extLst>
           </p:cNvPr>
@@ -2332,7 +2526,7 @@
     </p:spTree>
     <p:extLst>
       <p:ext uri="{BB962C8B-B14F-4D97-AF65-F5344CB8AC3E}">
-        <p14:creationId xmlns:p14="http://schemas.microsoft.com/office/powerpoint/2010/main" val="1581859005"/>
+        <p14:creationId xmlns:p14="http://schemas.microsoft.com/office/powerpoint/2010/main" val="2534530086"/>
       </p:ext>
     </p:extLst>
   </p:cSld>
@@ -2347,7 +2541,13 @@
   <p:cSld>
     <p:spTree>
       <p:nvGrpSpPr>
-        <p:cNvPr id="1" name=""/>
+        <p:cNvPr id="1" name="">
+          <a:extLst>
+            <a:ext uri="{FF2B5EF4-FFF2-40B4-BE49-F238E27FC236}">
+              <a16:creationId xmlns:a16="http://schemas.microsoft.com/office/drawing/2014/main" id="{6F918B0B-1527-F1CE-B7C6-3A4EEEE44FB1}"/>
+            </a:ext>
+          </a:extLst>
+        </p:cNvPr>
         <p:cNvGrpSpPr/>
         <p:nvPr/>
       </p:nvGrpSpPr>
@@ -2361,7 +2561,13 @@
       </p:grpSpPr>
       <p:sp>
         <p:nvSpPr>
-          <p:cNvPr id="2" name="Marcador de imagen de diapositiva 1"/>
+          <p:cNvPr id="2" name="Marcador de imagen de diapositiva 1">
+            <a:extLst>
+              <a:ext uri="{FF2B5EF4-FFF2-40B4-BE49-F238E27FC236}">
+                <a16:creationId xmlns:a16="http://schemas.microsoft.com/office/drawing/2014/main" id="{BD26890C-BFDE-EB57-C86A-5199A0D96212}"/>
+              </a:ext>
+            </a:extLst>
+          </p:cNvPr>
           <p:cNvSpPr>
             <a:spLocks noGrp="1" noRot="1" noChangeAspect="1"/>
           </p:cNvSpPr>
@@ -2373,7 +2579,13 @@
       </p:sp>
       <p:sp>
         <p:nvSpPr>
-          <p:cNvPr id="3" name="Marcador de notas 2"/>
+          <p:cNvPr id="3" name="Marcador de notas 2">
+            <a:extLst>
+              <a:ext uri="{FF2B5EF4-FFF2-40B4-BE49-F238E27FC236}">
+                <a16:creationId xmlns:a16="http://schemas.microsoft.com/office/drawing/2014/main" id="{2EEF1C62-7FB2-EC14-4109-CC2B3204CEBD}"/>
+              </a:ext>
+            </a:extLst>
+          </p:cNvPr>
           <p:cNvSpPr>
             <a:spLocks noGrp="1"/>
           </p:cNvSpPr>
@@ -2392,7 +2604,13 @@
       </p:sp>
       <p:sp>
         <p:nvSpPr>
-          <p:cNvPr id="4" name="Marcador de número de diapositiva 3"/>
+          <p:cNvPr id="4" name="Marcador de número de diapositiva 3">
+            <a:extLst>
+              <a:ext uri="{FF2B5EF4-FFF2-40B4-BE49-F238E27FC236}">
+                <a16:creationId xmlns:a16="http://schemas.microsoft.com/office/drawing/2014/main" id="{388CFB6A-4B50-8F81-53B5-44C94D279BC8}"/>
+              </a:ext>
+            </a:extLst>
+          </p:cNvPr>
           <p:cNvSpPr>
             <a:spLocks noGrp="1"/>
           </p:cNvSpPr>
@@ -2416,7 +2634,7 @@
     </p:spTree>
     <p:extLst>
       <p:ext uri="{BB962C8B-B14F-4D97-AF65-F5344CB8AC3E}">
-        <p14:creationId xmlns:p14="http://schemas.microsoft.com/office/powerpoint/2010/main" val="942232946"/>
+        <p14:creationId xmlns:p14="http://schemas.microsoft.com/office/powerpoint/2010/main" val="1740399813"/>
       </p:ext>
     </p:extLst>
   </p:cSld>
@@ -4347,118 +4565,394 @@
           </a:p>
         </p:txBody>
       </p:sp>
-      <p:sp>
-        <p:nvSpPr>
-          <p:cNvPr id="8" name="CuadroTexto 7">
-            <a:extLst>
-              <a:ext uri="{FF2B5EF4-FFF2-40B4-BE49-F238E27FC236}">
-                <a16:creationId xmlns:a16="http://schemas.microsoft.com/office/drawing/2014/main" id="{643565A9-7DB6-D6EE-152F-2852C8BA7986}"/>
-              </a:ext>
-            </a:extLst>
-          </p:cNvPr>
-          <p:cNvSpPr txBox="1"/>
+      <p:pic>
+        <p:nvPicPr>
+          <p:cNvPr id="5" name="Imagen 4">
+            <a:extLst>
+              <a:ext uri="{FF2B5EF4-FFF2-40B4-BE49-F238E27FC236}">
+                <a16:creationId xmlns:a16="http://schemas.microsoft.com/office/drawing/2014/main" id="{8FC4B0DD-3E3B-4BA7-96DE-842CDC92C3F2}"/>
+              </a:ext>
+            </a:extLst>
+          </p:cNvPr>
+          <p:cNvPicPr>
+            <a:picLocks noChangeAspect="1"/>
+          </p:cNvPicPr>
           <p:nvPr/>
-        </p:nvSpPr>
+        </p:nvPicPr>
+        <p:blipFill>
+          <a:blip r:embed="rId5"/>
+          <a:stretch>
+            <a:fillRect/>
+          </a:stretch>
+        </p:blipFill>
         <p:spPr>
           <a:xfrm>
-            <a:off x="640245" y="1942909"/>
-            <a:ext cx="11199972" cy="2708434"/>
+            <a:off x="7010400" y="1582495"/>
+            <a:ext cx="2820897" cy="1762135"/>
           </a:xfrm>
           <a:prstGeom prst="rect">
             <a:avLst/>
           </a:prstGeom>
-          <a:noFill/>
         </p:spPr>
-        <p:txBody>
-          <a:bodyPr wrap="square" rtlCol="0">
-            <a:spAutoFit/>
-          </a:bodyPr>
-          <a:lstStyle/>
-          <a:p>
-            <a:pPr algn="ctr"/>
-            <a:r>
-              <a:rPr lang="en-US" b="1" dirty="0"/>
-              <a:t>deep</a:t>
-            </a:r>
-            <a:r>
-              <a:rPr lang="en-US" dirty="0"/>
-              <a:t> waveguide</a:t>
-            </a:r>
-          </a:p>
-          <a:p>
-            <a:pPr algn="ctr"/>
-            <a:endParaRPr lang="en-US" dirty="0"/>
-          </a:p>
-          <a:p>
-            <a:pPr algn="ctr"/>
-            <a:r>
-              <a:rPr lang="en-US" dirty="0"/>
-              <a:t>Paste propagation plot and console results</a:t>
-            </a:r>
-          </a:p>
-          <a:p>
-            <a:pPr algn="ctr"/>
-            <a:endParaRPr lang="en-US" dirty="0"/>
-          </a:p>
-          <a:p>
-            <a:pPr algn="ctr"/>
-            <a:endParaRPr lang="en-US" dirty="0"/>
-          </a:p>
-          <a:p>
-            <a:pPr algn="r"/>
-            <a:r>
-              <a:rPr lang="en-US" sz="1600" b="1" dirty="0"/>
-              <a:t>Target</a:t>
-            </a:r>
-            <a:r>
-              <a:rPr lang="en-US" sz="1600" dirty="0"/>
-              <a:t>: make equal ratio over outputs (even if not 0.5) and minimize excess loss (even if not 0.0 dB)</a:t>
-            </a:r>
-          </a:p>
-          <a:p>
-            <a:pPr algn="r"/>
-            <a:r>
-              <a:rPr lang="en-US" sz="1600" dirty="0"/>
-              <a:t>With same settings of previous LO, now adjust try to manually optimize the MMI by changing iteratively:</a:t>
-            </a:r>
-          </a:p>
-          <a:p>
-            <a:pPr algn="r"/>
-            <a:r>
-              <a:rPr lang="en-US" sz="1600" dirty="0"/>
-              <a:t>- Change </a:t>
-            </a:r>
-            <a:r>
-              <a:rPr lang="en-US" sz="1600" dirty="0" err="1"/>
-              <a:t>dL_MMI</a:t>
-            </a:r>
-            <a:endParaRPr lang="en-US" sz="1600" dirty="0"/>
-          </a:p>
-          <a:p>
-            <a:pPr algn="r"/>
-            <a:r>
-              <a:rPr lang="en-US" sz="1600" dirty="0"/>
-              <a:t>- Change I/O waveguide position +/- </a:t>
-            </a:r>
-            <a:r>
-              <a:rPr lang="en-US" sz="1600" dirty="0" err="1"/>
-              <a:t>dy</a:t>
-            </a:r>
-            <a:endParaRPr lang="en-US" sz="1600" dirty="0"/>
-          </a:p>
-          <a:p>
-            <a:pPr algn="r"/>
-            <a:r>
-              <a:rPr lang="en-US" sz="1600" b="1" dirty="0"/>
-              <a:t>Hints</a:t>
-            </a:r>
-            <a:r>
-              <a:rPr lang="en-US" sz="1600" dirty="0"/>
-              <a:t>: observe the 2D EME propagation results to guide you to the best settings of a) and b).</a:t>
-            </a:r>
-          </a:p>
-        </p:txBody>
-      </p:sp>
+      </p:pic>
+      <p:pic>
+        <p:nvPicPr>
+          <p:cNvPr id="14" name="Imagen 13">
+            <a:extLst>
+              <a:ext uri="{FF2B5EF4-FFF2-40B4-BE49-F238E27FC236}">
+                <a16:creationId xmlns:a16="http://schemas.microsoft.com/office/drawing/2014/main" id="{7A8B332E-1833-4740-A240-712FB84CF020}"/>
+              </a:ext>
+            </a:extLst>
+          </p:cNvPr>
+          <p:cNvPicPr>
+            <a:picLocks noChangeAspect="1"/>
+          </p:cNvPicPr>
+          <p:nvPr/>
+        </p:nvPicPr>
+        <p:blipFill>
+          <a:blip r:embed="rId6"/>
+          <a:stretch>
+            <a:fillRect/>
+          </a:stretch>
+        </p:blipFill>
+        <p:spPr>
+          <a:xfrm>
+            <a:off x="1981200" y="1510240"/>
+            <a:ext cx="4721197" cy="1955328"/>
+          </a:xfrm>
+          <a:prstGeom prst="rect">
+            <a:avLst/>
+          </a:prstGeom>
+        </p:spPr>
+      </p:pic>
+      <p:graphicFrame>
+        <p:nvGraphicFramePr>
+          <p:cNvPr id="15" name="Tabla 6">
+            <a:extLst>
+              <a:ext uri="{FF2B5EF4-FFF2-40B4-BE49-F238E27FC236}">
+                <a16:creationId xmlns:a16="http://schemas.microsoft.com/office/drawing/2014/main" id="{382DBB63-2CA4-4648-A53C-E50A3E7EFA57}"/>
+              </a:ext>
+            </a:extLst>
+          </p:cNvPr>
+          <p:cNvGraphicFramePr>
+            <a:graphicFrameLocks noGrp="1"/>
+          </p:cNvGraphicFramePr>
+          <p:nvPr>
+            <p:extLst>
+              <p:ext uri="{D42A27DB-BD31-4B8C-83A1-F6EECF244321}">
+                <p14:modId xmlns:p14="http://schemas.microsoft.com/office/powerpoint/2010/main" val="3855458773"/>
+              </p:ext>
+            </p:extLst>
+          </p:nvPr>
+        </p:nvGraphicFramePr>
+        <p:xfrm>
+          <a:off x="1700968" y="3597221"/>
+          <a:ext cx="8848825" cy="743992"/>
+        </p:xfrm>
+        <a:graphic>
+          <a:graphicData uri="http://schemas.openxmlformats.org/drawingml/2006/table">
+            <a:tbl>
+              <a:tblPr firstRow="1" bandRow="1">
+                <a:tableStyleId>{5C22544A-7EE6-4342-B048-85BDC9FD1C3A}</a:tableStyleId>
+              </a:tblPr>
+              <a:tblGrid>
+                <a:gridCol w="2908355">
+                  <a:extLst>
+                    <a:ext uri="{9D8B030D-6E8A-4147-A177-3AD203B41FA5}">
+                      <a16:colId xmlns:a16="http://schemas.microsoft.com/office/drawing/2014/main" val="1794412849"/>
+                    </a:ext>
+                  </a:extLst>
+                </a:gridCol>
+                <a:gridCol w="816815">
+                  <a:extLst>
+                    <a:ext uri="{9D8B030D-6E8A-4147-A177-3AD203B41FA5}">
+                      <a16:colId xmlns:a16="http://schemas.microsoft.com/office/drawing/2014/main" val="2100323231"/>
+                    </a:ext>
+                  </a:extLst>
+                </a:gridCol>
+                <a:gridCol w="1039582">
+                  <a:extLst>
+                    <a:ext uri="{9D8B030D-6E8A-4147-A177-3AD203B41FA5}">
+                      <a16:colId xmlns:a16="http://schemas.microsoft.com/office/drawing/2014/main" val="3349686945"/>
+                    </a:ext>
+                  </a:extLst>
+                </a:gridCol>
+                <a:gridCol w="1782141">
+                  <a:extLst>
+                    <a:ext uri="{9D8B030D-6E8A-4147-A177-3AD203B41FA5}">
+                      <a16:colId xmlns:a16="http://schemas.microsoft.com/office/drawing/2014/main" val="2945410550"/>
+                    </a:ext>
+                  </a:extLst>
+                </a:gridCol>
+                <a:gridCol w="2301932">
+                  <a:extLst>
+                    <a:ext uri="{9D8B030D-6E8A-4147-A177-3AD203B41FA5}">
+                      <a16:colId xmlns:a16="http://schemas.microsoft.com/office/drawing/2014/main" val="3998529583"/>
+                    </a:ext>
+                  </a:extLst>
+                </a:gridCol>
+              </a:tblGrid>
+              <a:tr h="378232">
+                <a:tc>
+                  <a:txBody>
+                    <a:bodyPr/>
+                    <a:lstStyle/>
+                    <a:p>
+                      <a:r>
+                        <a:rPr lang="es-ES" dirty="0"/>
+                        <a:t>I/O </a:t>
+                      </a:r>
+                      <a:r>
+                        <a:rPr lang="es-ES" dirty="0" err="1"/>
+                        <a:t>waveguide</a:t>
+                      </a:r>
+                      <a:r>
+                        <a:rPr lang="es-ES" dirty="0"/>
+                        <a:t> </a:t>
+                      </a:r>
+                      <a:r>
+                        <a:rPr lang="es-ES" dirty="0" err="1"/>
+                        <a:t>width</a:t>
+                      </a:r>
+                      <a:r>
+                        <a:rPr lang="es-ES" dirty="0"/>
+                        <a:t> (</a:t>
+                      </a:r>
+                      <a:r>
+                        <a:rPr lang="es-ES" dirty="0" err="1"/>
+                        <a:t>um</a:t>
+                      </a:r>
+                      <a:r>
+                        <a:rPr lang="es-ES" dirty="0"/>
+                        <a:t>)</a:t>
+                      </a:r>
+                    </a:p>
+                  </a:txBody>
+                  <a:tcPr/>
+                </a:tc>
+                <a:tc>
+                  <a:txBody>
+                    <a:bodyPr/>
+                    <a:lstStyle/>
+                    <a:p>
+                      <a:r>
+                        <a:rPr lang="es-ES" dirty="0" err="1"/>
+                        <a:t>dy</a:t>
+                      </a:r>
+                      <a:endParaRPr lang="es-ES" dirty="0"/>
+                    </a:p>
+                  </a:txBody>
+                  <a:tcPr/>
+                </a:tc>
+                <a:tc>
+                  <a:txBody>
+                    <a:bodyPr/>
+                    <a:lstStyle/>
+                    <a:p>
+                      <a:r>
+                        <a:rPr lang="es-ES" dirty="0" err="1"/>
+                        <a:t>dL</a:t>
+                      </a:r>
+                      <a:endParaRPr lang="es-ES" dirty="0"/>
+                    </a:p>
+                  </a:txBody>
+                  <a:tcPr/>
+                </a:tc>
+                <a:tc>
+                  <a:txBody>
+                    <a:bodyPr/>
+                    <a:lstStyle/>
+                    <a:p>
+                      <a:r>
+                        <a:rPr lang="es-ES" dirty="0" err="1"/>
+                        <a:t>Excess</a:t>
+                      </a:r>
+                      <a:r>
+                        <a:rPr lang="es-ES" dirty="0"/>
+                        <a:t> </a:t>
+                      </a:r>
+                      <a:r>
+                        <a:rPr lang="es-ES" dirty="0" err="1"/>
+                        <a:t>Loss</a:t>
+                      </a:r>
+                      <a:r>
+                        <a:rPr lang="es-ES" dirty="0"/>
+                        <a:t> [dB]</a:t>
+                      </a:r>
+                    </a:p>
+                  </a:txBody>
+                  <a:tcPr/>
+                </a:tc>
+                <a:tc>
+                  <a:txBody>
+                    <a:bodyPr/>
+                    <a:lstStyle/>
+                    <a:p>
+                      <a:r>
+                        <a:rPr lang="es-ES" b="1" i="0" dirty="0">
+                          <a:solidFill>
+                            <a:schemeClr val="lt1"/>
+                          </a:solidFill>
+                          <a:effectLst/>
+                          <a:latin typeface="+mn-lt"/>
+                          <a:ea typeface="+mn-ea"/>
+                          <a:cs typeface="+mn-cs"/>
+                        </a:rPr>
+                        <a:t>Ratio </a:t>
+                      </a:r>
+                      <a:r>
+                        <a:rPr lang="es-ES" b="1" i="0" dirty="0" err="1">
+                          <a:solidFill>
+                            <a:schemeClr val="lt1"/>
+                          </a:solidFill>
+                          <a:effectLst/>
+                          <a:latin typeface="+mn-lt"/>
+                          <a:ea typeface="+mn-ea"/>
+                          <a:cs typeface="+mn-cs"/>
+                        </a:rPr>
+                        <a:t>over</a:t>
+                      </a:r>
+                      <a:r>
+                        <a:rPr lang="es-ES" b="1" i="0" dirty="0">
+                          <a:solidFill>
+                            <a:schemeClr val="lt1"/>
+                          </a:solidFill>
+                          <a:effectLst/>
+                          <a:latin typeface="+mn-lt"/>
+                          <a:ea typeface="+mn-ea"/>
+                          <a:cs typeface="+mn-cs"/>
+                        </a:rPr>
+                        <a:t> </a:t>
+                      </a:r>
+                      <a:r>
+                        <a:rPr lang="es-ES" b="1" i="0" dirty="0" err="1">
+                          <a:solidFill>
+                            <a:schemeClr val="lt1"/>
+                          </a:solidFill>
+                          <a:effectLst/>
+                          <a:latin typeface="+mn-lt"/>
+                          <a:ea typeface="+mn-ea"/>
+                          <a:cs typeface="+mn-cs"/>
+                        </a:rPr>
+                        <a:t>OUTs</a:t>
+                      </a:r>
+                      <a:r>
+                        <a:rPr lang="es-ES" b="1" i="0" dirty="0">
+                          <a:solidFill>
+                            <a:schemeClr val="lt1"/>
+                          </a:solidFill>
+                          <a:effectLst/>
+                          <a:latin typeface="+mn-lt"/>
+                          <a:ea typeface="+mn-ea"/>
+                          <a:cs typeface="+mn-cs"/>
+                        </a:rPr>
+                        <a:t> </a:t>
+                      </a:r>
+                      <a:endParaRPr lang="es-ES" b="1" dirty="0"/>
+                    </a:p>
+                  </a:txBody>
+                  <a:tcPr/>
+                </a:tc>
+                <a:extLst>
+                  <a:ext uri="{0D108BD9-81ED-4DB2-BD59-A6C34878D82A}">
+                    <a16:rowId xmlns:a16="http://schemas.microsoft.com/office/drawing/2014/main" val="4164163794"/>
+                  </a:ext>
+                </a:extLst>
+              </a:tr>
+              <a:tr h="305986">
+                <a:tc>
+                  <a:txBody>
+                    <a:bodyPr/>
+                    <a:lstStyle/>
+                    <a:p>
+                      <a:r>
+                        <a:rPr lang="es-ES" dirty="0"/>
+                        <a:t>6.6</a:t>
+                      </a:r>
+                    </a:p>
+                  </a:txBody>
+                  <a:tcPr/>
+                </a:tc>
+                <a:tc>
+                  <a:txBody>
+                    <a:bodyPr/>
+                    <a:lstStyle/>
+                    <a:p>
+                      <a:r>
+                        <a:rPr lang="es-ES" dirty="0"/>
+                        <a:t>0.05</a:t>
+                      </a:r>
+                    </a:p>
+                  </a:txBody>
+                  <a:tcPr/>
+                </a:tc>
+                <a:tc>
+                  <a:txBody>
+                    <a:bodyPr/>
+                    <a:lstStyle/>
+                    <a:p>
+                      <a:r>
+                        <a:rPr lang="es-ES" dirty="0"/>
+                        <a:t>-0.3</a:t>
+                      </a:r>
+                    </a:p>
+                  </a:txBody>
+                  <a:tcPr/>
+                </a:tc>
+                <a:tc>
+                  <a:txBody>
+                    <a:bodyPr/>
+                    <a:lstStyle/>
+                    <a:p>
+                      <a:r>
+                        <a:rPr lang="es-ES" b="0" i="0" dirty="0">
+                          <a:solidFill>
+                            <a:schemeClr val="dk1"/>
+                          </a:solidFill>
+                          <a:effectLst/>
+                          <a:latin typeface="+mn-lt"/>
+                          <a:ea typeface="+mn-ea"/>
+                          <a:cs typeface="+mn-cs"/>
+                        </a:rPr>
+                        <a:t>0.3800</a:t>
+                      </a:r>
+                      <a:endParaRPr lang="es-ES" dirty="0"/>
+                    </a:p>
+                  </a:txBody>
+                  <a:tcPr/>
+                </a:tc>
+                <a:tc>
+                  <a:txBody>
+                    <a:bodyPr/>
+                    <a:lstStyle/>
+                    <a:p>
+                      <a:r>
+                        <a:rPr lang="es-ES" b="0" i="0" dirty="0">
+                          <a:solidFill>
+                            <a:schemeClr val="dk1"/>
+                          </a:solidFill>
+                          <a:effectLst/>
+                          <a:latin typeface="+mn-lt"/>
+                          <a:ea typeface="+mn-ea"/>
+                          <a:cs typeface="+mn-cs"/>
+                        </a:rPr>
+                        <a:t>['0.5097', '0.4903']</a:t>
+                      </a:r>
+                      <a:endParaRPr lang="es-ES" dirty="0"/>
+                    </a:p>
+                  </a:txBody>
+                  <a:tcPr/>
+                </a:tc>
+                <a:extLst>
+                  <a:ext uri="{0D108BD9-81ED-4DB2-BD59-A6C34878D82A}">
+                    <a16:rowId xmlns:a16="http://schemas.microsoft.com/office/drawing/2014/main" val="4255659296"/>
+                  </a:ext>
+                </a:extLst>
+              </a:tr>
+            </a:tbl>
+          </a:graphicData>
+        </a:graphic>
+      </p:graphicFrame>
     </p:spTree>
     <p:extLst>
       <p:ext uri="{BB962C8B-B14F-4D97-AF65-F5344CB8AC3E}">
@@ -4801,112 +5295,394 @@
           </a:p>
         </p:txBody>
       </p:sp>
-      <p:sp>
-        <p:nvSpPr>
-          <p:cNvPr id="8" name="CuadroTexto 7">
-            <a:extLst>
-              <a:ext uri="{FF2B5EF4-FFF2-40B4-BE49-F238E27FC236}">
-                <a16:creationId xmlns:a16="http://schemas.microsoft.com/office/drawing/2014/main" id="{B0CFB20A-64F3-A296-71E8-F4FA17D35314}"/>
-              </a:ext>
-            </a:extLst>
-          </p:cNvPr>
-          <p:cNvSpPr txBox="1"/>
+      <p:graphicFrame>
+        <p:nvGraphicFramePr>
+          <p:cNvPr id="27" name="Tabla 6">
+            <a:extLst>
+              <a:ext uri="{FF2B5EF4-FFF2-40B4-BE49-F238E27FC236}">
+                <a16:creationId xmlns:a16="http://schemas.microsoft.com/office/drawing/2014/main" id="{125333E9-E734-46B4-984D-979FF277870F}"/>
+              </a:ext>
+            </a:extLst>
+          </p:cNvPr>
+          <p:cNvGraphicFramePr>
+            <a:graphicFrameLocks noGrp="1"/>
+          </p:cNvGraphicFramePr>
+          <p:nvPr>
+            <p:extLst>
+              <p:ext uri="{D42A27DB-BD31-4B8C-83A1-F6EECF244321}">
+                <p14:modId xmlns:p14="http://schemas.microsoft.com/office/powerpoint/2010/main" val="2301833566"/>
+              </p:ext>
+            </p:extLst>
+          </p:nvPr>
+        </p:nvGraphicFramePr>
+        <p:xfrm>
+          <a:off x="1700968" y="3597221"/>
+          <a:ext cx="8848825" cy="743992"/>
+        </p:xfrm>
+        <a:graphic>
+          <a:graphicData uri="http://schemas.openxmlformats.org/drawingml/2006/table">
+            <a:tbl>
+              <a:tblPr firstRow="1" bandRow="1">
+                <a:tableStyleId>{5C22544A-7EE6-4342-B048-85BDC9FD1C3A}</a:tableStyleId>
+              </a:tblPr>
+              <a:tblGrid>
+                <a:gridCol w="2908355">
+                  <a:extLst>
+                    <a:ext uri="{9D8B030D-6E8A-4147-A177-3AD203B41FA5}">
+                      <a16:colId xmlns:a16="http://schemas.microsoft.com/office/drawing/2014/main" val="1794412849"/>
+                    </a:ext>
+                  </a:extLst>
+                </a:gridCol>
+                <a:gridCol w="816815">
+                  <a:extLst>
+                    <a:ext uri="{9D8B030D-6E8A-4147-A177-3AD203B41FA5}">
+                      <a16:colId xmlns:a16="http://schemas.microsoft.com/office/drawing/2014/main" val="2100323231"/>
+                    </a:ext>
+                  </a:extLst>
+                </a:gridCol>
+                <a:gridCol w="1039582">
+                  <a:extLst>
+                    <a:ext uri="{9D8B030D-6E8A-4147-A177-3AD203B41FA5}">
+                      <a16:colId xmlns:a16="http://schemas.microsoft.com/office/drawing/2014/main" val="3349686945"/>
+                    </a:ext>
+                  </a:extLst>
+                </a:gridCol>
+                <a:gridCol w="1782141">
+                  <a:extLst>
+                    <a:ext uri="{9D8B030D-6E8A-4147-A177-3AD203B41FA5}">
+                      <a16:colId xmlns:a16="http://schemas.microsoft.com/office/drawing/2014/main" val="2945410550"/>
+                    </a:ext>
+                  </a:extLst>
+                </a:gridCol>
+                <a:gridCol w="2301932">
+                  <a:extLst>
+                    <a:ext uri="{9D8B030D-6E8A-4147-A177-3AD203B41FA5}">
+                      <a16:colId xmlns:a16="http://schemas.microsoft.com/office/drawing/2014/main" val="3998529583"/>
+                    </a:ext>
+                  </a:extLst>
+                </a:gridCol>
+              </a:tblGrid>
+              <a:tr h="378232">
+                <a:tc>
+                  <a:txBody>
+                    <a:bodyPr/>
+                    <a:lstStyle/>
+                    <a:p>
+                      <a:r>
+                        <a:rPr lang="es-ES" dirty="0"/>
+                        <a:t>I/O </a:t>
+                      </a:r>
+                      <a:r>
+                        <a:rPr lang="es-ES" dirty="0" err="1"/>
+                        <a:t>waveguide</a:t>
+                      </a:r>
+                      <a:r>
+                        <a:rPr lang="es-ES" dirty="0"/>
+                        <a:t> </a:t>
+                      </a:r>
+                      <a:r>
+                        <a:rPr lang="es-ES" dirty="0" err="1"/>
+                        <a:t>width</a:t>
+                      </a:r>
+                      <a:r>
+                        <a:rPr lang="es-ES" dirty="0"/>
+                        <a:t> (</a:t>
+                      </a:r>
+                      <a:r>
+                        <a:rPr lang="es-ES" dirty="0" err="1"/>
+                        <a:t>um</a:t>
+                      </a:r>
+                      <a:r>
+                        <a:rPr lang="es-ES" dirty="0"/>
+                        <a:t>)</a:t>
+                      </a:r>
+                    </a:p>
+                  </a:txBody>
+                  <a:tcPr/>
+                </a:tc>
+                <a:tc>
+                  <a:txBody>
+                    <a:bodyPr/>
+                    <a:lstStyle/>
+                    <a:p>
+                      <a:r>
+                        <a:rPr lang="es-ES" dirty="0" err="1"/>
+                        <a:t>dy</a:t>
+                      </a:r>
+                      <a:endParaRPr lang="es-ES" dirty="0"/>
+                    </a:p>
+                  </a:txBody>
+                  <a:tcPr/>
+                </a:tc>
+                <a:tc>
+                  <a:txBody>
+                    <a:bodyPr/>
+                    <a:lstStyle/>
+                    <a:p>
+                      <a:r>
+                        <a:rPr lang="es-ES" dirty="0" err="1"/>
+                        <a:t>dL</a:t>
+                      </a:r>
+                      <a:endParaRPr lang="es-ES" dirty="0"/>
+                    </a:p>
+                  </a:txBody>
+                  <a:tcPr/>
+                </a:tc>
+                <a:tc>
+                  <a:txBody>
+                    <a:bodyPr/>
+                    <a:lstStyle/>
+                    <a:p>
+                      <a:r>
+                        <a:rPr lang="es-ES" dirty="0" err="1"/>
+                        <a:t>Excess</a:t>
+                      </a:r>
+                      <a:r>
+                        <a:rPr lang="es-ES" dirty="0"/>
+                        <a:t> </a:t>
+                      </a:r>
+                      <a:r>
+                        <a:rPr lang="es-ES" dirty="0" err="1"/>
+                        <a:t>Loss</a:t>
+                      </a:r>
+                      <a:r>
+                        <a:rPr lang="es-ES" dirty="0"/>
+                        <a:t> [dB]</a:t>
+                      </a:r>
+                    </a:p>
+                  </a:txBody>
+                  <a:tcPr/>
+                </a:tc>
+                <a:tc>
+                  <a:txBody>
+                    <a:bodyPr/>
+                    <a:lstStyle/>
+                    <a:p>
+                      <a:r>
+                        <a:rPr lang="es-ES" b="1" i="0" dirty="0">
+                          <a:solidFill>
+                            <a:schemeClr val="lt1"/>
+                          </a:solidFill>
+                          <a:effectLst/>
+                          <a:latin typeface="+mn-lt"/>
+                          <a:ea typeface="+mn-ea"/>
+                          <a:cs typeface="+mn-cs"/>
+                        </a:rPr>
+                        <a:t>Ratio </a:t>
+                      </a:r>
+                      <a:r>
+                        <a:rPr lang="es-ES" b="1" i="0" dirty="0" err="1">
+                          <a:solidFill>
+                            <a:schemeClr val="lt1"/>
+                          </a:solidFill>
+                          <a:effectLst/>
+                          <a:latin typeface="+mn-lt"/>
+                          <a:ea typeface="+mn-ea"/>
+                          <a:cs typeface="+mn-cs"/>
+                        </a:rPr>
+                        <a:t>over</a:t>
+                      </a:r>
+                      <a:r>
+                        <a:rPr lang="es-ES" b="1" i="0" dirty="0">
+                          <a:solidFill>
+                            <a:schemeClr val="lt1"/>
+                          </a:solidFill>
+                          <a:effectLst/>
+                          <a:latin typeface="+mn-lt"/>
+                          <a:ea typeface="+mn-ea"/>
+                          <a:cs typeface="+mn-cs"/>
+                        </a:rPr>
+                        <a:t> </a:t>
+                      </a:r>
+                      <a:r>
+                        <a:rPr lang="es-ES" b="1" i="0" dirty="0" err="1">
+                          <a:solidFill>
+                            <a:schemeClr val="lt1"/>
+                          </a:solidFill>
+                          <a:effectLst/>
+                          <a:latin typeface="+mn-lt"/>
+                          <a:ea typeface="+mn-ea"/>
+                          <a:cs typeface="+mn-cs"/>
+                        </a:rPr>
+                        <a:t>OUTs</a:t>
+                      </a:r>
+                      <a:r>
+                        <a:rPr lang="es-ES" b="1" i="0" dirty="0">
+                          <a:solidFill>
+                            <a:schemeClr val="lt1"/>
+                          </a:solidFill>
+                          <a:effectLst/>
+                          <a:latin typeface="+mn-lt"/>
+                          <a:ea typeface="+mn-ea"/>
+                          <a:cs typeface="+mn-cs"/>
+                        </a:rPr>
+                        <a:t> </a:t>
+                      </a:r>
+                      <a:endParaRPr lang="es-ES" b="1" dirty="0"/>
+                    </a:p>
+                  </a:txBody>
+                  <a:tcPr/>
+                </a:tc>
+                <a:extLst>
+                  <a:ext uri="{0D108BD9-81ED-4DB2-BD59-A6C34878D82A}">
+                    <a16:rowId xmlns:a16="http://schemas.microsoft.com/office/drawing/2014/main" val="4164163794"/>
+                  </a:ext>
+                </a:extLst>
+              </a:tr>
+              <a:tr h="305986">
+                <a:tc>
+                  <a:txBody>
+                    <a:bodyPr/>
+                    <a:lstStyle/>
+                    <a:p>
+                      <a:r>
+                        <a:rPr lang="es-ES" dirty="0"/>
+                        <a:t>6.6 + 1.1</a:t>
+                      </a:r>
+                    </a:p>
+                  </a:txBody>
+                  <a:tcPr/>
+                </a:tc>
+                <a:tc>
+                  <a:txBody>
+                    <a:bodyPr/>
+                    <a:lstStyle/>
+                    <a:p>
+                      <a:r>
+                        <a:rPr lang="es-ES" dirty="0"/>
+                        <a:t>0.05</a:t>
+                      </a:r>
+                    </a:p>
+                  </a:txBody>
+                  <a:tcPr/>
+                </a:tc>
+                <a:tc>
+                  <a:txBody>
+                    <a:bodyPr/>
+                    <a:lstStyle/>
+                    <a:p>
+                      <a:r>
+                        <a:rPr lang="es-ES" dirty="0"/>
+                        <a:t>-0.3</a:t>
+                      </a:r>
+                    </a:p>
+                  </a:txBody>
+                  <a:tcPr/>
+                </a:tc>
+                <a:tc>
+                  <a:txBody>
+                    <a:bodyPr/>
+                    <a:lstStyle/>
+                    <a:p>
+                      <a:r>
+                        <a:rPr lang="es-ES" b="0" i="0" dirty="0">
+                          <a:solidFill>
+                            <a:schemeClr val="dk1"/>
+                          </a:solidFill>
+                          <a:effectLst/>
+                          <a:latin typeface="+mn-lt"/>
+                          <a:ea typeface="+mn-ea"/>
+                          <a:cs typeface="+mn-cs"/>
+                        </a:rPr>
+                        <a:t>0.0027</a:t>
+                      </a:r>
+                      <a:endParaRPr lang="es-ES" dirty="0"/>
+                    </a:p>
+                  </a:txBody>
+                  <a:tcPr/>
+                </a:tc>
+                <a:tc>
+                  <a:txBody>
+                    <a:bodyPr/>
+                    <a:lstStyle/>
+                    <a:p>
+                      <a:r>
+                        <a:rPr lang="es-ES" b="0" i="0" dirty="0">
+                          <a:solidFill>
+                            <a:schemeClr val="dk1"/>
+                          </a:solidFill>
+                          <a:effectLst/>
+                          <a:latin typeface="+mn-lt"/>
+                          <a:ea typeface="+mn-ea"/>
+                          <a:cs typeface="+mn-cs"/>
+                        </a:rPr>
+                        <a:t>['0.5084', '0.4916']</a:t>
+                      </a:r>
+                      <a:endParaRPr lang="es-ES" dirty="0"/>
+                    </a:p>
+                  </a:txBody>
+                  <a:tcPr/>
+                </a:tc>
+                <a:extLst>
+                  <a:ext uri="{0D108BD9-81ED-4DB2-BD59-A6C34878D82A}">
+                    <a16:rowId xmlns:a16="http://schemas.microsoft.com/office/drawing/2014/main" val="4255659296"/>
+                  </a:ext>
+                </a:extLst>
+              </a:tr>
+            </a:tbl>
+          </a:graphicData>
+        </a:graphic>
+      </p:graphicFrame>
+      <p:pic>
+        <p:nvPicPr>
+          <p:cNvPr id="31" name="Imagen 30">
+            <a:extLst>
+              <a:ext uri="{FF2B5EF4-FFF2-40B4-BE49-F238E27FC236}">
+                <a16:creationId xmlns:a16="http://schemas.microsoft.com/office/drawing/2014/main" id="{83C9CB34-EF25-4F5F-BDC2-614314C60680}"/>
+              </a:ext>
+            </a:extLst>
+          </p:cNvPr>
+          <p:cNvPicPr>
+            <a:picLocks noChangeAspect="1"/>
+          </p:cNvPicPr>
           <p:nvPr/>
-        </p:nvSpPr>
+        </p:nvPicPr>
+        <p:blipFill>
+          <a:blip r:embed="rId5"/>
+          <a:stretch>
+            <a:fillRect/>
+          </a:stretch>
+        </p:blipFill>
         <p:spPr>
           <a:xfrm>
-            <a:off x="640245" y="1942909"/>
-            <a:ext cx="11199972" cy="2708434"/>
+            <a:off x="6870402" y="1544787"/>
+            <a:ext cx="2445249" cy="1781107"/>
           </a:xfrm>
           <a:prstGeom prst="rect">
             <a:avLst/>
           </a:prstGeom>
-          <a:noFill/>
         </p:spPr>
-        <p:txBody>
-          <a:bodyPr wrap="square" rtlCol="0">
-            <a:spAutoFit/>
-          </a:bodyPr>
-          <a:lstStyle/>
-          <a:p>
-            <a:pPr algn="ctr"/>
-            <a:r>
-              <a:rPr lang="en-US" b="1" dirty="0"/>
-              <a:t>deep</a:t>
-            </a:r>
-            <a:r>
-              <a:rPr lang="en-US" dirty="0"/>
-              <a:t> waveguide</a:t>
-            </a:r>
-          </a:p>
-          <a:p>
-            <a:pPr algn="ctr"/>
-            <a:endParaRPr lang="en-US" dirty="0"/>
-          </a:p>
-          <a:p>
-            <a:pPr algn="ctr"/>
-            <a:r>
-              <a:rPr lang="en-US" dirty="0"/>
-              <a:t>Paste propagation plot and console results</a:t>
-            </a:r>
-          </a:p>
-          <a:p>
-            <a:pPr algn="ctr"/>
-            <a:endParaRPr lang="en-US" dirty="0"/>
-          </a:p>
-          <a:p>
-            <a:pPr algn="ctr"/>
-            <a:endParaRPr lang="en-US" dirty="0"/>
-          </a:p>
-          <a:p>
-            <a:pPr algn="r"/>
-            <a:r>
-              <a:rPr lang="en-US" sz="1600" b="1" dirty="0"/>
-              <a:t>Target</a:t>
-            </a:r>
-            <a:r>
-              <a:rPr lang="en-US" sz="1600" dirty="0"/>
-              <a:t>: make ratio over outputs 0.5 + excess loss &lt; 0.1 dB</a:t>
-            </a:r>
-          </a:p>
-          <a:p>
-            <a:pPr algn="r"/>
-            <a:r>
-              <a:rPr lang="en-US" sz="1600" dirty="0"/>
-              <a:t>With same settings of previous LO, now modify the notebook so I/O waveguides have a different width. </a:t>
-            </a:r>
-          </a:p>
-          <a:p>
-            <a:pPr algn="r"/>
-            <a:r>
-              <a:rPr lang="en-US" sz="1600" u="sng" dirty="0"/>
-              <a:t>- The nominal I/O waveguide width you have been using is 1.0 µm, increase it.</a:t>
-            </a:r>
-          </a:p>
-          <a:p>
-            <a:pPr algn="r"/>
-            <a:r>
-              <a:rPr lang="en-US" sz="1600" b="1" dirty="0"/>
-              <a:t>(Warning</a:t>
-            </a:r>
-            <a:r>
-              <a:rPr lang="en-US" sz="1600" dirty="0"/>
-              <a:t>! Every time you change the I/O waveguide width you have to re-run modes calculation)</a:t>
-            </a:r>
-          </a:p>
-          <a:p>
-            <a:pPr algn="r"/>
-            <a:r>
-              <a:rPr lang="en-US" sz="1600" b="1" dirty="0"/>
-              <a:t>Hints</a:t>
-            </a:r>
-            <a:r>
-              <a:rPr lang="en-US" sz="1600" dirty="0"/>
-              <a:t>: observe the 2D EME propagation results to guide you to the best settings of a) and b).</a:t>
-            </a:r>
-          </a:p>
-        </p:txBody>
-      </p:sp>
+      </p:pic>
+      <p:pic>
+        <p:nvPicPr>
+          <p:cNvPr id="33" name="Imagen 32">
+            <a:extLst>
+              <a:ext uri="{FF2B5EF4-FFF2-40B4-BE49-F238E27FC236}">
+                <a16:creationId xmlns:a16="http://schemas.microsoft.com/office/drawing/2014/main" id="{5F53F8DE-FCC8-4DA3-ADEB-716C48C020E7}"/>
+              </a:ext>
+            </a:extLst>
+          </p:cNvPr>
+          <p:cNvPicPr>
+            <a:picLocks noChangeAspect="1"/>
+          </p:cNvPicPr>
+          <p:nvPr/>
+        </p:nvPicPr>
+        <p:blipFill>
+          <a:blip r:embed="rId6"/>
+          <a:stretch>
+            <a:fillRect/>
+          </a:stretch>
+        </p:blipFill>
+        <p:spPr>
+          <a:xfrm>
+            <a:off x="2018522" y="1643408"/>
+            <a:ext cx="4389325" cy="1817880"/>
+          </a:xfrm>
+          <a:prstGeom prst="rect">
+            <a:avLst/>
+          </a:prstGeom>
+        </p:spPr>
+      </p:pic>
     </p:spTree>
     <p:extLst>
       <p:ext uri="{BB962C8B-B14F-4D97-AF65-F5344CB8AC3E}">
@@ -4984,15 +5760,7 @@
             </a:pPr>
             <a:r>
               <a:rPr lang="en-US" sz="2500" dirty="0"/>
-              <a:t>Learning </a:t>
-            </a:r>
-            <a:r>
-              <a:rPr lang="en-US" sz="2500"/>
-              <a:t>outcome #5 </a:t>
-            </a:r>
-            <a:r>
-              <a:rPr lang="en-US" sz="2500" dirty="0"/>
-              <a:t>– 1x4 Multimode Interference Coupler </a:t>
+              <a:t>Learning outcome #5.1 – 1x4 Multimode Interference Coupler </a:t>
             </a:r>
             <a:br>
               <a:rPr lang="en-US" sz="2500" dirty="0"/>
@@ -5007,7 +5775,7 @@
             </a:r>
             <a:r>
               <a:rPr lang="en-US" b="0" dirty="0"/>
-              <a:t> = ? µm</a:t>
+              <a:t> = 13.2 µm</a:t>
             </a:r>
             <a:endParaRPr lang="en-US" sz="2500" b="0" dirty="0">
               <a:latin typeface="+mj-lt"/>
@@ -5264,57 +6032,326 @@
           </a:p>
         </p:txBody>
       </p:sp>
-      <p:sp>
-        <p:nvSpPr>
-          <p:cNvPr id="8" name="CuadroTexto 7">
-            <a:extLst>
-              <a:ext uri="{FF2B5EF4-FFF2-40B4-BE49-F238E27FC236}">
-                <a16:creationId xmlns:a16="http://schemas.microsoft.com/office/drawing/2014/main" id="{C3506757-32B7-9151-DA89-AADDB7F7D093}"/>
-              </a:ext>
-            </a:extLst>
-          </p:cNvPr>
-          <p:cNvSpPr txBox="1"/>
+      <p:pic>
+        <p:nvPicPr>
+          <p:cNvPr id="20" name="Imagen 19">
+            <a:extLst>
+              <a:ext uri="{FF2B5EF4-FFF2-40B4-BE49-F238E27FC236}">
+                <a16:creationId xmlns:a16="http://schemas.microsoft.com/office/drawing/2014/main" id="{4422EE65-3928-4AB6-BF64-73D18353408D}"/>
+              </a:ext>
+            </a:extLst>
+          </p:cNvPr>
+          <p:cNvPicPr>
+            <a:picLocks noChangeAspect="1"/>
+          </p:cNvPicPr>
           <p:nvPr/>
-        </p:nvSpPr>
+        </p:nvPicPr>
+        <p:blipFill>
+          <a:blip r:embed="rId5"/>
+          <a:stretch>
+            <a:fillRect/>
+          </a:stretch>
+        </p:blipFill>
         <p:spPr>
           <a:xfrm>
-            <a:off x="2286000" y="2630415"/>
-            <a:ext cx="7718580" cy="923330"/>
+            <a:off x="1494913" y="1535427"/>
+            <a:ext cx="4616591" cy="1978539"/>
           </a:xfrm>
           <a:prstGeom prst="rect">
             <a:avLst/>
           </a:prstGeom>
-          <a:noFill/>
         </p:spPr>
-        <p:txBody>
-          <a:bodyPr wrap="square" rtlCol="0">
-            <a:spAutoFit/>
-          </a:bodyPr>
-          <a:lstStyle/>
-          <a:p>
-            <a:pPr algn="ctr"/>
-            <a:r>
-              <a:rPr lang="en-US" b="1" dirty="0"/>
-              <a:t>deep</a:t>
-            </a:r>
-            <a:r>
-              <a:rPr lang="en-US" dirty="0"/>
-              <a:t> waveguide</a:t>
-            </a:r>
-          </a:p>
-          <a:p>
-            <a:pPr algn="ctr"/>
-            <a:endParaRPr lang="en-US" dirty="0"/>
-          </a:p>
-          <a:p>
-            <a:pPr algn="ctr"/>
-            <a:r>
-              <a:rPr lang="en-US" dirty="0"/>
-              <a:t>Paste propagation plots and console results</a:t>
-            </a:r>
-          </a:p>
-        </p:txBody>
-      </p:sp>
+      </p:pic>
+      <p:pic>
+        <p:nvPicPr>
+          <p:cNvPr id="22" name="Imagen 21">
+            <a:extLst>
+              <a:ext uri="{FF2B5EF4-FFF2-40B4-BE49-F238E27FC236}">
+                <a16:creationId xmlns:a16="http://schemas.microsoft.com/office/drawing/2014/main" id="{1ACFF01F-200B-431E-A4F8-BE725FFBE6D9}"/>
+              </a:ext>
+            </a:extLst>
+          </p:cNvPr>
+          <p:cNvPicPr>
+            <a:picLocks noChangeAspect="1"/>
+          </p:cNvPicPr>
+          <p:nvPr/>
+        </p:nvPicPr>
+        <p:blipFill>
+          <a:blip r:embed="rId6"/>
+          <a:stretch>
+            <a:fillRect/>
+          </a:stretch>
+        </p:blipFill>
+        <p:spPr>
+          <a:xfrm>
+            <a:off x="6514865" y="1597894"/>
+            <a:ext cx="3722995" cy="1831106"/>
+          </a:xfrm>
+          <a:prstGeom prst="rect">
+            <a:avLst/>
+          </a:prstGeom>
+        </p:spPr>
+      </p:pic>
+      <p:graphicFrame>
+        <p:nvGraphicFramePr>
+          <p:cNvPr id="25" name="Tabla 6">
+            <a:extLst>
+              <a:ext uri="{FF2B5EF4-FFF2-40B4-BE49-F238E27FC236}">
+                <a16:creationId xmlns:a16="http://schemas.microsoft.com/office/drawing/2014/main" id="{449CA004-AE80-4863-B385-A74B15E72400}"/>
+              </a:ext>
+            </a:extLst>
+          </p:cNvPr>
+          <p:cNvGraphicFramePr>
+            <a:graphicFrameLocks noGrp="1"/>
+          </p:cNvGraphicFramePr>
+          <p:nvPr>
+            <p:extLst>
+              <p:ext uri="{D42A27DB-BD31-4B8C-83A1-F6EECF244321}">
+                <p14:modId xmlns:p14="http://schemas.microsoft.com/office/powerpoint/2010/main" val="1001735931"/>
+              </p:ext>
+            </p:extLst>
+          </p:nvPr>
+        </p:nvGraphicFramePr>
+        <p:xfrm>
+          <a:off x="1490902" y="3631777"/>
+          <a:ext cx="9210196" cy="784993"/>
+        </p:xfrm>
+        <a:graphic>
+          <a:graphicData uri="http://schemas.openxmlformats.org/drawingml/2006/table">
+            <a:tbl>
+              <a:tblPr firstRow="1" bandRow="1">
+                <a:tableStyleId>{5C22544A-7EE6-4342-B048-85BDC9FD1C3A}</a:tableStyleId>
+              </a:tblPr>
+              <a:tblGrid>
+                <a:gridCol w="2733196">
+                  <a:extLst>
+                    <a:ext uri="{9D8B030D-6E8A-4147-A177-3AD203B41FA5}">
+                      <a16:colId xmlns:a16="http://schemas.microsoft.com/office/drawing/2014/main" val="1794412849"/>
+                    </a:ext>
+                  </a:extLst>
+                </a:gridCol>
+                <a:gridCol w="2337903">
+                  <a:extLst>
+                    <a:ext uri="{9D8B030D-6E8A-4147-A177-3AD203B41FA5}">
+                      <a16:colId xmlns:a16="http://schemas.microsoft.com/office/drawing/2014/main" val="2945410550"/>
+                    </a:ext>
+                  </a:extLst>
+                </a:gridCol>
+                <a:gridCol w="4139097">
+                  <a:extLst>
+                    <a:ext uri="{9D8B030D-6E8A-4147-A177-3AD203B41FA5}">
+                      <a16:colId xmlns:a16="http://schemas.microsoft.com/office/drawing/2014/main" val="3998529583"/>
+                    </a:ext>
+                  </a:extLst>
+                </a:gridCol>
+              </a:tblGrid>
+              <a:tr h="399076">
+                <a:tc>
+                  <a:txBody>
+                    <a:bodyPr/>
+                    <a:lstStyle/>
+                    <a:p>
+                      <a:r>
+                        <a:rPr lang="es-ES" dirty="0"/>
+                        <a:t>I/O </a:t>
+                      </a:r>
+                      <a:r>
+                        <a:rPr lang="es-ES" dirty="0" err="1"/>
+                        <a:t>waveguide</a:t>
+                      </a:r>
+                      <a:r>
+                        <a:rPr lang="es-ES" dirty="0"/>
+                        <a:t> </a:t>
+                      </a:r>
+                      <a:r>
+                        <a:rPr lang="es-ES" dirty="0" err="1"/>
+                        <a:t>width</a:t>
+                      </a:r>
+                      <a:r>
+                        <a:rPr lang="es-ES" dirty="0"/>
+                        <a:t> (</a:t>
+                      </a:r>
+                      <a:r>
+                        <a:rPr lang="es-ES" dirty="0" err="1"/>
+                        <a:t>um</a:t>
+                      </a:r>
+                      <a:r>
+                        <a:rPr lang="es-ES" dirty="0"/>
+                        <a:t>)</a:t>
+                      </a:r>
+                    </a:p>
+                  </a:txBody>
+                  <a:tcPr/>
+                </a:tc>
+                <a:tc>
+                  <a:txBody>
+                    <a:bodyPr/>
+                    <a:lstStyle/>
+                    <a:p>
+                      <a:r>
+                        <a:rPr lang="es-ES" dirty="0" err="1"/>
+                        <a:t>Excess</a:t>
+                      </a:r>
+                      <a:r>
+                        <a:rPr lang="es-ES" dirty="0"/>
+                        <a:t> </a:t>
+                      </a:r>
+                      <a:r>
+                        <a:rPr lang="es-ES" dirty="0" err="1"/>
+                        <a:t>Loss</a:t>
+                      </a:r>
+                      <a:r>
+                        <a:rPr lang="es-ES" dirty="0"/>
+                        <a:t> [dB]</a:t>
+                      </a:r>
+                    </a:p>
+                  </a:txBody>
+                  <a:tcPr/>
+                </a:tc>
+                <a:tc>
+                  <a:txBody>
+                    <a:bodyPr/>
+                    <a:lstStyle/>
+                    <a:p>
+                      <a:r>
+                        <a:rPr lang="es-ES" b="1" i="0" dirty="0">
+                          <a:solidFill>
+                            <a:schemeClr val="lt1"/>
+                          </a:solidFill>
+                          <a:effectLst/>
+                          <a:latin typeface="+mn-lt"/>
+                          <a:ea typeface="+mn-ea"/>
+                          <a:cs typeface="+mn-cs"/>
+                        </a:rPr>
+                        <a:t>Ratio </a:t>
+                      </a:r>
+                      <a:r>
+                        <a:rPr lang="es-ES" b="1" i="0" dirty="0" err="1">
+                          <a:solidFill>
+                            <a:schemeClr val="lt1"/>
+                          </a:solidFill>
+                          <a:effectLst/>
+                          <a:latin typeface="+mn-lt"/>
+                          <a:ea typeface="+mn-ea"/>
+                          <a:cs typeface="+mn-cs"/>
+                        </a:rPr>
+                        <a:t>over</a:t>
+                      </a:r>
+                      <a:r>
+                        <a:rPr lang="es-ES" b="1" i="0" dirty="0">
+                          <a:solidFill>
+                            <a:schemeClr val="lt1"/>
+                          </a:solidFill>
+                          <a:effectLst/>
+                          <a:latin typeface="+mn-lt"/>
+                          <a:ea typeface="+mn-ea"/>
+                          <a:cs typeface="+mn-cs"/>
+                        </a:rPr>
+                        <a:t> </a:t>
+                      </a:r>
+                      <a:r>
+                        <a:rPr lang="es-ES" b="1" i="0" dirty="0" err="1">
+                          <a:solidFill>
+                            <a:schemeClr val="lt1"/>
+                          </a:solidFill>
+                          <a:effectLst/>
+                          <a:latin typeface="+mn-lt"/>
+                          <a:ea typeface="+mn-ea"/>
+                          <a:cs typeface="+mn-cs"/>
+                        </a:rPr>
+                        <a:t>OUTs</a:t>
+                      </a:r>
+                      <a:r>
+                        <a:rPr lang="es-ES" b="1" i="0" dirty="0">
+                          <a:solidFill>
+                            <a:schemeClr val="lt1"/>
+                          </a:solidFill>
+                          <a:effectLst/>
+                          <a:latin typeface="+mn-lt"/>
+                          <a:ea typeface="+mn-ea"/>
+                          <a:cs typeface="+mn-cs"/>
+                        </a:rPr>
+                        <a:t> </a:t>
+                      </a:r>
+                      <a:endParaRPr lang="es-ES" b="1" dirty="0"/>
+                    </a:p>
+                  </a:txBody>
+                  <a:tcPr/>
+                </a:tc>
+                <a:extLst>
+                  <a:ext uri="{0D108BD9-81ED-4DB2-BD59-A6C34878D82A}">
+                    <a16:rowId xmlns:a16="http://schemas.microsoft.com/office/drawing/2014/main" val="4164163794"/>
+                  </a:ext>
+                </a:extLst>
+              </a:tr>
+              <a:tr h="385917">
+                <a:tc>
+                  <a:txBody>
+                    <a:bodyPr/>
+                    <a:lstStyle/>
+                    <a:p>
+                      <a:r>
+                        <a:rPr lang="es-ES" dirty="0"/>
+                        <a:t>13.2</a:t>
+                      </a:r>
+                    </a:p>
+                  </a:txBody>
+                  <a:tcPr/>
+                </a:tc>
+                <a:tc>
+                  <a:txBody>
+                    <a:bodyPr/>
+                    <a:lstStyle/>
+                    <a:p>
+                      <a:r>
+                        <a:rPr lang="es-ES" b="0" i="0" dirty="0">
+                          <a:solidFill>
+                            <a:schemeClr val="dk1"/>
+                          </a:solidFill>
+                          <a:effectLst/>
+                          <a:latin typeface="+mn-lt"/>
+                          <a:ea typeface="+mn-ea"/>
+                          <a:cs typeface="+mn-cs"/>
+                        </a:rPr>
+                        <a:t>0.9430</a:t>
+                      </a:r>
+                      <a:endParaRPr lang="es-ES" dirty="0"/>
+                    </a:p>
+                  </a:txBody>
+                  <a:tcPr/>
+                </a:tc>
+                <a:tc>
+                  <a:txBody>
+                    <a:bodyPr/>
+                    <a:lstStyle/>
+                    <a:p>
+                      <a:r>
+                        <a:rPr lang="es-ES" b="0" i="0" dirty="0">
+                          <a:solidFill>
+                            <a:schemeClr val="dk1"/>
+                          </a:solidFill>
+                          <a:effectLst/>
+                          <a:latin typeface="+mn-lt"/>
+                          <a:ea typeface="+mn-ea"/>
+                          <a:cs typeface="+mn-cs"/>
+                        </a:rPr>
+                        <a:t>['0.2432', '0.2568', '0.2567', '0.2433']</a:t>
+                      </a:r>
+                      <a:endParaRPr lang="es-ES" dirty="0"/>
+                    </a:p>
+                  </a:txBody>
+                  <a:tcPr/>
+                </a:tc>
+                <a:extLst>
+                  <a:ext uri="{0D108BD9-81ED-4DB2-BD59-A6C34878D82A}">
+                    <a16:rowId xmlns:a16="http://schemas.microsoft.com/office/drawing/2014/main" val="4255659296"/>
+                  </a:ext>
+                </a:extLst>
+              </a:tr>
+            </a:tbl>
+          </a:graphicData>
+        </a:graphic>
+      </p:graphicFrame>
     </p:spTree>
     <p:extLst>
       <p:ext uri="{BB962C8B-B14F-4D97-AF65-F5344CB8AC3E}">
@@ -5329,6 +6366,1456 @@
 </file>
 
 <file path=ppt/slides/slide13.xml><?xml version="1.0" encoding="utf-8"?>
+<p:sld xmlns:a="http://schemas.openxmlformats.org/drawingml/2006/main" xmlns:r="http://schemas.openxmlformats.org/officeDocument/2006/relationships" xmlns:p="http://schemas.openxmlformats.org/presentationml/2006/main">
+  <p:cSld>
+    <p:spTree>
+      <p:nvGrpSpPr>
+        <p:cNvPr id="1" name="">
+          <a:extLst>
+            <a:ext uri="{FF2B5EF4-FFF2-40B4-BE49-F238E27FC236}">
+              <a16:creationId xmlns:a16="http://schemas.microsoft.com/office/drawing/2014/main" id="{200A1363-C83E-82B6-7BDE-AD2801F8B66D}"/>
+            </a:ext>
+          </a:extLst>
+        </p:cNvPr>
+        <p:cNvGrpSpPr/>
+        <p:nvPr/>
+      </p:nvGrpSpPr>
+      <p:grpSpPr>
+        <a:xfrm>
+          <a:off x="0" y="0"/>
+          <a:ext cx="0" cy="0"/>
+          <a:chOff x="0" y="0"/>
+          <a:chExt cx="0" cy="0"/>
+        </a:xfrm>
+      </p:grpSpPr>
+      <p:sp>
+        <p:nvSpPr>
+          <p:cNvPr id="16" name="object 16">
+            <a:extLst>
+              <a:ext uri="{FF2B5EF4-FFF2-40B4-BE49-F238E27FC236}">
+                <a16:creationId xmlns:a16="http://schemas.microsoft.com/office/drawing/2014/main" id="{1E256546-3103-104D-A87F-78AEBE5D595E}"/>
+              </a:ext>
+            </a:extLst>
+          </p:cNvPr>
+          <p:cNvSpPr txBox="1">
+            <a:spLocks noGrp="1"/>
+          </p:cNvSpPr>
+          <p:nvPr>
+            <p:ph type="title"/>
+          </p:nvPr>
+        </p:nvSpPr>
+        <p:spPr>
+          <a:xfrm>
+            <a:off x="685800" y="408883"/>
+            <a:ext cx="10994410" cy="705321"/>
+          </a:xfrm>
+          <a:prstGeom prst="rect">
+            <a:avLst/>
+          </a:prstGeom>
+        </p:spPr>
+        <p:txBody>
+          <a:bodyPr vert="horz" wrap="square" lIns="0" tIns="12700" rIns="0" bIns="0" rtlCol="0">
+            <a:spAutoFit/>
+          </a:bodyPr>
+          <a:lstStyle/>
+          <a:p>
+            <a:pPr marL="12700">
+              <a:lnSpc>
+                <a:spcPct val="100000"/>
+              </a:lnSpc>
+              <a:spcBef>
+                <a:spcPts val="100"/>
+              </a:spcBef>
+            </a:pPr>
+            <a:r>
+              <a:rPr lang="en-US" sz="2500" dirty="0"/>
+              <a:t>Learning outcome #5.2 – 1x4 Multimode Interference Coupler </a:t>
+            </a:r>
+            <a:br>
+              <a:rPr lang="en-US" sz="2500" dirty="0"/>
+            </a:br>
+            <a:r>
+              <a:rPr lang="en-US" b="0" dirty="0"/>
+              <a:t>Wavelength 1.55 µm, </a:t>
+            </a:r>
+            <a:r>
+              <a:rPr lang="en-US" b="0" dirty="0" err="1"/>
+              <a:t>wMMI</a:t>
+            </a:r>
+            <a:r>
+              <a:rPr lang="en-US" b="0" dirty="0"/>
+              <a:t> = 13.2 µm</a:t>
+            </a:r>
+            <a:endParaRPr lang="en-US" sz="2500" b="0" dirty="0">
+              <a:latin typeface="+mj-lt"/>
+              <a:cs typeface="Lucida Sans"/>
+            </a:endParaRPr>
+          </a:p>
+        </p:txBody>
+      </p:sp>
+      <p:pic>
+        <p:nvPicPr>
+          <p:cNvPr id="83" name="Gráfico 82">
+            <a:extLst>
+              <a:ext uri="{FF2B5EF4-FFF2-40B4-BE49-F238E27FC236}">
+                <a16:creationId xmlns:a16="http://schemas.microsoft.com/office/drawing/2014/main" id="{4BFCA3D8-29F6-7091-7099-77888A9F863B}"/>
+              </a:ext>
+            </a:extLst>
+          </p:cNvPr>
+          <p:cNvPicPr>
+            <a:picLocks noChangeAspect="1"/>
+          </p:cNvPicPr>
+          <p:nvPr/>
+        </p:nvPicPr>
+        <p:blipFill>
+          <a:blip r:embed="rId3">
+            <a:extLst>
+              <a:ext uri="{96DAC541-7B7A-43D3-8B79-37D633B846F1}">
+                <asvg:svgBlip xmlns:asvg="http://schemas.microsoft.com/office/drawing/2016/SVG/main" r:embed="rId4"/>
+              </a:ext>
+            </a:extLst>
+          </a:blip>
+          <a:stretch>
+            <a:fillRect/>
+          </a:stretch>
+        </p:blipFill>
+        <p:spPr>
+          <a:xfrm>
+            <a:off x="5045006" y="6356057"/>
+            <a:ext cx="6409575" cy="363174"/>
+          </a:xfrm>
+          <a:prstGeom prst="rect">
+            <a:avLst/>
+          </a:prstGeom>
+        </p:spPr>
+      </p:pic>
+      <p:sp>
+        <p:nvSpPr>
+          <p:cNvPr id="84" name="Marcador de número de diapositiva 83">
+            <a:extLst>
+              <a:ext uri="{FF2B5EF4-FFF2-40B4-BE49-F238E27FC236}">
+                <a16:creationId xmlns:a16="http://schemas.microsoft.com/office/drawing/2014/main" id="{42E75535-0FBC-4C5F-9AC5-7008914FCF56}"/>
+              </a:ext>
+            </a:extLst>
+          </p:cNvPr>
+          <p:cNvSpPr>
+            <a:spLocks noGrp="1"/>
+          </p:cNvSpPr>
+          <p:nvPr>
+            <p:ph type="sldNum" sz="quarter" idx="7"/>
+          </p:nvPr>
+        </p:nvSpPr>
+        <p:spPr/>
+        <p:txBody>
+          <a:bodyPr/>
+          <a:lstStyle/>
+          <a:p>
+            <a:fld id="{B6F15528-21DE-4FAA-801E-634DDDAF4B2B}" type="slidenum">
+              <a:rPr lang="es-ES" smtClean="0"/>
+              <a:t>13</a:t>
+            </a:fld>
+            <a:endParaRPr lang="es-ES"/>
+          </a:p>
+        </p:txBody>
+      </p:sp>
+      <p:sp>
+        <p:nvSpPr>
+          <p:cNvPr id="3" name="Marcador de pie de página 2">
+            <a:extLst>
+              <a:ext uri="{FF2B5EF4-FFF2-40B4-BE49-F238E27FC236}">
+                <a16:creationId xmlns:a16="http://schemas.microsoft.com/office/drawing/2014/main" id="{07AC2AFF-A7D9-EBCD-7C5A-6CDF61B69366}"/>
+              </a:ext>
+            </a:extLst>
+          </p:cNvPr>
+          <p:cNvSpPr>
+            <a:spLocks noGrp="1"/>
+          </p:cNvSpPr>
+          <p:nvPr>
+            <p:ph type="ftr" sz="quarter" idx="5"/>
+          </p:nvPr>
+        </p:nvSpPr>
+        <p:spPr/>
+        <p:txBody>
+          <a:bodyPr/>
+          <a:lstStyle/>
+          <a:p>
+            <a:pPr marL="12700">
+              <a:spcBef>
+                <a:spcPts val="15"/>
+              </a:spcBef>
+            </a:pPr>
+            <a:r>
+              <a:rPr lang="es-ES" spc="-5"/>
+              <a:t>LAB 2.0. COUPLERS</a:t>
+            </a:r>
+            <a:endParaRPr lang="es-ES" spc="-5" dirty="0"/>
+          </a:p>
+        </p:txBody>
+      </p:sp>
+      <p:sp>
+        <p:nvSpPr>
+          <p:cNvPr id="2" name="CuadroTexto 1">
+            <a:extLst>
+              <a:ext uri="{FF2B5EF4-FFF2-40B4-BE49-F238E27FC236}">
+                <a16:creationId xmlns:a16="http://schemas.microsoft.com/office/drawing/2014/main" id="{42D73A2E-0E5A-8A39-6B70-F9E94D6DBB70}"/>
+              </a:ext>
+            </a:extLst>
+          </p:cNvPr>
+          <p:cNvSpPr txBox="1"/>
+          <p:nvPr/>
+        </p:nvSpPr>
+        <p:spPr>
+          <a:xfrm>
+            <a:off x="609441" y="4819471"/>
+            <a:ext cx="11199971" cy="1200329"/>
+          </a:xfrm>
+          <a:prstGeom prst="rect">
+            <a:avLst/>
+          </a:prstGeom>
+          <a:solidFill>
+            <a:schemeClr val="bg1">
+              <a:lumMod val="95000"/>
+            </a:schemeClr>
+          </a:solidFill>
+          <a:ln w="28575">
+            <a:solidFill>
+              <a:srgbClr val="E0700D"/>
+            </a:solidFill>
+          </a:ln>
+        </p:spPr>
+        <p:txBody>
+          <a:bodyPr wrap="square" rtlCol="0">
+            <a:spAutoFit/>
+          </a:bodyPr>
+          <a:lstStyle/>
+          <a:p>
+            <a:pPr algn="just"/>
+            <a:r>
+              <a:rPr lang="en-US" sz="1200" dirty="0">
+                <a:latin typeface="Arial" panose="020B0604020202020204" pitchFamily="34" charset="0"/>
+                <a:cs typeface="Arial" panose="020B0604020202020204" pitchFamily="34" charset="0"/>
+              </a:rPr>
+              <a:t>Repeat all the design </a:t>
+            </a:r>
+            <a:r>
+              <a:rPr lang="en-US" sz="1200">
+                <a:latin typeface="Arial" panose="020B0604020202020204" pitchFamily="34" charset="0"/>
+                <a:cs typeface="Arial" panose="020B0604020202020204" pitchFamily="34" charset="0"/>
+              </a:rPr>
+              <a:t>process for a </a:t>
+            </a:r>
+            <a:r>
+              <a:rPr lang="en-US" sz="1200" dirty="0">
+                <a:latin typeface="Arial" panose="020B0604020202020204" pitchFamily="34" charset="0"/>
+                <a:cs typeface="Arial" panose="020B0604020202020204" pitchFamily="34" charset="0"/>
+              </a:rPr>
+              <a:t>1x4 MMI Coupler.  </a:t>
+            </a:r>
+          </a:p>
+          <a:p>
+            <a:pPr algn="just"/>
+            <a:endParaRPr lang="en-US" sz="1200" dirty="0">
+              <a:latin typeface="Arial" panose="020B0604020202020204" pitchFamily="34" charset="0"/>
+              <a:cs typeface="Arial" panose="020B0604020202020204" pitchFamily="34" charset="0"/>
+            </a:endParaRPr>
+          </a:p>
+          <a:p>
+            <a:pPr algn="just"/>
+            <a:endParaRPr lang="en-US" sz="1200" dirty="0">
+              <a:latin typeface="Arial" panose="020B0604020202020204" pitchFamily="34" charset="0"/>
+              <a:cs typeface="Arial" panose="020B0604020202020204" pitchFamily="34" charset="0"/>
+            </a:endParaRPr>
+          </a:p>
+          <a:p>
+            <a:pPr algn="just"/>
+            <a:endParaRPr lang="en-US" sz="1200" dirty="0">
+              <a:latin typeface="Arial" panose="020B0604020202020204" pitchFamily="34" charset="0"/>
+              <a:cs typeface="Arial" panose="020B0604020202020204" pitchFamily="34" charset="0"/>
+            </a:endParaRPr>
+          </a:p>
+          <a:p>
+            <a:pPr algn="just"/>
+            <a:endParaRPr lang="en-US" sz="1200" dirty="0">
+              <a:latin typeface="Arial" panose="020B0604020202020204" pitchFamily="34" charset="0"/>
+              <a:cs typeface="Arial" panose="020B0604020202020204" pitchFamily="34" charset="0"/>
+            </a:endParaRPr>
+          </a:p>
+          <a:p>
+            <a:pPr algn="just"/>
+            <a:endParaRPr lang="en-US" sz="1200" dirty="0">
+              <a:latin typeface="Arial" panose="020B0604020202020204" pitchFamily="34" charset="0"/>
+              <a:cs typeface="Arial" panose="020B0604020202020204" pitchFamily="34" charset="0"/>
+            </a:endParaRPr>
+          </a:p>
+        </p:txBody>
+      </p:sp>
+      <p:sp>
+        <p:nvSpPr>
+          <p:cNvPr id="7" name="Rectángulo 6">
+            <a:extLst>
+              <a:ext uri="{FF2B5EF4-FFF2-40B4-BE49-F238E27FC236}">
+                <a16:creationId xmlns:a16="http://schemas.microsoft.com/office/drawing/2014/main" id="{AFB86587-21D4-5A33-7D00-DDF170C919BA}"/>
+              </a:ext>
+            </a:extLst>
+          </p:cNvPr>
+          <p:cNvSpPr/>
+          <p:nvPr/>
+        </p:nvSpPr>
+        <p:spPr>
+          <a:xfrm>
+            <a:off x="609441" y="1377510"/>
+            <a:ext cx="11199971" cy="3306028"/>
+          </a:xfrm>
+          <a:prstGeom prst="rect">
+            <a:avLst/>
+          </a:prstGeom>
+          <a:noFill/>
+          <a:ln w="28575">
+            <a:solidFill>
+              <a:srgbClr val="E0700D"/>
+            </a:solidFill>
+          </a:ln>
+        </p:spPr>
+        <p:style>
+          <a:lnRef idx="2">
+            <a:schemeClr val="accent1">
+              <a:shade val="15000"/>
+            </a:schemeClr>
+          </a:lnRef>
+          <a:fillRef idx="1">
+            <a:schemeClr val="accent1"/>
+          </a:fillRef>
+          <a:effectRef idx="0">
+            <a:schemeClr val="accent1"/>
+          </a:effectRef>
+          <a:fontRef idx="minor">
+            <a:schemeClr val="lt1"/>
+          </a:fontRef>
+        </p:style>
+        <p:txBody>
+          <a:bodyPr rtlCol="0" anchor="ctr"/>
+          <a:lstStyle/>
+          <a:p>
+            <a:pPr algn="ctr"/>
+            <a:endParaRPr lang="en-US"/>
+          </a:p>
+        </p:txBody>
+      </p:sp>
+      <p:graphicFrame>
+        <p:nvGraphicFramePr>
+          <p:cNvPr id="13" name="Tabla 6">
+            <a:extLst>
+              <a:ext uri="{FF2B5EF4-FFF2-40B4-BE49-F238E27FC236}">
+                <a16:creationId xmlns:a16="http://schemas.microsoft.com/office/drawing/2014/main" id="{BFA61449-D3E5-4649-922F-B126177DC082}"/>
+              </a:ext>
+            </a:extLst>
+          </p:cNvPr>
+          <p:cNvGraphicFramePr>
+            <a:graphicFrameLocks noGrp="1"/>
+          </p:cNvGraphicFramePr>
+          <p:nvPr>
+            <p:extLst>
+              <p:ext uri="{D42A27DB-BD31-4B8C-83A1-F6EECF244321}">
+                <p14:modId xmlns:p14="http://schemas.microsoft.com/office/powerpoint/2010/main" val="27380287"/>
+              </p:ext>
+            </p:extLst>
+          </p:nvPr>
+        </p:nvGraphicFramePr>
+        <p:xfrm>
+          <a:off x="1420505" y="3746620"/>
+          <a:ext cx="9525000" cy="743992"/>
+        </p:xfrm>
+        <a:graphic>
+          <a:graphicData uri="http://schemas.openxmlformats.org/drawingml/2006/table">
+            <a:tbl>
+              <a:tblPr firstRow="1" bandRow="1">
+                <a:tableStyleId>{5C22544A-7EE6-4342-B048-85BDC9FD1C3A}</a:tableStyleId>
+              </a:tblPr>
+              <a:tblGrid>
+                <a:gridCol w="2761819">
+                  <a:extLst>
+                    <a:ext uri="{9D8B030D-6E8A-4147-A177-3AD203B41FA5}">
+                      <a16:colId xmlns:a16="http://schemas.microsoft.com/office/drawing/2014/main" val="1794412849"/>
+                    </a:ext>
+                  </a:extLst>
+                </a:gridCol>
+                <a:gridCol w="609600">
+                  <a:extLst>
+                    <a:ext uri="{9D8B030D-6E8A-4147-A177-3AD203B41FA5}">
+                      <a16:colId xmlns:a16="http://schemas.microsoft.com/office/drawing/2014/main" val="2100323231"/>
+                    </a:ext>
+                  </a:extLst>
+                </a:gridCol>
+                <a:gridCol w="685800">
+                  <a:extLst>
+                    <a:ext uri="{9D8B030D-6E8A-4147-A177-3AD203B41FA5}">
+                      <a16:colId xmlns:a16="http://schemas.microsoft.com/office/drawing/2014/main" val="3349686945"/>
+                    </a:ext>
+                  </a:extLst>
+                </a:gridCol>
+                <a:gridCol w="1752600">
+                  <a:extLst>
+                    <a:ext uri="{9D8B030D-6E8A-4147-A177-3AD203B41FA5}">
+                      <a16:colId xmlns:a16="http://schemas.microsoft.com/office/drawing/2014/main" val="2945410550"/>
+                    </a:ext>
+                  </a:extLst>
+                </a:gridCol>
+                <a:gridCol w="3715181">
+                  <a:extLst>
+                    <a:ext uri="{9D8B030D-6E8A-4147-A177-3AD203B41FA5}">
+                      <a16:colId xmlns:a16="http://schemas.microsoft.com/office/drawing/2014/main" val="3998529583"/>
+                    </a:ext>
+                  </a:extLst>
+                </a:gridCol>
+              </a:tblGrid>
+              <a:tr h="378232">
+                <a:tc>
+                  <a:txBody>
+                    <a:bodyPr/>
+                    <a:lstStyle/>
+                    <a:p>
+                      <a:r>
+                        <a:rPr lang="es-ES" dirty="0"/>
+                        <a:t>I/O </a:t>
+                      </a:r>
+                      <a:r>
+                        <a:rPr lang="es-ES" dirty="0" err="1"/>
+                        <a:t>waveguide</a:t>
+                      </a:r>
+                      <a:r>
+                        <a:rPr lang="es-ES" dirty="0"/>
+                        <a:t> </a:t>
+                      </a:r>
+                      <a:r>
+                        <a:rPr lang="es-ES" dirty="0" err="1"/>
+                        <a:t>width</a:t>
+                      </a:r>
+                      <a:r>
+                        <a:rPr lang="es-ES" dirty="0"/>
+                        <a:t> (</a:t>
+                      </a:r>
+                      <a:r>
+                        <a:rPr lang="es-ES" dirty="0" err="1"/>
+                        <a:t>um</a:t>
+                      </a:r>
+                      <a:r>
+                        <a:rPr lang="es-ES" dirty="0"/>
+                        <a:t>)</a:t>
+                      </a:r>
+                    </a:p>
+                  </a:txBody>
+                  <a:tcPr/>
+                </a:tc>
+                <a:tc>
+                  <a:txBody>
+                    <a:bodyPr/>
+                    <a:lstStyle/>
+                    <a:p>
+                      <a:r>
+                        <a:rPr lang="es-ES" dirty="0" err="1"/>
+                        <a:t>dy</a:t>
+                      </a:r>
+                      <a:endParaRPr lang="es-ES" dirty="0"/>
+                    </a:p>
+                  </a:txBody>
+                  <a:tcPr/>
+                </a:tc>
+                <a:tc>
+                  <a:txBody>
+                    <a:bodyPr/>
+                    <a:lstStyle/>
+                    <a:p>
+                      <a:r>
+                        <a:rPr lang="es-ES" dirty="0" err="1"/>
+                        <a:t>dL</a:t>
+                      </a:r>
+                      <a:endParaRPr lang="es-ES" dirty="0"/>
+                    </a:p>
+                  </a:txBody>
+                  <a:tcPr/>
+                </a:tc>
+                <a:tc>
+                  <a:txBody>
+                    <a:bodyPr/>
+                    <a:lstStyle/>
+                    <a:p>
+                      <a:r>
+                        <a:rPr lang="es-ES" dirty="0" err="1"/>
+                        <a:t>Excess</a:t>
+                      </a:r>
+                      <a:r>
+                        <a:rPr lang="es-ES" dirty="0"/>
+                        <a:t> </a:t>
+                      </a:r>
+                      <a:r>
+                        <a:rPr lang="es-ES" dirty="0" err="1"/>
+                        <a:t>Loss</a:t>
+                      </a:r>
+                      <a:r>
+                        <a:rPr lang="es-ES" dirty="0"/>
+                        <a:t> [dB]</a:t>
+                      </a:r>
+                    </a:p>
+                  </a:txBody>
+                  <a:tcPr/>
+                </a:tc>
+                <a:tc>
+                  <a:txBody>
+                    <a:bodyPr/>
+                    <a:lstStyle/>
+                    <a:p>
+                      <a:r>
+                        <a:rPr lang="es-ES" b="1" i="0" dirty="0">
+                          <a:solidFill>
+                            <a:schemeClr val="lt1"/>
+                          </a:solidFill>
+                          <a:effectLst/>
+                          <a:latin typeface="+mn-lt"/>
+                          <a:ea typeface="+mn-ea"/>
+                          <a:cs typeface="+mn-cs"/>
+                        </a:rPr>
+                        <a:t>Ratio </a:t>
+                      </a:r>
+                      <a:r>
+                        <a:rPr lang="es-ES" b="1" i="0" dirty="0" err="1">
+                          <a:solidFill>
+                            <a:schemeClr val="lt1"/>
+                          </a:solidFill>
+                          <a:effectLst/>
+                          <a:latin typeface="+mn-lt"/>
+                          <a:ea typeface="+mn-ea"/>
+                          <a:cs typeface="+mn-cs"/>
+                        </a:rPr>
+                        <a:t>over</a:t>
+                      </a:r>
+                      <a:r>
+                        <a:rPr lang="es-ES" b="1" i="0" dirty="0">
+                          <a:solidFill>
+                            <a:schemeClr val="lt1"/>
+                          </a:solidFill>
+                          <a:effectLst/>
+                          <a:latin typeface="+mn-lt"/>
+                          <a:ea typeface="+mn-ea"/>
+                          <a:cs typeface="+mn-cs"/>
+                        </a:rPr>
+                        <a:t> </a:t>
+                      </a:r>
+                      <a:r>
+                        <a:rPr lang="es-ES" b="1" i="0" dirty="0" err="1">
+                          <a:solidFill>
+                            <a:schemeClr val="lt1"/>
+                          </a:solidFill>
+                          <a:effectLst/>
+                          <a:latin typeface="+mn-lt"/>
+                          <a:ea typeface="+mn-ea"/>
+                          <a:cs typeface="+mn-cs"/>
+                        </a:rPr>
+                        <a:t>OUTs</a:t>
+                      </a:r>
+                      <a:r>
+                        <a:rPr lang="es-ES" b="1" i="0" dirty="0">
+                          <a:solidFill>
+                            <a:schemeClr val="lt1"/>
+                          </a:solidFill>
+                          <a:effectLst/>
+                          <a:latin typeface="+mn-lt"/>
+                          <a:ea typeface="+mn-ea"/>
+                          <a:cs typeface="+mn-cs"/>
+                        </a:rPr>
+                        <a:t> </a:t>
+                      </a:r>
+                      <a:endParaRPr lang="es-ES" b="1" dirty="0"/>
+                    </a:p>
+                  </a:txBody>
+                  <a:tcPr/>
+                </a:tc>
+                <a:extLst>
+                  <a:ext uri="{0D108BD9-81ED-4DB2-BD59-A6C34878D82A}">
+                    <a16:rowId xmlns:a16="http://schemas.microsoft.com/office/drawing/2014/main" val="4164163794"/>
+                  </a:ext>
+                </a:extLst>
+              </a:tr>
+              <a:tr h="305986">
+                <a:tc>
+                  <a:txBody>
+                    <a:bodyPr/>
+                    <a:lstStyle/>
+                    <a:p>
+                      <a:r>
+                        <a:rPr lang="es-ES" dirty="0"/>
+                        <a:t>13.2</a:t>
+                      </a:r>
+                    </a:p>
+                  </a:txBody>
+                  <a:tcPr/>
+                </a:tc>
+                <a:tc>
+                  <a:txBody>
+                    <a:bodyPr/>
+                    <a:lstStyle/>
+                    <a:p>
+                      <a:r>
+                        <a:rPr lang="es-ES" dirty="0"/>
+                        <a:t>0.07</a:t>
+                      </a:r>
+                    </a:p>
+                  </a:txBody>
+                  <a:tcPr/>
+                </a:tc>
+                <a:tc>
+                  <a:txBody>
+                    <a:bodyPr/>
+                    <a:lstStyle/>
+                    <a:p>
+                      <a:r>
+                        <a:rPr lang="es-ES" dirty="0"/>
+                        <a:t>-1.1</a:t>
+                      </a:r>
+                    </a:p>
+                  </a:txBody>
+                  <a:tcPr/>
+                </a:tc>
+                <a:tc>
+                  <a:txBody>
+                    <a:bodyPr/>
+                    <a:lstStyle/>
+                    <a:p>
+                      <a:r>
+                        <a:rPr lang="es-ES" b="0" i="0" dirty="0">
+                          <a:solidFill>
+                            <a:schemeClr val="dk1"/>
+                          </a:solidFill>
+                          <a:effectLst/>
+                          <a:latin typeface="+mn-lt"/>
+                          <a:ea typeface="+mn-ea"/>
+                          <a:cs typeface="+mn-cs"/>
+                        </a:rPr>
+                        <a:t>0.7777</a:t>
+                      </a:r>
+                      <a:endParaRPr lang="es-ES" dirty="0"/>
+                    </a:p>
+                  </a:txBody>
+                  <a:tcPr/>
+                </a:tc>
+                <a:tc>
+                  <a:txBody>
+                    <a:bodyPr/>
+                    <a:lstStyle/>
+                    <a:p>
+                      <a:r>
+                        <a:rPr lang="es-ES" b="0" i="0" dirty="0">
+                          <a:solidFill>
+                            <a:schemeClr val="dk1"/>
+                          </a:solidFill>
+                          <a:effectLst/>
+                          <a:latin typeface="+mn-lt"/>
+                          <a:ea typeface="+mn-ea"/>
+                          <a:cs typeface="+mn-cs"/>
+                        </a:rPr>
+                        <a:t>['0.2481', '0.2520', '0.2519', '0.2481']</a:t>
+                      </a:r>
+                      <a:endParaRPr lang="es-ES" dirty="0"/>
+                    </a:p>
+                  </a:txBody>
+                  <a:tcPr/>
+                </a:tc>
+                <a:extLst>
+                  <a:ext uri="{0D108BD9-81ED-4DB2-BD59-A6C34878D82A}">
+                    <a16:rowId xmlns:a16="http://schemas.microsoft.com/office/drawing/2014/main" val="4255659296"/>
+                  </a:ext>
+                </a:extLst>
+              </a:tr>
+            </a:tbl>
+          </a:graphicData>
+        </a:graphic>
+      </p:graphicFrame>
+      <p:pic>
+        <p:nvPicPr>
+          <p:cNvPr id="6" name="Imagen 5">
+            <a:extLst>
+              <a:ext uri="{FF2B5EF4-FFF2-40B4-BE49-F238E27FC236}">
+                <a16:creationId xmlns:a16="http://schemas.microsoft.com/office/drawing/2014/main" id="{DBE7AEC8-B283-4AAA-8DDC-14279906D0FE}"/>
+              </a:ext>
+            </a:extLst>
+          </p:cNvPr>
+          <p:cNvPicPr>
+            <a:picLocks noChangeAspect="1"/>
+          </p:cNvPicPr>
+          <p:nvPr/>
+        </p:nvPicPr>
+        <p:blipFill>
+          <a:blip r:embed="rId5"/>
+          <a:stretch>
+            <a:fillRect/>
+          </a:stretch>
+        </p:blipFill>
+        <p:spPr>
+          <a:xfrm>
+            <a:off x="6349210" y="1580895"/>
+            <a:ext cx="4090190" cy="1859894"/>
+          </a:xfrm>
+          <a:prstGeom prst="rect">
+            <a:avLst/>
+          </a:prstGeom>
+        </p:spPr>
+      </p:pic>
+      <p:pic>
+        <p:nvPicPr>
+          <p:cNvPr id="14" name="Imagen 13">
+            <a:extLst>
+              <a:ext uri="{FF2B5EF4-FFF2-40B4-BE49-F238E27FC236}">
+                <a16:creationId xmlns:a16="http://schemas.microsoft.com/office/drawing/2014/main" id="{1E88AF16-E05E-4682-982C-C0D1C1C958AC}"/>
+              </a:ext>
+            </a:extLst>
+          </p:cNvPr>
+          <p:cNvPicPr>
+            <a:picLocks noChangeAspect="1"/>
+          </p:cNvPicPr>
+          <p:nvPr/>
+        </p:nvPicPr>
+        <p:blipFill>
+          <a:blip r:embed="rId6"/>
+          <a:stretch>
+            <a:fillRect/>
+          </a:stretch>
+        </p:blipFill>
+        <p:spPr>
+          <a:xfrm>
+            <a:off x="1672389" y="1763003"/>
+            <a:ext cx="4568966" cy="1982008"/>
+          </a:xfrm>
+          <a:prstGeom prst="rect">
+            <a:avLst/>
+          </a:prstGeom>
+        </p:spPr>
+      </p:pic>
+    </p:spTree>
+    <p:extLst>
+      <p:ext uri="{BB962C8B-B14F-4D97-AF65-F5344CB8AC3E}">
+        <p14:creationId xmlns:p14="http://schemas.microsoft.com/office/powerpoint/2010/main" val="2427220443"/>
+      </p:ext>
+    </p:extLst>
+  </p:cSld>
+  <p:clrMapOvr>
+    <a:masterClrMapping/>
+  </p:clrMapOvr>
+</p:sld>
+</file>
+
+<file path=ppt/slides/slide14.xml><?xml version="1.0" encoding="utf-8"?>
+<p:sld xmlns:a="http://schemas.openxmlformats.org/drawingml/2006/main" xmlns:r="http://schemas.openxmlformats.org/officeDocument/2006/relationships" xmlns:p="http://schemas.openxmlformats.org/presentationml/2006/main">
+  <p:cSld>
+    <p:spTree>
+      <p:nvGrpSpPr>
+        <p:cNvPr id="1" name="">
+          <a:extLst>
+            <a:ext uri="{FF2B5EF4-FFF2-40B4-BE49-F238E27FC236}">
+              <a16:creationId xmlns:a16="http://schemas.microsoft.com/office/drawing/2014/main" id="{200A1363-C83E-82B6-7BDE-AD2801F8B66D}"/>
+            </a:ext>
+          </a:extLst>
+        </p:cNvPr>
+        <p:cNvGrpSpPr/>
+        <p:nvPr/>
+      </p:nvGrpSpPr>
+      <p:grpSpPr>
+        <a:xfrm>
+          <a:off x="0" y="0"/>
+          <a:ext cx="0" cy="0"/>
+          <a:chOff x="0" y="0"/>
+          <a:chExt cx="0" cy="0"/>
+        </a:xfrm>
+      </p:grpSpPr>
+      <p:sp>
+        <p:nvSpPr>
+          <p:cNvPr id="16" name="object 16">
+            <a:extLst>
+              <a:ext uri="{FF2B5EF4-FFF2-40B4-BE49-F238E27FC236}">
+                <a16:creationId xmlns:a16="http://schemas.microsoft.com/office/drawing/2014/main" id="{1E256546-3103-104D-A87F-78AEBE5D595E}"/>
+              </a:ext>
+            </a:extLst>
+          </p:cNvPr>
+          <p:cNvSpPr txBox="1">
+            <a:spLocks noGrp="1"/>
+          </p:cNvSpPr>
+          <p:nvPr>
+            <p:ph type="title"/>
+          </p:nvPr>
+        </p:nvSpPr>
+        <p:spPr>
+          <a:xfrm>
+            <a:off x="685800" y="408883"/>
+            <a:ext cx="10994410" cy="705321"/>
+          </a:xfrm>
+          <a:prstGeom prst="rect">
+            <a:avLst/>
+          </a:prstGeom>
+        </p:spPr>
+        <p:txBody>
+          <a:bodyPr vert="horz" wrap="square" lIns="0" tIns="12700" rIns="0" bIns="0" rtlCol="0">
+            <a:spAutoFit/>
+          </a:bodyPr>
+          <a:lstStyle/>
+          <a:p>
+            <a:pPr marL="12700">
+              <a:lnSpc>
+                <a:spcPct val="100000"/>
+              </a:lnSpc>
+              <a:spcBef>
+                <a:spcPts val="100"/>
+              </a:spcBef>
+            </a:pPr>
+            <a:r>
+              <a:rPr lang="en-US" sz="2500" dirty="0"/>
+              <a:t>Learning outcome #5.3 – 1x4 Multimode Interference Coupler </a:t>
+            </a:r>
+            <a:br>
+              <a:rPr lang="en-US" sz="2500" dirty="0"/>
+            </a:br>
+            <a:r>
+              <a:rPr lang="en-US" b="0" dirty="0"/>
+              <a:t>Wavelength 1.55 µm, </a:t>
+            </a:r>
+            <a:r>
+              <a:rPr lang="en-US" b="0" dirty="0" err="1"/>
+              <a:t>wMMI</a:t>
+            </a:r>
+            <a:r>
+              <a:rPr lang="en-US" b="0" dirty="0"/>
+              <a:t> = 13.2 µm</a:t>
+            </a:r>
+            <a:endParaRPr lang="en-US" sz="2500" b="0" dirty="0">
+              <a:latin typeface="+mj-lt"/>
+              <a:cs typeface="Lucida Sans"/>
+            </a:endParaRPr>
+          </a:p>
+        </p:txBody>
+      </p:sp>
+      <p:pic>
+        <p:nvPicPr>
+          <p:cNvPr id="83" name="Gráfico 82">
+            <a:extLst>
+              <a:ext uri="{FF2B5EF4-FFF2-40B4-BE49-F238E27FC236}">
+                <a16:creationId xmlns:a16="http://schemas.microsoft.com/office/drawing/2014/main" id="{4BFCA3D8-29F6-7091-7099-77888A9F863B}"/>
+              </a:ext>
+            </a:extLst>
+          </p:cNvPr>
+          <p:cNvPicPr>
+            <a:picLocks noChangeAspect="1"/>
+          </p:cNvPicPr>
+          <p:nvPr/>
+        </p:nvPicPr>
+        <p:blipFill>
+          <a:blip r:embed="rId3">
+            <a:extLst>
+              <a:ext uri="{96DAC541-7B7A-43D3-8B79-37D633B846F1}">
+                <asvg:svgBlip xmlns:asvg="http://schemas.microsoft.com/office/drawing/2016/SVG/main" r:embed="rId4"/>
+              </a:ext>
+            </a:extLst>
+          </a:blip>
+          <a:stretch>
+            <a:fillRect/>
+          </a:stretch>
+        </p:blipFill>
+        <p:spPr>
+          <a:xfrm>
+            <a:off x="5045006" y="6356057"/>
+            <a:ext cx="6409575" cy="363174"/>
+          </a:xfrm>
+          <a:prstGeom prst="rect">
+            <a:avLst/>
+          </a:prstGeom>
+        </p:spPr>
+      </p:pic>
+      <p:sp>
+        <p:nvSpPr>
+          <p:cNvPr id="84" name="Marcador de número de diapositiva 83">
+            <a:extLst>
+              <a:ext uri="{FF2B5EF4-FFF2-40B4-BE49-F238E27FC236}">
+                <a16:creationId xmlns:a16="http://schemas.microsoft.com/office/drawing/2014/main" id="{42E75535-0FBC-4C5F-9AC5-7008914FCF56}"/>
+              </a:ext>
+            </a:extLst>
+          </p:cNvPr>
+          <p:cNvSpPr>
+            <a:spLocks noGrp="1"/>
+          </p:cNvSpPr>
+          <p:nvPr>
+            <p:ph type="sldNum" sz="quarter" idx="7"/>
+          </p:nvPr>
+        </p:nvSpPr>
+        <p:spPr/>
+        <p:txBody>
+          <a:bodyPr/>
+          <a:lstStyle/>
+          <a:p>
+            <a:fld id="{B6F15528-21DE-4FAA-801E-634DDDAF4B2B}" type="slidenum">
+              <a:rPr lang="es-ES" smtClean="0"/>
+              <a:t>14</a:t>
+            </a:fld>
+            <a:endParaRPr lang="es-ES"/>
+          </a:p>
+        </p:txBody>
+      </p:sp>
+      <p:sp>
+        <p:nvSpPr>
+          <p:cNvPr id="3" name="Marcador de pie de página 2">
+            <a:extLst>
+              <a:ext uri="{FF2B5EF4-FFF2-40B4-BE49-F238E27FC236}">
+                <a16:creationId xmlns:a16="http://schemas.microsoft.com/office/drawing/2014/main" id="{07AC2AFF-A7D9-EBCD-7C5A-6CDF61B69366}"/>
+              </a:ext>
+            </a:extLst>
+          </p:cNvPr>
+          <p:cNvSpPr>
+            <a:spLocks noGrp="1"/>
+          </p:cNvSpPr>
+          <p:nvPr>
+            <p:ph type="ftr" sz="quarter" idx="5"/>
+          </p:nvPr>
+        </p:nvSpPr>
+        <p:spPr/>
+        <p:txBody>
+          <a:bodyPr/>
+          <a:lstStyle/>
+          <a:p>
+            <a:pPr marL="12700">
+              <a:spcBef>
+                <a:spcPts val="15"/>
+              </a:spcBef>
+            </a:pPr>
+            <a:r>
+              <a:rPr lang="es-ES" spc="-5"/>
+              <a:t>LAB 2.0. COUPLERS</a:t>
+            </a:r>
+            <a:endParaRPr lang="es-ES" spc="-5" dirty="0"/>
+          </a:p>
+        </p:txBody>
+      </p:sp>
+      <p:sp>
+        <p:nvSpPr>
+          <p:cNvPr id="2" name="CuadroTexto 1">
+            <a:extLst>
+              <a:ext uri="{FF2B5EF4-FFF2-40B4-BE49-F238E27FC236}">
+                <a16:creationId xmlns:a16="http://schemas.microsoft.com/office/drawing/2014/main" id="{42D73A2E-0E5A-8A39-6B70-F9E94D6DBB70}"/>
+              </a:ext>
+            </a:extLst>
+          </p:cNvPr>
+          <p:cNvSpPr txBox="1"/>
+          <p:nvPr/>
+        </p:nvSpPr>
+        <p:spPr>
+          <a:xfrm>
+            <a:off x="609441" y="4819471"/>
+            <a:ext cx="11199971" cy="1200329"/>
+          </a:xfrm>
+          <a:prstGeom prst="rect">
+            <a:avLst/>
+          </a:prstGeom>
+          <a:solidFill>
+            <a:schemeClr val="bg1">
+              <a:lumMod val="95000"/>
+            </a:schemeClr>
+          </a:solidFill>
+          <a:ln w="28575">
+            <a:solidFill>
+              <a:srgbClr val="E0700D"/>
+            </a:solidFill>
+          </a:ln>
+        </p:spPr>
+        <p:txBody>
+          <a:bodyPr wrap="square" rtlCol="0">
+            <a:spAutoFit/>
+          </a:bodyPr>
+          <a:lstStyle/>
+          <a:p>
+            <a:pPr algn="just"/>
+            <a:r>
+              <a:rPr lang="en-US" sz="1200" dirty="0">
+                <a:latin typeface="Arial" panose="020B0604020202020204" pitchFamily="34" charset="0"/>
+                <a:cs typeface="Arial" panose="020B0604020202020204" pitchFamily="34" charset="0"/>
+              </a:rPr>
+              <a:t>Repeat all the design </a:t>
+            </a:r>
+            <a:r>
+              <a:rPr lang="en-US" sz="1200">
+                <a:latin typeface="Arial" panose="020B0604020202020204" pitchFamily="34" charset="0"/>
+                <a:cs typeface="Arial" panose="020B0604020202020204" pitchFamily="34" charset="0"/>
+              </a:rPr>
+              <a:t>process for a </a:t>
+            </a:r>
+            <a:r>
+              <a:rPr lang="en-US" sz="1200" dirty="0">
+                <a:latin typeface="Arial" panose="020B0604020202020204" pitchFamily="34" charset="0"/>
+                <a:cs typeface="Arial" panose="020B0604020202020204" pitchFamily="34" charset="0"/>
+              </a:rPr>
+              <a:t>1x4 MMI Coupler.  </a:t>
+            </a:r>
+          </a:p>
+          <a:p>
+            <a:pPr algn="just"/>
+            <a:endParaRPr lang="en-US" sz="1200" dirty="0">
+              <a:latin typeface="Arial" panose="020B0604020202020204" pitchFamily="34" charset="0"/>
+              <a:cs typeface="Arial" panose="020B0604020202020204" pitchFamily="34" charset="0"/>
+            </a:endParaRPr>
+          </a:p>
+          <a:p>
+            <a:pPr algn="just"/>
+            <a:endParaRPr lang="en-US" sz="1200" dirty="0">
+              <a:latin typeface="Arial" panose="020B0604020202020204" pitchFamily="34" charset="0"/>
+              <a:cs typeface="Arial" panose="020B0604020202020204" pitchFamily="34" charset="0"/>
+            </a:endParaRPr>
+          </a:p>
+          <a:p>
+            <a:pPr algn="just"/>
+            <a:endParaRPr lang="en-US" sz="1200" dirty="0">
+              <a:latin typeface="Arial" panose="020B0604020202020204" pitchFamily="34" charset="0"/>
+              <a:cs typeface="Arial" panose="020B0604020202020204" pitchFamily="34" charset="0"/>
+            </a:endParaRPr>
+          </a:p>
+          <a:p>
+            <a:pPr algn="just"/>
+            <a:endParaRPr lang="en-US" sz="1200" dirty="0">
+              <a:latin typeface="Arial" panose="020B0604020202020204" pitchFamily="34" charset="0"/>
+              <a:cs typeface="Arial" panose="020B0604020202020204" pitchFamily="34" charset="0"/>
+            </a:endParaRPr>
+          </a:p>
+          <a:p>
+            <a:pPr algn="just"/>
+            <a:endParaRPr lang="en-US" sz="1200" dirty="0">
+              <a:latin typeface="Arial" panose="020B0604020202020204" pitchFamily="34" charset="0"/>
+              <a:cs typeface="Arial" panose="020B0604020202020204" pitchFamily="34" charset="0"/>
+            </a:endParaRPr>
+          </a:p>
+        </p:txBody>
+      </p:sp>
+      <p:sp>
+        <p:nvSpPr>
+          <p:cNvPr id="7" name="Rectángulo 6">
+            <a:extLst>
+              <a:ext uri="{FF2B5EF4-FFF2-40B4-BE49-F238E27FC236}">
+                <a16:creationId xmlns:a16="http://schemas.microsoft.com/office/drawing/2014/main" id="{AFB86587-21D4-5A33-7D00-DDF170C919BA}"/>
+              </a:ext>
+            </a:extLst>
+          </p:cNvPr>
+          <p:cNvSpPr/>
+          <p:nvPr/>
+        </p:nvSpPr>
+        <p:spPr>
+          <a:xfrm>
+            <a:off x="609441" y="1377510"/>
+            <a:ext cx="11199971" cy="3306028"/>
+          </a:xfrm>
+          <a:prstGeom prst="rect">
+            <a:avLst/>
+          </a:prstGeom>
+          <a:noFill/>
+          <a:ln w="28575">
+            <a:solidFill>
+              <a:srgbClr val="E0700D"/>
+            </a:solidFill>
+          </a:ln>
+        </p:spPr>
+        <p:style>
+          <a:lnRef idx="2">
+            <a:schemeClr val="accent1">
+              <a:shade val="15000"/>
+            </a:schemeClr>
+          </a:lnRef>
+          <a:fillRef idx="1">
+            <a:schemeClr val="accent1"/>
+          </a:fillRef>
+          <a:effectRef idx="0">
+            <a:schemeClr val="accent1"/>
+          </a:effectRef>
+          <a:fontRef idx="minor">
+            <a:schemeClr val="lt1"/>
+          </a:fontRef>
+        </p:style>
+        <p:txBody>
+          <a:bodyPr rtlCol="0" anchor="ctr"/>
+          <a:lstStyle/>
+          <a:p>
+            <a:pPr algn="ctr"/>
+            <a:endParaRPr lang="en-US"/>
+          </a:p>
+        </p:txBody>
+      </p:sp>
+      <p:pic>
+        <p:nvPicPr>
+          <p:cNvPr id="6" name="Imagen 5">
+            <a:extLst>
+              <a:ext uri="{FF2B5EF4-FFF2-40B4-BE49-F238E27FC236}">
+                <a16:creationId xmlns:a16="http://schemas.microsoft.com/office/drawing/2014/main" id="{76B707A9-F2F1-4E7D-8B3F-3D17437C96D1}"/>
+              </a:ext>
+            </a:extLst>
+          </p:cNvPr>
+          <p:cNvPicPr>
+            <a:picLocks noChangeAspect="1"/>
+          </p:cNvPicPr>
+          <p:nvPr/>
+        </p:nvPicPr>
+        <p:blipFill>
+          <a:blip r:embed="rId5"/>
+          <a:stretch>
+            <a:fillRect/>
+          </a:stretch>
+        </p:blipFill>
+        <p:spPr>
+          <a:xfrm>
+            <a:off x="6668674" y="1752178"/>
+            <a:ext cx="3581468" cy="1768066"/>
+          </a:xfrm>
+          <a:prstGeom prst="rect">
+            <a:avLst/>
+          </a:prstGeom>
+        </p:spPr>
+      </p:pic>
+      <p:pic>
+        <p:nvPicPr>
+          <p:cNvPr id="11" name="Imagen 10">
+            <a:extLst>
+              <a:ext uri="{FF2B5EF4-FFF2-40B4-BE49-F238E27FC236}">
+                <a16:creationId xmlns:a16="http://schemas.microsoft.com/office/drawing/2014/main" id="{09844E23-9D13-4A88-8C38-E00376B8A36A}"/>
+              </a:ext>
+            </a:extLst>
+          </p:cNvPr>
+          <p:cNvPicPr>
+            <a:picLocks noChangeAspect="1"/>
+          </p:cNvPicPr>
+          <p:nvPr/>
+        </p:nvPicPr>
+        <p:blipFill>
+          <a:blip r:embed="rId6"/>
+          <a:stretch>
+            <a:fillRect/>
+          </a:stretch>
+        </p:blipFill>
+        <p:spPr>
+          <a:xfrm>
+            <a:off x="1162062" y="1541297"/>
+            <a:ext cx="4953991" cy="2131770"/>
+          </a:xfrm>
+          <a:prstGeom prst="rect">
+            <a:avLst/>
+          </a:prstGeom>
+        </p:spPr>
+      </p:pic>
+      <p:graphicFrame>
+        <p:nvGraphicFramePr>
+          <p:cNvPr id="15" name="Tabla 6">
+            <a:extLst>
+              <a:ext uri="{FF2B5EF4-FFF2-40B4-BE49-F238E27FC236}">
+                <a16:creationId xmlns:a16="http://schemas.microsoft.com/office/drawing/2014/main" id="{31D23819-ED85-4903-A11C-ED9A992A4C34}"/>
+              </a:ext>
+            </a:extLst>
+          </p:cNvPr>
+          <p:cNvGraphicFramePr>
+            <a:graphicFrameLocks noGrp="1"/>
+          </p:cNvGraphicFramePr>
+          <p:nvPr>
+            <p:extLst>
+              <p:ext uri="{D42A27DB-BD31-4B8C-83A1-F6EECF244321}">
+                <p14:modId xmlns:p14="http://schemas.microsoft.com/office/powerpoint/2010/main" val="3200311329"/>
+              </p:ext>
+            </p:extLst>
+          </p:nvPr>
+        </p:nvGraphicFramePr>
+        <p:xfrm>
+          <a:off x="1420505" y="3746620"/>
+          <a:ext cx="9525000" cy="743992"/>
+        </p:xfrm>
+        <a:graphic>
+          <a:graphicData uri="http://schemas.openxmlformats.org/drawingml/2006/table">
+            <a:tbl>
+              <a:tblPr firstRow="1" bandRow="1">
+                <a:tableStyleId>{5C22544A-7EE6-4342-B048-85BDC9FD1C3A}</a:tableStyleId>
+              </a:tblPr>
+              <a:tblGrid>
+                <a:gridCol w="2761819">
+                  <a:extLst>
+                    <a:ext uri="{9D8B030D-6E8A-4147-A177-3AD203B41FA5}">
+                      <a16:colId xmlns:a16="http://schemas.microsoft.com/office/drawing/2014/main" val="1794412849"/>
+                    </a:ext>
+                  </a:extLst>
+                </a:gridCol>
+                <a:gridCol w="609600">
+                  <a:extLst>
+                    <a:ext uri="{9D8B030D-6E8A-4147-A177-3AD203B41FA5}">
+                      <a16:colId xmlns:a16="http://schemas.microsoft.com/office/drawing/2014/main" val="2100323231"/>
+                    </a:ext>
+                  </a:extLst>
+                </a:gridCol>
+                <a:gridCol w="685800">
+                  <a:extLst>
+                    <a:ext uri="{9D8B030D-6E8A-4147-A177-3AD203B41FA5}">
+                      <a16:colId xmlns:a16="http://schemas.microsoft.com/office/drawing/2014/main" val="3349686945"/>
+                    </a:ext>
+                  </a:extLst>
+                </a:gridCol>
+                <a:gridCol w="1752600">
+                  <a:extLst>
+                    <a:ext uri="{9D8B030D-6E8A-4147-A177-3AD203B41FA5}">
+                      <a16:colId xmlns:a16="http://schemas.microsoft.com/office/drawing/2014/main" val="2945410550"/>
+                    </a:ext>
+                  </a:extLst>
+                </a:gridCol>
+                <a:gridCol w="3715181">
+                  <a:extLst>
+                    <a:ext uri="{9D8B030D-6E8A-4147-A177-3AD203B41FA5}">
+                      <a16:colId xmlns:a16="http://schemas.microsoft.com/office/drawing/2014/main" val="3998529583"/>
+                    </a:ext>
+                  </a:extLst>
+                </a:gridCol>
+              </a:tblGrid>
+              <a:tr h="378232">
+                <a:tc>
+                  <a:txBody>
+                    <a:bodyPr/>
+                    <a:lstStyle/>
+                    <a:p>
+                      <a:r>
+                        <a:rPr lang="es-ES" dirty="0"/>
+                        <a:t>I/O </a:t>
+                      </a:r>
+                      <a:r>
+                        <a:rPr lang="es-ES" dirty="0" err="1"/>
+                        <a:t>waveguide</a:t>
+                      </a:r>
+                      <a:r>
+                        <a:rPr lang="es-ES" dirty="0"/>
+                        <a:t> </a:t>
+                      </a:r>
+                      <a:r>
+                        <a:rPr lang="es-ES" dirty="0" err="1"/>
+                        <a:t>width</a:t>
+                      </a:r>
+                      <a:r>
+                        <a:rPr lang="es-ES" dirty="0"/>
+                        <a:t> (</a:t>
+                      </a:r>
+                      <a:r>
+                        <a:rPr lang="es-ES" dirty="0" err="1"/>
+                        <a:t>um</a:t>
+                      </a:r>
+                      <a:r>
+                        <a:rPr lang="es-ES" dirty="0"/>
+                        <a:t>)</a:t>
+                      </a:r>
+                    </a:p>
+                  </a:txBody>
+                  <a:tcPr/>
+                </a:tc>
+                <a:tc>
+                  <a:txBody>
+                    <a:bodyPr/>
+                    <a:lstStyle/>
+                    <a:p>
+                      <a:r>
+                        <a:rPr lang="es-ES" dirty="0" err="1"/>
+                        <a:t>dy</a:t>
+                      </a:r>
+                      <a:endParaRPr lang="es-ES" dirty="0"/>
+                    </a:p>
+                  </a:txBody>
+                  <a:tcPr/>
+                </a:tc>
+                <a:tc>
+                  <a:txBody>
+                    <a:bodyPr/>
+                    <a:lstStyle/>
+                    <a:p>
+                      <a:r>
+                        <a:rPr lang="es-ES" dirty="0" err="1"/>
+                        <a:t>dL</a:t>
+                      </a:r>
+                      <a:endParaRPr lang="es-ES" dirty="0"/>
+                    </a:p>
+                  </a:txBody>
+                  <a:tcPr/>
+                </a:tc>
+                <a:tc>
+                  <a:txBody>
+                    <a:bodyPr/>
+                    <a:lstStyle/>
+                    <a:p>
+                      <a:r>
+                        <a:rPr lang="es-ES" dirty="0" err="1"/>
+                        <a:t>Excess</a:t>
+                      </a:r>
+                      <a:r>
+                        <a:rPr lang="es-ES" dirty="0"/>
+                        <a:t> </a:t>
+                      </a:r>
+                      <a:r>
+                        <a:rPr lang="es-ES" dirty="0" err="1"/>
+                        <a:t>Loss</a:t>
+                      </a:r>
+                      <a:r>
+                        <a:rPr lang="es-ES" dirty="0"/>
+                        <a:t> [dB]</a:t>
+                      </a:r>
+                    </a:p>
+                  </a:txBody>
+                  <a:tcPr/>
+                </a:tc>
+                <a:tc>
+                  <a:txBody>
+                    <a:bodyPr/>
+                    <a:lstStyle/>
+                    <a:p>
+                      <a:r>
+                        <a:rPr lang="es-ES" b="1" i="0" dirty="0">
+                          <a:solidFill>
+                            <a:schemeClr val="lt1"/>
+                          </a:solidFill>
+                          <a:effectLst/>
+                          <a:latin typeface="+mn-lt"/>
+                          <a:ea typeface="+mn-ea"/>
+                          <a:cs typeface="+mn-cs"/>
+                        </a:rPr>
+                        <a:t>Ratio </a:t>
+                      </a:r>
+                      <a:r>
+                        <a:rPr lang="es-ES" b="1" i="0" dirty="0" err="1">
+                          <a:solidFill>
+                            <a:schemeClr val="lt1"/>
+                          </a:solidFill>
+                          <a:effectLst/>
+                          <a:latin typeface="+mn-lt"/>
+                          <a:ea typeface="+mn-ea"/>
+                          <a:cs typeface="+mn-cs"/>
+                        </a:rPr>
+                        <a:t>over</a:t>
+                      </a:r>
+                      <a:r>
+                        <a:rPr lang="es-ES" b="1" i="0" dirty="0">
+                          <a:solidFill>
+                            <a:schemeClr val="lt1"/>
+                          </a:solidFill>
+                          <a:effectLst/>
+                          <a:latin typeface="+mn-lt"/>
+                          <a:ea typeface="+mn-ea"/>
+                          <a:cs typeface="+mn-cs"/>
+                        </a:rPr>
+                        <a:t> </a:t>
+                      </a:r>
+                      <a:r>
+                        <a:rPr lang="es-ES" b="1" i="0" dirty="0" err="1">
+                          <a:solidFill>
+                            <a:schemeClr val="lt1"/>
+                          </a:solidFill>
+                          <a:effectLst/>
+                          <a:latin typeface="+mn-lt"/>
+                          <a:ea typeface="+mn-ea"/>
+                          <a:cs typeface="+mn-cs"/>
+                        </a:rPr>
+                        <a:t>OUTs</a:t>
+                      </a:r>
+                      <a:r>
+                        <a:rPr lang="es-ES" b="1" i="0" dirty="0">
+                          <a:solidFill>
+                            <a:schemeClr val="lt1"/>
+                          </a:solidFill>
+                          <a:effectLst/>
+                          <a:latin typeface="+mn-lt"/>
+                          <a:ea typeface="+mn-ea"/>
+                          <a:cs typeface="+mn-cs"/>
+                        </a:rPr>
+                        <a:t> </a:t>
+                      </a:r>
+                      <a:endParaRPr lang="es-ES" b="1" dirty="0"/>
+                    </a:p>
+                  </a:txBody>
+                  <a:tcPr/>
+                </a:tc>
+                <a:extLst>
+                  <a:ext uri="{0D108BD9-81ED-4DB2-BD59-A6C34878D82A}">
+                    <a16:rowId xmlns:a16="http://schemas.microsoft.com/office/drawing/2014/main" val="4164163794"/>
+                  </a:ext>
+                </a:extLst>
+              </a:tr>
+              <a:tr h="305986">
+                <a:tc>
+                  <a:txBody>
+                    <a:bodyPr/>
+                    <a:lstStyle/>
+                    <a:p>
+                      <a:r>
+                        <a:rPr lang="es-ES" dirty="0"/>
+                        <a:t>13.2 + 1.35</a:t>
+                      </a:r>
+                    </a:p>
+                  </a:txBody>
+                  <a:tcPr/>
+                </a:tc>
+                <a:tc>
+                  <a:txBody>
+                    <a:bodyPr/>
+                    <a:lstStyle/>
+                    <a:p>
+                      <a:r>
+                        <a:rPr lang="es-ES" dirty="0"/>
+                        <a:t>0.07</a:t>
+                      </a:r>
+                    </a:p>
+                  </a:txBody>
+                  <a:tcPr/>
+                </a:tc>
+                <a:tc>
+                  <a:txBody>
+                    <a:bodyPr/>
+                    <a:lstStyle/>
+                    <a:p>
+                      <a:r>
+                        <a:rPr lang="es-ES" dirty="0"/>
+                        <a:t>-1.1</a:t>
+                      </a:r>
+                    </a:p>
+                  </a:txBody>
+                  <a:tcPr/>
+                </a:tc>
+                <a:tc>
+                  <a:txBody>
+                    <a:bodyPr/>
+                    <a:lstStyle/>
+                    <a:p>
+                      <a:endParaRPr lang="es-ES" dirty="0"/>
+                    </a:p>
+                  </a:txBody>
+                  <a:tcPr/>
+                </a:tc>
+                <a:tc>
+                  <a:txBody>
+                    <a:bodyPr/>
+                    <a:lstStyle/>
+                    <a:p>
+                      <a:endParaRPr lang="es-ES" dirty="0"/>
+                    </a:p>
+                  </a:txBody>
+                  <a:tcPr/>
+                </a:tc>
+                <a:extLst>
+                  <a:ext uri="{0D108BD9-81ED-4DB2-BD59-A6C34878D82A}">
+                    <a16:rowId xmlns:a16="http://schemas.microsoft.com/office/drawing/2014/main" val="4255659296"/>
+                  </a:ext>
+                </a:extLst>
+              </a:tr>
+            </a:tbl>
+          </a:graphicData>
+        </a:graphic>
+      </p:graphicFrame>
+    </p:spTree>
+    <p:extLst>
+      <p:ext uri="{BB962C8B-B14F-4D97-AF65-F5344CB8AC3E}">
+        <p14:creationId xmlns:p14="http://schemas.microsoft.com/office/powerpoint/2010/main" val="132975937"/>
+      </p:ext>
+    </p:extLst>
+  </p:cSld>
+  <p:clrMapOvr>
+    <a:masterClrMapping/>
+  </p:clrMapOvr>
+</p:sld>
+</file>
+
+<file path=ppt/slides/slide15.xml><?xml version="1.0" encoding="utf-8"?>
 <p:sld xmlns:a="http://schemas.openxmlformats.org/drawingml/2006/main" xmlns:r="http://schemas.openxmlformats.org/officeDocument/2006/relationships" xmlns:p="http://schemas.openxmlformats.org/presentationml/2006/main">
   <p:cSld>
     <p:spTree>
@@ -5484,7 +7971,7 @@
           <a:p>
             <a:fld id="{B6F15528-21DE-4FAA-801E-634DDDAF4B2B}" type="slidenum">
               <a:rPr lang="es-ES" smtClean="0"/>
-              <a:t>13</a:t>
+              <a:t>15</a:t>
             </a:fld>
             <a:endParaRPr lang="es-ES"/>
           </a:p>
@@ -6040,7 +8527,7 @@
 </p:sld>
 </file>
 
-<file path=ppt/slides/slide14.xml><?xml version="1.0" encoding="utf-8"?>
+<file path=ppt/slides/slide16.xml><?xml version="1.0" encoding="utf-8"?>
 <p:sld xmlns:a="http://schemas.openxmlformats.org/drawingml/2006/main" xmlns:r="http://schemas.openxmlformats.org/officeDocument/2006/relationships" xmlns:p="http://schemas.openxmlformats.org/presentationml/2006/main">
   <p:cSld>
     <p:spTree>
@@ -6193,7 +8680,7 @@
           <a:p>
             <a:fld id="{B6F15528-21DE-4FAA-801E-634DDDAF4B2B}" type="slidenum">
               <a:rPr lang="es-ES" smtClean="0"/>
-              <a:t>14</a:t>
+              <a:t>16</a:t>
             </a:fld>
             <a:endParaRPr lang="es-ES"/>
           </a:p>
@@ -6726,7 +9213,7 @@
 </p:sld>
 </file>
 
-<file path=ppt/slides/slide15.xml><?xml version="1.0" encoding="utf-8"?>
+<file path=ppt/slides/slide17.xml><?xml version="1.0" encoding="utf-8"?>
 <p:sld xmlns:a="http://schemas.openxmlformats.org/drawingml/2006/main" xmlns:r="http://schemas.openxmlformats.org/officeDocument/2006/relationships" xmlns:p="http://schemas.openxmlformats.org/presentationml/2006/main">
   <p:cSld>
     <p:spTree>
@@ -6876,7 +9363,7 @@
           <a:p>
             <a:fld id="{B6F15528-21DE-4FAA-801E-634DDDAF4B2B}" type="slidenum">
               <a:rPr lang="es-ES" smtClean="0"/>
-              <a:t>15</a:t>
+              <a:t>17</a:t>
             </a:fld>
             <a:endParaRPr lang="es-ES"/>
           </a:p>
@@ -7432,7 +9919,7 @@
 </p:sld>
 </file>
 
-<file path=ppt/slides/slide16.xml><?xml version="1.0" encoding="utf-8"?>
+<file path=ppt/slides/slide18.xml><?xml version="1.0" encoding="utf-8"?>
 <p:sld xmlns:a="http://schemas.openxmlformats.org/drawingml/2006/main" xmlns:r="http://schemas.openxmlformats.org/officeDocument/2006/relationships" xmlns:p="http://schemas.openxmlformats.org/presentationml/2006/main">
   <p:cSld>
     <p:spTree>
@@ -7582,7 +10069,7 @@
           <a:p>
             <a:fld id="{B6F15528-21DE-4FAA-801E-634DDDAF4B2B}" type="slidenum">
               <a:rPr lang="es-ES" smtClean="0"/>
-              <a:t>16</a:t>
+              <a:t>18</a:t>
             </a:fld>
             <a:endParaRPr lang="es-ES"/>
           </a:p>
@@ -8129,7 +10616,7 @@
 </p:sld>
 </file>
 
-<file path=ppt/slides/slide17.xml><?xml version="1.0" encoding="utf-8"?>
+<file path=ppt/slides/slide19.xml><?xml version="1.0" encoding="utf-8"?>
 <p:sld xmlns:a="http://schemas.openxmlformats.org/drawingml/2006/main" xmlns:r="http://schemas.openxmlformats.org/officeDocument/2006/relationships" xmlns:p="http://schemas.openxmlformats.org/presentationml/2006/main">
   <p:cSld>
     <p:spTree>
@@ -8268,7 +10755,7 @@
           <a:p>
             <a:fld id="{B6F15528-21DE-4FAA-801E-634DDDAF4B2B}" type="slidenum">
               <a:rPr lang="es-ES" smtClean="0"/>
-              <a:t>17</a:t>
+              <a:t>19</a:t>
             </a:fld>
             <a:endParaRPr lang="es-ES"/>
           </a:p>
@@ -11205,7 +13692,7 @@
             </a:br>
             <a:r>
               <a:rPr lang="en-US" b="0" dirty="0"/>
-              <a:t>Width 0.6 - 1.6 µm (step 0.1 µm) – Wavelength 1.55 µm </a:t>
+              <a:t>gap 0.6 - 1.6 µm (step 0.1 µm) – Wavelength 1.55 µm </a:t>
             </a:r>
             <a:endParaRPr lang="en-US" sz="2500" b="0" dirty="0">
               <a:latin typeface="+mj-lt"/>
@@ -12363,8 +14850,8 @@
         </p:nvSpPr>
         <p:spPr>
           <a:xfrm>
-            <a:off x="496014" y="533400"/>
-            <a:ext cx="11199971" cy="1200329"/>
+            <a:off x="6606920" y="1524000"/>
+            <a:ext cx="4574428" cy="1200329"/>
           </a:xfrm>
           <a:prstGeom prst="rect">
             <a:avLst/>
@@ -12446,6 +14933,36 @@
           </a:p>
         </p:txBody>
       </p:sp>
+      <p:pic>
+        <p:nvPicPr>
+          <p:cNvPr id="3" name="Imagen 2">
+            <a:extLst>
+              <a:ext uri="{FF2B5EF4-FFF2-40B4-BE49-F238E27FC236}">
+                <a16:creationId xmlns:a16="http://schemas.microsoft.com/office/drawing/2014/main" id="{2B1C0EA2-0558-46F7-8D9F-A852DE17F306}"/>
+              </a:ext>
+            </a:extLst>
+          </p:cNvPr>
+          <p:cNvPicPr>
+            <a:picLocks noChangeAspect="1"/>
+          </p:cNvPicPr>
+          <p:nvPr/>
+        </p:nvPicPr>
+        <p:blipFill>
+          <a:blip r:embed="rId2"/>
+          <a:stretch>
+            <a:fillRect/>
+          </a:stretch>
+        </p:blipFill>
+        <p:spPr>
+          <a:xfrm>
+            <a:off x="633663" y="1295400"/>
+            <a:ext cx="4951420" cy="3876496"/>
+          </a:xfrm>
+          <a:prstGeom prst="rect">
+            <a:avLst/>
+          </a:prstGeom>
+        </p:spPr>
+      </p:pic>
     </p:spTree>
     <p:extLst>
       <p:ext uri="{BB962C8B-B14F-4D97-AF65-F5344CB8AC3E}">
@@ -13116,6 +15633,36 @@
           </p:sp>
         </mc:Fallback>
       </mc:AlternateContent>
+      <p:pic>
+        <p:nvPicPr>
+          <p:cNvPr id="7" name="Imagen 6">
+            <a:extLst>
+              <a:ext uri="{FF2B5EF4-FFF2-40B4-BE49-F238E27FC236}">
+                <a16:creationId xmlns:a16="http://schemas.microsoft.com/office/drawing/2014/main" id="{3A7370DC-3FF3-4BF9-8946-25BB179D6F9B}"/>
+              </a:ext>
+            </a:extLst>
+          </p:cNvPr>
+          <p:cNvPicPr>
+            <a:picLocks noChangeAspect="1"/>
+          </p:cNvPicPr>
+          <p:nvPr/>
+        </p:nvPicPr>
+        <p:blipFill>
+          <a:blip r:embed="rId7"/>
+          <a:stretch>
+            <a:fillRect/>
+          </a:stretch>
+        </p:blipFill>
+        <p:spPr>
+          <a:xfrm>
+            <a:off x="830535" y="1438667"/>
+            <a:ext cx="5044369" cy="2802427"/>
+          </a:xfrm>
+          <a:prstGeom prst="rect">
+            <a:avLst/>
+          </a:prstGeom>
+        </p:spPr>
+      </p:pic>
     </p:spTree>
     <p:extLst>
       <p:ext uri="{BB962C8B-B14F-4D97-AF65-F5344CB8AC3E}">
@@ -13606,57 +16153,326 @@
           </a:p>
         </p:txBody>
       </p:sp>
-      <p:sp>
-        <p:nvSpPr>
-          <p:cNvPr id="8" name="CuadroTexto 7">
-            <a:extLst>
-              <a:ext uri="{FF2B5EF4-FFF2-40B4-BE49-F238E27FC236}">
-                <a16:creationId xmlns:a16="http://schemas.microsoft.com/office/drawing/2014/main" id="{0DA14DBA-172E-DA2C-0573-6A00BF18F4A5}"/>
-              </a:ext>
-            </a:extLst>
-          </p:cNvPr>
-          <p:cNvSpPr txBox="1"/>
+      <p:pic>
+        <p:nvPicPr>
+          <p:cNvPr id="5" name="Imagen 4">
+            <a:extLst>
+              <a:ext uri="{FF2B5EF4-FFF2-40B4-BE49-F238E27FC236}">
+                <a16:creationId xmlns:a16="http://schemas.microsoft.com/office/drawing/2014/main" id="{A82ABC21-6345-43FA-BEB3-EA812D4912B8}"/>
+              </a:ext>
+            </a:extLst>
+          </p:cNvPr>
+          <p:cNvPicPr>
+            <a:picLocks noChangeAspect="1"/>
+          </p:cNvPicPr>
           <p:nvPr/>
-        </p:nvSpPr>
+        </p:nvPicPr>
+        <p:blipFill>
+          <a:blip r:embed="rId5"/>
+          <a:stretch>
+            <a:fillRect/>
+          </a:stretch>
+        </p:blipFill>
         <p:spPr>
           <a:xfrm>
-            <a:off x="2286000" y="2630415"/>
-            <a:ext cx="7718580" cy="923330"/>
+            <a:off x="1513197" y="1551461"/>
+            <a:ext cx="4710192" cy="1942433"/>
           </a:xfrm>
           <a:prstGeom prst="rect">
             <a:avLst/>
           </a:prstGeom>
-          <a:noFill/>
         </p:spPr>
-        <p:txBody>
-          <a:bodyPr wrap="square" rtlCol="0">
-            <a:spAutoFit/>
-          </a:bodyPr>
-          <a:lstStyle/>
-          <a:p>
-            <a:pPr algn="ctr"/>
-            <a:r>
-              <a:rPr lang="en-US" b="1" dirty="0"/>
-              <a:t>deep</a:t>
-            </a:r>
-            <a:r>
-              <a:rPr lang="en-US" dirty="0"/>
-              <a:t> waveguide</a:t>
-            </a:r>
-          </a:p>
-          <a:p>
-            <a:pPr algn="ctr"/>
-            <a:endParaRPr lang="en-US" dirty="0"/>
-          </a:p>
-          <a:p>
-            <a:pPr algn="ctr"/>
-            <a:r>
-              <a:rPr lang="en-US" dirty="0"/>
-              <a:t>Paste propagation plots and console results</a:t>
-            </a:r>
-          </a:p>
-        </p:txBody>
-      </p:sp>
+      </p:pic>
+      <p:pic>
+        <p:nvPicPr>
+          <p:cNvPr id="9" name="Imagen 8">
+            <a:extLst>
+              <a:ext uri="{FF2B5EF4-FFF2-40B4-BE49-F238E27FC236}">
+                <a16:creationId xmlns:a16="http://schemas.microsoft.com/office/drawing/2014/main" id="{650F9BE6-BA0B-49C2-B0DA-E782C2113994}"/>
+              </a:ext>
+            </a:extLst>
+          </p:cNvPr>
+          <p:cNvPicPr>
+            <a:picLocks noChangeAspect="1"/>
+          </p:cNvPicPr>
+          <p:nvPr/>
+        </p:nvPicPr>
+        <p:blipFill>
+          <a:blip r:embed="rId6"/>
+          <a:stretch>
+            <a:fillRect/>
+          </a:stretch>
+        </p:blipFill>
+        <p:spPr>
+          <a:xfrm>
+            <a:off x="7010399" y="1551462"/>
+            <a:ext cx="2649093" cy="1829316"/>
+          </a:xfrm>
+          <a:prstGeom prst="rect">
+            <a:avLst/>
+          </a:prstGeom>
+        </p:spPr>
+      </p:pic>
+      <p:graphicFrame>
+        <p:nvGraphicFramePr>
+          <p:cNvPr id="13" name="Tabla 6">
+            <a:extLst>
+              <a:ext uri="{FF2B5EF4-FFF2-40B4-BE49-F238E27FC236}">
+                <a16:creationId xmlns:a16="http://schemas.microsoft.com/office/drawing/2014/main" id="{33E6EDA4-806A-41FE-8831-77BB025CF70E}"/>
+              </a:ext>
+            </a:extLst>
+          </p:cNvPr>
+          <p:cNvGraphicFramePr>
+            <a:graphicFrameLocks noGrp="1"/>
+          </p:cNvGraphicFramePr>
+          <p:nvPr>
+            <p:extLst>
+              <p:ext uri="{D42A27DB-BD31-4B8C-83A1-F6EECF244321}">
+                <p14:modId xmlns:p14="http://schemas.microsoft.com/office/powerpoint/2010/main" val="1064967748"/>
+              </p:ext>
+            </p:extLst>
+          </p:nvPr>
+        </p:nvGraphicFramePr>
+        <p:xfrm>
+          <a:off x="1981200" y="3650912"/>
+          <a:ext cx="6784766" cy="784993"/>
+        </p:xfrm>
+        <a:graphic>
+          <a:graphicData uri="http://schemas.openxmlformats.org/drawingml/2006/table">
+            <a:tbl>
+              <a:tblPr firstRow="1" bandRow="1">
+                <a:tableStyleId>{5C22544A-7EE6-4342-B048-85BDC9FD1C3A}</a:tableStyleId>
+              </a:tblPr>
+              <a:tblGrid>
+                <a:gridCol w="2821982">
+                  <a:extLst>
+                    <a:ext uri="{9D8B030D-6E8A-4147-A177-3AD203B41FA5}">
+                      <a16:colId xmlns:a16="http://schemas.microsoft.com/office/drawing/2014/main" val="1794412849"/>
+                    </a:ext>
+                  </a:extLst>
+                </a:gridCol>
+                <a:gridCol w="1729215">
+                  <a:extLst>
+                    <a:ext uri="{9D8B030D-6E8A-4147-A177-3AD203B41FA5}">
+                      <a16:colId xmlns:a16="http://schemas.microsoft.com/office/drawing/2014/main" val="2945410550"/>
+                    </a:ext>
+                  </a:extLst>
+                </a:gridCol>
+                <a:gridCol w="2233569">
+                  <a:extLst>
+                    <a:ext uri="{9D8B030D-6E8A-4147-A177-3AD203B41FA5}">
+                      <a16:colId xmlns:a16="http://schemas.microsoft.com/office/drawing/2014/main" val="3998529583"/>
+                    </a:ext>
+                  </a:extLst>
+                </a:gridCol>
+              </a:tblGrid>
+              <a:tr h="399076">
+                <a:tc>
+                  <a:txBody>
+                    <a:bodyPr/>
+                    <a:lstStyle/>
+                    <a:p>
+                      <a:r>
+                        <a:rPr lang="es-ES" dirty="0"/>
+                        <a:t>I/O </a:t>
+                      </a:r>
+                      <a:r>
+                        <a:rPr lang="es-ES" dirty="0" err="1"/>
+                        <a:t>waveguide</a:t>
+                      </a:r>
+                      <a:r>
+                        <a:rPr lang="es-ES" dirty="0"/>
+                        <a:t> </a:t>
+                      </a:r>
+                      <a:r>
+                        <a:rPr lang="es-ES" dirty="0" err="1"/>
+                        <a:t>width</a:t>
+                      </a:r>
+                      <a:r>
+                        <a:rPr lang="es-ES" dirty="0"/>
+                        <a:t> (</a:t>
+                      </a:r>
+                      <a:r>
+                        <a:rPr lang="es-ES" dirty="0" err="1"/>
+                        <a:t>um</a:t>
+                      </a:r>
+                      <a:r>
+                        <a:rPr lang="es-ES" dirty="0"/>
+                        <a:t>)</a:t>
+                      </a:r>
+                    </a:p>
+                  </a:txBody>
+                  <a:tcPr/>
+                </a:tc>
+                <a:tc>
+                  <a:txBody>
+                    <a:bodyPr/>
+                    <a:lstStyle/>
+                    <a:p>
+                      <a:r>
+                        <a:rPr lang="es-ES" dirty="0" err="1"/>
+                        <a:t>Excess</a:t>
+                      </a:r>
+                      <a:r>
+                        <a:rPr lang="es-ES" dirty="0"/>
+                        <a:t> </a:t>
+                      </a:r>
+                      <a:r>
+                        <a:rPr lang="es-ES" dirty="0" err="1"/>
+                        <a:t>Loss</a:t>
+                      </a:r>
+                      <a:r>
+                        <a:rPr lang="es-ES" dirty="0"/>
+                        <a:t> [dB]</a:t>
+                      </a:r>
+                    </a:p>
+                  </a:txBody>
+                  <a:tcPr/>
+                </a:tc>
+                <a:tc>
+                  <a:txBody>
+                    <a:bodyPr/>
+                    <a:lstStyle/>
+                    <a:p>
+                      <a:r>
+                        <a:rPr lang="es-ES" b="1" i="0" dirty="0">
+                          <a:solidFill>
+                            <a:schemeClr val="lt1"/>
+                          </a:solidFill>
+                          <a:effectLst/>
+                          <a:latin typeface="+mn-lt"/>
+                          <a:ea typeface="+mn-ea"/>
+                          <a:cs typeface="+mn-cs"/>
+                        </a:rPr>
+                        <a:t>Ratio </a:t>
+                      </a:r>
+                      <a:r>
+                        <a:rPr lang="es-ES" b="1" i="0" dirty="0" err="1">
+                          <a:solidFill>
+                            <a:schemeClr val="lt1"/>
+                          </a:solidFill>
+                          <a:effectLst/>
+                          <a:latin typeface="+mn-lt"/>
+                          <a:ea typeface="+mn-ea"/>
+                          <a:cs typeface="+mn-cs"/>
+                        </a:rPr>
+                        <a:t>over</a:t>
+                      </a:r>
+                      <a:r>
+                        <a:rPr lang="es-ES" b="1" i="0" dirty="0">
+                          <a:solidFill>
+                            <a:schemeClr val="lt1"/>
+                          </a:solidFill>
+                          <a:effectLst/>
+                          <a:latin typeface="+mn-lt"/>
+                          <a:ea typeface="+mn-ea"/>
+                          <a:cs typeface="+mn-cs"/>
+                        </a:rPr>
+                        <a:t> </a:t>
+                      </a:r>
+                      <a:r>
+                        <a:rPr lang="es-ES" b="1" i="0" dirty="0" err="1">
+                          <a:solidFill>
+                            <a:schemeClr val="lt1"/>
+                          </a:solidFill>
+                          <a:effectLst/>
+                          <a:latin typeface="+mn-lt"/>
+                          <a:ea typeface="+mn-ea"/>
+                          <a:cs typeface="+mn-cs"/>
+                        </a:rPr>
+                        <a:t>OUTs</a:t>
+                      </a:r>
+                      <a:r>
+                        <a:rPr lang="es-ES" b="1" i="0" dirty="0">
+                          <a:solidFill>
+                            <a:schemeClr val="lt1"/>
+                          </a:solidFill>
+                          <a:effectLst/>
+                          <a:latin typeface="+mn-lt"/>
+                          <a:ea typeface="+mn-ea"/>
+                          <a:cs typeface="+mn-cs"/>
+                        </a:rPr>
+                        <a:t> </a:t>
+                      </a:r>
+                      <a:endParaRPr lang="es-ES" b="1" dirty="0"/>
+                    </a:p>
+                  </a:txBody>
+                  <a:tcPr/>
+                </a:tc>
+                <a:extLst>
+                  <a:ext uri="{0D108BD9-81ED-4DB2-BD59-A6C34878D82A}">
+                    <a16:rowId xmlns:a16="http://schemas.microsoft.com/office/drawing/2014/main" val="4164163794"/>
+                  </a:ext>
+                </a:extLst>
+              </a:tr>
+              <a:tr h="385917">
+                <a:tc>
+                  <a:txBody>
+                    <a:bodyPr/>
+                    <a:lstStyle/>
+                    <a:p>
+                      <a:r>
+                        <a:rPr lang="es-ES" dirty="0"/>
+                        <a:t>6.6</a:t>
+                      </a:r>
+                    </a:p>
+                  </a:txBody>
+                  <a:tcPr/>
+                </a:tc>
+                <a:tc>
+                  <a:txBody>
+                    <a:bodyPr/>
+                    <a:lstStyle/>
+                    <a:p>
+                      <a:r>
+                        <a:rPr lang="es-ES" b="0" i="0" dirty="0">
+                          <a:solidFill>
+                            <a:schemeClr val="dk1"/>
+                          </a:solidFill>
+                          <a:effectLst/>
+                          <a:latin typeface="+mn-lt"/>
+                          <a:ea typeface="+mn-ea"/>
+                          <a:cs typeface="+mn-cs"/>
+                        </a:rPr>
+                        <a:t>0.4217</a:t>
+                      </a:r>
+                      <a:endParaRPr lang="es-ES" dirty="0"/>
+                    </a:p>
+                  </a:txBody>
+                  <a:tcPr/>
+                </a:tc>
+                <a:tc>
+                  <a:txBody>
+                    <a:bodyPr/>
+                    <a:lstStyle/>
+                    <a:p>
+                      <a:r>
+                        <a:rPr lang="es-ES" b="0" i="0" dirty="0">
+                          <a:solidFill>
+                            <a:schemeClr val="dk1"/>
+                          </a:solidFill>
+                          <a:effectLst/>
+                          <a:latin typeface="+mn-lt"/>
+                          <a:ea typeface="+mn-ea"/>
+                          <a:cs typeface="+mn-cs"/>
+                        </a:rPr>
+                        <a:t>['0.5152', '0.4848']</a:t>
+                      </a:r>
+                      <a:endParaRPr lang="es-ES" dirty="0"/>
+                    </a:p>
+                  </a:txBody>
+                  <a:tcPr/>
+                </a:tc>
+                <a:extLst>
+                  <a:ext uri="{0D108BD9-81ED-4DB2-BD59-A6C34878D82A}">
+                    <a16:rowId xmlns:a16="http://schemas.microsoft.com/office/drawing/2014/main" val="4255659296"/>
+                  </a:ext>
+                </a:extLst>
+              </a:tr>
+            </a:tbl>
+          </a:graphicData>
+        </a:graphic>
+      </p:graphicFrame>
     </p:spTree>
     <p:extLst>
       <p:ext uri="{BB962C8B-B14F-4D97-AF65-F5344CB8AC3E}">

--- a/LabBook_20_Nadia.pptx
+++ b/LabBook_20_Nadia.pptx
@@ -7031,10 +7031,10 @@
       </p:graphicFrame>
       <p:pic>
         <p:nvPicPr>
-          <p:cNvPr id="6" name="Imagen 5">
-            <a:extLst>
-              <a:ext uri="{FF2B5EF4-FFF2-40B4-BE49-F238E27FC236}">
-                <a16:creationId xmlns:a16="http://schemas.microsoft.com/office/drawing/2014/main" id="{DBE7AEC8-B283-4AAA-8DDC-14279906D0FE}"/>
+          <p:cNvPr id="17" name="Imagen 16">
+            <a:extLst>
+              <a:ext uri="{FF2B5EF4-FFF2-40B4-BE49-F238E27FC236}">
+                <a16:creationId xmlns:a16="http://schemas.microsoft.com/office/drawing/2014/main" id="{57EAC778-2749-4B02-9D32-95CC2A09A124}"/>
               </a:ext>
             </a:extLst>
           </p:cNvPr>
@@ -7051,8 +7051,8 @@
         </p:blipFill>
         <p:spPr>
           <a:xfrm>
-            <a:off x="6349210" y="1580895"/>
-            <a:ext cx="4090190" cy="1859894"/>
+            <a:off x="5943600" y="1605520"/>
+            <a:ext cx="4031339" cy="1950926"/>
           </a:xfrm>
           <a:prstGeom prst="rect">
             <a:avLst/>
@@ -7061,10 +7061,10 @@
       </p:pic>
       <p:pic>
         <p:nvPicPr>
-          <p:cNvPr id="14" name="Imagen 13">
-            <a:extLst>
-              <a:ext uri="{FF2B5EF4-FFF2-40B4-BE49-F238E27FC236}">
-                <a16:creationId xmlns:a16="http://schemas.microsoft.com/office/drawing/2014/main" id="{1E88AF16-E05E-4682-982C-C0D1C1C958AC}"/>
+          <p:cNvPr id="19" name="Imagen 18">
+            <a:extLst>
+              <a:ext uri="{FF2B5EF4-FFF2-40B4-BE49-F238E27FC236}">
+                <a16:creationId xmlns:a16="http://schemas.microsoft.com/office/drawing/2014/main" id="{8AF66268-8662-48CC-8F4C-A93D1B734E5C}"/>
               </a:ext>
             </a:extLst>
           </p:cNvPr>
@@ -7081,8 +7081,8 @@
         </p:blipFill>
         <p:spPr>
           <a:xfrm>
-            <a:off x="1672389" y="1763003"/>
-            <a:ext cx="4568966" cy="1982008"/>
+            <a:off x="1524000" y="1846298"/>
+            <a:ext cx="3876675" cy="1681694"/>
           </a:xfrm>
           <a:prstGeom prst="rect">
             <a:avLst/>
@@ -7303,7 +7303,7 @@
         </p:nvSpPr>
         <p:spPr>
           <a:xfrm>
-            <a:off x="609441" y="4819471"/>
+            <a:off x="609440" y="4880325"/>
             <a:ext cx="11199971" cy="1200329"/>
           </a:xfrm>
           <a:prstGeom prst="rect">
@@ -7438,66 +7438,6 @@
           </a:p>
         </p:txBody>
       </p:sp>
-      <p:pic>
-        <p:nvPicPr>
-          <p:cNvPr id="6" name="Imagen 5">
-            <a:extLst>
-              <a:ext uri="{FF2B5EF4-FFF2-40B4-BE49-F238E27FC236}">
-                <a16:creationId xmlns:a16="http://schemas.microsoft.com/office/drawing/2014/main" id="{76B707A9-F2F1-4E7D-8B3F-3D17437C96D1}"/>
-              </a:ext>
-            </a:extLst>
-          </p:cNvPr>
-          <p:cNvPicPr>
-            <a:picLocks noChangeAspect="1"/>
-          </p:cNvPicPr>
-          <p:nvPr/>
-        </p:nvPicPr>
-        <p:blipFill>
-          <a:blip r:embed="rId5"/>
-          <a:stretch>
-            <a:fillRect/>
-          </a:stretch>
-        </p:blipFill>
-        <p:spPr>
-          <a:xfrm>
-            <a:off x="6668674" y="1752178"/>
-            <a:ext cx="3581468" cy="1768066"/>
-          </a:xfrm>
-          <a:prstGeom prst="rect">
-            <a:avLst/>
-          </a:prstGeom>
-        </p:spPr>
-      </p:pic>
-      <p:pic>
-        <p:nvPicPr>
-          <p:cNvPr id="11" name="Imagen 10">
-            <a:extLst>
-              <a:ext uri="{FF2B5EF4-FFF2-40B4-BE49-F238E27FC236}">
-                <a16:creationId xmlns:a16="http://schemas.microsoft.com/office/drawing/2014/main" id="{09844E23-9D13-4A88-8C38-E00376B8A36A}"/>
-              </a:ext>
-            </a:extLst>
-          </p:cNvPr>
-          <p:cNvPicPr>
-            <a:picLocks noChangeAspect="1"/>
-          </p:cNvPicPr>
-          <p:nvPr/>
-        </p:nvPicPr>
-        <p:blipFill>
-          <a:blip r:embed="rId6"/>
-          <a:stretch>
-            <a:fillRect/>
-          </a:stretch>
-        </p:blipFill>
-        <p:spPr>
-          <a:xfrm>
-            <a:off x="1162062" y="1541297"/>
-            <a:ext cx="4953991" cy="2131770"/>
-          </a:xfrm>
-          <a:prstGeom prst="rect">
-            <a:avLst/>
-          </a:prstGeom>
-        </p:spPr>
-      </p:pic>
       <p:graphicFrame>
         <p:nvGraphicFramePr>
           <p:cNvPr id="15" name="Tabla 6">
@@ -7513,7 +7453,7 @@
           <p:nvPr>
             <p:extLst>
               <p:ext uri="{D42A27DB-BD31-4B8C-83A1-F6EECF244321}">
-                <p14:modId xmlns:p14="http://schemas.microsoft.com/office/powerpoint/2010/main" val="3200311329"/>
+                <p14:modId xmlns:p14="http://schemas.microsoft.com/office/powerpoint/2010/main" val="222850975"/>
               </p:ext>
             </p:extLst>
           </p:nvPr>
@@ -7777,6 +7717,18 @@
                     <a:bodyPr/>
                     <a:lstStyle/>
                     <a:p>
+                      <a:r>
+                        <a:rPr lang="es-ES" b="0" i="0" dirty="0">
+                          <a:solidFill>
+                            <a:schemeClr val="dk1"/>
+                          </a:solidFill>
+                          <a:effectLst/>
+                          <a:latin typeface="+mn-lt"/>
+                          <a:ea typeface="+mn-ea"/>
+                          <a:cs typeface="+mn-cs"/>
+                        </a:rPr>
+                        <a:t>0.0326</a:t>
+                      </a:r>
                       <a:endParaRPr lang="es-ES" dirty="0"/>
                     </a:p>
                   </a:txBody>
@@ -7787,6 +7739,18 @@
                     <a:bodyPr/>
                     <a:lstStyle/>
                     <a:p>
+                      <a:r>
+                        <a:rPr lang="es-ES" b="0" i="0" dirty="0">
+                          <a:solidFill>
+                            <a:schemeClr val="dk1"/>
+                          </a:solidFill>
+                          <a:effectLst/>
+                          <a:latin typeface="+mn-lt"/>
+                          <a:ea typeface="+mn-ea"/>
+                          <a:cs typeface="+mn-cs"/>
+                        </a:rPr>
+                        <a:t>['0.2444', '0.2556', '0.2556', '0.2444']</a:t>
+                      </a:r>
                       <a:endParaRPr lang="es-ES" dirty="0"/>
                     </a:p>
                   </a:txBody>
@@ -7802,6 +7766,66 @@
           </a:graphicData>
         </a:graphic>
       </p:graphicFrame>
+      <p:pic>
+        <p:nvPicPr>
+          <p:cNvPr id="17" name="Imagen 16">
+            <a:extLst>
+              <a:ext uri="{FF2B5EF4-FFF2-40B4-BE49-F238E27FC236}">
+                <a16:creationId xmlns:a16="http://schemas.microsoft.com/office/drawing/2014/main" id="{C588AC49-FC2C-484E-9B26-95200B92B47D}"/>
+              </a:ext>
+            </a:extLst>
+          </p:cNvPr>
+          <p:cNvPicPr>
+            <a:picLocks noChangeAspect="1"/>
+          </p:cNvPicPr>
+          <p:nvPr/>
+        </p:nvPicPr>
+        <p:blipFill>
+          <a:blip r:embed="rId5"/>
+          <a:stretch>
+            <a:fillRect/>
+          </a:stretch>
+        </p:blipFill>
+        <p:spPr>
+          <a:xfrm>
+            <a:off x="1640460" y="1696646"/>
+            <a:ext cx="4568966" cy="1982008"/>
+          </a:xfrm>
+          <a:prstGeom prst="rect">
+            <a:avLst/>
+          </a:prstGeom>
+        </p:spPr>
+      </p:pic>
+      <p:pic>
+        <p:nvPicPr>
+          <p:cNvPr id="18" name="Imagen 17">
+            <a:extLst>
+              <a:ext uri="{FF2B5EF4-FFF2-40B4-BE49-F238E27FC236}">
+                <a16:creationId xmlns:a16="http://schemas.microsoft.com/office/drawing/2014/main" id="{1E2B6480-0B07-42BC-AF2E-5C4D53D8C394}"/>
+              </a:ext>
+            </a:extLst>
+          </p:cNvPr>
+          <p:cNvPicPr>
+            <a:picLocks noChangeAspect="1"/>
+          </p:cNvPicPr>
+          <p:nvPr/>
+        </p:nvPicPr>
+        <p:blipFill>
+          <a:blip r:embed="rId6"/>
+          <a:stretch>
+            <a:fillRect/>
+          </a:stretch>
+        </p:blipFill>
+        <p:spPr>
+          <a:xfrm>
+            <a:off x="6349210" y="1580895"/>
+            <a:ext cx="4090190" cy="1859894"/>
+          </a:xfrm>
+          <a:prstGeom prst="rect">
+            <a:avLst/>
+          </a:prstGeom>
+        </p:spPr>
+      </p:pic>
     </p:spTree>
     <p:extLst>
       <p:ext uri="{BB962C8B-B14F-4D97-AF65-F5344CB8AC3E}">

--- a/LabBook_20_Nadia.pptx
+++ b/LabBook_20_Nadia.pptx
@@ -820,7 +820,7 @@
           <a:p>
             <a:fld id="{8438F8DC-35B0-48E6-A86E-42F1F08DD00F}" type="datetimeFigureOut">
               <a:rPr lang="es-ES" smtClean="0"/>
-              <a:t>10/03/2026</a:t>
+              <a:t>11/03/2026</a:t>
             </a:fld>
             <a:endParaRPr lang="es-ES"/>
           </a:p>
@@ -997,7 +997,7 @@
           <a:p>
             <a:fld id="{FACBDC12-F39B-4B97-8F4D-6734F9D366FF}" type="datetimeFigureOut">
               <a:rPr lang="es-ES" smtClean="0"/>
-              <a:t>10/03/2026</a:t>
+              <a:t>11/03/2026</a:t>
             </a:fld>
             <a:endParaRPr lang="es-ES"/>
           </a:p>
@@ -13154,7 +13154,7 @@
         <p:spPr>
           <a:xfrm>
             <a:off x="609441" y="4860334"/>
-            <a:ext cx="11199971" cy="1384995"/>
+            <a:ext cx="11199971" cy="1200329"/>
           </a:xfrm>
           <a:prstGeom prst="rect">
             <a:avLst/>
@@ -13206,157 +13206,161 @@
                 <a:latin typeface="Arial" panose="020B0604020202020204" pitchFamily="34" charset="0"/>
                 <a:cs typeface="Arial" panose="020B0604020202020204" pitchFamily="34" charset="0"/>
               </a:rPr>
-              <a:t> que a una </a:t>
+              <a:t> que para </a:t>
             </a:r>
             <a:r>
               <a:rPr lang="en-US" sz="1200" dirty="0" err="1">
                 <a:latin typeface="Arial" panose="020B0604020202020204" pitchFamily="34" charset="0"/>
                 <a:cs typeface="Arial" panose="020B0604020202020204" pitchFamily="34" charset="0"/>
               </a:rPr>
-              <a:t>distancia</a:t>
+              <a:t>lograr</a:t>
             </a:r>
             <a:r>
               <a:rPr lang="en-US" sz="1200" dirty="0">
                 <a:latin typeface="Arial" panose="020B0604020202020204" pitchFamily="34" charset="0"/>
                 <a:cs typeface="Arial" panose="020B0604020202020204" pitchFamily="34" charset="0"/>
               </a:rPr>
-              <a:t> de L= </a:t>
+              <a:t> una </a:t>
             </a:r>
             <a:r>
               <a:rPr lang="en-US" sz="1200" dirty="0" err="1">
                 <a:latin typeface="Arial" panose="020B0604020202020204" pitchFamily="34" charset="0"/>
                 <a:cs typeface="Arial" panose="020B0604020202020204" pitchFamily="34" charset="0"/>
               </a:rPr>
-              <a:t>Lpi</a:t>
+              <a:t>transferencia</a:t>
             </a:r>
             <a:r>
               <a:rPr lang="en-US" sz="1200" dirty="0">
                 <a:latin typeface="Arial" panose="020B0604020202020204" pitchFamily="34" charset="0"/>
                 <a:cs typeface="Arial" panose="020B0604020202020204" pitchFamily="34" charset="0"/>
               </a:rPr>
-              <a:t> </a:t>
+              <a:t> de </a:t>
             </a:r>
             <a:r>
               <a:rPr lang="en-US" sz="1200" dirty="0" err="1">
                 <a:latin typeface="Arial" panose="020B0604020202020204" pitchFamily="34" charset="0"/>
                 <a:cs typeface="Arial" panose="020B0604020202020204" pitchFamily="34" charset="0"/>
               </a:rPr>
-              <a:t>obtenemos</a:t>
+              <a:t>energía</a:t>
             </a:r>
             <a:r>
               <a:rPr lang="en-US" sz="1200" dirty="0">
                 <a:latin typeface="Arial" panose="020B0604020202020204" pitchFamily="34" charset="0"/>
                 <a:cs typeface="Arial" panose="020B0604020202020204" pitchFamily="34" charset="0"/>
               </a:rPr>
-              <a:t> </a:t>
+              <a:t> total (100%) a la </a:t>
             </a:r>
             <a:r>
               <a:rPr lang="en-US" sz="1200" dirty="0" err="1">
                 <a:latin typeface="Arial" panose="020B0604020202020204" pitchFamily="34" charset="0"/>
                 <a:cs typeface="Arial" panose="020B0604020202020204" pitchFamily="34" charset="0"/>
               </a:rPr>
-              <a:t>toda</a:t>
+              <a:t>guía</a:t>
             </a:r>
             <a:r>
               <a:rPr lang="en-US" sz="1200" dirty="0">
                 <a:latin typeface="Arial" panose="020B0604020202020204" pitchFamily="34" charset="0"/>
                 <a:cs typeface="Arial" panose="020B0604020202020204" pitchFamily="34" charset="0"/>
               </a:rPr>
-              <a:t> la </a:t>
+              <a:t> superior, se ha de </a:t>
             </a:r>
             <a:r>
               <a:rPr lang="en-US" sz="1200" dirty="0" err="1">
                 <a:latin typeface="Arial" panose="020B0604020202020204" pitchFamily="34" charset="0"/>
                 <a:cs typeface="Arial" panose="020B0604020202020204" pitchFamily="34" charset="0"/>
               </a:rPr>
-              <a:t>potencia</a:t>
+              <a:t>cumplir</a:t>
             </a:r>
             <a:r>
               <a:rPr lang="en-US" sz="1200" dirty="0">
                 <a:latin typeface="Arial" panose="020B0604020202020204" pitchFamily="34" charset="0"/>
                 <a:cs typeface="Arial" panose="020B0604020202020204" pitchFamily="34" charset="0"/>
               </a:rPr>
-              <a:t> </a:t>
+              <a:t> que L = </a:t>
             </a:r>
             <a:r>
               <a:rPr lang="en-US" sz="1200" dirty="0" err="1">
                 <a:latin typeface="Arial" panose="020B0604020202020204" pitchFamily="34" charset="0"/>
                 <a:cs typeface="Arial" panose="020B0604020202020204" pitchFamily="34" charset="0"/>
               </a:rPr>
-              <a:t>en</a:t>
+              <a:t>L_pi</a:t>
             </a:r>
             <a:r>
               <a:rPr lang="en-US" sz="1200" dirty="0">
                 <a:latin typeface="Arial" panose="020B0604020202020204" pitchFamily="34" charset="0"/>
                 <a:cs typeface="Arial" panose="020B0604020202020204" pitchFamily="34" charset="0"/>
               </a:rPr>
-              <a:t> la </a:t>
+              <a:t>. Por </a:t>
             </a:r>
             <a:r>
               <a:rPr lang="en-US" sz="1200" dirty="0" err="1">
                 <a:latin typeface="Arial" panose="020B0604020202020204" pitchFamily="34" charset="0"/>
                 <a:cs typeface="Arial" panose="020B0604020202020204" pitchFamily="34" charset="0"/>
               </a:rPr>
-              <a:t>guía</a:t>
+              <a:t>otro</a:t>
             </a:r>
             <a:r>
               <a:rPr lang="en-US" sz="1200" dirty="0">
                 <a:latin typeface="Arial" panose="020B0604020202020204" pitchFamily="34" charset="0"/>
                 <a:cs typeface="Arial" panose="020B0604020202020204" pitchFamily="34" charset="0"/>
               </a:rPr>
-              <a:t> de </a:t>
+              <a:t> </a:t>
             </a:r>
             <a:r>
               <a:rPr lang="en-US" sz="1200" dirty="0" err="1">
                 <a:latin typeface="Arial" panose="020B0604020202020204" pitchFamily="34" charset="0"/>
                 <a:cs typeface="Arial" panose="020B0604020202020204" pitchFamily="34" charset="0"/>
               </a:rPr>
-              <a:t>arriba</a:t>
+              <a:t>lado</a:t>
             </a:r>
             <a:r>
               <a:rPr lang="en-US" sz="1200" dirty="0">
                 <a:latin typeface="Arial" panose="020B0604020202020204" pitchFamily="34" charset="0"/>
                 <a:cs typeface="Arial" panose="020B0604020202020204" pitchFamily="34" charset="0"/>
               </a:rPr>
-              <a:t>. </a:t>
-            </a:r>
-          </a:p>
-          <a:p>
-            <a:pPr algn="just"/>
+              <a:t> para </a:t>
+            </a:r>
+            <a:r>
+              <a:rPr lang="en-US" sz="1200" dirty="0" err="1">
+                <a:latin typeface="Arial" panose="020B0604020202020204" pitchFamily="34" charset="0"/>
+                <a:cs typeface="Arial" panose="020B0604020202020204" pitchFamily="34" charset="0"/>
+              </a:rPr>
+              <a:t>conseguir</a:t>
+            </a:r>
             <a:r>
               <a:rPr lang="en-US" sz="1200" dirty="0">
                 <a:latin typeface="Arial" panose="020B0604020202020204" pitchFamily="34" charset="0"/>
                 <a:cs typeface="Arial" panose="020B0604020202020204" pitchFamily="34" charset="0"/>
               </a:rPr>
-              <a:t>Para </a:t>
+              <a:t> una </a:t>
             </a:r>
             <a:r>
               <a:rPr lang="en-US" sz="1200" dirty="0" err="1">
                 <a:latin typeface="Arial" panose="020B0604020202020204" pitchFamily="34" charset="0"/>
                 <a:cs typeface="Arial" panose="020B0604020202020204" pitchFamily="34" charset="0"/>
               </a:rPr>
-              <a:t>conseguir</a:t>
+              <a:t>distribucion</a:t>
             </a:r>
             <a:r>
               <a:rPr lang="en-US" sz="1200" dirty="0">
                 <a:latin typeface="Arial" panose="020B0604020202020204" pitchFamily="34" charset="0"/>
                 <a:cs typeface="Arial" panose="020B0604020202020204" pitchFamily="34" charset="0"/>
               </a:rPr>
-              <a:t> la </a:t>
+              <a:t> de 50/50, </a:t>
             </a:r>
             <a:r>
               <a:rPr lang="en-US" sz="1200" dirty="0" err="1">
                 <a:latin typeface="Arial" panose="020B0604020202020204" pitchFamily="34" charset="0"/>
                 <a:cs typeface="Arial" panose="020B0604020202020204" pitchFamily="34" charset="0"/>
               </a:rPr>
-              <a:t>mitad</a:t>
+              <a:t>hacer</a:t>
             </a:r>
             <a:r>
               <a:rPr lang="en-US" sz="1200" dirty="0">
                 <a:latin typeface="Arial" panose="020B0604020202020204" pitchFamily="34" charset="0"/>
                 <a:cs typeface="Arial" panose="020B0604020202020204" pitchFamily="34" charset="0"/>
               </a:rPr>
-              <a:t> de la </a:t>
+              <a:t> un divisor de </a:t>
             </a:r>
             <a:r>
               <a:rPr lang="en-US" sz="1200" dirty="0" err="1">
@@ -13377,64 +13381,43 @@
                 <a:latin typeface="Arial" panose="020B0604020202020204" pitchFamily="34" charset="0"/>
                 <a:cs typeface="Arial" panose="020B0604020202020204" pitchFamily="34" charset="0"/>
               </a:rPr>
-              <a:t>en</a:t>
+              <a:t>equilibrado</a:t>
             </a:r>
             <a:r>
               <a:rPr lang="en-US" sz="1200" dirty="0">
                 <a:latin typeface="Arial" panose="020B0604020202020204" pitchFamily="34" charset="0"/>
                 <a:cs typeface="Arial" panose="020B0604020202020204" pitchFamily="34" charset="0"/>
               </a:rPr>
-              <a:t> </a:t>
+              <a:t>, la longitude ha de ser la </a:t>
             </a:r>
             <a:r>
               <a:rPr lang="en-US" sz="1200" dirty="0" err="1">
                 <a:latin typeface="Arial" panose="020B0604020202020204" pitchFamily="34" charset="0"/>
                 <a:cs typeface="Arial" panose="020B0604020202020204" pitchFamily="34" charset="0"/>
               </a:rPr>
-              <a:t>cada</a:t>
+              <a:t>mitad</a:t>
             </a:r>
             <a:r>
               <a:rPr lang="en-US" sz="1200" dirty="0">
                 <a:latin typeface="Arial" panose="020B0604020202020204" pitchFamily="34" charset="0"/>
                 <a:cs typeface="Arial" panose="020B0604020202020204" pitchFamily="34" charset="0"/>
               </a:rPr>
-              <a:t> </a:t>
+              <a:t> L= </a:t>
             </a:r>
             <a:r>
               <a:rPr lang="en-US" sz="1200" dirty="0" err="1">
                 <a:latin typeface="Arial" panose="020B0604020202020204" pitchFamily="34" charset="0"/>
                 <a:cs typeface="Arial" panose="020B0604020202020204" pitchFamily="34" charset="0"/>
               </a:rPr>
-              <a:t>puerto</a:t>
+              <a:t>L_pi</a:t>
             </a:r>
             <a:r>
               <a:rPr lang="en-US" sz="1200" dirty="0">
                 <a:latin typeface="Arial" panose="020B0604020202020204" pitchFamily="34" charset="0"/>
                 <a:cs typeface="Arial" panose="020B0604020202020204" pitchFamily="34" charset="0"/>
               </a:rPr>
-              <a:t> L= </a:t>
-            </a:r>
-            <a:r>
-              <a:rPr lang="en-US" sz="1200" dirty="0" err="1">
-                <a:latin typeface="Arial" panose="020B0604020202020204" pitchFamily="34" charset="0"/>
-                <a:cs typeface="Arial" panose="020B0604020202020204" pitchFamily="34" charset="0"/>
-              </a:rPr>
-              <a:t>Lpi</a:t>
-            </a:r>
-            <a:r>
-              <a:rPr lang="en-US" sz="1200" dirty="0">
-                <a:latin typeface="Arial" panose="020B0604020202020204" pitchFamily="34" charset="0"/>
-                <a:cs typeface="Arial" panose="020B0604020202020204" pitchFamily="34" charset="0"/>
-              </a:rPr>
               <a:t>/2</a:t>
             </a:r>
-          </a:p>
-          <a:p>
-            <a:pPr algn="just"/>
-            <a:endParaRPr lang="en-US" sz="1200" dirty="0">
-              <a:latin typeface="Arial" panose="020B0604020202020204" pitchFamily="34" charset="0"/>
-              <a:cs typeface="Arial" panose="020B0604020202020204" pitchFamily="34" charset="0"/>
-            </a:endParaRPr>
           </a:p>
           <a:p>
             <a:pPr algn="just"/>
@@ -14874,8 +14857,8 @@
         </p:nvSpPr>
         <p:spPr>
           <a:xfrm>
-            <a:off x="6606920" y="1524000"/>
-            <a:ext cx="4574428" cy="1200329"/>
+            <a:off x="6606919" y="1828800"/>
+            <a:ext cx="4574428" cy="2308324"/>
           </a:xfrm>
           <a:prstGeom prst="rect">
             <a:avLst/>
@@ -14929,10 +14912,356 @@
           </a:p>
           <a:p>
             <a:pPr algn="just"/>
-            <a:endParaRPr lang="en-US" sz="1200" dirty="0">
-              <a:latin typeface="Arial" panose="020B0604020202020204" pitchFamily="34" charset="0"/>
-              <a:cs typeface="Arial" panose="020B0604020202020204" pitchFamily="34" charset="0"/>
-            </a:endParaRPr>
+            <a:r>
+              <a:rPr lang="en-US" sz="1200" dirty="0" err="1">
+                <a:latin typeface="Arial" panose="020B0604020202020204" pitchFamily="34" charset="0"/>
+                <a:cs typeface="Arial" panose="020B0604020202020204" pitchFamily="34" charset="0"/>
+              </a:rPr>
+              <a:t>Hemos</a:t>
+            </a:r>
+            <a:r>
+              <a:rPr lang="en-US" sz="1200" dirty="0">
+                <a:latin typeface="Arial" panose="020B0604020202020204" pitchFamily="34" charset="0"/>
+                <a:cs typeface="Arial" panose="020B0604020202020204" pitchFamily="34" charset="0"/>
+              </a:rPr>
+              <a:t> </a:t>
+            </a:r>
+            <a:r>
+              <a:rPr lang="en-US" sz="1200" dirty="0" err="1">
+                <a:latin typeface="Arial" panose="020B0604020202020204" pitchFamily="34" charset="0"/>
+                <a:cs typeface="Arial" panose="020B0604020202020204" pitchFamily="34" charset="0"/>
+              </a:rPr>
+              <a:t>representado</a:t>
+            </a:r>
+            <a:r>
+              <a:rPr lang="en-US" sz="1200" dirty="0">
+                <a:latin typeface="Arial" panose="020B0604020202020204" pitchFamily="34" charset="0"/>
+                <a:cs typeface="Arial" panose="020B0604020202020204" pitchFamily="34" charset="0"/>
+              </a:rPr>
+              <a:t> la longitude de </a:t>
+            </a:r>
+            <a:r>
+              <a:rPr lang="en-US" sz="1200" dirty="0" err="1">
+                <a:latin typeface="Arial" panose="020B0604020202020204" pitchFamily="34" charset="0"/>
+                <a:cs typeface="Arial" panose="020B0604020202020204" pitchFamily="34" charset="0"/>
+              </a:rPr>
+              <a:t>L_pi</a:t>
+            </a:r>
+            <a:r>
+              <a:rPr lang="en-US" sz="1200" dirty="0">
+                <a:latin typeface="Arial" panose="020B0604020202020204" pitchFamily="34" charset="0"/>
+                <a:cs typeface="Arial" panose="020B0604020202020204" pitchFamily="34" charset="0"/>
+              </a:rPr>
+              <a:t> </a:t>
+            </a:r>
+            <a:r>
+              <a:rPr lang="en-US" sz="1200" dirty="0" err="1">
+                <a:latin typeface="Arial" panose="020B0604020202020204" pitchFamily="34" charset="0"/>
+                <a:cs typeface="Arial" panose="020B0604020202020204" pitchFamily="34" charset="0"/>
+              </a:rPr>
+              <a:t>en</a:t>
+            </a:r>
+            <a:r>
+              <a:rPr lang="en-US" sz="1200" dirty="0">
+                <a:latin typeface="Arial" panose="020B0604020202020204" pitchFamily="34" charset="0"/>
+                <a:cs typeface="Arial" panose="020B0604020202020204" pitchFamily="34" charset="0"/>
+              </a:rPr>
+              <a:t> function del gap </a:t>
+            </a:r>
+            <a:r>
+              <a:rPr lang="en-US" sz="1200" dirty="0" err="1">
+                <a:latin typeface="Arial" panose="020B0604020202020204" pitchFamily="34" charset="0"/>
+                <a:cs typeface="Arial" panose="020B0604020202020204" pitchFamily="34" charset="0"/>
+              </a:rPr>
+              <a:t>obtenidas</a:t>
+            </a:r>
+            <a:r>
+              <a:rPr lang="en-US" sz="1200" dirty="0">
+                <a:latin typeface="Arial" panose="020B0604020202020204" pitchFamily="34" charset="0"/>
+                <a:cs typeface="Arial" panose="020B0604020202020204" pitchFamily="34" charset="0"/>
+              </a:rPr>
+              <a:t> </a:t>
+            </a:r>
+            <a:r>
+              <a:rPr lang="en-US" sz="1200" dirty="0" err="1">
+                <a:latin typeface="Arial" panose="020B0604020202020204" pitchFamily="34" charset="0"/>
+                <a:cs typeface="Arial" panose="020B0604020202020204" pitchFamily="34" charset="0"/>
+              </a:rPr>
+              <a:t>en</a:t>
+            </a:r>
+            <a:r>
+              <a:rPr lang="en-US" sz="1200" dirty="0">
+                <a:latin typeface="Arial" panose="020B0604020202020204" pitchFamily="34" charset="0"/>
+                <a:cs typeface="Arial" panose="020B0604020202020204" pitchFamily="34" charset="0"/>
+              </a:rPr>
+              <a:t> las </a:t>
+            </a:r>
+            <a:r>
+              <a:rPr lang="en-US" sz="1200" dirty="0" err="1">
+                <a:latin typeface="Arial" panose="020B0604020202020204" pitchFamily="34" charset="0"/>
+                <a:cs typeface="Arial" panose="020B0604020202020204" pitchFamily="34" charset="0"/>
+              </a:rPr>
+              <a:t>simulaciones</a:t>
+            </a:r>
+            <a:r>
+              <a:rPr lang="en-US" sz="1200" dirty="0">
+                <a:latin typeface="Arial" panose="020B0604020202020204" pitchFamily="34" charset="0"/>
+                <a:cs typeface="Arial" panose="020B0604020202020204" pitchFamily="34" charset="0"/>
+              </a:rPr>
+              <a:t> para </a:t>
+            </a:r>
+            <a:r>
+              <a:rPr lang="en-US" sz="1200" dirty="0" err="1">
+                <a:latin typeface="Arial" panose="020B0604020202020204" pitchFamily="34" charset="0"/>
+                <a:cs typeface="Arial" panose="020B0604020202020204" pitchFamily="34" charset="0"/>
+              </a:rPr>
+              <a:t>ver</a:t>
+            </a:r>
+            <a:r>
+              <a:rPr lang="en-US" sz="1200" dirty="0">
+                <a:latin typeface="Arial" panose="020B0604020202020204" pitchFamily="34" charset="0"/>
+                <a:cs typeface="Arial" panose="020B0604020202020204" pitchFamily="34" charset="0"/>
+              </a:rPr>
+              <a:t> de </a:t>
+            </a:r>
+            <a:r>
+              <a:rPr lang="en-US" sz="1200" dirty="0" err="1">
+                <a:latin typeface="Arial" panose="020B0604020202020204" pitchFamily="34" charset="0"/>
+                <a:cs typeface="Arial" panose="020B0604020202020204" pitchFamily="34" charset="0"/>
+              </a:rPr>
+              <a:t>manera</a:t>
+            </a:r>
+            <a:r>
+              <a:rPr lang="en-US" sz="1200" dirty="0">
+                <a:latin typeface="Arial" panose="020B0604020202020204" pitchFamily="34" charset="0"/>
+                <a:cs typeface="Arial" panose="020B0604020202020204" pitchFamily="34" charset="0"/>
+              </a:rPr>
+              <a:t> </a:t>
+            </a:r>
+            <a:r>
+              <a:rPr lang="en-US" sz="1200" dirty="0" err="1">
+                <a:latin typeface="Arial" panose="020B0604020202020204" pitchFamily="34" charset="0"/>
+                <a:cs typeface="Arial" panose="020B0604020202020204" pitchFamily="34" charset="0"/>
+              </a:rPr>
+              <a:t>más</a:t>
+            </a:r>
+            <a:r>
+              <a:rPr lang="en-US" sz="1200" dirty="0">
+                <a:latin typeface="Arial" panose="020B0604020202020204" pitchFamily="34" charset="0"/>
+                <a:cs typeface="Arial" panose="020B0604020202020204" pitchFamily="34" charset="0"/>
+              </a:rPr>
+              <a:t> visual </a:t>
+            </a:r>
+            <a:r>
+              <a:rPr lang="en-US" sz="1200" dirty="0" err="1">
+                <a:latin typeface="Arial" panose="020B0604020202020204" pitchFamily="34" charset="0"/>
+                <a:cs typeface="Arial" panose="020B0604020202020204" pitchFamily="34" charset="0"/>
+              </a:rPr>
+              <a:t>esta</a:t>
+            </a:r>
+            <a:r>
+              <a:rPr lang="en-US" sz="1200" dirty="0">
+                <a:latin typeface="Arial" panose="020B0604020202020204" pitchFamily="34" charset="0"/>
+                <a:cs typeface="Arial" panose="020B0604020202020204" pitchFamily="34" charset="0"/>
+              </a:rPr>
+              <a:t> </a:t>
+            </a:r>
+            <a:r>
+              <a:rPr lang="en-US" sz="1200" dirty="0" err="1">
+                <a:latin typeface="Arial" panose="020B0604020202020204" pitchFamily="34" charset="0"/>
+                <a:cs typeface="Arial" panose="020B0604020202020204" pitchFamily="34" charset="0"/>
+              </a:rPr>
+              <a:t>dependencia</a:t>
+            </a:r>
+            <a:r>
+              <a:rPr lang="en-US" sz="1200" dirty="0">
+                <a:latin typeface="Arial" panose="020B0604020202020204" pitchFamily="34" charset="0"/>
+                <a:cs typeface="Arial" panose="020B0604020202020204" pitchFamily="34" charset="0"/>
+              </a:rPr>
+              <a:t>. </a:t>
+            </a:r>
+            <a:r>
+              <a:rPr lang="en-US" sz="1200" dirty="0" err="1">
+                <a:latin typeface="Arial" panose="020B0604020202020204" pitchFamily="34" charset="0"/>
+                <a:cs typeface="Arial" panose="020B0604020202020204" pitchFamily="34" charset="0"/>
+              </a:rPr>
+              <a:t>Vemos</a:t>
+            </a:r>
+            <a:r>
+              <a:rPr lang="en-US" sz="1200" dirty="0">
+                <a:latin typeface="Arial" panose="020B0604020202020204" pitchFamily="34" charset="0"/>
+                <a:cs typeface="Arial" panose="020B0604020202020204" pitchFamily="34" charset="0"/>
+              </a:rPr>
+              <a:t> que </a:t>
+            </a:r>
+            <a:r>
+              <a:rPr lang="en-US" sz="1200" dirty="0" err="1">
+                <a:latin typeface="Arial" panose="020B0604020202020204" pitchFamily="34" charset="0"/>
+                <a:cs typeface="Arial" panose="020B0604020202020204" pitchFamily="34" charset="0"/>
+              </a:rPr>
+              <a:t>aumenta</a:t>
+            </a:r>
+            <a:r>
+              <a:rPr lang="en-US" sz="1200" dirty="0">
+                <a:latin typeface="Arial" panose="020B0604020202020204" pitchFamily="34" charset="0"/>
+                <a:cs typeface="Arial" panose="020B0604020202020204" pitchFamily="34" charset="0"/>
+              </a:rPr>
+              <a:t> </a:t>
+            </a:r>
+            <a:r>
+              <a:rPr lang="en-US" sz="1200" dirty="0" err="1">
+                <a:latin typeface="Arial" panose="020B0604020202020204" pitchFamily="34" charset="0"/>
+                <a:cs typeface="Arial" panose="020B0604020202020204" pitchFamily="34" charset="0"/>
+              </a:rPr>
+              <a:t>significativamente</a:t>
+            </a:r>
+            <a:r>
+              <a:rPr lang="en-US" sz="1200" dirty="0">
+                <a:latin typeface="Arial" panose="020B0604020202020204" pitchFamily="34" charset="0"/>
+                <a:cs typeface="Arial" panose="020B0604020202020204" pitchFamily="34" charset="0"/>
+              </a:rPr>
+              <a:t> al </a:t>
+            </a:r>
+            <a:r>
+              <a:rPr lang="en-US" sz="1200" dirty="0" err="1">
+                <a:latin typeface="Arial" panose="020B0604020202020204" pitchFamily="34" charset="0"/>
+                <a:cs typeface="Arial" panose="020B0604020202020204" pitchFamily="34" charset="0"/>
+              </a:rPr>
+              <a:t>ir</a:t>
+            </a:r>
+            <a:r>
+              <a:rPr lang="en-US" sz="1200" dirty="0">
+                <a:latin typeface="Arial" panose="020B0604020202020204" pitchFamily="34" charset="0"/>
+                <a:cs typeface="Arial" panose="020B0604020202020204" pitchFamily="34" charset="0"/>
+              </a:rPr>
+              <a:t> </a:t>
+            </a:r>
+            <a:r>
+              <a:rPr lang="en-US" sz="1200" dirty="0" err="1">
+                <a:latin typeface="Arial" panose="020B0604020202020204" pitchFamily="34" charset="0"/>
+                <a:cs typeface="Arial" panose="020B0604020202020204" pitchFamily="34" charset="0"/>
+              </a:rPr>
+              <a:t>incrementando</a:t>
+            </a:r>
+            <a:r>
+              <a:rPr lang="en-US" sz="1200" dirty="0">
+                <a:latin typeface="Arial" panose="020B0604020202020204" pitchFamily="34" charset="0"/>
+                <a:cs typeface="Arial" panose="020B0604020202020204" pitchFamily="34" charset="0"/>
+              </a:rPr>
+              <a:t> la </a:t>
+            </a:r>
+            <a:r>
+              <a:rPr lang="en-US" sz="1200" dirty="0" err="1">
+                <a:latin typeface="Arial" panose="020B0604020202020204" pitchFamily="34" charset="0"/>
+                <a:cs typeface="Arial" panose="020B0604020202020204" pitchFamily="34" charset="0"/>
+              </a:rPr>
+              <a:t>separación</a:t>
+            </a:r>
+            <a:r>
+              <a:rPr lang="en-US" sz="1200" dirty="0">
+                <a:latin typeface="Arial" panose="020B0604020202020204" pitchFamily="34" charset="0"/>
+                <a:cs typeface="Arial" panose="020B0604020202020204" pitchFamily="34" charset="0"/>
+              </a:rPr>
+              <a:t> entre las </a:t>
+            </a:r>
+            <a:r>
+              <a:rPr lang="en-US" sz="1200" dirty="0" err="1">
+                <a:latin typeface="Arial" panose="020B0604020202020204" pitchFamily="34" charset="0"/>
+                <a:cs typeface="Arial" panose="020B0604020202020204" pitchFamily="34" charset="0"/>
+              </a:rPr>
+              <a:t>guías</a:t>
+            </a:r>
+            <a:r>
+              <a:rPr lang="en-US" sz="1200" dirty="0">
+                <a:latin typeface="Arial" panose="020B0604020202020204" pitchFamily="34" charset="0"/>
+                <a:cs typeface="Arial" panose="020B0604020202020204" pitchFamily="34" charset="0"/>
+              </a:rPr>
+              <a:t>, </a:t>
+            </a:r>
+            <a:r>
+              <a:rPr lang="en-US" sz="1200" dirty="0" err="1">
+                <a:latin typeface="Arial" panose="020B0604020202020204" pitchFamily="34" charset="0"/>
+                <a:cs typeface="Arial" panose="020B0604020202020204" pitchFamily="34" charset="0"/>
+              </a:rPr>
+              <a:t>comportamiento</a:t>
+            </a:r>
+            <a:r>
+              <a:rPr lang="en-US" sz="1200" dirty="0">
+                <a:latin typeface="Arial" panose="020B0604020202020204" pitchFamily="34" charset="0"/>
+                <a:cs typeface="Arial" panose="020B0604020202020204" pitchFamily="34" charset="0"/>
+              </a:rPr>
+              <a:t> </a:t>
+            </a:r>
+            <a:r>
+              <a:rPr lang="en-US" sz="1200" dirty="0" err="1">
+                <a:latin typeface="Arial" panose="020B0604020202020204" pitchFamily="34" charset="0"/>
+                <a:cs typeface="Arial" panose="020B0604020202020204" pitchFamily="34" charset="0"/>
+              </a:rPr>
+              <a:t>exponencial</a:t>
+            </a:r>
+            <a:r>
+              <a:rPr lang="en-US" sz="1200" dirty="0">
+                <a:latin typeface="Arial" panose="020B0604020202020204" pitchFamily="34" charset="0"/>
+                <a:cs typeface="Arial" panose="020B0604020202020204" pitchFamily="34" charset="0"/>
+              </a:rPr>
+              <a:t>. </a:t>
+            </a:r>
+            <a:r>
+              <a:rPr lang="en-US" sz="1200" dirty="0" err="1">
+                <a:latin typeface="Arial" panose="020B0604020202020204" pitchFamily="34" charset="0"/>
+                <a:cs typeface="Arial" panose="020B0604020202020204" pitchFamily="34" charset="0"/>
+              </a:rPr>
+              <a:t>Pasamos</a:t>
+            </a:r>
+            <a:r>
+              <a:rPr lang="en-US" sz="1200" dirty="0">
+                <a:latin typeface="Arial" panose="020B0604020202020204" pitchFamily="34" charset="0"/>
+                <a:cs typeface="Arial" panose="020B0604020202020204" pitchFamily="34" charset="0"/>
+              </a:rPr>
+              <a:t> de gap= 0.6 um y </a:t>
+            </a:r>
+            <a:r>
+              <a:rPr lang="en-US" sz="1200" dirty="0" err="1">
+                <a:latin typeface="Arial" panose="020B0604020202020204" pitchFamily="34" charset="0"/>
+                <a:cs typeface="Arial" panose="020B0604020202020204" pitchFamily="34" charset="0"/>
+              </a:rPr>
+              <a:t>obtener</a:t>
+            </a:r>
+            <a:r>
+              <a:rPr lang="en-US" sz="1200" dirty="0">
+                <a:latin typeface="Arial" panose="020B0604020202020204" pitchFamily="34" charset="0"/>
+                <a:cs typeface="Arial" panose="020B0604020202020204" pitchFamily="34" charset="0"/>
+              </a:rPr>
+              <a:t> un </a:t>
+            </a:r>
+            <a:r>
+              <a:rPr lang="en-US" sz="1200" dirty="0" err="1">
+                <a:latin typeface="Arial" panose="020B0604020202020204" pitchFamily="34" charset="0"/>
+                <a:cs typeface="Arial" panose="020B0604020202020204" pitchFamily="34" charset="0"/>
+              </a:rPr>
+              <a:t>L_pi</a:t>
+            </a:r>
+            <a:r>
+              <a:rPr lang="en-US" sz="1200" dirty="0">
+                <a:latin typeface="Arial" panose="020B0604020202020204" pitchFamily="34" charset="0"/>
+                <a:cs typeface="Arial" panose="020B0604020202020204" pitchFamily="34" charset="0"/>
+              </a:rPr>
+              <a:t> = 94.03 um a un gap de 1.6 um, </a:t>
+            </a:r>
+            <a:r>
+              <a:rPr lang="en-US" sz="1200" dirty="0" err="1">
+                <a:latin typeface="Arial" panose="020B0604020202020204" pitchFamily="34" charset="0"/>
+                <a:cs typeface="Arial" panose="020B0604020202020204" pitchFamily="34" charset="0"/>
+              </a:rPr>
+              <a:t>L_pi</a:t>
+            </a:r>
+            <a:r>
+              <a:rPr lang="en-US" sz="1200" dirty="0">
+                <a:latin typeface="Arial" panose="020B0604020202020204" pitchFamily="34" charset="0"/>
+                <a:cs typeface="Arial" panose="020B0604020202020204" pitchFamily="34" charset="0"/>
+              </a:rPr>
+              <a:t>= 1892.47 um.</a:t>
+            </a:r>
           </a:p>
           <a:p>
             <a:pPr algn="just"/>
@@ -14943,10 +15272,139 @@
           </a:p>
           <a:p>
             <a:pPr algn="just"/>
-            <a:endParaRPr lang="en-US" sz="1200" dirty="0">
-              <a:latin typeface="Arial" panose="020B0604020202020204" pitchFamily="34" charset="0"/>
-              <a:cs typeface="Arial" panose="020B0604020202020204" pitchFamily="34" charset="0"/>
-            </a:endParaRPr>
+            <a:r>
+              <a:rPr lang="en-US" sz="1200" dirty="0">
+                <a:latin typeface="Arial" panose="020B0604020202020204" pitchFamily="34" charset="0"/>
+                <a:cs typeface="Arial" panose="020B0604020202020204" pitchFamily="34" charset="0"/>
+              </a:rPr>
+              <a:t>A mayor gap, </a:t>
+            </a:r>
+            <a:r>
+              <a:rPr lang="en-US" sz="1200" dirty="0" err="1">
+                <a:latin typeface="Arial" panose="020B0604020202020204" pitchFamily="34" charset="0"/>
+                <a:cs typeface="Arial" panose="020B0604020202020204" pitchFamily="34" charset="0"/>
+              </a:rPr>
+              <a:t>más</a:t>
+            </a:r>
+            <a:r>
+              <a:rPr lang="en-US" sz="1200" dirty="0">
+                <a:latin typeface="Arial" panose="020B0604020202020204" pitchFamily="34" charset="0"/>
+                <a:cs typeface="Arial" panose="020B0604020202020204" pitchFamily="34" charset="0"/>
+              </a:rPr>
+              <a:t> </a:t>
+            </a:r>
+            <a:r>
+              <a:rPr lang="en-US" sz="1200" dirty="0" err="1">
+                <a:latin typeface="Arial" panose="020B0604020202020204" pitchFamily="34" charset="0"/>
+                <a:cs typeface="Arial" panose="020B0604020202020204" pitchFamily="34" charset="0"/>
+              </a:rPr>
+              <a:t>debil</a:t>
+            </a:r>
+            <a:r>
+              <a:rPr lang="en-US" sz="1200" dirty="0">
+                <a:latin typeface="Arial" panose="020B0604020202020204" pitchFamily="34" charset="0"/>
+                <a:cs typeface="Arial" panose="020B0604020202020204" pitchFamily="34" charset="0"/>
+              </a:rPr>
+              <a:t> </a:t>
+            </a:r>
+            <a:r>
+              <a:rPr lang="en-US" sz="1200" dirty="0" err="1">
+                <a:latin typeface="Arial" panose="020B0604020202020204" pitchFamily="34" charset="0"/>
+                <a:cs typeface="Arial" panose="020B0604020202020204" pitchFamily="34" charset="0"/>
+              </a:rPr>
+              <a:t>és</a:t>
+            </a:r>
+            <a:r>
+              <a:rPr lang="en-US" sz="1200" dirty="0">
+                <a:latin typeface="Arial" panose="020B0604020202020204" pitchFamily="34" charset="0"/>
+                <a:cs typeface="Arial" panose="020B0604020202020204" pitchFamily="34" charset="0"/>
+              </a:rPr>
+              <a:t> </a:t>
+            </a:r>
+            <a:r>
+              <a:rPr lang="en-US" sz="1200" dirty="0" err="1">
+                <a:latin typeface="Arial" panose="020B0604020202020204" pitchFamily="34" charset="0"/>
+                <a:cs typeface="Arial" panose="020B0604020202020204" pitchFamily="34" charset="0"/>
+              </a:rPr>
+              <a:t>el</a:t>
+            </a:r>
+            <a:r>
+              <a:rPr lang="en-US" sz="1200" dirty="0">
+                <a:latin typeface="Arial" panose="020B0604020202020204" pitchFamily="34" charset="0"/>
+                <a:cs typeface="Arial" panose="020B0604020202020204" pitchFamily="34" charset="0"/>
+              </a:rPr>
+              <a:t> </a:t>
+            </a:r>
+            <a:r>
+              <a:rPr lang="en-US" sz="1200" dirty="0" err="1">
+                <a:latin typeface="Arial" panose="020B0604020202020204" pitchFamily="34" charset="0"/>
+                <a:cs typeface="Arial" panose="020B0604020202020204" pitchFamily="34" charset="0"/>
+              </a:rPr>
+              <a:t>acoplamiento</a:t>
+            </a:r>
+            <a:r>
+              <a:rPr lang="en-US" sz="1200" dirty="0">
+                <a:latin typeface="Arial" panose="020B0604020202020204" pitchFamily="34" charset="0"/>
+                <a:cs typeface="Arial" panose="020B0604020202020204" pitchFamily="34" charset="0"/>
+              </a:rPr>
+              <a:t> y mayor la </a:t>
+            </a:r>
+            <a:r>
+              <a:rPr lang="en-US" sz="1200" dirty="0" err="1">
+                <a:latin typeface="Arial" panose="020B0604020202020204" pitchFamily="34" charset="0"/>
+                <a:cs typeface="Arial" panose="020B0604020202020204" pitchFamily="34" charset="0"/>
+              </a:rPr>
+              <a:t>distancia</a:t>
+            </a:r>
+            <a:r>
+              <a:rPr lang="en-US" sz="1200" dirty="0">
+                <a:latin typeface="Arial" panose="020B0604020202020204" pitchFamily="34" charset="0"/>
+                <a:cs typeface="Arial" panose="020B0604020202020204" pitchFamily="34" charset="0"/>
+              </a:rPr>
+              <a:t> </a:t>
+            </a:r>
+            <a:r>
+              <a:rPr lang="en-US" sz="1200" dirty="0" err="1">
+                <a:latin typeface="Arial" panose="020B0604020202020204" pitchFamily="34" charset="0"/>
+                <a:cs typeface="Arial" panose="020B0604020202020204" pitchFamily="34" charset="0"/>
+              </a:rPr>
+              <a:t>necesaria</a:t>
+            </a:r>
+            <a:r>
+              <a:rPr lang="en-US" sz="1200" dirty="0">
+                <a:latin typeface="Arial" panose="020B0604020202020204" pitchFamily="34" charset="0"/>
+                <a:cs typeface="Arial" panose="020B0604020202020204" pitchFamily="34" charset="0"/>
+              </a:rPr>
+              <a:t> para </a:t>
+            </a:r>
+            <a:r>
+              <a:rPr lang="en-US" sz="1200" dirty="0" err="1">
+                <a:latin typeface="Arial" panose="020B0604020202020204" pitchFamily="34" charset="0"/>
+                <a:cs typeface="Arial" panose="020B0604020202020204" pitchFamily="34" charset="0"/>
+              </a:rPr>
+              <a:t>transferir</a:t>
+            </a:r>
+            <a:r>
+              <a:rPr lang="en-US" sz="1200" dirty="0">
+                <a:latin typeface="Arial" panose="020B0604020202020204" pitchFamily="34" charset="0"/>
+                <a:cs typeface="Arial" panose="020B0604020202020204" pitchFamily="34" charset="0"/>
+              </a:rPr>
+              <a:t> la </a:t>
+            </a:r>
+            <a:r>
+              <a:rPr lang="en-US" sz="1200" dirty="0" err="1">
+                <a:latin typeface="Arial" panose="020B0604020202020204" pitchFamily="34" charset="0"/>
+                <a:cs typeface="Arial" panose="020B0604020202020204" pitchFamily="34" charset="0"/>
+              </a:rPr>
+              <a:t>energía</a:t>
+            </a:r>
+            <a:r>
+              <a:rPr lang="en-US" sz="1200" dirty="0">
+                <a:latin typeface="Arial" panose="020B0604020202020204" pitchFamily="34" charset="0"/>
+                <a:cs typeface="Arial" panose="020B0604020202020204" pitchFamily="34" charset="0"/>
+              </a:rPr>
+              <a:t>. </a:t>
+            </a:r>
           </a:p>
           <a:p>
             <a:pPr algn="just"/>
@@ -15201,7 +15659,7 @@
         <p:spPr>
           <a:xfrm>
             <a:off x="609441" y="4627196"/>
-            <a:ext cx="11199971" cy="2123658"/>
+            <a:ext cx="11199971" cy="1938992"/>
           </a:xfrm>
           <a:prstGeom prst="rect">
             <a:avLst/>
@@ -15265,34 +15723,267 @@
           </a:p>
           <a:p>
             <a:pPr algn="just"/>
-            <a:endParaRPr lang="en-US" sz="1200" dirty="0">
-              <a:latin typeface="Arial" panose="020B0604020202020204" pitchFamily="34" charset="0"/>
-              <a:cs typeface="Arial" panose="020B0604020202020204" pitchFamily="34" charset="0"/>
-            </a:endParaRPr>
+            <a:r>
+              <a:rPr lang="en-US" sz="1200" dirty="0" err="1">
+                <a:latin typeface="Arial" panose="020B0604020202020204" pitchFamily="34" charset="0"/>
+                <a:cs typeface="Arial" panose="020B0604020202020204" pitchFamily="34" charset="0"/>
+              </a:rPr>
+              <a:t>En</a:t>
+            </a:r>
+            <a:r>
+              <a:rPr lang="en-US" sz="1200" dirty="0">
+                <a:latin typeface="Arial" panose="020B0604020202020204" pitchFamily="34" charset="0"/>
+                <a:cs typeface="Arial" panose="020B0604020202020204" pitchFamily="34" charset="0"/>
+              </a:rPr>
+              <a:t> </a:t>
+            </a:r>
+            <a:r>
+              <a:rPr lang="en-US" sz="1200" dirty="0" err="1">
+                <a:latin typeface="Arial" panose="020B0604020202020204" pitchFamily="34" charset="0"/>
+                <a:cs typeface="Arial" panose="020B0604020202020204" pitchFamily="34" charset="0"/>
+              </a:rPr>
+              <a:t>este</a:t>
+            </a:r>
+            <a:r>
+              <a:rPr lang="en-US" sz="1200" dirty="0">
+                <a:latin typeface="Arial" panose="020B0604020202020204" pitchFamily="34" charset="0"/>
+                <a:cs typeface="Arial" panose="020B0604020202020204" pitchFamily="34" charset="0"/>
+              </a:rPr>
+              <a:t> </a:t>
+            </a:r>
+            <a:r>
+              <a:rPr lang="en-US" sz="1200" dirty="0" err="1">
+                <a:latin typeface="Arial" panose="020B0604020202020204" pitchFamily="34" charset="0"/>
+                <a:cs typeface="Arial" panose="020B0604020202020204" pitchFamily="34" charset="0"/>
+              </a:rPr>
+              <a:t>ejercicio</a:t>
+            </a:r>
+            <a:r>
+              <a:rPr lang="en-US" sz="1200" dirty="0">
+                <a:latin typeface="Arial" panose="020B0604020202020204" pitchFamily="34" charset="0"/>
+                <a:cs typeface="Arial" panose="020B0604020202020204" pitchFamily="34" charset="0"/>
+              </a:rPr>
+              <a:t> </a:t>
+            </a:r>
+            <a:r>
+              <a:rPr lang="en-US" sz="1200" dirty="0" err="1">
+                <a:latin typeface="Arial" panose="020B0604020202020204" pitchFamily="34" charset="0"/>
+                <a:cs typeface="Arial" panose="020B0604020202020204" pitchFamily="34" charset="0"/>
+              </a:rPr>
+              <a:t>nuestro</a:t>
+            </a:r>
+            <a:r>
+              <a:rPr lang="en-US" sz="1200" dirty="0">
+                <a:latin typeface="Arial" panose="020B0604020202020204" pitchFamily="34" charset="0"/>
+                <a:cs typeface="Arial" panose="020B0604020202020204" pitchFamily="34" charset="0"/>
+              </a:rPr>
+              <a:t> </a:t>
+            </a:r>
+            <a:r>
+              <a:rPr lang="en-US" sz="1200" dirty="0" err="1">
+                <a:latin typeface="Arial" panose="020B0604020202020204" pitchFamily="34" charset="0"/>
+                <a:cs typeface="Arial" panose="020B0604020202020204" pitchFamily="34" charset="0"/>
+              </a:rPr>
+              <a:t>objetivo</a:t>
+            </a:r>
+            <a:r>
+              <a:rPr lang="en-US" sz="1200" dirty="0">
+                <a:latin typeface="Arial" panose="020B0604020202020204" pitchFamily="34" charset="0"/>
+                <a:cs typeface="Arial" panose="020B0604020202020204" pitchFamily="34" charset="0"/>
+              </a:rPr>
+              <a:t> es </a:t>
+            </a:r>
+            <a:r>
+              <a:rPr lang="en-US" sz="1200" dirty="0" err="1">
+                <a:latin typeface="Arial" panose="020B0604020202020204" pitchFamily="34" charset="0"/>
+                <a:cs typeface="Arial" panose="020B0604020202020204" pitchFamily="34" charset="0"/>
+              </a:rPr>
+              <a:t>buscar</a:t>
+            </a:r>
+            <a:r>
+              <a:rPr lang="en-US" sz="1200" dirty="0">
+                <a:latin typeface="Arial" panose="020B0604020202020204" pitchFamily="34" charset="0"/>
+                <a:cs typeface="Arial" panose="020B0604020202020204" pitchFamily="34" charset="0"/>
+              </a:rPr>
+              <a:t> la </a:t>
+            </a:r>
+            <a:r>
+              <a:rPr lang="en-US" sz="1200" dirty="0" err="1">
+                <a:latin typeface="Arial" panose="020B0604020202020204" pitchFamily="34" charset="0"/>
+                <a:cs typeface="Arial" panose="020B0604020202020204" pitchFamily="34" charset="0"/>
+              </a:rPr>
+              <a:t>distancia</a:t>
+            </a:r>
+            <a:r>
+              <a:rPr lang="en-US" sz="1200" dirty="0">
+                <a:latin typeface="Arial" panose="020B0604020202020204" pitchFamily="34" charset="0"/>
+                <a:cs typeface="Arial" panose="020B0604020202020204" pitchFamily="34" charset="0"/>
+              </a:rPr>
+              <a:t> minima de gap para </a:t>
+            </a:r>
+            <a:r>
+              <a:rPr lang="en-US" sz="1200" dirty="0" err="1">
+                <a:latin typeface="Arial" panose="020B0604020202020204" pitchFamily="34" charset="0"/>
+                <a:cs typeface="Arial" panose="020B0604020202020204" pitchFamily="34" charset="0"/>
+              </a:rPr>
+              <a:t>evitar</a:t>
+            </a:r>
+            <a:r>
+              <a:rPr lang="en-US" sz="1200" dirty="0">
+                <a:latin typeface="Arial" panose="020B0604020202020204" pitchFamily="34" charset="0"/>
+                <a:cs typeface="Arial" panose="020B0604020202020204" pitchFamily="34" charset="0"/>
+              </a:rPr>
+              <a:t> que la luz </a:t>
+            </a:r>
+            <a:r>
+              <a:rPr lang="en-US" sz="1200" dirty="0" err="1">
+                <a:latin typeface="Arial" panose="020B0604020202020204" pitchFamily="34" charset="0"/>
+                <a:cs typeface="Arial" panose="020B0604020202020204" pitchFamily="34" charset="0"/>
+              </a:rPr>
+              <a:t>salte</a:t>
+            </a:r>
+            <a:r>
+              <a:rPr lang="en-US" sz="1200" dirty="0">
+                <a:latin typeface="Arial" panose="020B0604020202020204" pitchFamily="34" charset="0"/>
+                <a:cs typeface="Arial" panose="020B0604020202020204" pitchFamily="34" charset="0"/>
+              </a:rPr>
+              <a:t> entre dos </a:t>
+            </a:r>
+            <a:r>
+              <a:rPr lang="en-US" sz="1200" dirty="0" err="1">
+                <a:latin typeface="Arial" panose="020B0604020202020204" pitchFamily="34" charset="0"/>
+                <a:cs typeface="Arial" panose="020B0604020202020204" pitchFamily="34" charset="0"/>
+              </a:rPr>
+              <a:t>guías</a:t>
+            </a:r>
+            <a:r>
+              <a:rPr lang="en-US" sz="1200" dirty="0">
+                <a:latin typeface="Arial" panose="020B0604020202020204" pitchFamily="34" charset="0"/>
+                <a:cs typeface="Arial" panose="020B0604020202020204" pitchFamily="34" charset="0"/>
+              </a:rPr>
+              <a:t> </a:t>
+            </a:r>
+            <a:r>
+              <a:rPr lang="en-US" sz="1200" dirty="0" err="1">
+                <a:latin typeface="Arial" panose="020B0604020202020204" pitchFamily="34" charset="0"/>
+                <a:cs typeface="Arial" panose="020B0604020202020204" pitchFamily="34" charset="0"/>
+              </a:rPr>
+              <a:t>en</a:t>
+            </a:r>
+            <a:r>
+              <a:rPr lang="en-US" sz="1200" dirty="0">
+                <a:latin typeface="Arial" panose="020B0604020202020204" pitchFamily="34" charset="0"/>
+                <a:cs typeface="Arial" panose="020B0604020202020204" pitchFamily="34" charset="0"/>
+              </a:rPr>
+              <a:t> </a:t>
+            </a:r>
+            <a:r>
+              <a:rPr lang="en-US" sz="1200" dirty="0" err="1">
+                <a:latin typeface="Arial" panose="020B0604020202020204" pitchFamily="34" charset="0"/>
+                <a:cs typeface="Arial" panose="020B0604020202020204" pitchFamily="34" charset="0"/>
+              </a:rPr>
+              <a:t>paralelo</a:t>
+            </a:r>
+            <a:r>
+              <a:rPr lang="en-US" sz="1200" dirty="0">
+                <a:latin typeface="Arial" panose="020B0604020202020204" pitchFamily="34" charset="0"/>
+                <a:cs typeface="Arial" panose="020B0604020202020204" pitchFamily="34" charset="0"/>
+              </a:rPr>
+              <a:t>. Para </a:t>
+            </a:r>
+            <a:r>
+              <a:rPr lang="en-US" sz="1200" dirty="0" err="1">
+                <a:latin typeface="Arial" panose="020B0604020202020204" pitchFamily="34" charset="0"/>
+                <a:cs typeface="Arial" panose="020B0604020202020204" pitchFamily="34" charset="0"/>
+              </a:rPr>
+              <a:t>ello</a:t>
+            </a:r>
+            <a:r>
+              <a:rPr lang="en-US" sz="1200" dirty="0">
+                <a:latin typeface="Arial" panose="020B0604020202020204" pitchFamily="34" charset="0"/>
+                <a:cs typeface="Arial" panose="020B0604020202020204" pitchFamily="34" charset="0"/>
+              </a:rPr>
+              <a:t> </a:t>
+            </a:r>
+            <a:r>
+              <a:rPr lang="en-US" sz="1200" dirty="0" err="1">
+                <a:latin typeface="Arial" panose="020B0604020202020204" pitchFamily="34" charset="0"/>
+                <a:cs typeface="Arial" panose="020B0604020202020204" pitchFamily="34" charset="0"/>
+              </a:rPr>
+              <a:t>hemos</a:t>
+            </a:r>
+            <a:r>
+              <a:rPr lang="en-US" sz="1200" dirty="0">
+                <a:latin typeface="Arial" panose="020B0604020202020204" pitchFamily="34" charset="0"/>
+                <a:cs typeface="Arial" panose="020B0604020202020204" pitchFamily="34" charset="0"/>
+              </a:rPr>
+              <a:t> </a:t>
+            </a:r>
+            <a:r>
+              <a:rPr lang="en-US" sz="1200" dirty="0" err="1">
+                <a:latin typeface="Arial" panose="020B0604020202020204" pitchFamily="34" charset="0"/>
+                <a:cs typeface="Arial" panose="020B0604020202020204" pitchFamily="34" charset="0"/>
+              </a:rPr>
+              <a:t>simulado</a:t>
+            </a:r>
+            <a:r>
+              <a:rPr lang="en-US" sz="1200" dirty="0">
+                <a:latin typeface="Arial" panose="020B0604020202020204" pitchFamily="34" charset="0"/>
+                <a:cs typeface="Arial" panose="020B0604020202020204" pitchFamily="34" charset="0"/>
+              </a:rPr>
+              <a:t> </a:t>
+            </a:r>
+            <a:r>
+              <a:rPr lang="en-US" sz="1200" dirty="0" err="1">
+                <a:latin typeface="Arial" panose="020B0604020202020204" pitchFamily="34" charset="0"/>
+                <a:cs typeface="Arial" panose="020B0604020202020204" pitchFamily="34" charset="0"/>
+              </a:rPr>
+              <a:t>el</a:t>
+            </a:r>
+            <a:r>
+              <a:rPr lang="en-US" sz="1200" dirty="0">
+                <a:latin typeface="Arial" panose="020B0604020202020204" pitchFamily="34" charset="0"/>
+                <a:cs typeface="Arial" panose="020B0604020202020204" pitchFamily="34" charset="0"/>
+              </a:rPr>
+              <a:t> </a:t>
+            </a:r>
+            <a:r>
+              <a:rPr lang="en-US" sz="1200" dirty="0" err="1">
+                <a:latin typeface="Arial" panose="020B0604020202020204" pitchFamily="34" charset="0"/>
+                <a:cs typeface="Arial" panose="020B0604020202020204" pitchFamily="34" charset="0"/>
+              </a:rPr>
+              <a:t>comportamiento</a:t>
+            </a:r>
+            <a:r>
+              <a:rPr lang="en-US" sz="1200" dirty="0">
+                <a:latin typeface="Arial" panose="020B0604020202020204" pitchFamily="34" charset="0"/>
+                <a:cs typeface="Arial" panose="020B0604020202020204" pitchFamily="34" charset="0"/>
+              </a:rPr>
+              <a:t> del gap </a:t>
+            </a:r>
+            <a:r>
+              <a:rPr lang="en-US" sz="1200" dirty="0" err="1">
+                <a:latin typeface="Arial" panose="020B0604020202020204" pitchFamily="34" charset="0"/>
+                <a:cs typeface="Arial" panose="020B0604020202020204" pitchFamily="34" charset="0"/>
+              </a:rPr>
+              <a:t>frente</a:t>
+            </a:r>
+            <a:r>
+              <a:rPr lang="en-US" sz="1200" dirty="0">
+                <a:latin typeface="Arial" panose="020B0604020202020204" pitchFamily="34" charset="0"/>
+                <a:cs typeface="Arial" panose="020B0604020202020204" pitchFamily="34" charset="0"/>
+              </a:rPr>
+              <a:t> a K,   </a:t>
+            </a:r>
           </a:p>
           <a:p>
             <a:pPr algn="just"/>
-            <a:endParaRPr lang="en-US" sz="1200" dirty="0">
-              <a:latin typeface="Arial" panose="020B0604020202020204" pitchFamily="34" charset="0"/>
-              <a:cs typeface="Arial" panose="020B0604020202020204" pitchFamily="34" charset="0"/>
-            </a:endParaRPr>
-          </a:p>
-          <a:p>
-            <a:pPr algn="just"/>
-            <a:endParaRPr lang="en-US" sz="1200" dirty="0">
-              <a:latin typeface="Arial" panose="020B0604020202020204" pitchFamily="34" charset="0"/>
-              <a:cs typeface="Arial" panose="020B0604020202020204" pitchFamily="34" charset="0"/>
-            </a:endParaRPr>
-          </a:p>
-          <a:p>
-            <a:pPr algn="just"/>
-            <a:endParaRPr lang="en-US" sz="1200" dirty="0">
-              <a:latin typeface="Arial" panose="020B0604020202020204" pitchFamily="34" charset="0"/>
-              <a:cs typeface="Arial" panose="020B0604020202020204" pitchFamily="34" charset="0"/>
-            </a:endParaRPr>
-          </a:p>
-          <a:p>
-            <a:pPr algn="just"/>
+            <a:br>
+              <a:rPr lang="en-US" sz="1200" dirty="0">
+                <a:latin typeface="Arial" panose="020B0604020202020204" pitchFamily="34" charset="0"/>
+                <a:cs typeface="Arial" panose="020B0604020202020204" pitchFamily="34" charset="0"/>
+              </a:rPr>
+            </a:br>
             <a:endParaRPr lang="en-US" sz="1200" dirty="0">
               <a:latin typeface="Arial" panose="020B0604020202020204" pitchFamily="34" charset="0"/>
               <a:cs typeface="Arial" panose="020B0604020202020204" pitchFamily="34" charset="0"/>
@@ -15657,12 +16348,66 @@
           </p:sp>
         </mc:Fallback>
       </mc:AlternateContent>
+      <p:sp>
+        <p:nvSpPr>
+          <p:cNvPr id="6" name="Signo de multiplicación 5">
+            <a:extLst>
+              <a:ext uri="{FF2B5EF4-FFF2-40B4-BE49-F238E27FC236}">
+                <a16:creationId xmlns:a16="http://schemas.microsoft.com/office/drawing/2014/main" id="{AC04EABA-F18D-4C07-9BC4-3EA07283F10D}"/>
+              </a:ext>
+            </a:extLst>
+          </p:cNvPr>
+          <p:cNvSpPr/>
+          <p:nvPr/>
+        </p:nvSpPr>
+        <p:spPr>
+          <a:xfrm>
+            <a:off x="7833179" y="2169209"/>
+            <a:ext cx="2956921" cy="1685937"/>
+          </a:xfrm>
+          <a:prstGeom prst="mathMultiply">
+            <a:avLst/>
+          </a:prstGeom>
+          <a:solidFill>
+            <a:schemeClr val="accent2"/>
+          </a:solidFill>
+          <a:ln>
+            <a:solidFill>
+              <a:srgbClr val="C00000"/>
+            </a:solidFill>
+          </a:ln>
+        </p:spPr>
+        <p:style>
+          <a:lnRef idx="2">
+            <a:schemeClr val="accent1">
+              <a:shade val="50000"/>
+            </a:schemeClr>
+          </a:lnRef>
+          <a:fillRef idx="1">
+            <a:schemeClr val="accent1"/>
+          </a:fillRef>
+          <a:effectRef idx="0">
+            <a:schemeClr val="accent1"/>
+          </a:effectRef>
+          <a:fontRef idx="minor">
+            <a:schemeClr val="lt1"/>
+          </a:fontRef>
+        </p:style>
+        <p:txBody>
+          <a:bodyPr rtlCol="0" anchor="ctr"/>
+          <a:lstStyle/>
+          <a:p>
+            <a:pPr algn="ctr"/>
+            <a:endParaRPr lang="es-ES"/>
+          </a:p>
+        </p:txBody>
+      </p:sp>
       <p:pic>
         <p:nvPicPr>
-          <p:cNvPr id="7" name="Imagen 6">
-            <a:extLst>
-              <a:ext uri="{FF2B5EF4-FFF2-40B4-BE49-F238E27FC236}">
-                <a16:creationId xmlns:a16="http://schemas.microsoft.com/office/drawing/2014/main" id="{3A7370DC-3FF3-4BF9-8946-25BB179D6F9B}"/>
+          <p:cNvPr id="11" name="Imagen 10">
+            <a:extLst>
+              <a:ext uri="{FF2B5EF4-FFF2-40B4-BE49-F238E27FC236}">
+                <a16:creationId xmlns:a16="http://schemas.microsoft.com/office/drawing/2014/main" id="{53C9F671-3181-47B6-A699-930421C6120D}"/>
               </a:ext>
             </a:extLst>
           </p:cNvPr>
@@ -15679,8 +16424,8 @@
         </p:blipFill>
         <p:spPr>
           <a:xfrm>
-            <a:off x="830535" y="1438667"/>
-            <a:ext cx="5044369" cy="2802427"/>
+            <a:off x="806524" y="1393751"/>
+            <a:ext cx="5206453" cy="2898628"/>
           </a:xfrm>
           <a:prstGeom prst="rect">
             <a:avLst/>

--- a/LabBook_20_Nadia.pptx
+++ b/LabBook_20_Nadia.pptx
@@ -820,7 +820,7 @@
           <a:p>
             <a:fld id="{8438F8DC-35B0-48E6-A86E-42F1F08DD00F}" type="datetimeFigureOut">
               <a:rPr lang="es-ES" smtClean="0"/>
-              <a:t>11/03/2026</a:t>
+              <a:t>12/03/2026</a:t>
             </a:fld>
             <a:endParaRPr lang="es-ES"/>
           </a:p>
@@ -997,7 +997,7 @@
           <a:p>
             <a:fld id="{FACBDC12-F39B-4B97-8F4D-6734F9D366FF}" type="datetimeFigureOut">
               <a:rPr lang="es-ES" smtClean="0"/>
-              <a:t>11/03/2026</a:t>
+              <a:t>12/03/2026</a:t>
             </a:fld>
             <a:endParaRPr lang="es-ES"/>
           </a:p>
@@ -4437,7 +4437,7 @@
         </p:nvSpPr>
         <p:spPr>
           <a:xfrm>
-            <a:off x="609441" y="4819471"/>
+            <a:off x="605812" y="4787992"/>
             <a:ext cx="11199971" cy="1384995"/>
           </a:xfrm>
           <a:prstGeom prst="rect">
@@ -4478,10 +4478,324 @@
           </a:p>
           <a:p>
             <a:pPr algn="just"/>
-            <a:endParaRPr lang="en-US" sz="1200" dirty="0">
-              <a:latin typeface="Arial" panose="020B0604020202020204" pitchFamily="34" charset="0"/>
-              <a:cs typeface="Arial" panose="020B0604020202020204" pitchFamily="34" charset="0"/>
-            </a:endParaRPr>
+            <a:r>
+              <a:rPr lang="en-US" sz="1200" dirty="0" err="1">
+                <a:latin typeface="Arial" panose="020B0604020202020204" pitchFamily="34" charset="0"/>
+                <a:cs typeface="Arial" panose="020B0604020202020204" pitchFamily="34" charset="0"/>
+              </a:rPr>
+              <a:t>En</a:t>
+            </a:r>
+            <a:r>
+              <a:rPr lang="en-US" sz="1200" dirty="0">
+                <a:latin typeface="Arial" panose="020B0604020202020204" pitchFamily="34" charset="0"/>
+                <a:cs typeface="Arial" panose="020B0604020202020204" pitchFamily="34" charset="0"/>
+              </a:rPr>
+              <a:t> </a:t>
+            </a:r>
+            <a:r>
+              <a:rPr lang="en-US" sz="1200" dirty="0" err="1">
+                <a:latin typeface="Arial" panose="020B0604020202020204" pitchFamily="34" charset="0"/>
+                <a:cs typeface="Arial" panose="020B0604020202020204" pitchFamily="34" charset="0"/>
+              </a:rPr>
+              <a:t>este</a:t>
+            </a:r>
+            <a:r>
+              <a:rPr lang="en-US" sz="1200" dirty="0">
+                <a:latin typeface="Arial" panose="020B0604020202020204" pitchFamily="34" charset="0"/>
+                <a:cs typeface="Arial" panose="020B0604020202020204" pitchFamily="34" charset="0"/>
+              </a:rPr>
+              <a:t> primer paso de </a:t>
+            </a:r>
+            <a:r>
+              <a:rPr lang="en-US" sz="1200" dirty="0" err="1">
+                <a:latin typeface="Arial" panose="020B0604020202020204" pitchFamily="34" charset="0"/>
+                <a:cs typeface="Arial" panose="020B0604020202020204" pitchFamily="34" charset="0"/>
+              </a:rPr>
+              <a:t>optimización</a:t>
+            </a:r>
+            <a:r>
+              <a:rPr lang="en-US" sz="1200" dirty="0">
+                <a:latin typeface="Arial" panose="020B0604020202020204" pitchFamily="34" charset="0"/>
+                <a:cs typeface="Arial" panose="020B0604020202020204" pitchFamily="34" charset="0"/>
+              </a:rPr>
+              <a:t> </a:t>
+            </a:r>
+            <a:r>
+              <a:rPr lang="en-US" sz="1200" dirty="0" err="1">
+                <a:latin typeface="Arial" panose="020B0604020202020204" pitchFamily="34" charset="0"/>
+                <a:cs typeface="Arial" panose="020B0604020202020204" pitchFamily="34" charset="0"/>
+              </a:rPr>
+              <a:t>hemos</a:t>
+            </a:r>
+            <a:r>
+              <a:rPr lang="en-US" sz="1200" dirty="0">
+                <a:latin typeface="Arial" panose="020B0604020202020204" pitchFamily="34" charset="0"/>
+                <a:cs typeface="Arial" panose="020B0604020202020204" pitchFamily="34" charset="0"/>
+              </a:rPr>
+              <a:t> </a:t>
+            </a:r>
+            <a:r>
+              <a:rPr lang="en-US" sz="1200" dirty="0" err="1">
+                <a:latin typeface="Arial" panose="020B0604020202020204" pitchFamily="34" charset="0"/>
+                <a:cs typeface="Arial" panose="020B0604020202020204" pitchFamily="34" charset="0"/>
+              </a:rPr>
+              <a:t>añadido</a:t>
+            </a:r>
+            <a:r>
+              <a:rPr lang="en-US" sz="1200" dirty="0">
+                <a:latin typeface="Arial" panose="020B0604020202020204" pitchFamily="34" charset="0"/>
+                <a:cs typeface="Arial" panose="020B0604020202020204" pitchFamily="34" charset="0"/>
+              </a:rPr>
+              <a:t> un </a:t>
+            </a:r>
+            <a:r>
+              <a:rPr lang="en-US" sz="1200" dirty="0" err="1">
+                <a:latin typeface="Arial" panose="020B0604020202020204" pitchFamily="34" charset="0"/>
+                <a:cs typeface="Arial" panose="020B0604020202020204" pitchFamily="34" charset="0"/>
+              </a:rPr>
+              <a:t>incremento</a:t>
+            </a:r>
+            <a:r>
+              <a:rPr lang="en-US" sz="1200" dirty="0">
+                <a:latin typeface="Arial" panose="020B0604020202020204" pitchFamily="34" charset="0"/>
+                <a:cs typeface="Arial" panose="020B0604020202020204" pitchFamily="34" charset="0"/>
+              </a:rPr>
+              <a:t> </a:t>
+            </a:r>
+            <a:r>
+              <a:rPr lang="en-US" sz="1200" dirty="0" err="1">
+                <a:latin typeface="Arial" panose="020B0604020202020204" pitchFamily="34" charset="0"/>
+                <a:cs typeface="Arial" panose="020B0604020202020204" pitchFamily="34" charset="0"/>
+              </a:rPr>
+              <a:t>en</a:t>
+            </a:r>
+            <a:r>
+              <a:rPr lang="en-US" sz="1200" dirty="0">
+                <a:latin typeface="Arial" panose="020B0604020202020204" pitchFamily="34" charset="0"/>
+                <a:cs typeface="Arial" panose="020B0604020202020204" pitchFamily="34" charset="0"/>
+              </a:rPr>
+              <a:t> la </a:t>
+            </a:r>
+            <a:r>
+              <a:rPr lang="en-US" sz="1200" dirty="0" err="1">
+                <a:latin typeface="Arial" panose="020B0604020202020204" pitchFamily="34" charset="0"/>
+                <a:cs typeface="Arial" panose="020B0604020202020204" pitchFamily="34" charset="0"/>
+              </a:rPr>
+              <a:t>longitud</a:t>
+            </a:r>
+            <a:r>
+              <a:rPr lang="en-US" sz="1200" dirty="0">
+                <a:latin typeface="Arial" panose="020B0604020202020204" pitchFamily="34" charset="0"/>
+                <a:cs typeface="Arial" panose="020B0604020202020204" pitchFamily="34" charset="0"/>
+              </a:rPr>
+              <a:t> del MMI y un </a:t>
+            </a:r>
+            <a:r>
+              <a:rPr lang="en-US" sz="1200" dirty="0" err="1">
+                <a:latin typeface="Arial" panose="020B0604020202020204" pitchFamily="34" charset="0"/>
+                <a:cs typeface="Arial" panose="020B0604020202020204" pitchFamily="34" charset="0"/>
+              </a:rPr>
+              <a:t>incremento</a:t>
+            </a:r>
+            <a:r>
+              <a:rPr lang="en-US" sz="1200" dirty="0">
+                <a:latin typeface="Arial" panose="020B0604020202020204" pitchFamily="34" charset="0"/>
+                <a:cs typeface="Arial" panose="020B0604020202020204" pitchFamily="34" charset="0"/>
+              </a:rPr>
+              <a:t> </a:t>
+            </a:r>
+            <a:r>
+              <a:rPr lang="en-US" sz="1200" dirty="0" err="1">
+                <a:latin typeface="Arial" panose="020B0604020202020204" pitchFamily="34" charset="0"/>
+                <a:cs typeface="Arial" panose="020B0604020202020204" pitchFamily="34" charset="0"/>
+              </a:rPr>
+              <a:t>en</a:t>
+            </a:r>
+            <a:r>
+              <a:rPr lang="en-US" sz="1200" dirty="0">
+                <a:latin typeface="Arial" panose="020B0604020202020204" pitchFamily="34" charset="0"/>
+                <a:cs typeface="Arial" panose="020B0604020202020204" pitchFamily="34" charset="0"/>
+              </a:rPr>
+              <a:t> las </a:t>
+            </a:r>
+            <a:r>
+              <a:rPr lang="en-US" sz="1200" dirty="0" err="1">
+                <a:latin typeface="Arial" panose="020B0604020202020204" pitchFamily="34" charset="0"/>
+                <a:cs typeface="Arial" panose="020B0604020202020204" pitchFamily="34" charset="0"/>
+              </a:rPr>
+              <a:t>posiciones</a:t>
+            </a:r>
+            <a:r>
+              <a:rPr lang="en-US" sz="1200" dirty="0">
+                <a:latin typeface="Arial" panose="020B0604020202020204" pitchFamily="34" charset="0"/>
+                <a:cs typeface="Arial" panose="020B0604020202020204" pitchFamily="34" charset="0"/>
+              </a:rPr>
+              <a:t> de los </a:t>
+            </a:r>
+            <a:r>
+              <a:rPr lang="en-US" sz="1200" dirty="0" err="1">
+                <a:latin typeface="Arial" panose="020B0604020202020204" pitchFamily="34" charset="0"/>
+                <a:cs typeface="Arial" panose="020B0604020202020204" pitchFamily="34" charset="0"/>
+              </a:rPr>
+              <a:t>puertos</a:t>
+            </a:r>
+            <a:r>
+              <a:rPr lang="en-US" sz="1200" dirty="0">
+                <a:latin typeface="Arial" panose="020B0604020202020204" pitchFamily="34" charset="0"/>
+                <a:cs typeface="Arial" panose="020B0604020202020204" pitchFamily="34" charset="0"/>
+              </a:rPr>
+              <a:t> de entrada y </a:t>
+            </a:r>
+            <a:r>
+              <a:rPr lang="en-US" sz="1200" dirty="0" err="1">
+                <a:latin typeface="Arial" panose="020B0604020202020204" pitchFamily="34" charset="0"/>
+                <a:cs typeface="Arial" panose="020B0604020202020204" pitchFamily="34" charset="0"/>
+              </a:rPr>
+              <a:t>salida</a:t>
+            </a:r>
+            <a:r>
+              <a:rPr lang="en-US" sz="1200" dirty="0">
+                <a:latin typeface="Arial" panose="020B0604020202020204" pitchFamily="34" charset="0"/>
+                <a:cs typeface="Arial" panose="020B0604020202020204" pitchFamily="34" charset="0"/>
+              </a:rPr>
+              <a:t> a lo largo del </a:t>
+            </a:r>
+            <a:r>
+              <a:rPr lang="en-US" sz="1200" dirty="0" err="1">
+                <a:latin typeface="Arial" panose="020B0604020202020204" pitchFamily="34" charset="0"/>
+                <a:cs typeface="Arial" panose="020B0604020202020204" pitchFamily="34" charset="0"/>
+              </a:rPr>
+              <a:t>eje</a:t>
+            </a:r>
+            <a:r>
+              <a:rPr lang="en-US" sz="1200" dirty="0">
+                <a:latin typeface="Arial" panose="020B0604020202020204" pitchFamily="34" charset="0"/>
+                <a:cs typeface="Arial" panose="020B0604020202020204" pitchFamily="34" charset="0"/>
+              </a:rPr>
+              <a:t> y, </a:t>
+            </a:r>
+            <a:r>
+              <a:rPr lang="en-US" sz="1200" dirty="0" err="1">
+                <a:latin typeface="Arial" panose="020B0604020202020204" pitchFamily="34" charset="0"/>
+                <a:cs typeface="Arial" panose="020B0604020202020204" pitchFamily="34" charset="0"/>
+              </a:rPr>
+              <a:t>simulando</a:t>
+            </a:r>
+            <a:r>
+              <a:rPr lang="en-US" sz="1200" dirty="0">
+                <a:latin typeface="Arial" panose="020B0604020202020204" pitchFamily="34" charset="0"/>
+                <a:cs typeface="Arial" panose="020B0604020202020204" pitchFamily="34" charset="0"/>
+              </a:rPr>
+              <a:t> para </a:t>
+            </a:r>
+            <a:r>
+              <a:rPr lang="en-US" sz="1200" dirty="0" err="1">
+                <a:latin typeface="Arial" panose="020B0604020202020204" pitchFamily="34" charset="0"/>
+                <a:cs typeface="Arial" panose="020B0604020202020204" pitchFamily="34" charset="0"/>
+              </a:rPr>
+              <a:t>alcanzar</a:t>
+            </a:r>
+            <a:r>
+              <a:rPr lang="en-US" sz="1200" dirty="0">
+                <a:latin typeface="Arial" panose="020B0604020202020204" pitchFamily="34" charset="0"/>
+                <a:cs typeface="Arial" panose="020B0604020202020204" pitchFamily="34" charset="0"/>
+              </a:rPr>
+              <a:t> los </a:t>
+            </a:r>
+            <a:r>
+              <a:rPr lang="en-US" sz="1200" dirty="0" err="1">
+                <a:latin typeface="Arial" panose="020B0604020202020204" pitchFamily="34" charset="0"/>
+                <a:cs typeface="Arial" panose="020B0604020202020204" pitchFamily="34" charset="0"/>
+              </a:rPr>
+              <a:t>valores</a:t>
+            </a:r>
+            <a:r>
+              <a:rPr lang="en-US" sz="1200" dirty="0">
+                <a:latin typeface="Arial" panose="020B0604020202020204" pitchFamily="34" charset="0"/>
+                <a:cs typeface="Arial" panose="020B0604020202020204" pitchFamily="34" charset="0"/>
+              </a:rPr>
+              <a:t> </a:t>
+            </a:r>
+            <a:r>
+              <a:rPr lang="en-US" sz="1200" dirty="0" err="1">
+                <a:latin typeface="Arial" panose="020B0604020202020204" pitchFamily="34" charset="0"/>
+                <a:cs typeface="Arial" panose="020B0604020202020204" pitchFamily="34" charset="0"/>
+              </a:rPr>
+              <a:t>optimos</a:t>
+            </a:r>
+            <a:r>
+              <a:rPr lang="en-US" sz="1200" dirty="0">
+                <a:latin typeface="Arial" panose="020B0604020202020204" pitchFamily="34" charset="0"/>
+                <a:cs typeface="Arial" panose="020B0604020202020204" pitchFamily="34" charset="0"/>
+              </a:rPr>
+              <a:t> </a:t>
+            </a:r>
+            <a:r>
+              <a:rPr lang="en-US" sz="1200" dirty="0" err="1">
+                <a:latin typeface="Arial" panose="020B0604020202020204" pitchFamily="34" charset="0"/>
+                <a:cs typeface="Arial" panose="020B0604020202020204" pitchFamily="34" charset="0"/>
+              </a:rPr>
+              <a:t>de`pérdidas</a:t>
+            </a:r>
+            <a:r>
+              <a:rPr lang="en-US" sz="1200" dirty="0">
+                <a:latin typeface="Arial" panose="020B0604020202020204" pitchFamily="34" charset="0"/>
+                <a:cs typeface="Arial" panose="020B0604020202020204" pitchFamily="34" charset="0"/>
+              </a:rPr>
+              <a:t> y ratio </a:t>
+            </a:r>
+            <a:r>
+              <a:rPr lang="en-US" sz="1200" dirty="0" err="1">
+                <a:latin typeface="Arial" panose="020B0604020202020204" pitchFamily="34" charset="0"/>
+                <a:cs typeface="Arial" panose="020B0604020202020204" pitchFamily="34" charset="0"/>
+              </a:rPr>
+              <a:t>llegamos</a:t>
+            </a:r>
+            <a:r>
+              <a:rPr lang="en-US" sz="1200" dirty="0">
+                <a:latin typeface="Arial" panose="020B0604020202020204" pitchFamily="34" charset="0"/>
+                <a:cs typeface="Arial" panose="020B0604020202020204" pitchFamily="34" charset="0"/>
+              </a:rPr>
+              <a:t> a un </a:t>
+            </a:r>
+            <a:r>
+              <a:rPr lang="en-US" sz="1200" dirty="0" err="1">
+                <a:latin typeface="Arial" panose="020B0604020202020204" pitchFamily="34" charset="0"/>
+                <a:cs typeface="Arial" panose="020B0604020202020204" pitchFamily="34" charset="0"/>
+              </a:rPr>
+              <a:t>diseño</a:t>
+            </a:r>
+            <a:r>
+              <a:rPr lang="en-US" sz="1200" dirty="0">
+                <a:latin typeface="Arial" panose="020B0604020202020204" pitchFamily="34" charset="0"/>
+                <a:cs typeface="Arial" panose="020B0604020202020204" pitchFamily="34" charset="0"/>
+              </a:rPr>
+              <a:t> de: </a:t>
+            </a:r>
+          </a:p>
+          <a:p>
+            <a:pPr algn="just"/>
+            <a:r>
+              <a:rPr lang="en-US" sz="1200" dirty="0">
+                <a:latin typeface="Arial" panose="020B0604020202020204" pitchFamily="34" charset="0"/>
+                <a:cs typeface="Arial" panose="020B0604020202020204" pitchFamily="34" charset="0"/>
+              </a:rPr>
+              <a:t>L_MMI= 34.218 um y IN/</a:t>
+            </a:r>
+            <a:r>
+              <a:rPr lang="en-US" sz="1200" dirty="0" err="1">
+                <a:latin typeface="Arial" panose="020B0604020202020204" pitchFamily="34" charset="0"/>
+                <a:cs typeface="Arial" panose="020B0604020202020204" pitchFamily="34" charset="0"/>
+              </a:rPr>
+              <a:t>OUT_positions</a:t>
+            </a:r>
+            <a:r>
+              <a:rPr lang="en-US" sz="1200" dirty="0">
+                <a:latin typeface="Arial" panose="020B0604020202020204" pitchFamily="34" charset="0"/>
+                <a:cs typeface="Arial" panose="020B0604020202020204" pitchFamily="34" charset="0"/>
+              </a:rPr>
+              <a:t>= ( -1/6 -0.05, 1/6 + 0.05) </a:t>
+            </a:r>
           </a:p>
           <a:p>
             <a:pPr algn="just"/>
@@ -4492,20 +4806,123 @@
           </a:p>
           <a:p>
             <a:pPr algn="just"/>
-            <a:endParaRPr lang="en-US" sz="1200" dirty="0">
-              <a:latin typeface="Arial" panose="020B0604020202020204" pitchFamily="34" charset="0"/>
-              <a:cs typeface="Arial" panose="020B0604020202020204" pitchFamily="34" charset="0"/>
-            </a:endParaRPr>
-          </a:p>
-          <a:p>
-            <a:pPr algn="just"/>
-            <a:endParaRPr lang="en-US" sz="1200" dirty="0">
-              <a:latin typeface="Arial" panose="020B0604020202020204" pitchFamily="34" charset="0"/>
-              <a:cs typeface="Arial" panose="020B0604020202020204" pitchFamily="34" charset="0"/>
-            </a:endParaRPr>
-          </a:p>
-          <a:p>
-            <a:pPr algn="just"/>
+            <a:r>
+              <a:rPr lang="en-US" sz="1200" dirty="0">
+                <a:latin typeface="Arial" panose="020B0604020202020204" pitchFamily="34" charset="0"/>
+                <a:cs typeface="Arial" panose="020B0604020202020204" pitchFamily="34" charset="0"/>
+              </a:rPr>
+              <a:t>Con </a:t>
+            </a:r>
+            <a:r>
+              <a:rPr lang="en-US" sz="1200" dirty="0" err="1">
+                <a:latin typeface="Arial" panose="020B0604020202020204" pitchFamily="34" charset="0"/>
+                <a:cs typeface="Arial" panose="020B0604020202020204" pitchFamily="34" charset="0"/>
+              </a:rPr>
+              <a:t>esto</a:t>
+            </a:r>
+            <a:r>
+              <a:rPr lang="en-US" sz="1200" dirty="0">
+                <a:latin typeface="Arial" panose="020B0604020202020204" pitchFamily="34" charset="0"/>
+                <a:cs typeface="Arial" panose="020B0604020202020204" pitchFamily="34" charset="0"/>
+              </a:rPr>
+              <a:t> </a:t>
+            </a:r>
+            <a:r>
+              <a:rPr lang="en-US" sz="1200" dirty="0" err="1">
+                <a:latin typeface="Arial" panose="020B0604020202020204" pitchFamily="34" charset="0"/>
+                <a:cs typeface="Arial" panose="020B0604020202020204" pitchFamily="34" charset="0"/>
+              </a:rPr>
+              <a:t>hemos</a:t>
+            </a:r>
+            <a:r>
+              <a:rPr lang="en-US" sz="1200" dirty="0">
+                <a:latin typeface="Arial" panose="020B0604020202020204" pitchFamily="34" charset="0"/>
+                <a:cs typeface="Arial" panose="020B0604020202020204" pitchFamily="34" charset="0"/>
+              </a:rPr>
+              <a:t> </a:t>
+            </a:r>
+            <a:r>
+              <a:rPr lang="en-US" sz="1200" dirty="0" err="1">
+                <a:latin typeface="Arial" panose="020B0604020202020204" pitchFamily="34" charset="0"/>
+                <a:cs typeface="Arial" panose="020B0604020202020204" pitchFamily="34" charset="0"/>
+              </a:rPr>
+              <a:t>conseguido</a:t>
+            </a:r>
+            <a:r>
+              <a:rPr lang="en-US" sz="1200" dirty="0">
+                <a:latin typeface="Arial" panose="020B0604020202020204" pitchFamily="34" charset="0"/>
+                <a:cs typeface="Arial" panose="020B0604020202020204" pitchFamily="34" charset="0"/>
+              </a:rPr>
+              <a:t> </a:t>
+            </a:r>
+            <a:r>
+              <a:rPr lang="en-US" sz="1200" dirty="0" err="1">
+                <a:latin typeface="Arial" panose="020B0604020202020204" pitchFamily="34" charset="0"/>
+                <a:cs typeface="Arial" panose="020B0604020202020204" pitchFamily="34" charset="0"/>
+              </a:rPr>
+              <a:t>disminuir</a:t>
+            </a:r>
+            <a:r>
+              <a:rPr lang="en-US" sz="1200" dirty="0">
+                <a:latin typeface="Arial" panose="020B0604020202020204" pitchFamily="34" charset="0"/>
+                <a:cs typeface="Arial" panose="020B0604020202020204" pitchFamily="34" charset="0"/>
+              </a:rPr>
+              <a:t> 0.0417 dB de </a:t>
+            </a:r>
+            <a:r>
+              <a:rPr lang="en-US" sz="1200" dirty="0" err="1">
+                <a:latin typeface="Arial" panose="020B0604020202020204" pitchFamily="34" charset="0"/>
+                <a:cs typeface="Arial" panose="020B0604020202020204" pitchFamily="34" charset="0"/>
+              </a:rPr>
+              <a:t>pérdidas</a:t>
+            </a:r>
+            <a:r>
+              <a:rPr lang="en-US" sz="1200" dirty="0">
+                <a:latin typeface="Arial" panose="020B0604020202020204" pitchFamily="34" charset="0"/>
+                <a:cs typeface="Arial" panose="020B0604020202020204" pitchFamily="34" charset="0"/>
+              </a:rPr>
+              <a:t> y una </a:t>
+            </a:r>
+            <a:r>
+              <a:rPr lang="en-US" sz="1200" dirty="0" err="1">
+                <a:latin typeface="Arial" panose="020B0604020202020204" pitchFamily="34" charset="0"/>
+                <a:cs typeface="Arial" panose="020B0604020202020204" pitchFamily="34" charset="0"/>
+              </a:rPr>
+              <a:t>relación</a:t>
+            </a:r>
+            <a:r>
+              <a:rPr lang="en-US" sz="1200" dirty="0">
+                <a:latin typeface="Arial" panose="020B0604020202020204" pitchFamily="34" charset="0"/>
+                <a:cs typeface="Arial" panose="020B0604020202020204" pitchFamily="34" charset="0"/>
+              </a:rPr>
+              <a:t> de </a:t>
+            </a:r>
+            <a:r>
+              <a:rPr lang="en-US" sz="1200" dirty="0" err="1">
+                <a:latin typeface="Arial" panose="020B0604020202020204" pitchFamily="34" charset="0"/>
+                <a:cs typeface="Arial" panose="020B0604020202020204" pitchFamily="34" charset="0"/>
+              </a:rPr>
+              <a:t>acoplo</a:t>
+            </a:r>
+            <a:r>
+              <a:rPr lang="en-US" sz="1200" dirty="0">
+                <a:latin typeface="Arial" panose="020B0604020202020204" pitchFamily="34" charset="0"/>
+                <a:cs typeface="Arial" panose="020B0604020202020204" pitchFamily="34" charset="0"/>
+              </a:rPr>
+              <a:t> de </a:t>
+            </a:r>
+            <a:r>
+              <a:rPr lang="es-ES" sz="1200" b="0" i="0" dirty="0">
+                <a:solidFill>
+                  <a:schemeClr val="dk1"/>
+                </a:solidFill>
+                <a:effectLst/>
+                <a:latin typeface="+mn-lt"/>
+                <a:ea typeface="+mn-ea"/>
+                <a:cs typeface="+mn-cs"/>
+              </a:rPr>
+              <a:t>0.5097/'0.4903.</a:t>
+            </a:r>
             <a:endParaRPr lang="en-US" sz="1200" dirty="0">
               <a:latin typeface="Arial" panose="020B0604020202020204" pitchFamily="34" charset="0"/>
               <a:cs typeface="Arial" panose="020B0604020202020204" pitchFamily="34" charset="0"/>
@@ -4640,7 +5057,7 @@
           <p:nvPr>
             <p:extLst>
               <p:ext uri="{D42A27DB-BD31-4B8C-83A1-F6EECF244321}">
-                <p14:modId xmlns:p14="http://schemas.microsoft.com/office/powerpoint/2010/main" val="3855458773"/>
+                <p14:modId xmlns:p14="http://schemas.microsoft.com/office/powerpoint/2010/main" val="1974420815"/>
               </p:ext>
             </p:extLst>
           </p:nvPr>
@@ -4867,7 +5284,7 @@
                     <a:p>
                       <a:r>
                         <a:rPr lang="es-ES" dirty="0"/>
-                        <a:t>6.6</a:t>
+                        <a:t>1</a:t>
                       </a:r>
                     </a:p>
                   </a:txBody>
@@ -5208,10 +5625,286 @@
           </a:p>
           <a:p>
             <a:pPr algn="just"/>
-            <a:endParaRPr lang="en-US" sz="1200" dirty="0">
-              <a:latin typeface="Arial" panose="020B0604020202020204" pitchFamily="34" charset="0"/>
-              <a:cs typeface="Arial" panose="020B0604020202020204" pitchFamily="34" charset="0"/>
-            </a:endParaRPr>
+            <a:r>
+              <a:rPr lang="en-US" sz="1200" dirty="0" err="1">
+                <a:latin typeface="Arial" panose="020B0604020202020204" pitchFamily="34" charset="0"/>
+                <a:cs typeface="Arial" panose="020B0604020202020204" pitchFamily="34" charset="0"/>
+              </a:rPr>
+              <a:t>En</a:t>
+            </a:r>
+            <a:r>
+              <a:rPr lang="en-US" sz="1200" dirty="0">
+                <a:latin typeface="Arial" panose="020B0604020202020204" pitchFamily="34" charset="0"/>
+                <a:cs typeface="Arial" panose="020B0604020202020204" pitchFamily="34" charset="0"/>
+              </a:rPr>
+              <a:t> </a:t>
+            </a:r>
+            <a:r>
+              <a:rPr lang="en-US" sz="1200" dirty="0" err="1">
+                <a:latin typeface="Arial" panose="020B0604020202020204" pitchFamily="34" charset="0"/>
+                <a:cs typeface="Arial" panose="020B0604020202020204" pitchFamily="34" charset="0"/>
+              </a:rPr>
+              <a:t>este</a:t>
+            </a:r>
+            <a:r>
+              <a:rPr lang="en-US" sz="1200" dirty="0">
+                <a:latin typeface="Arial" panose="020B0604020202020204" pitchFamily="34" charset="0"/>
+                <a:cs typeface="Arial" panose="020B0604020202020204" pitchFamily="34" charset="0"/>
+              </a:rPr>
+              <a:t> </a:t>
+            </a:r>
+            <a:r>
+              <a:rPr lang="en-US" sz="1200" dirty="0" err="1">
+                <a:latin typeface="Arial" panose="020B0604020202020204" pitchFamily="34" charset="0"/>
+                <a:cs typeface="Arial" panose="020B0604020202020204" pitchFamily="34" charset="0"/>
+              </a:rPr>
+              <a:t>último</a:t>
+            </a:r>
+            <a:r>
+              <a:rPr lang="en-US" sz="1200" dirty="0">
+                <a:latin typeface="Arial" panose="020B0604020202020204" pitchFamily="34" charset="0"/>
+                <a:cs typeface="Arial" panose="020B0604020202020204" pitchFamily="34" charset="0"/>
+              </a:rPr>
+              <a:t> paso de </a:t>
+            </a:r>
+            <a:r>
+              <a:rPr lang="en-US" sz="1200" dirty="0" err="1">
+                <a:latin typeface="Arial" panose="020B0604020202020204" pitchFamily="34" charset="0"/>
+                <a:cs typeface="Arial" panose="020B0604020202020204" pitchFamily="34" charset="0"/>
+              </a:rPr>
+              <a:t>optimización</a:t>
+            </a:r>
+            <a:r>
+              <a:rPr lang="en-US" sz="1200" dirty="0">
+                <a:latin typeface="Arial" panose="020B0604020202020204" pitchFamily="34" charset="0"/>
+                <a:cs typeface="Arial" panose="020B0604020202020204" pitchFamily="34" charset="0"/>
+              </a:rPr>
+              <a:t> </a:t>
+            </a:r>
+            <a:r>
+              <a:rPr lang="en-US" sz="1200" dirty="0" err="1">
+                <a:latin typeface="Arial" panose="020B0604020202020204" pitchFamily="34" charset="0"/>
+                <a:cs typeface="Arial" panose="020B0604020202020204" pitchFamily="34" charset="0"/>
+              </a:rPr>
+              <a:t>hemos</a:t>
+            </a:r>
+            <a:r>
+              <a:rPr lang="en-US" sz="1200" dirty="0">
+                <a:latin typeface="Arial" panose="020B0604020202020204" pitchFamily="34" charset="0"/>
+                <a:cs typeface="Arial" panose="020B0604020202020204" pitchFamily="34" charset="0"/>
+              </a:rPr>
+              <a:t> </a:t>
+            </a:r>
+            <a:r>
+              <a:rPr lang="en-US" sz="1200" dirty="0" err="1">
+                <a:latin typeface="Arial" panose="020B0604020202020204" pitchFamily="34" charset="0"/>
+                <a:cs typeface="Arial" panose="020B0604020202020204" pitchFamily="34" charset="0"/>
+              </a:rPr>
+              <a:t>añadido</a:t>
+            </a:r>
+            <a:r>
+              <a:rPr lang="en-US" sz="1200" dirty="0">
+                <a:latin typeface="Arial" panose="020B0604020202020204" pitchFamily="34" charset="0"/>
+                <a:cs typeface="Arial" panose="020B0604020202020204" pitchFamily="34" charset="0"/>
+              </a:rPr>
+              <a:t> un </a:t>
+            </a:r>
+            <a:r>
+              <a:rPr lang="en-US" sz="1200" dirty="0" err="1">
+                <a:latin typeface="Arial" panose="020B0604020202020204" pitchFamily="34" charset="0"/>
+                <a:cs typeface="Arial" panose="020B0604020202020204" pitchFamily="34" charset="0"/>
+              </a:rPr>
+              <a:t>incremeto</a:t>
+            </a:r>
+            <a:r>
+              <a:rPr lang="en-US" sz="1200" dirty="0">
+                <a:latin typeface="Arial" panose="020B0604020202020204" pitchFamily="34" charset="0"/>
+                <a:cs typeface="Arial" panose="020B0604020202020204" pitchFamily="34" charset="0"/>
+              </a:rPr>
+              <a:t> a la </a:t>
+            </a:r>
+            <a:r>
+              <a:rPr lang="en-US" sz="1200" dirty="0" err="1">
+                <a:latin typeface="Arial" panose="020B0604020202020204" pitchFamily="34" charset="0"/>
+                <a:cs typeface="Arial" panose="020B0604020202020204" pitchFamily="34" charset="0"/>
+              </a:rPr>
+              <a:t>anchura</a:t>
+            </a:r>
+            <a:r>
+              <a:rPr lang="en-US" sz="1200" dirty="0">
+                <a:latin typeface="Arial" panose="020B0604020202020204" pitchFamily="34" charset="0"/>
+                <a:cs typeface="Arial" panose="020B0604020202020204" pitchFamily="34" charset="0"/>
+              </a:rPr>
+              <a:t> de las </a:t>
+            </a:r>
+            <a:r>
+              <a:rPr lang="en-US" sz="1200" dirty="0" err="1">
+                <a:latin typeface="Arial" panose="020B0604020202020204" pitchFamily="34" charset="0"/>
+                <a:cs typeface="Arial" panose="020B0604020202020204" pitchFamily="34" charset="0"/>
+              </a:rPr>
+              <a:t>guías</a:t>
+            </a:r>
+            <a:r>
+              <a:rPr lang="en-US" sz="1200" dirty="0">
+                <a:latin typeface="Arial" panose="020B0604020202020204" pitchFamily="34" charset="0"/>
+                <a:cs typeface="Arial" panose="020B0604020202020204" pitchFamily="34" charset="0"/>
+              </a:rPr>
+              <a:t> de </a:t>
+            </a:r>
+            <a:r>
+              <a:rPr lang="en-US" sz="1200" dirty="0" err="1">
+                <a:latin typeface="Arial" panose="020B0604020202020204" pitchFamily="34" charset="0"/>
+                <a:cs typeface="Arial" panose="020B0604020202020204" pitchFamily="34" charset="0"/>
+              </a:rPr>
+              <a:t>onda</a:t>
+            </a:r>
+            <a:r>
+              <a:rPr lang="en-US" sz="1200" dirty="0">
+                <a:latin typeface="Arial" panose="020B0604020202020204" pitchFamily="34" charset="0"/>
+                <a:cs typeface="Arial" panose="020B0604020202020204" pitchFamily="34" charset="0"/>
+              </a:rPr>
+              <a:t> de entrada y </a:t>
+            </a:r>
+            <a:r>
+              <a:rPr lang="en-US" sz="1200" dirty="0" err="1">
+                <a:latin typeface="Arial" panose="020B0604020202020204" pitchFamily="34" charset="0"/>
+                <a:cs typeface="Arial" panose="020B0604020202020204" pitchFamily="34" charset="0"/>
+              </a:rPr>
+              <a:t>salida</a:t>
+            </a:r>
+            <a:r>
+              <a:rPr lang="en-US" sz="1200" dirty="0">
+                <a:latin typeface="Arial" panose="020B0604020202020204" pitchFamily="34" charset="0"/>
+                <a:cs typeface="Arial" panose="020B0604020202020204" pitchFamily="34" charset="0"/>
+              </a:rPr>
+              <a:t> del MMI. Probando </a:t>
+            </a:r>
+            <a:r>
+              <a:rPr lang="en-US" sz="1200" dirty="0" err="1">
+                <a:latin typeface="Arial" panose="020B0604020202020204" pitchFamily="34" charset="0"/>
+                <a:cs typeface="Arial" panose="020B0604020202020204" pitchFamily="34" charset="0"/>
+              </a:rPr>
+              <a:t>distintos</a:t>
+            </a:r>
+            <a:r>
+              <a:rPr lang="en-US" sz="1200" dirty="0">
+                <a:latin typeface="Arial" panose="020B0604020202020204" pitchFamily="34" charset="0"/>
+                <a:cs typeface="Arial" panose="020B0604020202020204" pitchFamily="34" charset="0"/>
+              </a:rPr>
+              <a:t> </a:t>
+            </a:r>
+            <a:r>
+              <a:rPr lang="en-US" sz="1200" dirty="0" err="1">
+                <a:latin typeface="Arial" panose="020B0604020202020204" pitchFamily="34" charset="0"/>
+                <a:cs typeface="Arial" panose="020B0604020202020204" pitchFamily="34" charset="0"/>
+              </a:rPr>
+              <a:t>valores</a:t>
+            </a:r>
+            <a:r>
+              <a:rPr lang="en-US" sz="1200" dirty="0">
+                <a:latin typeface="Arial" panose="020B0604020202020204" pitchFamily="34" charset="0"/>
+                <a:cs typeface="Arial" panose="020B0604020202020204" pitchFamily="34" charset="0"/>
+              </a:rPr>
+              <a:t> </a:t>
+            </a:r>
+            <a:r>
+              <a:rPr lang="en-US" sz="1200" dirty="0" err="1">
+                <a:latin typeface="Arial" panose="020B0604020202020204" pitchFamily="34" charset="0"/>
+                <a:cs typeface="Arial" panose="020B0604020202020204" pitchFamily="34" charset="0"/>
+              </a:rPr>
+              <a:t>hemos</a:t>
+            </a:r>
+            <a:r>
+              <a:rPr lang="en-US" sz="1200" dirty="0">
+                <a:latin typeface="Arial" panose="020B0604020202020204" pitchFamily="34" charset="0"/>
+                <a:cs typeface="Arial" panose="020B0604020202020204" pitchFamily="34" charset="0"/>
+              </a:rPr>
+              <a:t> </a:t>
+            </a:r>
+            <a:r>
+              <a:rPr lang="en-US" sz="1200" dirty="0" err="1">
+                <a:latin typeface="Arial" panose="020B0604020202020204" pitchFamily="34" charset="0"/>
+                <a:cs typeface="Arial" panose="020B0604020202020204" pitchFamily="34" charset="0"/>
+              </a:rPr>
+              <a:t>llegado</a:t>
+            </a:r>
+            <a:r>
+              <a:rPr lang="en-US" sz="1200" dirty="0">
+                <a:latin typeface="Arial" panose="020B0604020202020204" pitchFamily="34" charset="0"/>
+                <a:cs typeface="Arial" panose="020B0604020202020204" pitchFamily="34" charset="0"/>
+              </a:rPr>
+              <a:t> a una </a:t>
+            </a:r>
+            <a:r>
+              <a:rPr lang="en-US" sz="1200" dirty="0" err="1">
+                <a:latin typeface="Arial" panose="020B0604020202020204" pitchFamily="34" charset="0"/>
+                <a:cs typeface="Arial" panose="020B0604020202020204" pitchFamily="34" charset="0"/>
+              </a:rPr>
+              <a:t>respuesta</a:t>
+            </a:r>
+            <a:r>
+              <a:rPr lang="en-US" sz="1200" dirty="0">
+                <a:latin typeface="Arial" panose="020B0604020202020204" pitchFamily="34" charset="0"/>
+                <a:cs typeface="Arial" panose="020B0604020202020204" pitchFamily="34" charset="0"/>
+              </a:rPr>
+              <a:t> </a:t>
+            </a:r>
+            <a:r>
+              <a:rPr lang="en-US" sz="1200" dirty="0" err="1">
+                <a:latin typeface="Arial" panose="020B0604020202020204" pitchFamily="34" charset="0"/>
+                <a:cs typeface="Arial" panose="020B0604020202020204" pitchFamily="34" charset="0"/>
+              </a:rPr>
+              <a:t>óptima</a:t>
+            </a:r>
+            <a:r>
+              <a:rPr lang="en-US" sz="1200" dirty="0">
+                <a:latin typeface="Arial" panose="020B0604020202020204" pitchFamily="34" charset="0"/>
+                <a:cs typeface="Arial" panose="020B0604020202020204" pitchFamily="34" charset="0"/>
+              </a:rPr>
+              <a:t> para un valor de 1.1450 um, </a:t>
+            </a:r>
+            <a:r>
+              <a:rPr lang="en-US" sz="1200" dirty="0" err="1">
+                <a:latin typeface="Arial" panose="020B0604020202020204" pitchFamily="34" charset="0"/>
+                <a:cs typeface="Arial" panose="020B0604020202020204" pitchFamily="34" charset="0"/>
+              </a:rPr>
+              <a:t>quedando</a:t>
+            </a:r>
+            <a:r>
+              <a:rPr lang="en-US" sz="1200" dirty="0">
+                <a:latin typeface="Arial" panose="020B0604020202020204" pitchFamily="34" charset="0"/>
+                <a:cs typeface="Arial" panose="020B0604020202020204" pitchFamily="34" charset="0"/>
+              </a:rPr>
+              <a:t> </a:t>
+            </a:r>
+            <a:r>
+              <a:rPr lang="en-US" sz="1200" dirty="0" err="1">
+                <a:latin typeface="Arial" panose="020B0604020202020204" pitchFamily="34" charset="0"/>
+                <a:cs typeface="Arial" panose="020B0604020202020204" pitchFamily="34" charset="0"/>
+              </a:rPr>
+              <a:t>el</a:t>
+            </a:r>
+            <a:r>
+              <a:rPr lang="en-US" sz="1200" dirty="0">
+                <a:latin typeface="Arial" panose="020B0604020202020204" pitchFamily="34" charset="0"/>
+                <a:cs typeface="Arial" panose="020B0604020202020204" pitchFamily="34" charset="0"/>
+              </a:rPr>
+              <a:t> ancho de las </a:t>
+            </a:r>
+            <a:r>
+              <a:rPr lang="en-US" sz="1200" dirty="0" err="1">
+                <a:latin typeface="Arial" panose="020B0604020202020204" pitchFamily="34" charset="0"/>
+                <a:cs typeface="Arial" panose="020B0604020202020204" pitchFamily="34" charset="0"/>
+              </a:rPr>
+              <a:t>guías</a:t>
+            </a:r>
+            <a:r>
+              <a:rPr lang="en-US" sz="1200" dirty="0">
+                <a:latin typeface="Arial" panose="020B0604020202020204" pitchFamily="34" charset="0"/>
+                <a:cs typeface="Arial" panose="020B0604020202020204" pitchFamily="34" charset="0"/>
+              </a:rPr>
+              <a:t> con un valor de 2.145 um.</a:t>
+            </a:r>
           </a:p>
           <a:p>
             <a:pPr algn="just"/>
@@ -5222,24 +5915,160 @@
           </a:p>
           <a:p>
             <a:pPr algn="just"/>
-            <a:endParaRPr lang="en-US" sz="1200" dirty="0">
-              <a:latin typeface="Arial" panose="020B0604020202020204" pitchFamily="34" charset="0"/>
-              <a:cs typeface="Arial" panose="020B0604020202020204" pitchFamily="34" charset="0"/>
-            </a:endParaRPr>
-          </a:p>
-          <a:p>
-            <a:pPr algn="just"/>
-            <a:endParaRPr lang="en-US" sz="1200" dirty="0">
-              <a:latin typeface="Arial" panose="020B0604020202020204" pitchFamily="34" charset="0"/>
-              <a:cs typeface="Arial" panose="020B0604020202020204" pitchFamily="34" charset="0"/>
-            </a:endParaRPr>
-          </a:p>
-          <a:p>
-            <a:pPr algn="just"/>
-            <a:endParaRPr lang="en-US" sz="1200" dirty="0">
-              <a:latin typeface="Arial" panose="020B0604020202020204" pitchFamily="34" charset="0"/>
-              <a:cs typeface="Arial" panose="020B0604020202020204" pitchFamily="34" charset="0"/>
-            </a:endParaRPr>
+            <a:r>
+              <a:rPr lang="en-US" sz="1200" dirty="0" err="1">
+                <a:latin typeface="Arial" panose="020B0604020202020204" pitchFamily="34" charset="0"/>
+                <a:cs typeface="Arial" panose="020B0604020202020204" pitchFamily="34" charset="0"/>
+              </a:rPr>
+              <a:t>Vemos</a:t>
+            </a:r>
+            <a:r>
+              <a:rPr lang="en-US" sz="1200" dirty="0">
+                <a:latin typeface="Arial" panose="020B0604020202020204" pitchFamily="34" charset="0"/>
+                <a:cs typeface="Arial" panose="020B0604020202020204" pitchFamily="34" charset="0"/>
+              </a:rPr>
+              <a:t> que </a:t>
+            </a:r>
+            <a:r>
+              <a:rPr lang="en-US" sz="1200" dirty="0" err="1">
+                <a:latin typeface="Arial" panose="020B0604020202020204" pitchFamily="34" charset="0"/>
+                <a:cs typeface="Arial" panose="020B0604020202020204" pitchFamily="34" charset="0"/>
+              </a:rPr>
+              <a:t>han</a:t>
+            </a:r>
+            <a:r>
+              <a:rPr lang="en-US" sz="1200" dirty="0">
+                <a:latin typeface="Arial" panose="020B0604020202020204" pitchFamily="34" charset="0"/>
+                <a:cs typeface="Arial" panose="020B0604020202020204" pitchFamily="34" charset="0"/>
+              </a:rPr>
+              <a:t> </a:t>
+            </a:r>
+            <a:r>
+              <a:rPr lang="en-US" sz="1200" dirty="0" err="1">
+                <a:latin typeface="Arial" panose="020B0604020202020204" pitchFamily="34" charset="0"/>
+                <a:cs typeface="Arial" panose="020B0604020202020204" pitchFamily="34" charset="0"/>
+              </a:rPr>
+              <a:t>mejorado</a:t>
+            </a:r>
+            <a:r>
+              <a:rPr lang="en-US" sz="1200" dirty="0">
+                <a:latin typeface="Arial" panose="020B0604020202020204" pitchFamily="34" charset="0"/>
+                <a:cs typeface="Arial" panose="020B0604020202020204" pitchFamily="34" charset="0"/>
+              </a:rPr>
+              <a:t> </a:t>
+            </a:r>
+            <a:r>
+              <a:rPr lang="en-US" sz="1200" dirty="0" err="1">
+                <a:latin typeface="Arial" panose="020B0604020202020204" pitchFamily="34" charset="0"/>
+                <a:cs typeface="Arial" panose="020B0604020202020204" pitchFamily="34" charset="0"/>
+              </a:rPr>
+              <a:t>significativamente</a:t>
+            </a:r>
+            <a:r>
+              <a:rPr lang="en-US" sz="1200" dirty="0">
+                <a:latin typeface="Arial" panose="020B0604020202020204" pitchFamily="34" charset="0"/>
+                <a:cs typeface="Arial" panose="020B0604020202020204" pitchFamily="34" charset="0"/>
+              </a:rPr>
+              <a:t> las </a:t>
+            </a:r>
+            <a:r>
+              <a:rPr lang="en-US" sz="1200" dirty="0" err="1">
+                <a:latin typeface="Arial" panose="020B0604020202020204" pitchFamily="34" charset="0"/>
+                <a:cs typeface="Arial" panose="020B0604020202020204" pitchFamily="34" charset="0"/>
+              </a:rPr>
+              <a:t>pérdidas</a:t>
+            </a:r>
+            <a:r>
+              <a:rPr lang="en-US" sz="1200" dirty="0">
+                <a:latin typeface="Arial" panose="020B0604020202020204" pitchFamily="34" charset="0"/>
+                <a:cs typeface="Arial" panose="020B0604020202020204" pitchFamily="34" charset="0"/>
+              </a:rPr>
+              <a:t> </a:t>
+            </a:r>
+            <a:r>
+              <a:rPr lang="en-US" sz="1200" dirty="0" err="1">
+                <a:latin typeface="Arial" panose="020B0604020202020204" pitchFamily="34" charset="0"/>
+                <a:cs typeface="Arial" panose="020B0604020202020204" pitchFamily="34" charset="0"/>
+              </a:rPr>
+              <a:t>llegando</a:t>
+            </a:r>
+            <a:r>
+              <a:rPr lang="en-US" sz="1200" dirty="0">
+                <a:latin typeface="Arial" panose="020B0604020202020204" pitchFamily="34" charset="0"/>
+                <a:cs typeface="Arial" panose="020B0604020202020204" pitchFamily="34" charset="0"/>
+              </a:rPr>
+              <a:t> a un valor de 0.0027dB y sin embargo </a:t>
+            </a:r>
+            <a:r>
+              <a:rPr lang="en-US" sz="1200" dirty="0" err="1">
+                <a:latin typeface="Arial" panose="020B0604020202020204" pitchFamily="34" charset="0"/>
+                <a:cs typeface="Arial" panose="020B0604020202020204" pitchFamily="34" charset="0"/>
+              </a:rPr>
+              <a:t>el</a:t>
+            </a:r>
+            <a:r>
+              <a:rPr lang="en-US" sz="1200" dirty="0">
+                <a:latin typeface="Arial" panose="020B0604020202020204" pitchFamily="34" charset="0"/>
+                <a:cs typeface="Arial" panose="020B0604020202020204" pitchFamily="34" charset="0"/>
+              </a:rPr>
+              <a:t> ratio ha </a:t>
+            </a:r>
+            <a:r>
+              <a:rPr lang="en-US" sz="1200" dirty="0" err="1">
+                <a:latin typeface="Arial" panose="020B0604020202020204" pitchFamily="34" charset="0"/>
+                <a:cs typeface="Arial" panose="020B0604020202020204" pitchFamily="34" charset="0"/>
+              </a:rPr>
+              <a:t>variado</a:t>
+            </a:r>
+            <a:r>
+              <a:rPr lang="en-US" sz="1200" dirty="0">
+                <a:latin typeface="Arial" panose="020B0604020202020204" pitchFamily="34" charset="0"/>
+                <a:cs typeface="Arial" panose="020B0604020202020204" pitchFamily="34" charset="0"/>
+              </a:rPr>
+              <a:t> </a:t>
+            </a:r>
+            <a:r>
+              <a:rPr lang="en-US" sz="1200" dirty="0" err="1">
+                <a:latin typeface="Arial" panose="020B0604020202020204" pitchFamily="34" charset="0"/>
+                <a:cs typeface="Arial" panose="020B0604020202020204" pitchFamily="34" charset="0"/>
+              </a:rPr>
+              <a:t>muy</a:t>
+            </a:r>
+            <a:r>
+              <a:rPr lang="en-US" sz="1200" dirty="0">
+                <a:latin typeface="Arial" panose="020B0604020202020204" pitchFamily="34" charset="0"/>
+                <a:cs typeface="Arial" panose="020B0604020202020204" pitchFamily="34" charset="0"/>
+              </a:rPr>
+              <a:t> poco de la </a:t>
+            </a:r>
+            <a:r>
+              <a:rPr lang="en-US" sz="1200" dirty="0" err="1">
+                <a:latin typeface="Arial" panose="020B0604020202020204" pitchFamily="34" charset="0"/>
+                <a:cs typeface="Arial" panose="020B0604020202020204" pitchFamily="34" charset="0"/>
+              </a:rPr>
+              <a:t>configuración</a:t>
+            </a:r>
+            <a:r>
+              <a:rPr lang="en-US" sz="1200" dirty="0">
+                <a:latin typeface="Arial" panose="020B0604020202020204" pitchFamily="34" charset="0"/>
+                <a:cs typeface="Arial" panose="020B0604020202020204" pitchFamily="34" charset="0"/>
+              </a:rPr>
+              <a:t> anterior a </a:t>
+            </a:r>
+            <a:r>
+              <a:rPr lang="en-US" sz="1200" dirty="0" err="1">
+                <a:latin typeface="Arial" panose="020B0604020202020204" pitchFamily="34" charset="0"/>
+                <a:cs typeface="Arial" panose="020B0604020202020204" pitchFamily="34" charset="0"/>
+              </a:rPr>
+              <a:t>esta</a:t>
+            </a:r>
+            <a:r>
+              <a:rPr lang="en-US" sz="1200" dirty="0">
+                <a:latin typeface="Arial" panose="020B0604020202020204" pitchFamily="34" charset="0"/>
+                <a:cs typeface="Arial" panose="020B0604020202020204" pitchFamily="34" charset="0"/>
+              </a:rPr>
+              <a:t>.</a:t>
+            </a:r>
           </a:p>
         </p:txBody>
       </p:sp>
@@ -5310,7 +6139,7 @@
           <p:nvPr>
             <p:extLst>
               <p:ext uri="{D42A27DB-BD31-4B8C-83A1-F6EECF244321}">
-                <p14:modId xmlns:p14="http://schemas.microsoft.com/office/powerpoint/2010/main" val="2301833566"/>
+                <p14:modId xmlns:p14="http://schemas.microsoft.com/office/powerpoint/2010/main" val="981306847"/>
               </p:ext>
             </p:extLst>
           </p:nvPr>
@@ -5537,7 +6366,7 @@
                     <a:p>
                       <a:r>
                         <a:rPr lang="es-ES" dirty="0"/>
-                        <a:t>6.6 + 1.1</a:t>
+                        <a:t>1 + 1.1450</a:t>
                       </a:r>
                     </a:p>
                   </a:txBody>
@@ -5926,21 +6755,230 @@
                 <a:latin typeface="Arial" panose="020B0604020202020204" pitchFamily="34" charset="0"/>
                 <a:cs typeface="Arial" panose="020B0604020202020204" pitchFamily="34" charset="0"/>
               </a:rPr>
-              <a:t>Repeat all the design </a:t>
-            </a:r>
-            <a:r>
-              <a:rPr lang="en-US" sz="1200">
-                <a:latin typeface="Arial" panose="020B0604020202020204" pitchFamily="34" charset="0"/>
-                <a:cs typeface="Arial" panose="020B0604020202020204" pitchFamily="34" charset="0"/>
-              </a:rPr>
-              <a:t>process for a </a:t>
-            </a:r>
-            <a:r>
-              <a:rPr lang="en-US" sz="1200" dirty="0">
-                <a:latin typeface="Arial" panose="020B0604020202020204" pitchFamily="34" charset="0"/>
-                <a:cs typeface="Arial" panose="020B0604020202020204" pitchFamily="34" charset="0"/>
-              </a:rPr>
-              <a:t>1x4 MMI Coupler.  </a:t>
+              <a:t>Repeat all the design process for a 1x4 MMI Coupler.  </a:t>
+            </a:r>
+          </a:p>
+          <a:p>
+            <a:pPr algn="just"/>
+            <a:r>
+              <a:rPr lang="en-US" sz="1200" dirty="0" err="1">
+                <a:latin typeface="Arial" panose="020B0604020202020204" pitchFamily="34" charset="0"/>
+                <a:cs typeface="Arial" panose="020B0604020202020204" pitchFamily="34" charset="0"/>
+              </a:rPr>
+              <a:t>Ahora</a:t>
+            </a:r>
+            <a:r>
+              <a:rPr lang="en-US" sz="1200" dirty="0">
+                <a:latin typeface="Arial" panose="020B0604020202020204" pitchFamily="34" charset="0"/>
+                <a:cs typeface="Arial" panose="020B0604020202020204" pitchFamily="34" charset="0"/>
+              </a:rPr>
+              <a:t> </a:t>
+            </a:r>
+            <a:r>
+              <a:rPr lang="en-US" sz="1200" dirty="0" err="1">
+                <a:latin typeface="Arial" panose="020B0604020202020204" pitchFamily="34" charset="0"/>
+                <a:cs typeface="Arial" panose="020B0604020202020204" pitchFamily="34" charset="0"/>
+              </a:rPr>
+              <a:t>hemos</a:t>
+            </a:r>
+            <a:r>
+              <a:rPr lang="en-US" sz="1200" dirty="0">
+                <a:latin typeface="Arial" panose="020B0604020202020204" pitchFamily="34" charset="0"/>
+                <a:cs typeface="Arial" panose="020B0604020202020204" pitchFamily="34" charset="0"/>
+              </a:rPr>
+              <a:t> </a:t>
+            </a:r>
+            <a:r>
+              <a:rPr lang="en-US" sz="1200" dirty="0" err="1">
+                <a:latin typeface="Arial" panose="020B0604020202020204" pitchFamily="34" charset="0"/>
+                <a:cs typeface="Arial" panose="020B0604020202020204" pitchFamily="34" charset="0"/>
+              </a:rPr>
+              <a:t>repetido</a:t>
+            </a:r>
+            <a:r>
+              <a:rPr lang="en-US" sz="1200" dirty="0">
+                <a:latin typeface="Arial" panose="020B0604020202020204" pitchFamily="34" charset="0"/>
+                <a:cs typeface="Arial" panose="020B0604020202020204" pitchFamily="34" charset="0"/>
+              </a:rPr>
+              <a:t> </a:t>
+            </a:r>
+            <a:r>
+              <a:rPr lang="en-US" sz="1200" dirty="0" err="1">
+                <a:latin typeface="Arial" panose="020B0604020202020204" pitchFamily="34" charset="0"/>
+                <a:cs typeface="Arial" panose="020B0604020202020204" pitchFamily="34" charset="0"/>
+              </a:rPr>
+              <a:t>el</a:t>
+            </a:r>
+            <a:r>
+              <a:rPr lang="en-US" sz="1200" dirty="0">
+                <a:latin typeface="Arial" panose="020B0604020202020204" pitchFamily="34" charset="0"/>
+                <a:cs typeface="Arial" panose="020B0604020202020204" pitchFamily="34" charset="0"/>
+              </a:rPr>
+              <a:t> </a:t>
+            </a:r>
+            <a:r>
+              <a:rPr lang="en-US" sz="1200" dirty="0" err="1">
+                <a:latin typeface="Arial" panose="020B0604020202020204" pitchFamily="34" charset="0"/>
+                <a:cs typeface="Arial" panose="020B0604020202020204" pitchFamily="34" charset="0"/>
+              </a:rPr>
+              <a:t>mismo</a:t>
+            </a:r>
+            <a:r>
+              <a:rPr lang="en-US" sz="1200" dirty="0">
+                <a:latin typeface="Arial" panose="020B0604020202020204" pitchFamily="34" charset="0"/>
+                <a:cs typeface="Arial" panose="020B0604020202020204" pitchFamily="34" charset="0"/>
+              </a:rPr>
+              <a:t> </a:t>
+            </a:r>
+            <a:r>
+              <a:rPr lang="en-US" sz="1200" dirty="0" err="1">
+                <a:latin typeface="Arial" panose="020B0604020202020204" pitchFamily="34" charset="0"/>
+                <a:cs typeface="Arial" panose="020B0604020202020204" pitchFamily="34" charset="0"/>
+              </a:rPr>
+              <a:t>proceso</a:t>
+            </a:r>
+            <a:r>
+              <a:rPr lang="en-US" sz="1200" dirty="0">
+                <a:latin typeface="Arial" panose="020B0604020202020204" pitchFamily="34" charset="0"/>
+                <a:cs typeface="Arial" panose="020B0604020202020204" pitchFamily="34" charset="0"/>
+              </a:rPr>
+              <a:t> de </a:t>
+            </a:r>
+            <a:r>
+              <a:rPr lang="en-US" sz="1200" dirty="0" err="1">
+                <a:latin typeface="Arial" panose="020B0604020202020204" pitchFamily="34" charset="0"/>
+                <a:cs typeface="Arial" panose="020B0604020202020204" pitchFamily="34" charset="0"/>
+              </a:rPr>
+              <a:t>optimización</a:t>
+            </a:r>
+            <a:r>
+              <a:rPr lang="en-US" sz="1200" dirty="0">
+                <a:latin typeface="Arial" panose="020B0604020202020204" pitchFamily="34" charset="0"/>
+                <a:cs typeface="Arial" panose="020B0604020202020204" pitchFamily="34" charset="0"/>
+              </a:rPr>
+              <a:t> para un MMI 1x4. El primer paso ha </a:t>
+            </a:r>
+            <a:r>
+              <a:rPr lang="en-US" sz="1200" dirty="0" err="1">
+                <a:latin typeface="Arial" panose="020B0604020202020204" pitchFamily="34" charset="0"/>
+                <a:cs typeface="Arial" panose="020B0604020202020204" pitchFamily="34" charset="0"/>
+              </a:rPr>
+              <a:t>sido</a:t>
+            </a:r>
+            <a:r>
+              <a:rPr lang="en-US" sz="1200" dirty="0">
+                <a:latin typeface="Arial" panose="020B0604020202020204" pitchFamily="34" charset="0"/>
+                <a:cs typeface="Arial" panose="020B0604020202020204" pitchFamily="34" charset="0"/>
+              </a:rPr>
+              <a:t> </a:t>
+            </a:r>
+            <a:r>
+              <a:rPr lang="en-US" sz="1200" dirty="0" err="1">
+                <a:latin typeface="Arial" panose="020B0604020202020204" pitchFamily="34" charset="0"/>
+                <a:cs typeface="Arial" panose="020B0604020202020204" pitchFamily="34" charset="0"/>
+              </a:rPr>
+              <a:t>configurarlo</a:t>
+            </a:r>
+            <a:r>
+              <a:rPr lang="en-US" sz="1200" dirty="0">
+                <a:latin typeface="Arial" panose="020B0604020202020204" pitchFamily="34" charset="0"/>
+                <a:cs typeface="Arial" panose="020B0604020202020204" pitchFamily="34" charset="0"/>
+              </a:rPr>
+              <a:t> con los </a:t>
+            </a:r>
+            <a:r>
+              <a:rPr lang="en-US" sz="1200" dirty="0" err="1">
+                <a:latin typeface="Arial" panose="020B0604020202020204" pitchFamily="34" charset="0"/>
+                <a:cs typeface="Arial" panose="020B0604020202020204" pitchFamily="34" charset="0"/>
+              </a:rPr>
+              <a:t>sigueintes</a:t>
+            </a:r>
+            <a:r>
+              <a:rPr lang="en-US" sz="1200" dirty="0">
+                <a:latin typeface="Arial" panose="020B0604020202020204" pitchFamily="34" charset="0"/>
+                <a:cs typeface="Arial" panose="020B0604020202020204" pitchFamily="34" charset="0"/>
+              </a:rPr>
+              <a:t> </a:t>
+            </a:r>
+            <a:r>
+              <a:rPr lang="en-US" sz="1200" dirty="0" err="1">
+                <a:latin typeface="Arial" panose="020B0604020202020204" pitchFamily="34" charset="0"/>
+                <a:cs typeface="Arial" panose="020B0604020202020204" pitchFamily="34" charset="0"/>
+              </a:rPr>
+              <a:t>valores</a:t>
+            </a:r>
+            <a:r>
+              <a:rPr lang="en-US" sz="1200" dirty="0">
+                <a:latin typeface="Arial" panose="020B0604020202020204" pitchFamily="34" charset="0"/>
+                <a:cs typeface="Arial" panose="020B0604020202020204" pitchFamily="34" charset="0"/>
+              </a:rPr>
+              <a:t>:</a:t>
+            </a:r>
+          </a:p>
+          <a:p>
+            <a:pPr algn="just"/>
+            <a:r>
+              <a:rPr lang="en-US" sz="1200" dirty="0">
+                <a:latin typeface="Arial" panose="020B0604020202020204" pitchFamily="34" charset="0"/>
+                <a:cs typeface="Arial" panose="020B0604020202020204" pitchFamily="34" charset="0"/>
+              </a:rPr>
+              <a:t>Width= 13.2 um,  </a:t>
+            </a:r>
+            <a:r>
+              <a:rPr lang="en-US" sz="1200" dirty="0" err="1">
+                <a:latin typeface="Arial" panose="020B0604020202020204" pitchFamily="34" charset="0"/>
+                <a:cs typeface="Arial" panose="020B0604020202020204" pitchFamily="34" charset="0"/>
+              </a:rPr>
+              <a:t>Wg_width</a:t>
+            </a:r>
+            <a:r>
+              <a:rPr lang="en-US" sz="1200" dirty="0">
+                <a:latin typeface="Arial" panose="020B0604020202020204" pitchFamily="34" charset="0"/>
+                <a:cs typeface="Arial" panose="020B0604020202020204" pitchFamily="34" charset="0"/>
+              </a:rPr>
+              <a:t>= 1 um,  L= 3*</a:t>
+            </a:r>
+            <a:r>
+              <a:rPr lang="en-US" sz="1200" dirty="0" err="1">
+                <a:latin typeface="Arial" panose="020B0604020202020204" pitchFamily="34" charset="0"/>
+                <a:cs typeface="Arial" panose="020B0604020202020204" pitchFamily="34" charset="0"/>
+              </a:rPr>
+              <a:t>L_pi</a:t>
+            </a:r>
+            <a:r>
+              <a:rPr lang="en-US" sz="1200" dirty="0">
+                <a:latin typeface="Arial" panose="020B0604020202020204" pitchFamily="34" charset="0"/>
+                <a:cs typeface="Arial" panose="020B0604020202020204" pitchFamily="34" charset="0"/>
+              </a:rPr>
+              <a:t> / 16 </a:t>
+            </a:r>
+            <a:r>
+              <a:rPr lang="en-US" sz="1200" dirty="0" err="1">
+                <a:latin typeface="Arial" panose="020B0604020202020204" pitchFamily="34" charset="0"/>
+                <a:cs typeface="Arial" panose="020B0604020202020204" pitchFamily="34" charset="0"/>
+              </a:rPr>
+              <a:t>IN_wg</a:t>
+            </a:r>
+            <a:r>
+              <a:rPr lang="en-US" sz="1200" dirty="0">
+                <a:latin typeface="Arial" panose="020B0604020202020204" pitchFamily="34" charset="0"/>
+                <a:cs typeface="Arial" panose="020B0604020202020204" pitchFamily="34" charset="0"/>
+              </a:rPr>
+              <a:t>= 0  y </a:t>
+            </a:r>
+            <a:r>
+              <a:rPr lang="en-US" sz="1200" dirty="0" err="1">
+                <a:latin typeface="Arial" panose="020B0604020202020204" pitchFamily="34" charset="0"/>
+                <a:cs typeface="Arial" panose="020B0604020202020204" pitchFamily="34" charset="0"/>
+              </a:rPr>
+              <a:t>OUT_wg</a:t>
+            </a:r>
+            <a:r>
+              <a:rPr lang="en-US" sz="1200" dirty="0">
+                <a:latin typeface="Arial" panose="020B0604020202020204" pitchFamily="34" charset="0"/>
+                <a:cs typeface="Arial" panose="020B0604020202020204" pitchFamily="34" charset="0"/>
+              </a:rPr>
+              <a:t>= ( -3/8, 1/8, 1/8, 3/8)</a:t>
             </a:r>
           </a:p>
           <a:p>
@@ -5952,20 +6990,132 @@
           </a:p>
           <a:p>
             <a:pPr algn="just"/>
-            <a:endParaRPr lang="en-US" sz="1200" dirty="0">
-              <a:latin typeface="Arial" panose="020B0604020202020204" pitchFamily="34" charset="0"/>
-              <a:cs typeface="Arial" panose="020B0604020202020204" pitchFamily="34" charset="0"/>
-            </a:endParaRPr>
-          </a:p>
-          <a:p>
-            <a:pPr algn="just"/>
-            <a:endParaRPr lang="en-US" sz="1200" dirty="0">
-              <a:latin typeface="Arial" panose="020B0604020202020204" pitchFamily="34" charset="0"/>
-              <a:cs typeface="Arial" panose="020B0604020202020204" pitchFamily="34" charset="0"/>
-            </a:endParaRPr>
-          </a:p>
-          <a:p>
-            <a:pPr algn="just"/>
+            <a:r>
+              <a:rPr lang="en-US" sz="1200" dirty="0" err="1">
+                <a:latin typeface="Arial" panose="020B0604020202020204" pitchFamily="34" charset="0"/>
+                <a:cs typeface="Arial" panose="020B0604020202020204" pitchFamily="34" charset="0"/>
+              </a:rPr>
+              <a:t>En</a:t>
+            </a:r>
+            <a:r>
+              <a:rPr lang="en-US" sz="1200" dirty="0">
+                <a:latin typeface="Arial" panose="020B0604020202020204" pitchFamily="34" charset="0"/>
+                <a:cs typeface="Arial" panose="020B0604020202020204" pitchFamily="34" charset="0"/>
+              </a:rPr>
+              <a:t> </a:t>
+            </a:r>
+            <a:r>
+              <a:rPr lang="en-US" sz="1200" dirty="0" err="1">
+                <a:latin typeface="Arial" panose="020B0604020202020204" pitchFamily="34" charset="0"/>
+                <a:cs typeface="Arial" panose="020B0604020202020204" pitchFamily="34" charset="0"/>
+              </a:rPr>
+              <a:t>esta</a:t>
+            </a:r>
+            <a:r>
+              <a:rPr lang="en-US" sz="1200" dirty="0">
+                <a:latin typeface="Arial" panose="020B0604020202020204" pitchFamily="34" charset="0"/>
+                <a:cs typeface="Arial" panose="020B0604020202020204" pitchFamily="34" charset="0"/>
+              </a:rPr>
+              <a:t> </a:t>
+            </a:r>
+            <a:r>
+              <a:rPr lang="en-US" sz="1200" dirty="0" err="1">
+                <a:latin typeface="Arial" panose="020B0604020202020204" pitchFamily="34" charset="0"/>
+                <a:cs typeface="Arial" panose="020B0604020202020204" pitchFamily="34" charset="0"/>
+              </a:rPr>
+              <a:t>primera</a:t>
+            </a:r>
+            <a:r>
+              <a:rPr lang="en-US" sz="1200" dirty="0">
+                <a:latin typeface="Arial" panose="020B0604020202020204" pitchFamily="34" charset="0"/>
+                <a:cs typeface="Arial" panose="020B0604020202020204" pitchFamily="34" charset="0"/>
+              </a:rPr>
+              <a:t> </a:t>
+            </a:r>
+            <a:r>
+              <a:rPr lang="en-US" sz="1200" dirty="0" err="1">
+                <a:latin typeface="Arial" panose="020B0604020202020204" pitchFamily="34" charset="0"/>
+                <a:cs typeface="Arial" panose="020B0604020202020204" pitchFamily="34" charset="0"/>
+              </a:rPr>
+              <a:t>configuración</a:t>
+            </a:r>
+            <a:r>
+              <a:rPr lang="en-US" sz="1200" dirty="0">
+                <a:latin typeface="Arial" panose="020B0604020202020204" pitchFamily="34" charset="0"/>
+                <a:cs typeface="Arial" panose="020B0604020202020204" pitchFamily="34" charset="0"/>
+              </a:rPr>
+              <a:t> </a:t>
+            </a:r>
+            <a:r>
+              <a:rPr lang="en-US" sz="1200" dirty="0" err="1">
+                <a:latin typeface="Arial" panose="020B0604020202020204" pitchFamily="34" charset="0"/>
+                <a:cs typeface="Arial" panose="020B0604020202020204" pitchFamily="34" charset="0"/>
+              </a:rPr>
+              <a:t>hemos</a:t>
+            </a:r>
+            <a:r>
+              <a:rPr lang="en-US" sz="1200" dirty="0">
+                <a:latin typeface="Arial" panose="020B0604020202020204" pitchFamily="34" charset="0"/>
+                <a:cs typeface="Arial" panose="020B0604020202020204" pitchFamily="34" charset="0"/>
+              </a:rPr>
+              <a:t> </a:t>
+            </a:r>
+            <a:r>
+              <a:rPr lang="en-US" sz="1200" dirty="0" err="1">
+                <a:latin typeface="Arial" panose="020B0604020202020204" pitchFamily="34" charset="0"/>
+                <a:cs typeface="Arial" panose="020B0604020202020204" pitchFamily="34" charset="0"/>
+              </a:rPr>
+              <a:t>obtenido</a:t>
+            </a:r>
+            <a:r>
+              <a:rPr lang="en-US" sz="1200" dirty="0">
+                <a:latin typeface="Arial" panose="020B0604020202020204" pitchFamily="34" charset="0"/>
+                <a:cs typeface="Arial" panose="020B0604020202020204" pitchFamily="34" charset="0"/>
+              </a:rPr>
+              <a:t> </a:t>
+            </a:r>
+            <a:r>
+              <a:rPr lang="en-US" sz="1200" dirty="0" err="1">
+                <a:latin typeface="Arial" panose="020B0604020202020204" pitchFamily="34" charset="0"/>
+                <a:cs typeface="Arial" panose="020B0604020202020204" pitchFamily="34" charset="0"/>
+              </a:rPr>
+              <a:t>unas</a:t>
+            </a:r>
+            <a:r>
+              <a:rPr lang="en-US" sz="1200" dirty="0">
+                <a:latin typeface="Arial" panose="020B0604020202020204" pitchFamily="34" charset="0"/>
+                <a:cs typeface="Arial" panose="020B0604020202020204" pitchFamily="34" charset="0"/>
+              </a:rPr>
+              <a:t> </a:t>
+            </a:r>
+            <a:r>
+              <a:rPr lang="en-US" sz="1200" dirty="0" err="1">
+                <a:latin typeface="Arial" panose="020B0604020202020204" pitchFamily="34" charset="0"/>
+                <a:cs typeface="Arial" panose="020B0604020202020204" pitchFamily="34" charset="0"/>
+              </a:rPr>
+              <a:t>altas</a:t>
+            </a:r>
+            <a:r>
+              <a:rPr lang="en-US" sz="1200" dirty="0">
+                <a:latin typeface="Arial" panose="020B0604020202020204" pitchFamily="34" charset="0"/>
+                <a:cs typeface="Arial" panose="020B0604020202020204" pitchFamily="34" charset="0"/>
+              </a:rPr>
+              <a:t> </a:t>
+            </a:r>
+            <a:r>
+              <a:rPr lang="en-US" sz="1200" dirty="0" err="1">
+                <a:latin typeface="Arial" panose="020B0604020202020204" pitchFamily="34" charset="0"/>
+                <a:cs typeface="Arial" panose="020B0604020202020204" pitchFamily="34" charset="0"/>
+              </a:rPr>
+              <a:t>pérdidas</a:t>
+            </a:r>
+            <a:r>
+              <a:rPr lang="en-US" sz="1200">
+                <a:latin typeface="Arial" panose="020B0604020202020204" pitchFamily="34" charset="0"/>
+                <a:cs typeface="Arial" panose="020B0604020202020204" pitchFamily="34" charset="0"/>
+              </a:rPr>
+              <a:t>.</a:t>
+            </a:r>
             <a:endParaRPr lang="en-US" sz="1200" dirty="0">
               <a:latin typeface="Arial" panose="020B0604020202020204" pitchFamily="34" charset="0"/>
               <a:cs typeface="Arial" panose="020B0604020202020204" pitchFamily="34" charset="0"/>
@@ -14857,8 +16007,8 @@
         </p:nvSpPr>
         <p:spPr>
           <a:xfrm>
-            <a:off x="6606919" y="1828800"/>
-            <a:ext cx="4574428" cy="2308324"/>
+            <a:off x="6096000" y="1981200"/>
+            <a:ext cx="5257800" cy="2123658"/>
           </a:xfrm>
           <a:prstGeom prst="rect">
             <a:avLst/>
@@ -15658,7 +16808,7 @@
         </p:nvSpPr>
         <p:spPr>
           <a:xfrm>
-            <a:off x="609441" y="4627196"/>
+            <a:off x="571726" y="4188156"/>
             <a:ext cx="11199971" cy="1938992"/>
           </a:xfrm>
           <a:prstGeom prst="rect">
@@ -15973,28 +17123,378 @@
                 <a:latin typeface="Arial" panose="020B0604020202020204" pitchFamily="34" charset="0"/>
                 <a:cs typeface="Arial" panose="020B0604020202020204" pitchFamily="34" charset="0"/>
               </a:rPr>
-              <a:t> a K,   </a:t>
+              <a:t> a K. </a:t>
+            </a:r>
+            <a:r>
+              <a:rPr lang="en-US" sz="1200" dirty="0" err="1">
+                <a:latin typeface="Arial" panose="020B0604020202020204" pitchFamily="34" charset="0"/>
+                <a:cs typeface="Arial" panose="020B0604020202020204" pitchFamily="34" charset="0"/>
+              </a:rPr>
+              <a:t>Vemos</a:t>
+            </a:r>
+            <a:r>
+              <a:rPr lang="en-US" sz="1200" dirty="0">
+                <a:latin typeface="Arial" panose="020B0604020202020204" pitchFamily="34" charset="0"/>
+                <a:cs typeface="Arial" panose="020B0604020202020204" pitchFamily="34" charset="0"/>
+              </a:rPr>
+              <a:t> que se </a:t>
+            </a:r>
+            <a:r>
+              <a:rPr lang="en-US" sz="1200" dirty="0" err="1">
+                <a:latin typeface="Arial" panose="020B0604020202020204" pitchFamily="34" charset="0"/>
+                <a:cs typeface="Arial" panose="020B0604020202020204" pitchFamily="34" charset="0"/>
+              </a:rPr>
+              <a:t>comporta</a:t>
+            </a:r>
+            <a:r>
+              <a:rPr lang="en-US" sz="1200" dirty="0">
+                <a:latin typeface="Arial" panose="020B0604020202020204" pitchFamily="34" charset="0"/>
+                <a:cs typeface="Arial" panose="020B0604020202020204" pitchFamily="34" charset="0"/>
+              </a:rPr>
+              <a:t> </a:t>
+            </a:r>
+            <a:r>
+              <a:rPr lang="en-US" sz="1200" dirty="0" err="1">
+                <a:latin typeface="Arial" panose="020B0604020202020204" pitchFamily="34" charset="0"/>
+                <a:cs typeface="Arial" panose="020B0604020202020204" pitchFamily="34" charset="0"/>
+              </a:rPr>
+              <a:t>como</a:t>
+            </a:r>
+            <a:r>
+              <a:rPr lang="en-US" sz="1200" dirty="0">
+                <a:latin typeface="Arial" panose="020B0604020202020204" pitchFamily="34" charset="0"/>
+                <a:cs typeface="Arial" panose="020B0604020202020204" pitchFamily="34" charset="0"/>
+              </a:rPr>
+              <a:t> una </a:t>
+            </a:r>
+            <a:r>
+              <a:rPr lang="en-US" sz="1200" dirty="0" err="1">
+                <a:latin typeface="Arial" panose="020B0604020202020204" pitchFamily="34" charset="0"/>
+                <a:cs typeface="Arial" panose="020B0604020202020204" pitchFamily="34" charset="0"/>
+              </a:rPr>
+              <a:t>exponencial</a:t>
+            </a:r>
+            <a:r>
+              <a:rPr lang="en-US" sz="1200" dirty="0">
+                <a:latin typeface="Arial" panose="020B0604020202020204" pitchFamily="34" charset="0"/>
+                <a:cs typeface="Arial" panose="020B0604020202020204" pitchFamily="34" charset="0"/>
+              </a:rPr>
+              <a:t> </a:t>
+            </a:r>
+            <a:r>
+              <a:rPr lang="en-US" sz="1200" dirty="0" err="1">
+                <a:latin typeface="Arial" panose="020B0604020202020204" pitchFamily="34" charset="0"/>
+                <a:cs typeface="Arial" panose="020B0604020202020204" pitchFamily="34" charset="0"/>
+              </a:rPr>
+              <a:t>decreciente</a:t>
+            </a:r>
+            <a:r>
+              <a:rPr lang="en-US" sz="1200" dirty="0">
+                <a:latin typeface="Arial" panose="020B0604020202020204" pitchFamily="34" charset="0"/>
+                <a:cs typeface="Arial" panose="020B0604020202020204" pitchFamily="34" charset="0"/>
+              </a:rPr>
+              <a:t>, dado que al </a:t>
+            </a:r>
+            <a:r>
+              <a:rPr lang="en-US" sz="1200" dirty="0" err="1">
+                <a:latin typeface="Arial" panose="020B0604020202020204" pitchFamily="34" charset="0"/>
+                <a:cs typeface="Arial" panose="020B0604020202020204" pitchFamily="34" charset="0"/>
+              </a:rPr>
+              <a:t>tener</a:t>
+            </a:r>
+            <a:r>
+              <a:rPr lang="en-US" sz="1200" dirty="0">
+                <a:latin typeface="Arial" panose="020B0604020202020204" pitchFamily="34" charset="0"/>
+                <a:cs typeface="Arial" panose="020B0604020202020204" pitchFamily="34" charset="0"/>
+              </a:rPr>
+              <a:t> </a:t>
+            </a:r>
+            <a:r>
+              <a:rPr lang="en-US" sz="1200" dirty="0" err="1">
+                <a:latin typeface="Arial" panose="020B0604020202020204" pitchFamily="34" charset="0"/>
+                <a:cs typeface="Arial" panose="020B0604020202020204" pitchFamily="34" charset="0"/>
+              </a:rPr>
+              <a:t>valores</a:t>
+            </a:r>
+            <a:r>
+              <a:rPr lang="en-US" sz="1200" dirty="0">
+                <a:latin typeface="Arial" panose="020B0604020202020204" pitchFamily="34" charset="0"/>
+                <a:cs typeface="Arial" panose="020B0604020202020204" pitchFamily="34" charset="0"/>
+              </a:rPr>
+              <a:t> de gap tan </a:t>
+            </a:r>
+            <a:r>
+              <a:rPr lang="en-US" sz="1200" dirty="0" err="1">
+                <a:latin typeface="Arial" panose="020B0604020202020204" pitchFamily="34" charset="0"/>
+                <a:cs typeface="Arial" panose="020B0604020202020204" pitchFamily="34" charset="0"/>
+              </a:rPr>
+              <a:t>grandes</a:t>
+            </a:r>
+            <a:r>
+              <a:rPr lang="en-US" sz="1200" dirty="0">
+                <a:latin typeface="Arial" panose="020B0604020202020204" pitchFamily="34" charset="0"/>
+                <a:cs typeface="Arial" panose="020B0604020202020204" pitchFamily="34" charset="0"/>
+              </a:rPr>
+              <a:t> </a:t>
+            </a:r>
+            <a:r>
+              <a:rPr lang="en-US" sz="1200" dirty="0" err="1">
+                <a:latin typeface="Arial" panose="020B0604020202020204" pitchFamily="34" charset="0"/>
+                <a:cs typeface="Arial" panose="020B0604020202020204" pitchFamily="34" charset="0"/>
+              </a:rPr>
+              <a:t>dejamos</a:t>
+            </a:r>
+            <a:r>
+              <a:rPr lang="en-US" sz="1200" dirty="0">
+                <a:latin typeface="Arial" panose="020B0604020202020204" pitchFamily="34" charset="0"/>
+                <a:cs typeface="Arial" panose="020B0604020202020204" pitchFamily="34" charset="0"/>
+              </a:rPr>
+              <a:t> de </a:t>
+            </a:r>
+            <a:r>
+              <a:rPr lang="en-US" sz="1200" dirty="0" err="1">
+                <a:latin typeface="Arial" panose="020B0604020202020204" pitchFamily="34" charset="0"/>
+                <a:cs typeface="Arial" panose="020B0604020202020204" pitchFamily="34" charset="0"/>
+              </a:rPr>
+              <a:t>apreciar</a:t>
+            </a:r>
+            <a:r>
+              <a:rPr lang="en-US" sz="1200" dirty="0">
+                <a:latin typeface="Arial" panose="020B0604020202020204" pitchFamily="34" charset="0"/>
+                <a:cs typeface="Arial" panose="020B0604020202020204" pitchFamily="34" charset="0"/>
+              </a:rPr>
+              <a:t> ese </a:t>
+            </a:r>
+            <a:r>
+              <a:rPr lang="en-US" sz="1200" dirty="0" err="1">
+                <a:latin typeface="Arial" panose="020B0604020202020204" pitchFamily="34" charset="0"/>
+                <a:cs typeface="Arial" panose="020B0604020202020204" pitchFamily="34" charset="0"/>
+              </a:rPr>
+              <a:t>comportamiento</a:t>
+            </a:r>
+            <a:r>
+              <a:rPr lang="en-US" sz="1200" dirty="0">
+                <a:latin typeface="Arial" panose="020B0604020202020204" pitchFamily="34" charset="0"/>
+                <a:cs typeface="Arial" panose="020B0604020202020204" pitchFamily="34" charset="0"/>
+              </a:rPr>
+              <a:t> sinusoidal de K,  y </a:t>
+            </a:r>
+            <a:r>
+              <a:rPr lang="en-US" sz="1200" dirty="0" err="1">
+                <a:latin typeface="Arial" panose="020B0604020202020204" pitchFamily="34" charset="0"/>
+                <a:cs typeface="Arial" panose="020B0604020202020204" pitchFamily="34" charset="0"/>
+              </a:rPr>
+              <a:t>obtenemos</a:t>
+            </a:r>
+            <a:r>
+              <a:rPr lang="en-US" sz="1200" dirty="0">
+                <a:latin typeface="Arial" panose="020B0604020202020204" pitchFamily="34" charset="0"/>
+                <a:cs typeface="Arial" panose="020B0604020202020204" pitchFamily="34" charset="0"/>
+              </a:rPr>
+              <a:t> que mayor gap </a:t>
+            </a:r>
+            <a:r>
+              <a:rPr lang="en-US" sz="1200" dirty="0" err="1">
+                <a:latin typeface="Arial" panose="020B0604020202020204" pitchFamily="34" charset="0"/>
+                <a:cs typeface="Arial" panose="020B0604020202020204" pitchFamily="34" charset="0"/>
+              </a:rPr>
+              <a:t>menor</a:t>
+            </a:r>
+            <a:r>
+              <a:rPr lang="en-US" sz="1200" dirty="0">
+                <a:latin typeface="Arial" panose="020B0604020202020204" pitchFamily="34" charset="0"/>
+                <a:cs typeface="Arial" panose="020B0604020202020204" pitchFamily="34" charset="0"/>
+              </a:rPr>
+              <a:t> k.</a:t>
             </a:r>
           </a:p>
           <a:p>
             <a:pPr algn="just"/>
-            <a:br>
-              <a:rPr lang="en-US" sz="1200" dirty="0">
-                <a:latin typeface="Arial" panose="020B0604020202020204" pitchFamily="34" charset="0"/>
-                <a:cs typeface="Arial" panose="020B0604020202020204" pitchFamily="34" charset="0"/>
-              </a:rPr>
-            </a:br>
-            <a:endParaRPr lang="en-US" sz="1200" dirty="0">
-              <a:latin typeface="Arial" panose="020B0604020202020204" pitchFamily="34" charset="0"/>
-              <a:cs typeface="Arial" panose="020B0604020202020204" pitchFamily="34" charset="0"/>
-            </a:endParaRPr>
+            <a:r>
+              <a:rPr lang="en-US" sz="1200" dirty="0">
+                <a:latin typeface="Arial" panose="020B0604020202020204" pitchFamily="34" charset="0"/>
+                <a:cs typeface="Arial" panose="020B0604020202020204" pitchFamily="34" charset="0"/>
+              </a:rPr>
+              <a:t>Con un gap de 2.6 um se </a:t>
+            </a:r>
+            <a:r>
+              <a:rPr lang="en-US" sz="1200" dirty="0" err="1">
+                <a:latin typeface="Arial" panose="020B0604020202020204" pitchFamily="34" charset="0"/>
+                <a:cs typeface="Arial" panose="020B0604020202020204" pitchFamily="34" charset="0"/>
+              </a:rPr>
+              <a:t>tiene</a:t>
+            </a:r>
+            <a:r>
+              <a:rPr lang="en-US" sz="1200" dirty="0">
+                <a:latin typeface="Arial" panose="020B0604020202020204" pitchFamily="34" charset="0"/>
+                <a:cs typeface="Arial" panose="020B0604020202020204" pitchFamily="34" charset="0"/>
+              </a:rPr>
+              <a:t> un gran </a:t>
+            </a:r>
+            <a:r>
+              <a:rPr lang="en-US" sz="1200" dirty="0" err="1">
+                <a:latin typeface="Arial" panose="020B0604020202020204" pitchFamily="34" charset="0"/>
+                <a:cs typeface="Arial" panose="020B0604020202020204" pitchFamily="34" charset="0"/>
+              </a:rPr>
+              <a:t>acoplamiento</a:t>
+            </a:r>
+            <a:r>
+              <a:rPr lang="en-US" sz="1200" dirty="0">
+                <a:latin typeface="Arial" panose="020B0604020202020204" pitchFamily="34" charset="0"/>
+                <a:cs typeface="Arial" panose="020B0604020202020204" pitchFamily="34" charset="0"/>
+              </a:rPr>
+              <a:t> (K= 0.82), </a:t>
+            </a:r>
+            <a:r>
+              <a:rPr lang="en-US" sz="1200" dirty="0" err="1">
+                <a:latin typeface="Arial" panose="020B0604020202020204" pitchFamily="34" charset="0"/>
+                <a:cs typeface="Arial" panose="020B0604020202020204" pitchFamily="34" charset="0"/>
+              </a:rPr>
+              <a:t>mientras</a:t>
+            </a:r>
+            <a:r>
+              <a:rPr lang="en-US" sz="1200" dirty="0">
+                <a:latin typeface="Arial" panose="020B0604020202020204" pitchFamily="34" charset="0"/>
+                <a:cs typeface="Arial" panose="020B0604020202020204" pitchFamily="34" charset="0"/>
+              </a:rPr>
+              <a:t> que </a:t>
+            </a:r>
+            <a:r>
+              <a:rPr lang="en-US" sz="1200" dirty="0" err="1">
+                <a:latin typeface="Arial" panose="020B0604020202020204" pitchFamily="34" charset="0"/>
+                <a:cs typeface="Arial" panose="020B0604020202020204" pitchFamily="34" charset="0"/>
+              </a:rPr>
+              <a:t>avanzando</a:t>
+            </a:r>
+            <a:r>
+              <a:rPr lang="en-US" sz="1200" dirty="0">
+                <a:latin typeface="Arial" panose="020B0604020202020204" pitchFamily="34" charset="0"/>
+                <a:cs typeface="Arial" panose="020B0604020202020204" pitchFamily="34" charset="0"/>
+              </a:rPr>
+              <a:t> </a:t>
+            </a:r>
+            <a:r>
+              <a:rPr lang="en-US" sz="1200" dirty="0" err="1">
+                <a:latin typeface="Arial" panose="020B0604020202020204" pitchFamily="34" charset="0"/>
+                <a:cs typeface="Arial" panose="020B0604020202020204" pitchFamily="34" charset="0"/>
+              </a:rPr>
+              <a:t>llegamos</a:t>
+            </a:r>
+            <a:r>
+              <a:rPr lang="en-US" sz="1200" dirty="0">
+                <a:latin typeface="Arial" panose="020B0604020202020204" pitchFamily="34" charset="0"/>
+                <a:cs typeface="Arial" panose="020B0604020202020204" pitchFamily="34" charset="0"/>
+              </a:rPr>
+              <a:t> a pasar </a:t>
+            </a:r>
+            <a:r>
+              <a:rPr lang="en-US" sz="1200" dirty="0" err="1">
+                <a:latin typeface="Arial" panose="020B0604020202020204" pitchFamily="34" charset="0"/>
+                <a:cs typeface="Arial" panose="020B0604020202020204" pitchFamily="34" charset="0"/>
+              </a:rPr>
+              <a:t>el</a:t>
+            </a:r>
+            <a:r>
+              <a:rPr lang="en-US" sz="1200" dirty="0">
+                <a:latin typeface="Arial" panose="020B0604020202020204" pitchFamily="34" charset="0"/>
+                <a:cs typeface="Arial" panose="020B0604020202020204" pitchFamily="34" charset="0"/>
+              </a:rPr>
+              <a:t> umbral (K=0.01)  con un gap de 3.6 um.</a:t>
+            </a:r>
           </a:p>
           <a:p>
             <a:pPr algn="just"/>
-            <a:endParaRPr lang="en-US" sz="1200" dirty="0">
-              <a:latin typeface="Arial" panose="020B0604020202020204" pitchFamily="34" charset="0"/>
-              <a:cs typeface="Arial" panose="020B0604020202020204" pitchFamily="34" charset="0"/>
-            </a:endParaRPr>
+            <a:r>
+              <a:rPr lang="en-US" sz="1200" dirty="0">
+                <a:latin typeface="Arial" panose="020B0604020202020204" pitchFamily="34" charset="0"/>
+                <a:cs typeface="Arial" panose="020B0604020202020204" pitchFamily="34" charset="0"/>
+              </a:rPr>
+              <a:t>Para una </a:t>
+            </a:r>
+            <a:r>
+              <a:rPr lang="en-US" sz="1200" dirty="0" err="1">
+                <a:latin typeface="Arial" panose="020B0604020202020204" pitchFamily="34" charset="0"/>
+                <a:cs typeface="Arial" panose="020B0604020202020204" pitchFamily="34" charset="0"/>
+              </a:rPr>
+              <a:t>distancia</a:t>
+            </a:r>
+            <a:r>
+              <a:rPr lang="en-US" sz="1200" dirty="0">
+                <a:latin typeface="Arial" panose="020B0604020202020204" pitchFamily="34" charset="0"/>
+                <a:cs typeface="Arial" panose="020B0604020202020204" pitchFamily="34" charset="0"/>
+              </a:rPr>
+              <a:t> de 10 mm con </a:t>
+            </a:r>
+            <a:r>
+              <a:rPr lang="en-US" sz="1200" dirty="0" err="1">
+                <a:latin typeface="Arial" panose="020B0604020202020204" pitchFamily="34" charset="0"/>
+                <a:cs typeface="Arial" panose="020B0604020202020204" pitchFamily="34" charset="0"/>
+              </a:rPr>
+              <a:t>cualquier</a:t>
+            </a:r>
+            <a:r>
+              <a:rPr lang="en-US" sz="1200" dirty="0">
+                <a:latin typeface="Arial" panose="020B0604020202020204" pitchFamily="34" charset="0"/>
+                <a:cs typeface="Arial" panose="020B0604020202020204" pitchFamily="34" charset="0"/>
+              </a:rPr>
+              <a:t> gap inferior a 3.6 um </a:t>
+            </a:r>
+            <a:r>
+              <a:rPr lang="en-US" sz="1200" dirty="0" err="1">
+                <a:latin typeface="Arial" panose="020B0604020202020204" pitchFamily="34" charset="0"/>
+                <a:cs typeface="Arial" panose="020B0604020202020204" pitchFamily="34" charset="0"/>
+              </a:rPr>
+              <a:t>tendríamos</a:t>
+            </a:r>
+            <a:r>
+              <a:rPr lang="en-US" sz="1200" dirty="0">
+                <a:latin typeface="Arial" panose="020B0604020202020204" pitchFamily="34" charset="0"/>
+                <a:cs typeface="Arial" panose="020B0604020202020204" pitchFamily="34" charset="0"/>
+              </a:rPr>
+              <a:t> una </a:t>
+            </a:r>
+            <a:r>
+              <a:rPr lang="en-US" sz="1200" dirty="0" err="1">
+                <a:latin typeface="Arial" panose="020B0604020202020204" pitchFamily="34" charset="0"/>
+                <a:cs typeface="Arial" panose="020B0604020202020204" pitchFamily="34" charset="0"/>
+              </a:rPr>
+              <a:t>transferencia</a:t>
+            </a:r>
+            <a:r>
+              <a:rPr lang="en-US" sz="1200" dirty="0">
+                <a:latin typeface="Arial" panose="020B0604020202020204" pitchFamily="34" charset="0"/>
+                <a:cs typeface="Arial" panose="020B0604020202020204" pitchFamily="34" charset="0"/>
+              </a:rPr>
+              <a:t> de </a:t>
+            </a:r>
+            <a:r>
+              <a:rPr lang="en-US" sz="1200" dirty="0" err="1">
+                <a:latin typeface="Arial" panose="020B0604020202020204" pitchFamily="34" charset="0"/>
+                <a:cs typeface="Arial" panose="020B0604020202020204" pitchFamily="34" charset="0"/>
+              </a:rPr>
+              <a:t>energía</a:t>
+            </a:r>
+            <a:r>
+              <a:rPr lang="en-US" sz="1200" dirty="0">
+                <a:latin typeface="Arial" panose="020B0604020202020204" pitchFamily="34" charset="0"/>
+                <a:cs typeface="Arial" panose="020B0604020202020204" pitchFamily="34" charset="0"/>
+              </a:rPr>
+              <a:t> </a:t>
+            </a:r>
+            <a:r>
+              <a:rPr lang="en-US" sz="1200" dirty="0" err="1">
+                <a:latin typeface="Arial" panose="020B0604020202020204" pitchFamily="34" charset="0"/>
+                <a:cs typeface="Arial" panose="020B0604020202020204" pitchFamily="34" charset="0"/>
+              </a:rPr>
+              <a:t>superipor</a:t>
+            </a:r>
+            <a:r>
+              <a:rPr lang="en-US" sz="1200" dirty="0">
+                <a:latin typeface="Arial" panose="020B0604020202020204" pitchFamily="34" charset="0"/>
+                <a:cs typeface="Arial" panose="020B0604020202020204" pitchFamily="34" charset="0"/>
+              </a:rPr>
+              <a:t> a un 1%.</a:t>
+            </a:r>
           </a:p>
         </p:txBody>
       </p:sp>
@@ -16012,8 +17512,8 @@
         </p:nvSpPr>
         <p:spPr>
           <a:xfrm>
-            <a:off x="609441" y="1219200"/>
-            <a:ext cx="5486559" cy="3306028"/>
+            <a:off x="609442" y="1219200"/>
+            <a:ext cx="5334000" cy="2780014"/>
           </a:xfrm>
           <a:prstGeom prst="rect">
             <a:avLst/>
@@ -16064,8 +17564,8 @@
         </p:nvSpPr>
         <p:spPr>
           <a:xfrm>
-            <a:off x="6321424" y="1219200"/>
-            <a:ext cx="5486559" cy="3306028"/>
+            <a:off x="6459393" y="1219200"/>
+            <a:ext cx="5394580" cy="2780014"/>
           </a:xfrm>
           <a:prstGeom prst="rect">
             <a:avLst/>
@@ -16362,7 +17862,7 @@
         </p:nvSpPr>
         <p:spPr>
           <a:xfrm>
-            <a:off x="7833179" y="2169209"/>
+            <a:off x="7756799" y="1913436"/>
             <a:ext cx="2956921" cy="1685937"/>
           </a:xfrm>
           <a:prstGeom prst="mathMultiply">
@@ -16424,8 +17924,8 @@
         </p:blipFill>
         <p:spPr>
           <a:xfrm>
-            <a:off x="806524" y="1393751"/>
-            <a:ext cx="5206453" cy="2898628"/>
+            <a:off x="885671" y="1331924"/>
+            <a:ext cx="4679876" cy="2605463"/>
           </a:xfrm>
           <a:prstGeom prst="rect">
             <a:avLst/>
@@ -16788,7 +18288,7 @@
         <p:spPr>
           <a:xfrm>
             <a:off x="609441" y="4819471"/>
-            <a:ext cx="11199971" cy="1200329"/>
+            <a:ext cx="11199971" cy="1384995"/>
           </a:xfrm>
           <a:prstGeom prst="rect">
             <a:avLst/>
@@ -16835,10 +18335,258 @@
           </a:p>
           <a:p>
             <a:pPr algn="just"/>
-            <a:endParaRPr lang="en-US" sz="1200" dirty="0">
-              <a:latin typeface="Arial" panose="020B0604020202020204" pitchFamily="34" charset="0"/>
-              <a:cs typeface="Arial" panose="020B0604020202020204" pitchFamily="34" charset="0"/>
-            </a:endParaRPr>
+            <a:r>
+              <a:rPr lang="en-US" sz="1200" dirty="0" err="1">
+                <a:latin typeface="Arial" panose="020B0604020202020204" pitchFamily="34" charset="0"/>
+                <a:cs typeface="Arial" panose="020B0604020202020204" pitchFamily="34" charset="0"/>
+              </a:rPr>
+              <a:t>En</a:t>
+            </a:r>
+            <a:r>
+              <a:rPr lang="en-US" sz="1200" dirty="0">
+                <a:latin typeface="Arial" panose="020B0604020202020204" pitchFamily="34" charset="0"/>
+                <a:cs typeface="Arial" panose="020B0604020202020204" pitchFamily="34" charset="0"/>
+              </a:rPr>
+              <a:t> </a:t>
+            </a:r>
+            <a:r>
+              <a:rPr lang="en-US" sz="1200" dirty="0" err="1">
+                <a:latin typeface="Arial" panose="020B0604020202020204" pitchFamily="34" charset="0"/>
+                <a:cs typeface="Arial" panose="020B0604020202020204" pitchFamily="34" charset="0"/>
+              </a:rPr>
+              <a:t>este</a:t>
+            </a:r>
+            <a:r>
+              <a:rPr lang="en-US" sz="1200" dirty="0">
+                <a:latin typeface="Arial" panose="020B0604020202020204" pitchFamily="34" charset="0"/>
+                <a:cs typeface="Arial" panose="020B0604020202020204" pitchFamily="34" charset="0"/>
+              </a:rPr>
+              <a:t> </a:t>
+            </a:r>
+            <a:r>
+              <a:rPr lang="en-US" sz="1200" dirty="0" err="1">
+                <a:latin typeface="Arial" panose="020B0604020202020204" pitchFamily="34" charset="0"/>
+                <a:cs typeface="Arial" panose="020B0604020202020204" pitchFamily="34" charset="0"/>
+              </a:rPr>
+              <a:t>ejercicio</a:t>
+            </a:r>
+            <a:r>
+              <a:rPr lang="en-US" sz="1200" dirty="0">
+                <a:latin typeface="Arial" panose="020B0604020202020204" pitchFamily="34" charset="0"/>
+                <a:cs typeface="Arial" panose="020B0604020202020204" pitchFamily="34" charset="0"/>
+              </a:rPr>
+              <a:t> </a:t>
+            </a:r>
+            <a:r>
+              <a:rPr lang="en-US" sz="1200" dirty="0" err="1">
+                <a:latin typeface="Arial" panose="020B0604020202020204" pitchFamily="34" charset="0"/>
+                <a:cs typeface="Arial" panose="020B0604020202020204" pitchFamily="34" charset="0"/>
+              </a:rPr>
+              <a:t>henmos</a:t>
+            </a:r>
+            <a:r>
+              <a:rPr lang="en-US" sz="1200" dirty="0">
+                <a:latin typeface="Arial" panose="020B0604020202020204" pitchFamily="34" charset="0"/>
+                <a:cs typeface="Arial" panose="020B0604020202020204" pitchFamily="34" charset="0"/>
+              </a:rPr>
+              <a:t> </a:t>
+            </a:r>
+            <a:r>
+              <a:rPr lang="en-US" sz="1200" dirty="0" err="1">
+                <a:latin typeface="Arial" panose="020B0604020202020204" pitchFamily="34" charset="0"/>
+                <a:cs typeface="Arial" panose="020B0604020202020204" pitchFamily="34" charset="0"/>
+              </a:rPr>
+              <a:t>simulado</a:t>
+            </a:r>
+            <a:r>
+              <a:rPr lang="en-US" sz="1200" dirty="0">
+                <a:latin typeface="Arial" panose="020B0604020202020204" pitchFamily="34" charset="0"/>
+                <a:cs typeface="Arial" panose="020B0604020202020204" pitchFamily="34" charset="0"/>
+              </a:rPr>
+              <a:t> </a:t>
+            </a:r>
+            <a:r>
+              <a:rPr lang="en-US" sz="1200" dirty="0" err="1">
+                <a:latin typeface="Arial" panose="020B0604020202020204" pitchFamily="34" charset="0"/>
+                <a:cs typeface="Arial" panose="020B0604020202020204" pitchFamily="34" charset="0"/>
+              </a:rPr>
+              <a:t>el</a:t>
+            </a:r>
+            <a:r>
+              <a:rPr lang="en-US" sz="1200" dirty="0">
+                <a:latin typeface="Arial" panose="020B0604020202020204" pitchFamily="34" charset="0"/>
+                <a:cs typeface="Arial" panose="020B0604020202020204" pitchFamily="34" charset="0"/>
+              </a:rPr>
+              <a:t> </a:t>
+            </a:r>
+            <a:r>
+              <a:rPr lang="en-US" sz="1200" dirty="0" err="1">
+                <a:latin typeface="Arial" panose="020B0604020202020204" pitchFamily="34" charset="0"/>
+                <a:cs typeface="Arial" panose="020B0604020202020204" pitchFamily="34" charset="0"/>
+              </a:rPr>
+              <a:t>comportamiento</a:t>
+            </a:r>
+            <a:r>
+              <a:rPr lang="en-US" sz="1200" dirty="0">
+                <a:latin typeface="Arial" panose="020B0604020202020204" pitchFamily="34" charset="0"/>
+                <a:cs typeface="Arial" panose="020B0604020202020204" pitchFamily="34" charset="0"/>
+              </a:rPr>
+              <a:t> de un MMI. </a:t>
+            </a:r>
+            <a:r>
+              <a:rPr lang="en-US" sz="1200" dirty="0" err="1">
+                <a:latin typeface="Arial" panose="020B0604020202020204" pitchFamily="34" charset="0"/>
+                <a:cs typeface="Arial" panose="020B0604020202020204" pitchFamily="34" charset="0"/>
+              </a:rPr>
+              <a:t>En</a:t>
+            </a:r>
+            <a:r>
+              <a:rPr lang="en-US" sz="1200" dirty="0">
+                <a:latin typeface="Arial" panose="020B0604020202020204" pitchFamily="34" charset="0"/>
+                <a:cs typeface="Arial" panose="020B0604020202020204" pitchFamily="34" charset="0"/>
+              </a:rPr>
+              <a:t> </a:t>
+            </a:r>
+            <a:r>
+              <a:rPr lang="en-US" sz="1200" dirty="0" err="1">
+                <a:latin typeface="Arial" panose="020B0604020202020204" pitchFamily="34" charset="0"/>
+                <a:cs typeface="Arial" panose="020B0604020202020204" pitchFamily="34" charset="0"/>
+              </a:rPr>
+              <a:t>esta</a:t>
+            </a:r>
+            <a:r>
+              <a:rPr lang="en-US" sz="1200" dirty="0">
+                <a:latin typeface="Arial" panose="020B0604020202020204" pitchFamily="34" charset="0"/>
+                <a:cs typeface="Arial" panose="020B0604020202020204" pitchFamily="34" charset="0"/>
+              </a:rPr>
+              <a:t> </a:t>
+            </a:r>
+            <a:r>
+              <a:rPr lang="en-US" sz="1200" dirty="0" err="1">
+                <a:latin typeface="Arial" panose="020B0604020202020204" pitchFamily="34" charset="0"/>
+                <a:cs typeface="Arial" panose="020B0604020202020204" pitchFamily="34" charset="0"/>
+              </a:rPr>
+              <a:t>primera</a:t>
+            </a:r>
+            <a:r>
+              <a:rPr lang="en-US" sz="1200" dirty="0">
+                <a:latin typeface="Arial" panose="020B0604020202020204" pitchFamily="34" charset="0"/>
+                <a:cs typeface="Arial" panose="020B0604020202020204" pitchFamily="34" charset="0"/>
+              </a:rPr>
+              <a:t> </a:t>
+            </a:r>
+            <a:r>
+              <a:rPr lang="en-US" sz="1200" dirty="0" err="1">
+                <a:latin typeface="Arial" panose="020B0604020202020204" pitchFamily="34" charset="0"/>
+                <a:cs typeface="Arial" panose="020B0604020202020204" pitchFamily="34" charset="0"/>
+              </a:rPr>
+              <a:t>simulación</a:t>
+            </a:r>
+            <a:r>
+              <a:rPr lang="en-US" sz="1200" dirty="0">
+                <a:latin typeface="Arial" panose="020B0604020202020204" pitchFamily="34" charset="0"/>
+                <a:cs typeface="Arial" panose="020B0604020202020204" pitchFamily="34" charset="0"/>
+              </a:rPr>
+              <a:t> </a:t>
+            </a:r>
+            <a:r>
+              <a:rPr lang="en-US" sz="1200" dirty="0" err="1">
+                <a:latin typeface="Arial" panose="020B0604020202020204" pitchFamily="34" charset="0"/>
+                <a:cs typeface="Arial" panose="020B0604020202020204" pitchFamily="34" charset="0"/>
+              </a:rPr>
+              <a:t>hemos</a:t>
+            </a:r>
+            <a:r>
+              <a:rPr lang="en-US" sz="1200" dirty="0">
+                <a:latin typeface="Arial" panose="020B0604020202020204" pitchFamily="34" charset="0"/>
+                <a:cs typeface="Arial" panose="020B0604020202020204" pitchFamily="34" charset="0"/>
+              </a:rPr>
+              <a:t> </a:t>
+            </a:r>
+            <a:r>
+              <a:rPr lang="en-US" sz="1200" dirty="0" err="1">
+                <a:latin typeface="Arial" panose="020B0604020202020204" pitchFamily="34" charset="0"/>
+                <a:cs typeface="Arial" panose="020B0604020202020204" pitchFamily="34" charset="0"/>
+              </a:rPr>
+              <a:t>obtenido</a:t>
+            </a:r>
+            <a:r>
+              <a:rPr lang="en-US" sz="1200" dirty="0">
+                <a:latin typeface="Arial" panose="020B0604020202020204" pitchFamily="34" charset="0"/>
+                <a:cs typeface="Arial" panose="020B0604020202020204" pitchFamily="34" charset="0"/>
+              </a:rPr>
+              <a:t> un valor </a:t>
+            </a:r>
+            <a:r>
+              <a:rPr lang="en-US" sz="1200" dirty="0" err="1">
+                <a:latin typeface="Arial" panose="020B0604020202020204" pitchFamily="34" charset="0"/>
+                <a:cs typeface="Arial" panose="020B0604020202020204" pitchFamily="34" charset="0"/>
+              </a:rPr>
+              <a:t>aún</a:t>
+            </a:r>
+            <a:r>
+              <a:rPr lang="en-US" sz="1200" dirty="0">
+                <a:latin typeface="Arial" panose="020B0604020202020204" pitchFamily="34" charset="0"/>
+                <a:cs typeface="Arial" panose="020B0604020202020204" pitchFamily="34" charset="0"/>
+              </a:rPr>
+              <a:t> </a:t>
+            </a:r>
+            <a:r>
+              <a:rPr lang="en-US" sz="1200" dirty="0" err="1">
+                <a:latin typeface="Arial" panose="020B0604020202020204" pitchFamily="34" charset="0"/>
+                <a:cs typeface="Arial" panose="020B0604020202020204" pitchFamily="34" charset="0"/>
+              </a:rPr>
+              <a:t>mejorable</a:t>
+            </a:r>
+            <a:r>
+              <a:rPr lang="en-US" sz="1200" dirty="0">
+                <a:latin typeface="Arial" panose="020B0604020202020204" pitchFamily="34" charset="0"/>
+                <a:cs typeface="Arial" panose="020B0604020202020204" pitchFamily="34" charset="0"/>
+              </a:rPr>
+              <a:t> </a:t>
+            </a:r>
+            <a:r>
+              <a:rPr lang="en-US" sz="1200" dirty="0" err="1">
+                <a:latin typeface="Arial" panose="020B0604020202020204" pitchFamily="34" charset="0"/>
+                <a:cs typeface="Arial" panose="020B0604020202020204" pitchFamily="34" charset="0"/>
+              </a:rPr>
+              <a:t>en</a:t>
+            </a:r>
+            <a:r>
+              <a:rPr lang="en-US" sz="1200" dirty="0">
+                <a:latin typeface="Arial" panose="020B0604020202020204" pitchFamily="34" charset="0"/>
+                <a:cs typeface="Arial" panose="020B0604020202020204" pitchFamily="34" charset="0"/>
+              </a:rPr>
+              <a:t> </a:t>
+            </a:r>
+            <a:r>
+              <a:rPr lang="en-US" sz="1200" dirty="0" err="1">
+                <a:latin typeface="Arial" panose="020B0604020202020204" pitchFamily="34" charset="0"/>
+                <a:cs typeface="Arial" panose="020B0604020202020204" pitchFamily="34" charset="0"/>
+              </a:rPr>
+              <a:t>cuanto</a:t>
+            </a:r>
+            <a:r>
+              <a:rPr lang="en-US" sz="1200" dirty="0">
+                <a:latin typeface="Arial" panose="020B0604020202020204" pitchFamily="34" charset="0"/>
+                <a:cs typeface="Arial" panose="020B0604020202020204" pitchFamily="34" charset="0"/>
+              </a:rPr>
+              <a:t> a </a:t>
+            </a:r>
+            <a:r>
+              <a:rPr lang="en-US" sz="1200" dirty="0" err="1">
+                <a:latin typeface="Arial" panose="020B0604020202020204" pitchFamily="34" charset="0"/>
+                <a:cs typeface="Arial" panose="020B0604020202020204" pitchFamily="34" charset="0"/>
+              </a:rPr>
+              <a:t>pérdidas</a:t>
+            </a:r>
+            <a:r>
+              <a:rPr lang="en-US" sz="1200" dirty="0">
+                <a:latin typeface="Arial" panose="020B0604020202020204" pitchFamily="34" charset="0"/>
+                <a:cs typeface="Arial" panose="020B0604020202020204" pitchFamily="34" charset="0"/>
+              </a:rPr>
+              <a:t> y ratio.</a:t>
+            </a:r>
           </a:p>
           <a:p>
             <a:pPr algn="just"/>
@@ -16849,24 +18597,311 @@
           </a:p>
           <a:p>
             <a:pPr algn="just"/>
-            <a:endParaRPr lang="en-US" sz="1200" dirty="0">
-              <a:latin typeface="Arial" panose="020B0604020202020204" pitchFamily="34" charset="0"/>
-              <a:cs typeface="Arial" panose="020B0604020202020204" pitchFamily="34" charset="0"/>
-            </a:endParaRPr>
+            <a:r>
+              <a:rPr lang="en-US" sz="1200" dirty="0">
+                <a:latin typeface="Arial" panose="020B0604020202020204" pitchFamily="34" charset="0"/>
+                <a:cs typeface="Arial" panose="020B0604020202020204" pitchFamily="34" charset="0"/>
+              </a:rPr>
+              <a:t>- </a:t>
+            </a:r>
+            <a:r>
+              <a:rPr lang="en-US" sz="1200" dirty="0" err="1">
+                <a:latin typeface="Arial" panose="020B0604020202020204" pitchFamily="34" charset="0"/>
+                <a:cs typeface="Arial" panose="020B0604020202020204" pitchFamily="34" charset="0"/>
+              </a:rPr>
+              <a:t>Hemos</a:t>
+            </a:r>
+            <a:r>
+              <a:rPr lang="en-US" sz="1200" dirty="0">
+                <a:latin typeface="Arial" panose="020B0604020202020204" pitchFamily="34" charset="0"/>
+                <a:cs typeface="Arial" panose="020B0604020202020204" pitchFamily="34" charset="0"/>
+              </a:rPr>
+              <a:t> </a:t>
+            </a:r>
+            <a:r>
+              <a:rPr lang="en-US" sz="1200" dirty="0" err="1">
+                <a:latin typeface="Arial" panose="020B0604020202020204" pitchFamily="34" charset="0"/>
+                <a:cs typeface="Arial" panose="020B0604020202020204" pitchFamily="34" charset="0"/>
+              </a:rPr>
+              <a:t>obtenido</a:t>
+            </a:r>
+            <a:r>
+              <a:rPr lang="en-US" sz="1200" dirty="0">
+                <a:latin typeface="Arial" panose="020B0604020202020204" pitchFamily="34" charset="0"/>
+                <a:cs typeface="Arial" panose="020B0604020202020204" pitchFamily="34" charset="0"/>
+              </a:rPr>
+              <a:t> una </a:t>
+            </a:r>
+            <a:r>
+              <a:rPr lang="en-US" sz="1200" dirty="0" err="1">
+                <a:latin typeface="Arial" panose="020B0604020202020204" pitchFamily="34" charset="0"/>
+                <a:cs typeface="Arial" panose="020B0604020202020204" pitchFamily="34" charset="0"/>
+              </a:rPr>
+              <a:t>relación</a:t>
+            </a:r>
+            <a:r>
+              <a:rPr lang="en-US" sz="1200" dirty="0">
+                <a:latin typeface="Arial" panose="020B0604020202020204" pitchFamily="34" charset="0"/>
+                <a:cs typeface="Arial" panose="020B0604020202020204" pitchFamily="34" charset="0"/>
+              </a:rPr>
+              <a:t> de </a:t>
+            </a:r>
+            <a:r>
+              <a:rPr lang="en-US" sz="1200" dirty="0" err="1">
+                <a:latin typeface="Arial" panose="020B0604020202020204" pitchFamily="34" charset="0"/>
+                <a:cs typeface="Arial" panose="020B0604020202020204" pitchFamily="34" charset="0"/>
+              </a:rPr>
+              <a:t>acoplo</a:t>
+            </a:r>
+            <a:r>
+              <a:rPr lang="en-US" sz="1200" dirty="0">
+                <a:latin typeface="Arial" panose="020B0604020202020204" pitchFamily="34" charset="0"/>
+                <a:cs typeface="Arial" panose="020B0604020202020204" pitchFamily="34" charset="0"/>
+              </a:rPr>
+              <a:t> de </a:t>
+            </a:r>
+            <a:r>
+              <a:rPr lang="es-ES" sz="1200" b="0" i="0" dirty="0">
+                <a:solidFill>
+                  <a:schemeClr val="dk1"/>
+                </a:solidFill>
+                <a:effectLst/>
+                <a:latin typeface="+mn-lt"/>
+                <a:ea typeface="+mn-ea"/>
+                <a:cs typeface="+mn-cs"/>
+              </a:rPr>
+              <a:t>0.5152/0.4848 quedándonos un poco distantes del ideal 50/50.</a:t>
+            </a:r>
           </a:p>
           <a:p>
             <a:pPr algn="just"/>
-            <a:endParaRPr lang="en-US" sz="1200" dirty="0">
-              <a:latin typeface="Arial" panose="020B0604020202020204" pitchFamily="34" charset="0"/>
-              <a:cs typeface="Arial" panose="020B0604020202020204" pitchFamily="34" charset="0"/>
-            </a:endParaRPr>
+            <a:r>
+              <a:rPr lang="en-US" sz="1200" dirty="0">
+                <a:latin typeface="Arial" panose="020B0604020202020204" pitchFamily="34" charset="0"/>
+                <a:cs typeface="Arial" panose="020B0604020202020204" pitchFamily="34" charset="0"/>
+              </a:rPr>
+              <a:t>- </a:t>
+            </a:r>
+            <a:r>
+              <a:rPr lang="en-US" sz="1200" dirty="0" err="1">
+                <a:latin typeface="Arial" panose="020B0604020202020204" pitchFamily="34" charset="0"/>
+                <a:cs typeface="Arial" panose="020B0604020202020204" pitchFamily="34" charset="0"/>
+              </a:rPr>
+              <a:t>Tenemos</a:t>
+            </a:r>
+            <a:r>
+              <a:rPr lang="en-US" sz="1200" dirty="0">
+                <a:latin typeface="Arial" panose="020B0604020202020204" pitchFamily="34" charset="0"/>
+                <a:cs typeface="Arial" panose="020B0604020202020204" pitchFamily="34" charset="0"/>
+              </a:rPr>
+              <a:t> 0.4217 dB de </a:t>
+            </a:r>
+            <a:r>
+              <a:rPr lang="en-US" sz="1200" dirty="0" err="1">
+                <a:latin typeface="Arial" panose="020B0604020202020204" pitchFamily="34" charset="0"/>
+                <a:cs typeface="Arial" panose="020B0604020202020204" pitchFamily="34" charset="0"/>
+              </a:rPr>
+              <a:t>pérdidas</a:t>
+            </a:r>
+            <a:r>
+              <a:rPr lang="en-US" sz="1200" dirty="0">
+                <a:latin typeface="Arial" panose="020B0604020202020204" pitchFamily="34" charset="0"/>
+                <a:cs typeface="Arial" panose="020B0604020202020204" pitchFamily="34" charset="0"/>
+              </a:rPr>
+              <a:t> </a:t>
+            </a:r>
+            <a:r>
+              <a:rPr lang="en-US" sz="1200" dirty="0" err="1">
+                <a:latin typeface="Arial" panose="020B0604020202020204" pitchFamily="34" charset="0"/>
+                <a:cs typeface="Arial" panose="020B0604020202020204" pitchFamily="34" charset="0"/>
+              </a:rPr>
+              <a:t>dejándonos</a:t>
+            </a:r>
+            <a:r>
+              <a:rPr lang="en-US" sz="1200" dirty="0">
+                <a:latin typeface="Arial" panose="020B0604020202020204" pitchFamily="34" charset="0"/>
+                <a:cs typeface="Arial" panose="020B0604020202020204" pitchFamily="34" charset="0"/>
+              </a:rPr>
+              <a:t> un </a:t>
+            </a:r>
+            <a:r>
+              <a:rPr lang="en-US" sz="1200" dirty="0" err="1">
+                <a:latin typeface="Arial" panose="020B0604020202020204" pitchFamily="34" charset="0"/>
+                <a:cs typeface="Arial" panose="020B0604020202020204" pitchFamily="34" charset="0"/>
+              </a:rPr>
+              <a:t>margen</a:t>
+            </a:r>
+            <a:r>
+              <a:rPr lang="en-US" sz="1200" dirty="0">
+                <a:latin typeface="Arial" panose="020B0604020202020204" pitchFamily="34" charset="0"/>
+                <a:cs typeface="Arial" panose="020B0604020202020204" pitchFamily="34" charset="0"/>
+              </a:rPr>
+              <a:t> de </a:t>
+            </a:r>
+            <a:r>
+              <a:rPr lang="en-US" sz="1200" dirty="0" err="1">
+                <a:latin typeface="Arial" panose="020B0604020202020204" pitchFamily="34" charset="0"/>
+                <a:cs typeface="Arial" panose="020B0604020202020204" pitchFamily="34" charset="0"/>
+              </a:rPr>
+              <a:t>mejora</a:t>
+            </a:r>
+            <a:r>
+              <a:rPr lang="en-US" sz="1200" dirty="0">
+                <a:latin typeface="Arial" panose="020B0604020202020204" pitchFamily="34" charset="0"/>
+                <a:cs typeface="Arial" panose="020B0604020202020204" pitchFamily="34" charset="0"/>
+              </a:rPr>
+              <a:t>.</a:t>
+            </a:r>
           </a:p>
           <a:p>
             <a:pPr algn="just"/>
-            <a:endParaRPr lang="en-US" sz="1200" dirty="0">
-              <a:latin typeface="Arial" panose="020B0604020202020204" pitchFamily="34" charset="0"/>
-              <a:cs typeface="Arial" panose="020B0604020202020204" pitchFamily="34" charset="0"/>
-            </a:endParaRPr>
+            <a:r>
+              <a:rPr lang="en-US" sz="1200" dirty="0">
+                <a:latin typeface="Arial" panose="020B0604020202020204" pitchFamily="34" charset="0"/>
+                <a:cs typeface="Arial" panose="020B0604020202020204" pitchFamily="34" charset="0"/>
+              </a:rPr>
+              <a:t>- Si </a:t>
+            </a:r>
+            <a:r>
+              <a:rPr lang="en-US" sz="1200" dirty="0" err="1">
+                <a:latin typeface="Arial" panose="020B0604020202020204" pitchFamily="34" charset="0"/>
+                <a:cs typeface="Arial" panose="020B0604020202020204" pitchFamily="34" charset="0"/>
+              </a:rPr>
+              <a:t>comparamos</a:t>
+            </a:r>
+            <a:r>
+              <a:rPr lang="en-US" sz="1200" dirty="0">
+                <a:latin typeface="Arial" panose="020B0604020202020204" pitchFamily="34" charset="0"/>
+                <a:cs typeface="Arial" panose="020B0604020202020204" pitchFamily="34" charset="0"/>
+              </a:rPr>
+              <a:t> la </a:t>
+            </a:r>
+            <a:r>
+              <a:rPr lang="en-US" sz="1200" dirty="0" err="1">
+                <a:latin typeface="Arial" panose="020B0604020202020204" pitchFamily="34" charset="0"/>
+                <a:cs typeface="Arial" panose="020B0604020202020204" pitchFamily="34" charset="0"/>
+              </a:rPr>
+              <a:t>geometría</a:t>
+            </a:r>
+            <a:r>
+              <a:rPr lang="en-US" sz="1200" dirty="0">
+                <a:latin typeface="Arial" panose="020B0604020202020204" pitchFamily="34" charset="0"/>
+                <a:cs typeface="Arial" panose="020B0604020202020204" pitchFamily="34" charset="0"/>
+              </a:rPr>
+              <a:t> del MMI con </a:t>
+            </a:r>
+            <a:r>
+              <a:rPr lang="en-US" sz="1200" dirty="0" err="1">
+                <a:latin typeface="Arial" panose="020B0604020202020204" pitchFamily="34" charset="0"/>
+                <a:cs typeface="Arial" panose="020B0604020202020204" pitchFamily="34" charset="0"/>
+              </a:rPr>
+              <a:t>respecto</a:t>
+            </a:r>
+            <a:r>
+              <a:rPr lang="en-US" sz="1200" dirty="0">
+                <a:latin typeface="Arial" panose="020B0604020202020204" pitchFamily="34" charset="0"/>
+                <a:cs typeface="Arial" panose="020B0604020202020204" pitchFamily="34" charset="0"/>
+              </a:rPr>
+              <a:t> al directional Coupler, </a:t>
+            </a:r>
+            <a:r>
+              <a:rPr lang="en-US" sz="1200" dirty="0" err="1">
+                <a:latin typeface="Arial" panose="020B0604020202020204" pitchFamily="34" charset="0"/>
+                <a:cs typeface="Arial" panose="020B0604020202020204" pitchFamily="34" charset="0"/>
+              </a:rPr>
+              <a:t>vemos</a:t>
+            </a:r>
+            <a:r>
+              <a:rPr lang="en-US" sz="1200" dirty="0">
+                <a:latin typeface="Arial" panose="020B0604020202020204" pitchFamily="34" charset="0"/>
+                <a:cs typeface="Arial" panose="020B0604020202020204" pitchFamily="34" charset="0"/>
+              </a:rPr>
+              <a:t> que </a:t>
+            </a:r>
+            <a:r>
+              <a:rPr lang="en-US" sz="1200" dirty="0" err="1">
+                <a:latin typeface="Arial" panose="020B0604020202020204" pitchFamily="34" charset="0"/>
+                <a:cs typeface="Arial" panose="020B0604020202020204" pitchFamily="34" charset="0"/>
+              </a:rPr>
+              <a:t>el</a:t>
+            </a:r>
+            <a:r>
+              <a:rPr lang="en-US" sz="1200" dirty="0">
+                <a:latin typeface="Arial" panose="020B0604020202020204" pitchFamily="34" charset="0"/>
+                <a:cs typeface="Arial" panose="020B0604020202020204" pitchFamily="34" charset="0"/>
+              </a:rPr>
+              <a:t> MMI es un </a:t>
+            </a:r>
+            <a:r>
+              <a:rPr lang="en-US" sz="1200" dirty="0" err="1">
+                <a:latin typeface="Arial" panose="020B0604020202020204" pitchFamily="34" charset="0"/>
+                <a:cs typeface="Arial" panose="020B0604020202020204" pitchFamily="34" charset="0"/>
+              </a:rPr>
+              <a:t>dispositivo</a:t>
+            </a:r>
+            <a:r>
+              <a:rPr lang="en-US" sz="1200" dirty="0">
+                <a:latin typeface="Arial" panose="020B0604020202020204" pitchFamily="34" charset="0"/>
+                <a:cs typeface="Arial" panose="020B0604020202020204" pitchFamily="34" charset="0"/>
+              </a:rPr>
+              <a:t> </a:t>
+            </a:r>
+            <a:r>
+              <a:rPr lang="en-US" sz="1200" dirty="0" err="1">
+                <a:latin typeface="Arial" panose="020B0604020202020204" pitchFamily="34" charset="0"/>
+                <a:cs typeface="Arial" panose="020B0604020202020204" pitchFamily="34" charset="0"/>
+              </a:rPr>
+              <a:t>más</a:t>
+            </a:r>
+            <a:r>
+              <a:rPr lang="en-US" sz="1200" dirty="0">
+                <a:latin typeface="Arial" panose="020B0604020202020204" pitchFamily="34" charset="0"/>
+                <a:cs typeface="Arial" panose="020B0604020202020204" pitchFamily="34" charset="0"/>
+              </a:rPr>
+              <a:t> </a:t>
+            </a:r>
+            <a:r>
+              <a:rPr lang="en-US" sz="1200" dirty="0" err="1">
+                <a:latin typeface="Arial" panose="020B0604020202020204" pitchFamily="34" charset="0"/>
+                <a:cs typeface="Arial" panose="020B0604020202020204" pitchFamily="34" charset="0"/>
+              </a:rPr>
+              <a:t>compacto</a:t>
+            </a:r>
+            <a:r>
+              <a:rPr lang="en-US" sz="1200" dirty="0">
+                <a:latin typeface="Arial" panose="020B0604020202020204" pitchFamily="34" charset="0"/>
+                <a:cs typeface="Arial" panose="020B0604020202020204" pitchFamily="34" charset="0"/>
+              </a:rPr>
+              <a:t>, </a:t>
+            </a:r>
+            <a:r>
+              <a:rPr lang="en-US" sz="1200" dirty="0" err="1">
+                <a:latin typeface="Arial" panose="020B0604020202020204" pitchFamily="34" charset="0"/>
+                <a:cs typeface="Arial" panose="020B0604020202020204" pitchFamily="34" charset="0"/>
+              </a:rPr>
+              <a:t>comparamos</a:t>
+            </a:r>
+            <a:r>
+              <a:rPr lang="en-US" sz="1200" dirty="0">
+                <a:latin typeface="Arial" panose="020B0604020202020204" pitchFamily="34" charset="0"/>
+                <a:cs typeface="Arial" panose="020B0604020202020204" pitchFamily="34" charset="0"/>
+              </a:rPr>
+              <a:t> 34,5180 um del MMI </a:t>
+            </a:r>
+            <a:r>
+              <a:rPr lang="en-US" sz="1200" dirty="0" err="1">
+                <a:latin typeface="Arial" panose="020B0604020202020204" pitchFamily="34" charset="0"/>
+                <a:cs typeface="Arial" panose="020B0604020202020204" pitchFamily="34" charset="0"/>
+              </a:rPr>
+              <a:t>respecto</a:t>
+            </a:r>
+            <a:r>
+              <a:rPr lang="en-US" sz="1200" dirty="0">
+                <a:latin typeface="Arial" panose="020B0604020202020204" pitchFamily="34" charset="0"/>
+                <a:cs typeface="Arial" panose="020B0604020202020204" pitchFamily="34" charset="0"/>
+              </a:rPr>
+              <a:t> a 94.03 um de un directional coupler con un gap de 0.6 um. </a:t>
+            </a:r>
           </a:p>
         </p:txBody>
       </p:sp>
@@ -16997,7 +19032,7 @@
           <p:nvPr>
             <p:extLst>
               <p:ext uri="{D42A27DB-BD31-4B8C-83A1-F6EECF244321}">
-                <p14:modId xmlns:p14="http://schemas.microsoft.com/office/powerpoint/2010/main" val="1064967748"/>
+                <p14:modId xmlns:p14="http://schemas.microsoft.com/office/powerpoint/2010/main" val="3872233866"/>
               </p:ext>
             </p:extLst>
           </p:nvPr>
@@ -17182,7 +19217,7 @@
                     <a:p>
                       <a:r>
                         <a:rPr lang="es-ES" dirty="0"/>
-                        <a:t>6.6</a:t>
+                        <a:t>1</a:t>
                       </a:r>
                     </a:p>
                   </a:txBody>

--- a/LabBook_20_Nadia.pptx
+++ b/LabBook_20_Nadia.pptx
@@ -820,7 +820,7 @@
           <a:p>
             <a:fld id="{8438F8DC-35B0-48E6-A86E-42F1F08DD00F}" type="datetimeFigureOut">
               <a:rPr lang="es-ES" smtClean="0"/>
-              <a:t>12/03/2026</a:t>
+              <a:t>13/03/2026</a:t>
             </a:fld>
             <a:endParaRPr lang="es-ES"/>
           </a:p>
@@ -997,7 +997,7 @@
           <a:p>
             <a:fld id="{FACBDC12-F39B-4B97-8F4D-6734F9D366FF}" type="datetimeFigureOut">
               <a:rPr lang="es-ES" smtClean="0"/>
-              <a:t>12/03/2026</a:t>
+              <a:t>13/03/2026</a:t>
             </a:fld>
             <a:endParaRPr lang="es-ES"/>
           </a:p>
@@ -6727,7 +6727,7 @@
         <p:spPr>
           <a:xfrm>
             <a:off x="609441" y="4819471"/>
-            <a:ext cx="11199971" cy="1200329"/>
+            <a:ext cx="11199971" cy="1384995"/>
           </a:xfrm>
           <a:prstGeom prst="rect">
             <a:avLst/>
@@ -7093,6 +7093,48 @@
                 <a:latin typeface="Arial" panose="020B0604020202020204" pitchFamily="34" charset="0"/>
                 <a:cs typeface="Arial" panose="020B0604020202020204" pitchFamily="34" charset="0"/>
               </a:rPr>
+              <a:t>pérdidas</a:t>
+            </a:r>
+            <a:r>
+              <a:rPr lang="en-US" sz="1200" dirty="0">
+                <a:latin typeface="Arial" panose="020B0604020202020204" pitchFamily="34" charset="0"/>
+                <a:cs typeface="Arial" panose="020B0604020202020204" pitchFamily="34" charset="0"/>
+              </a:rPr>
+              <a:t> de 0.9430 dB </a:t>
+            </a:r>
+            <a:r>
+              <a:rPr lang="en-US" sz="1200" dirty="0" err="1">
+                <a:latin typeface="Arial" panose="020B0604020202020204" pitchFamily="34" charset="0"/>
+                <a:cs typeface="Arial" panose="020B0604020202020204" pitchFamily="34" charset="0"/>
+              </a:rPr>
+              <a:t>bastante</a:t>
+            </a:r>
+            <a:r>
+              <a:rPr lang="en-US" sz="1200" dirty="0">
+                <a:latin typeface="Arial" panose="020B0604020202020204" pitchFamily="34" charset="0"/>
+                <a:cs typeface="Arial" panose="020B0604020202020204" pitchFamily="34" charset="0"/>
+              </a:rPr>
+              <a:t> </a:t>
+            </a:r>
+            <a:r>
+              <a:rPr lang="en-US" sz="1200" dirty="0" err="1">
+                <a:latin typeface="Arial" panose="020B0604020202020204" pitchFamily="34" charset="0"/>
+                <a:cs typeface="Arial" panose="020B0604020202020204" pitchFamily="34" charset="0"/>
+              </a:rPr>
+              <a:t>más</a:t>
+            </a:r>
+            <a:r>
+              <a:rPr lang="en-US" sz="1200" dirty="0">
+                <a:latin typeface="Arial" panose="020B0604020202020204" pitchFamily="34" charset="0"/>
+                <a:cs typeface="Arial" panose="020B0604020202020204" pitchFamily="34" charset="0"/>
+              </a:rPr>
+              <a:t> </a:t>
+            </a:r>
+            <a:r>
+              <a:rPr lang="en-US" sz="1200" dirty="0" err="1">
+                <a:latin typeface="Arial" panose="020B0604020202020204" pitchFamily="34" charset="0"/>
+                <a:cs typeface="Arial" panose="020B0604020202020204" pitchFamily="34" charset="0"/>
+              </a:rPr>
               <a:t>altas</a:t>
             </a:r>
             <a:r>
@@ -7100,6 +7142,20 @@
                 <a:latin typeface="Arial" panose="020B0604020202020204" pitchFamily="34" charset="0"/>
                 <a:cs typeface="Arial" panose="020B0604020202020204" pitchFamily="34" charset="0"/>
               </a:rPr>
+              <a:t> que </a:t>
+            </a:r>
+            <a:r>
+              <a:rPr lang="en-US" sz="1200" dirty="0" err="1">
+                <a:latin typeface="Arial" panose="020B0604020202020204" pitchFamily="34" charset="0"/>
+                <a:cs typeface="Arial" panose="020B0604020202020204" pitchFamily="34" charset="0"/>
+              </a:rPr>
+              <a:t>en</a:t>
+            </a:r>
+            <a:r>
+              <a:rPr lang="en-US" sz="1200" dirty="0">
+                <a:latin typeface="Arial" panose="020B0604020202020204" pitchFamily="34" charset="0"/>
+                <a:cs typeface="Arial" panose="020B0604020202020204" pitchFamily="34" charset="0"/>
+              </a:rPr>
               <a:t> </a:t>
             </a:r>
             <a:r>
@@ -7107,19 +7163,113 @@
                 <a:latin typeface="Arial" panose="020B0604020202020204" pitchFamily="34" charset="0"/>
                 <a:cs typeface="Arial" panose="020B0604020202020204" pitchFamily="34" charset="0"/>
               </a:rPr>
-              <a:t>pérdidas</a:t>
-            </a:r>
-            <a:r>
-              <a:rPr lang="en-US" sz="1200">
-                <a:latin typeface="Arial" panose="020B0604020202020204" pitchFamily="34" charset="0"/>
-                <a:cs typeface="Arial" panose="020B0604020202020204" pitchFamily="34" charset="0"/>
-              </a:rPr>
-              <a:t>.</a:t>
-            </a:r>
-            <a:endParaRPr lang="en-US" sz="1200" dirty="0">
-              <a:latin typeface="Arial" panose="020B0604020202020204" pitchFamily="34" charset="0"/>
-              <a:cs typeface="Arial" panose="020B0604020202020204" pitchFamily="34" charset="0"/>
-            </a:endParaRPr>
+              <a:t>el</a:t>
+            </a:r>
+            <a:r>
+              <a:rPr lang="en-US" sz="1200" dirty="0">
+                <a:latin typeface="Arial" panose="020B0604020202020204" pitchFamily="34" charset="0"/>
+                <a:cs typeface="Arial" panose="020B0604020202020204" pitchFamily="34" charset="0"/>
+              </a:rPr>
+              <a:t> 2x2. El ratio </a:t>
+            </a:r>
+            <a:r>
+              <a:rPr lang="en-US" sz="1200" dirty="0" err="1">
+                <a:latin typeface="Arial" panose="020B0604020202020204" pitchFamily="34" charset="0"/>
+                <a:cs typeface="Arial" panose="020B0604020202020204" pitchFamily="34" charset="0"/>
+              </a:rPr>
+              <a:t>tiene</a:t>
+            </a:r>
+            <a:r>
+              <a:rPr lang="en-US" sz="1200" dirty="0">
+                <a:latin typeface="Arial" panose="020B0604020202020204" pitchFamily="34" charset="0"/>
+                <a:cs typeface="Arial" panose="020B0604020202020204" pitchFamily="34" charset="0"/>
+              </a:rPr>
+              <a:t> una </a:t>
+            </a:r>
+            <a:r>
+              <a:rPr lang="en-US" sz="1200" dirty="0" err="1">
+                <a:latin typeface="Arial" panose="020B0604020202020204" pitchFamily="34" charset="0"/>
+                <a:cs typeface="Arial" panose="020B0604020202020204" pitchFamily="34" charset="0"/>
+              </a:rPr>
+              <a:t>simetría</a:t>
+            </a:r>
+            <a:r>
+              <a:rPr lang="en-US" sz="1200" dirty="0">
+                <a:latin typeface="Arial" panose="020B0604020202020204" pitchFamily="34" charset="0"/>
+                <a:cs typeface="Arial" panose="020B0604020202020204" pitchFamily="34" charset="0"/>
+              </a:rPr>
+              <a:t> acceptable de un 24,3% </a:t>
+            </a:r>
+            <a:r>
+              <a:rPr lang="en-US" sz="1200" dirty="0" err="1">
+                <a:latin typeface="Arial" panose="020B0604020202020204" pitchFamily="34" charset="0"/>
+                <a:cs typeface="Arial" panose="020B0604020202020204" pitchFamily="34" charset="0"/>
+              </a:rPr>
+              <a:t>frente</a:t>
+            </a:r>
+            <a:r>
+              <a:rPr lang="en-US" sz="1200" dirty="0">
+                <a:latin typeface="Arial" panose="020B0604020202020204" pitchFamily="34" charset="0"/>
+                <a:cs typeface="Arial" panose="020B0604020202020204" pitchFamily="34" charset="0"/>
+              </a:rPr>
+              <a:t> a un 25,7%. Al </a:t>
+            </a:r>
+            <a:r>
+              <a:rPr lang="en-US" sz="1200" dirty="0" err="1">
+                <a:latin typeface="Arial" panose="020B0604020202020204" pitchFamily="34" charset="0"/>
+                <a:cs typeface="Arial" panose="020B0604020202020204" pitchFamily="34" charset="0"/>
+              </a:rPr>
+              <a:t>tener</a:t>
+            </a:r>
+            <a:r>
+              <a:rPr lang="en-US" sz="1200" dirty="0">
+                <a:latin typeface="Arial" panose="020B0604020202020204" pitchFamily="34" charset="0"/>
+                <a:cs typeface="Arial" panose="020B0604020202020204" pitchFamily="34" charset="0"/>
+              </a:rPr>
+              <a:t> </a:t>
+            </a:r>
+            <a:r>
+              <a:rPr lang="en-US" sz="1200" dirty="0" err="1">
+                <a:latin typeface="Arial" panose="020B0604020202020204" pitchFamily="34" charset="0"/>
+                <a:cs typeface="Arial" panose="020B0604020202020204" pitchFamily="34" charset="0"/>
+              </a:rPr>
+              <a:t>más</a:t>
+            </a:r>
+            <a:r>
+              <a:rPr lang="en-US" sz="1200" dirty="0">
+                <a:latin typeface="Arial" panose="020B0604020202020204" pitchFamily="34" charset="0"/>
+                <a:cs typeface="Arial" panose="020B0604020202020204" pitchFamily="34" charset="0"/>
+              </a:rPr>
+              <a:t> </a:t>
+            </a:r>
+            <a:r>
+              <a:rPr lang="en-US" sz="1200" dirty="0" err="1">
+                <a:latin typeface="Arial" panose="020B0604020202020204" pitchFamily="34" charset="0"/>
+                <a:cs typeface="Arial" panose="020B0604020202020204" pitchFamily="34" charset="0"/>
+              </a:rPr>
+              <a:t>puertos</a:t>
+            </a:r>
+            <a:r>
+              <a:rPr lang="en-US" sz="1200" dirty="0">
+                <a:latin typeface="Arial" panose="020B0604020202020204" pitchFamily="34" charset="0"/>
+                <a:cs typeface="Arial" panose="020B0604020202020204" pitchFamily="34" charset="0"/>
+              </a:rPr>
+              <a:t> de </a:t>
+            </a:r>
+            <a:r>
+              <a:rPr lang="en-US" sz="1200" dirty="0" err="1">
+                <a:latin typeface="Arial" panose="020B0604020202020204" pitchFamily="34" charset="0"/>
+                <a:cs typeface="Arial" panose="020B0604020202020204" pitchFamily="34" charset="0"/>
+              </a:rPr>
+              <a:t>salida</a:t>
+            </a:r>
+            <a:r>
+              <a:rPr lang="en-US" sz="1200" dirty="0">
+                <a:latin typeface="Arial" panose="020B0604020202020204" pitchFamily="34" charset="0"/>
+                <a:cs typeface="Arial" panose="020B0604020202020204" pitchFamily="34" charset="0"/>
+              </a:rPr>
+              <a:t> require una precision mayor. </a:t>
+            </a:r>
           </a:p>
           <a:p>
             <a:pPr algn="just"/>
@@ -7257,7 +7407,7 @@
           <p:nvPr>
             <p:extLst>
               <p:ext uri="{D42A27DB-BD31-4B8C-83A1-F6EECF244321}">
-                <p14:modId xmlns:p14="http://schemas.microsoft.com/office/powerpoint/2010/main" val="1001735931"/>
+                <p14:modId xmlns:p14="http://schemas.microsoft.com/office/powerpoint/2010/main" val="1582341681"/>
               </p:ext>
             </p:extLst>
           </p:nvPr>
@@ -7442,7 +7592,7 @@
                     <a:p>
                       <a:r>
                         <a:rPr lang="es-ES" dirty="0"/>
-                        <a:t>13.2</a:t>
+                        <a:t>1</a:t>
                       </a:r>
                     </a:p>
                   </a:txBody>
@@ -7745,21 +7895,7 @@
                 <a:latin typeface="Arial" panose="020B0604020202020204" pitchFamily="34" charset="0"/>
                 <a:cs typeface="Arial" panose="020B0604020202020204" pitchFamily="34" charset="0"/>
               </a:rPr>
-              <a:t>Repeat all the design </a:t>
-            </a:r>
-            <a:r>
-              <a:rPr lang="en-US" sz="1200">
-                <a:latin typeface="Arial" panose="020B0604020202020204" pitchFamily="34" charset="0"/>
-                <a:cs typeface="Arial" panose="020B0604020202020204" pitchFamily="34" charset="0"/>
-              </a:rPr>
-              <a:t>process for a </a:t>
-            </a:r>
-            <a:r>
-              <a:rPr lang="en-US" sz="1200" dirty="0">
-                <a:latin typeface="Arial" panose="020B0604020202020204" pitchFamily="34" charset="0"/>
-                <a:cs typeface="Arial" panose="020B0604020202020204" pitchFamily="34" charset="0"/>
-              </a:rPr>
-              <a:t>1x4 MMI Coupler.  </a:t>
+              <a:t>Repeat all the design process for a 1x4 MMI Coupler.  </a:t>
             </a:r>
           </a:p>
           <a:p>
@@ -7771,24 +7907,454 @@
           </a:p>
           <a:p>
             <a:pPr algn="just"/>
-            <a:endParaRPr lang="en-US" sz="1200" dirty="0">
-              <a:latin typeface="Arial" panose="020B0604020202020204" pitchFamily="34" charset="0"/>
-              <a:cs typeface="Arial" panose="020B0604020202020204" pitchFamily="34" charset="0"/>
-            </a:endParaRPr>
-          </a:p>
-          <a:p>
-            <a:pPr algn="just"/>
-            <a:endParaRPr lang="en-US" sz="1200" dirty="0">
-              <a:latin typeface="Arial" panose="020B0604020202020204" pitchFamily="34" charset="0"/>
-              <a:cs typeface="Arial" panose="020B0604020202020204" pitchFamily="34" charset="0"/>
-            </a:endParaRPr>
-          </a:p>
-          <a:p>
-            <a:pPr algn="just"/>
-            <a:endParaRPr lang="en-US" sz="1200" dirty="0">
-              <a:latin typeface="Arial" panose="020B0604020202020204" pitchFamily="34" charset="0"/>
-              <a:cs typeface="Arial" panose="020B0604020202020204" pitchFamily="34" charset="0"/>
-            </a:endParaRPr>
+            <a:r>
+              <a:rPr lang="en-US" sz="1200" dirty="0" err="1">
+                <a:latin typeface="Arial" panose="020B0604020202020204" pitchFamily="34" charset="0"/>
+                <a:cs typeface="Arial" panose="020B0604020202020204" pitchFamily="34" charset="0"/>
+              </a:rPr>
+              <a:t>Ahora</a:t>
+            </a:r>
+            <a:r>
+              <a:rPr lang="en-US" sz="1200" dirty="0">
+                <a:latin typeface="Arial" panose="020B0604020202020204" pitchFamily="34" charset="0"/>
+                <a:cs typeface="Arial" panose="020B0604020202020204" pitchFamily="34" charset="0"/>
+              </a:rPr>
+              <a:t> </a:t>
+            </a:r>
+            <a:r>
+              <a:rPr lang="en-US" sz="1200" dirty="0" err="1">
+                <a:latin typeface="Arial" panose="020B0604020202020204" pitchFamily="34" charset="0"/>
+                <a:cs typeface="Arial" panose="020B0604020202020204" pitchFamily="34" charset="0"/>
+              </a:rPr>
+              <a:t>hemos</a:t>
+            </a:r>
+            <a:r>
+              <a:rPr lang="en-US" sz="1200" dirty="0">
+                <a:latin typeface="Arial" panose="020B0604020202020204" pitchFamily="34" charset="0"/>
+                <a:cs typeface="Arial" panose="020B0604020202020204" pitchFamily="34" charset="0"/>
+              </a:rPr>
+              <a:t> </a:t>
+            </a:r>
+            <a:r>
+              <a:rPr lang="en-US" sz="1200" dirty="0" err="1">
+                <a:latin typeface="Arial" panose="020B0604020202020204" pitchFamily="34" charset="0"/>
+                <a:cs typeface="Arial" panose="020B0604020202020204" pitchFamily="34" charset="0"/>
+              </a:rPr>
+              <a:t>seguido</a:t>
+            </a:r>
+            <a:r>
+              <a:rPr lang="en-US" sz="1200" dirty="0">
+                <a:latin typeface="Arial" panose="020B0604020202020204" pitchFamily="34" charset="0"/>
+                <a:cs typeface="Arial" panose="020B0604020202020204" pitchFamily="34" charset="0"/>
+              </a:rPr>
+              <a:t> </a:t>
+            </a:r>
+            <a:r>
+              <a:rPr lang="en-US" sz="1200" dirty="0" err="1">
+                <a:latin typeface="Arial" panose="020B0604020202020204" pitchFamily="34" charset="0"/>
+                <a:cs typeface="Arial" panose="020B0604020202020204" pitchFamily="34" charset="0"/>
+              </a:rPr>
+              <a:t>el</a:t>
+            </a:r>
+            <a:r>
+              <a:rPr lang="en-US" sz="1200" dirty="0">
+                <a:latin typeface="Arial" panose="020B0604020202020204" pitchFamily="34" charset="0"/>
+                <a:cs typeface="Arial" panose="020B0604020202020204" pitchFamily="34" charset="0"/>
+              </a:rPr>
+              <a:t> </a:t>
+            </a:r>
+            <a:r>
+              <a:rPr lang="en-US" sz="1200" dirty="0" err="1">
+                <a:latin typeface="Arial" panose="020B0604020202020204" pitchFamily="34" charset="0"/>
+                <a:cs typeface="Arial" panose="020B0604020202020204" pitchFamily="34" charset="0"/>
+              </a:rPr>
+              <a:t>mismo</a:t>
+            </a:r>
+            <a:r>
+              <a:rPr lang="en-US" sz="1200" dirty="0">
+                <a:latin typeface="Arial" panose="020B0604020202020204" pitchFamily="34" charset="0"/>
+                <a:cs typeface="Arial" panose="020B0604020202020204" pitchFamily="34" charset="0"/>
+              </a:rPr>
+              <a:t> </a:t>
+            </a:r>
+            <a:r>
+              <a:rPr lang="en-US" sz="1200" dirty="0" err="1">
+                <a:latin typeface="Arial" panose="020B0604020202020204" pitchFamily="34" charset="0"/>
+                <a:cs typeface="Arial" panose="020B0604020202020204" pitchFamily="34" charset="0"/>
+              </a:rPr>
+              <a:t>procedimiento</a:t>
+            </a:r>
+            <a:r>
+              <a:rPr lang="en-US" sz="1200" dirty="0">
+                <a:latin typeface="Arial" panose="020B0604020202020204" pitchFamily="34" charset="0"/>
+                <a:cs typeface="Arial" panose="020B0604020202020204" pitchFamily="34" charset="0"/>
+              </a:rPr>
+              <a:t> de </a:t>
+            </a:r>
+            <a:r>
+              <a:rPr lang="en-US" sz="1200" dirty="0" err="1">
+                <a:latin typeface="Arial" panose="020B0604020202020204" pitchFamily="34" charset="0"/>
+                <a:cs typeface="Arial" panose="020B0604020202020204" pitchFamily="34" charset="0"/>
+              </a:rPr>
+              <a:t>corrección</a:t>
+            </a:r>
+            <a:r>
+              <a:rPr lang="en-US" sz="1200" dirty="0">
+                <a:latin typeface="Arial" panose="020B0604020202020204" pitchFamily="34" charset="0"/>
+                <a:cs typeface="Arial" panose="020B0604020202020204" pitchFamily="34" charset="0"/>
+              </a:rPr>
+              <a:t> que con </a:t>
+            </a:r>
+            <a:r>
+              <a:rPr lang="en-US" sz="1200" dirty="0" err="1">
+                <a:latin typeface="Arial" panose="020B0604020202020204" pitchFamily="34" charset="0"/>
+                <a:cs typeface="Arial" panose="020B0604020202020204" pitchFamily="34" charset="0"/>
+              </a:rPr>
+              <a:t>el</a:t>
+            </a:r>
+            <a:r>
+              <a:rPr lang="en-US" sz="1200" dirty="0">
+                <a:latin typeface="Arial" panose="020B0604020202020204" pitchFamily="34" charset="0"/>
+                <a:cs typeface="Arial" panose="020B0604020202020204" pitchFamily="34" charset="0"/>
+              </a:rPr>
+              <a:t> 2x2. </a:t>
+            </a:r>
+            <a:r>
+              <a:rPr lang="en-US" sz="1200" dirty="0" err="1">
+                <a:latin typeface="Arial" panose="020B0604020202020204" pitchFamily="34" charset="0"/>
+                <a:cs typeface="Arial" panose="020B0604020202020204" pitchFamily="34" charset="0"/>
+              </a:rPr>
+              <a:t>Añadiendo</a:t>
+            </a:r>
+            <a:r>
+              <a:rPr lang="en-US" sz="1200" dirty="0">
+                <a:latin typeface="Arial" panose="020B0604020202020204" pitchFamily="34" charset="0"/>
+                <a:cs typeface="Arial" panose="020B0604020202020204" pitchFamily="34" charset="0"/>
+              </a:rPr>
+              <a:t> un dL= -1.1 um y un </a:t>
+            </a:r>
+            <a:r>
+              <a:rPr lang="en-US" sz="1200" dirty="0" err="1">
+                <a:latin typeface="Arial" panose="020B0604020202020204" pitchFamily="34" charset="0"/>
+                <a:cs typeface="Arial" panose="020B0604020202020204" pitchFamily="34" charset="0"/>
+              </a:rPr>
+              <a:t>dy</a:t>
+            </a:r>
+            <a:r>
+              <a:rPr lang="en-US" sz="1200" dirty="0">
+                <a:latin typeface="Arial" panose="020B0604020202020204" pitchFamily="34" charset="0"/>
+                <a:cs typeface="Arial" panose="020B0604020202020204" pitchFamily="34" charset="0"/>
+              </a:rPr>
+              <a:t>= 0.07 </a:t>
+            </a:r>
+            <a:r>
+              <a:rPr lang="en-US" sz="1200" dirty="0" err="1">
+                <a:latin typeface="Arial" panose="020B0604020202020204" pitchFamily="34" charset="0"/>
+                <a:cs typeface="Arial" panose="020B0604020202020204" pitchFamily="34" charset="0"/>
+              </a:rPr>
+              <a:t>hemos</a:t>
+            </a:r>
+            <a:r>
+              <a:rPr lang="en-US" sz="1200" dirty="0">
+                <a:latin typeface="Arial" panose="020B0604020202020204" pitchFamily="34" charset="0"/>
+                <a:cs typeface="Arial" panose="020B0604020202020204" pitchFamily="34" charset="0"/>
+              </a:rPr>
+              <a:t> </a:t>
+            </a:r>
+            <a:r>
+              <a:rPr lang="en-US" sz="1200" dirty="0" err="1">
+                <a:latin typeface="Arial" panose="020B0604020202020204" pitchFamily="34" charset="0"/>
+                <a:cs typeface="Arial" panose="020B0604020202020204" pitchFamily="34" charset="0"/>
+              </a:rPr>
+              <a:t>conseguido</a:t>
+            </a:r>
+            <a:r>
+              <a:rPr lang="en-US" sz="1200" dirty="0">
+                <a:latin typeface="Arial" panose="020B0604020202020204" pitchFamily="34" charset="0"/>
+                <a:cs typeface="Arial" panose="020B0604020202020204" pitchFamily="34" charset="0"/>
+              </a:rPr>
+              <a:t> </a:t>
+            </a:r>
+            <a:r>
+              <a:rPr lang="en-US" sz="1200" dirty="0" err="1">
+                <a:latin typeface="Arial" panose="020B0604020202020204" pitchFamily="34" charset="0"/>
+                <a:cs typeface="Arial" panose="020B0604020202020204" pitchFamily="34" charset="0"/>
+              </a:rPr>
+              <a:t>disminuir</a:t>
+            </a:r>
+            <a:r>
+              <a:rPr lang="en-US" sz="1200" dirty="0">
+                <a:latin typeface="Arial" panose="020B0604020202020204" pitchFamily="34" charset="0"/>
+                <a:cs typeface="Arial" panose="020B0604020202020204" pitchFamily="34" charset="0"/>
+              </a:rPr>
+              <a:t> algo las </a:t>
+            </a:r>
+            <a:r>
+              <a:rPr lang="en-US" sz="1200" dirty="0" err="1">
+                <a:latin typeface="Arial" panose="020B0604020202020204" pitchFamily="34" charset="0"/>
+                <a:cs typeface="Arial" panose="020B0604020202020204" pitchFamily="34" charset="0"/>
+              </a:rPr>
+              <a:t>pérdidas</a:t>
+            </a:r>
+            <a:r>
+              <a:rPr lang="en-US" sz="1200" dirty="0">
+                <a:latin typeface="Arial" panose="020B0604020202020204" pitchFamily="34" charset="0"/>
+                <a:cs typeface="Arial" panose="020B0604020202020204" pitchFamily="34" charset="0"/>
+              </a:rPr>
+              <a:t> </a:t>
+            </a:r>
+            <a:r>
+              <a:rPr lang="en-US" sz="1200" dirty="0" err="1">
+                <a:latin typeface="Arial" panose="020B0604020202020204" pitchFamily="34" charset="0"/>
+                <a:cs typeface="Arial" panose="020B0604020202020204" pitchFamily="34" charset="0"/>
+              </a:rPr>
+              <a:t>como</a:t>
+            </a:r>
+            <a:r>
+              <a:rPr lang="en-US" sz="1200" dirty="0">
+                <a:latin typeface="Arial" panose="020B0604020202020204" pitchFamily="34" charset="0"/>
+                <a:cs typeface="Arial" panose="020B0604020202020204" pitchFamily="34" charset="0"/>
+              </a:rPr>
+              <a:t> </a:t>
+            </a:r>
+            <a:r>
+              <a:rPr lang="en-US" sz="1200" dirty="0" err="1">
+                <a:latin typeface="Arial" panose="020B0604020202020204" pitchFamily="34" charset="0"/>
+                <a:cs typeface="Arial" panose="020B0604020202020204" pitchFamily="34" charset="0"/>
+              </a:rPr>
+              <a:t>vemos</a:t>
+            </a:r>
+            <a:r>
+              <a:rPr lang="en-US" sz="1200" dirty="0">
+                <a:latin typeface="Arial" panose="020B0604020202020204" pitchFamily="34" charset="0"/>
+                <a:cs typeface="Arial" panose="020B0604020202020204" pitchFamily="34" charset="0"/>
+              </a:rPr>
+              <a:t> </a:t>
+            </a:r>
+            <a:r>
+              <a:rPr lang="en-US" sz="1200" dirty="0" err="1">
+                <a:latin typeface="Arial" panose="020B0604020202020204" pitchFamily="34" charset="0"/>
+                <a:cs typeface="Arial" panose="020B0604020202020204" pitchFamily="34" charset="0"/>
+              </a:rPr>
+              <a:t>en</a:t>
+            </a:r>
+            <a:r>
+              <a:rPr lang="en-US" sz="1200" dirty="0">
+                <a:latin typeface="Arial" panose="020B0604020202020204" pitchFamily="34" charset="0"/>
+                <a:cs typeface="Arial" panose="020B0604020202020204" pitchFamily="34" charset="0"/>
+              </a:rPr>
+              <a:t> la </a:t>
+            </a:r>
+            <a:r>
+              <a:rPr lang="en-US" sz="1200" dirty="0" err="1">
+                <a:latin typeface="Arial" panose="020B0604020202020204" pitchFamily="34" charset="0"/>
+                <a:cs typeface="Arial" panose="020B0604020202020204" pitchFamily="34" charset="0"/>
+              </a:rPr>
+              <a:t>tabla</a:t>
+            </a:r>
+            <a:r>
+              <a:rPr lang="en-US" sz="1200" dirty="0">
+                <a:latin typeface="Arial" panose="020B0604020202020204" pitchFamily="34" charset="0"/>
+                <a:cs typeface="Arial" panose="020B0604020202020204" pitchFamily="34" charset="0"/>
+              </a:rPr>
+              <a:t> </a:t>
+            </a:r>
+            <a:r>
+              <a:rPr lang="en-US" sz="1200" dirty="0" err="1">
+                <a:latin typeface="Arial" panose="020B0604020202020204" pitchFamily="34" charset="0"/>
+                <a:cs typeface="Arial" panose="020B0604020202020204" pitchFamily="34" charset="0"/>
+              </a:rPr>
+              <a:t>llegando</a:t>
+            </a:r>
+            <a:r>
+              <a:rPr lang="en-US" sz="1200" dirty="0">
+                <a:latin typeface="Arial" panose="020B0604020202020204" pitchFamily="34" charset="0"/>
+                <a:cs typeface="Arial" panose="020B0604020202020204" pitchFamily="34" charset="0"/>
+              </a:rPr>
+              <a:t> a 0.7777 </a:t>
+            </a:r>
+            <a:r>
+              <a:rPr lang="en-US" sz="1200" dirty="0" err="1">
+                <a:latin typeface="Arial" panose="020B0604020202020204" pitchFamily="34" charset="0"/>
+                <a:cs typeface="Arial" panose="020B0604020202020204" pitchFamily="34" charset="0"/>
+              </a:rPr>
+              <a:t>dBs.</a:t>
+            </a:r>
+            <a:r>
+              <a:rPr lang="en-US" sz="1200" dirty="0">
+                <a:latin typeface="Arial" panose="020B0604020202020204" pitchFamily="34" charset="0"/>
+                <a:cs typeface="Arial" panose="020B0604020202020204" pitchFamily="34" charset="0"/>
+              </a:rPr>
+              <a:t> </a:t>
+            </a:r>
+            <a:r>
+              <a:rPr lang="en-US" sz="1200" dirty="0" err="1">
+                <a:latin typeface="Arial" panose="020B0604020202020204" pitchFamily="34" charset="0"/>
+                <a:cs typeface="Arial" panose="020B0604020202020204" pitchFamily="34" charset="0"/>
+              </a:rPr>
+              <a:t>Así</a:t>
+            </a:r>
+            <a:r>
+              <a:rPr lang="en-US" sz="1200" dirty="0">
+                <a:latin typeface="Arial" panose="020B0604020202020204" pitchFamily="34" charset="0"/>
+                <a:cs typeface="Arial" panose="020B0604020202020204" pitchFamily="34" charset="0"/>
+              </a:rPr>
+              <a:t> </a:t>
+            </a:r>
+            <a:r>
+              <a:rPr lang="en-US" sz="1200" dirty="0" err="1">
+                <a:latin typeface="Arial" panose="020B0604020202020204" pitchFamily="34" charset="0"/>
+                <a:cs typeface="Arial" panose="020B0604020202020204" pitchFamily="34" charset="0"/>
+              </a:rPr>
+              <a:t>como</a:t>
+            </a:r>
+            <a:r>
+              <a:rPr lang="en-US" sz="1200" dirty="0">
+                <a:latin typeface="Arial" panose="020B0604020202020204" pitchFamily="34" charset="0"/>
+                <a:cs typeface="Arial" panose="020B0604020202020204" pitchFamily="34" charset="0"/>
+              </a:rPr>
+              <a:t> </a:t>
+            </a:r>
+            <a:r>
+              <a:rPr lang="en-US" sz="1200" dirty="0" err="1">
+                <a:latin typeface="Arial" panose="020B0604020202020204" pitchFamily="34" charset="0"/>
+                <a:cs typeface="Arial" panose="020B0604020202020204" pitchFamily="34" charset="0"/>
+              </a:rPr>
+              <a:t>mejorar</a:t>
+            </a:r>
+            <a:r>
+              <a:rPr lang="en-US" sz="1200" dirty="0">
+                <a:latin typeface="Arial" panose="020B0604020202020204" pitchFamily="34" charset="0"/>
+                <a:cs typeface="Arial" panose="020B0604020202020204" pitchFamily="34" charset="0"/>
+              </a:rPr>
+              <a:t> </a:t>
+            </a:r>
+            <a:r>
+              <a:rPr lang="en-US" sz="1200" dirty="0" err="1">
+                <a:latin typeface="Arial" panose="020B0604020202020204" pitchFamily="34" charset="0"/>
+                <a:cs typeface="Arial" panose="020B0604020202020204" pitchFamily="34" charset="0"/>
+              </a:rPr>
+              <a:t>significativamente</a:t>
+            </a:r>
+            <a:r>
+              <a:rPr lang="en-US" sz="1200" dirty="0">
+                <a:latin typeface="Arial" panose="020B0604020202020204" pitchFamily="34" charset="0"/>
+                <a:cs typeface="Arial" panose="020B0604020202020204" pitchFamily="34" charset="0"/>
+              </a:rPr>
+              <a:t> </a:t>
+            </a:r>
+            <a:r>
+              <a:rPr lang="en-US" sz="1200" dirty="0" err="1">
+                <a:latin typeface="Arial" panose="020B0604020202020204" pitchFamily="34" charset="0"/>
+                <a:cs typeface="Arial" panose="020B0604020202020204" pitchFamily="34" charset="0"/>
+              </a:rPr>
+              <a:t>el</a:t>
+            </a:r>
+            <a:r>
+              <a:rPr lang="en-US" sz="1200" dirty="0">
+                <a:latin typeface="Arial" panose="020B0604020202020204" pitchFamily="34" charset="0"/>
+                <a:cs typeface="Arial" panose="020B0604020202020204" pitchFamily="34" charset="0"/>
+              </a:rPr>
+              <a:t> ratio, </a:t>
+            </a:r>
+            <a:r>
+              <a:rPr lang="en-US" sz="1200" dirty="0" err="1">
+                <a:latin typeface="Arial" panose="020B0604020202020204" pitchFamily="34" charset="0"/>
+                <a:cs typeface="Arial" panose="020B0604020202020204" pitchFamily="34" charset="0"/>
+              </a:rPr>
+              <a:t>consiguiendo</a:t>
+            </a:r>
+            <a:r>
+              <a:rPr lang="en-US" sz="1200" dirty="0">
+                <a:latin typeface="Arial" panose="020B0604020202020204" pitchFamily="34" charset="0"/>
+                <a:cs typeface="Arial" panose="020B0604020202020204" pitchFamily="34" charset="0"/>
+              </a:rPr>
+              <a:t> mayor </a:t>
+            </a:r>
+            <a:r>
+              <a:rPr lang="en-US" sz="1200" dirty="0" err="1">
+                <a:latin typeface="Arial" panose="020B0604020202020204" pitchFamily="34" charset="0"/>
+                <a:cs typeface="Arial" panose="020B0604020202020204" pitchFamily="34" charset="0"/>
+              </a:rPr>
+              <a:t>rquilibrio</a:t>
+            </a:r>
+            <a:r>
+              <a:rPr lang="en-US" sz="1200" dirty="0">
+                <a:latin typeface="Arial" panose="020B0604020202020204" pitchFamily="34" charset="0"/>
+                <a:cs typeface="Arial" panose="020B0604020202020204" pitchFamily="34" charset="0"/>
+              </a:rPr>
+              <a:t>, una </a:t>
+            </a:r>
+            <a:r>
+              <a:rPr lang="en-US" sz="1200" dirty="0" err="1">
+                <a:latin typeface="Arial" panose="020B0604020202020204" pitchFamily="34" charset="0"/>
+                <a:cs typeface="Arial" panose="020B0604020202020204" pitchFamily="34" charset="0"/>
+              </a:rPr>
+              <a:t>simetría</a:t>
+            </a:r>
+            <a:r>
+              <a:rPr lang="en-US" sz="1200" dirty="0">
+                <a:latin typeface="Arial" panose="020B0604020202020204" pitchFamily="34" charset="0"/>
+                <a:cs typeface="Arial" panose="020B0604020202020204" pitchFamily="34" charset="0"/>
+              </a:rPr>
+              <a:t> de 24,81% e los </a:t>
+            </a:r>
+            <a:r>
+              <a:rPr lang="en-US" sz="1200" dirty="0" err="1">
+                <a:latin typeface="Arial" panose="020B0604020202020204" pitchFamily="34" charset="0"/>
+                <a:cs typeface="Arial" panose="020B0604020202020204" pitchFamily="34" charset="0"/>
+              </a:rPr>
+              <a:t>puertos</a:t>
+            </a:r>
+            <a:r>
+              <a:rPr lang="en-US" sz="1200" dirty="0">
+                <a:latin typeface="Arial" panose="020B0604020202020204" pitchFamily="34" charset="0"/>
+                <a:cs typeface="Arial" panose="020B0604020202020204" pitchFamily="34" charset="0"/>
+              </a:rPr>
+              <a:t> </a:t>
+            </a:r>
+            <a:r>
+              <a:rPr lang="en-US" sz="1200" dirty="0" err="1">
+                <a:latin typeface="Arial" panose="020B0604020202020204" pitchFamily="34" charset="0"/>
+                <a:cs typeface="Arial" panose="020B0604020202020204" pitchFamily="34" charset="0"/>
+              </a:rPr>
+              <a:t>exteriores</a:t>
+            </a:r>
+            <a:r>
+              <a:rPr lang="en-US" sz="1200" dirty="0">
+                <a:latin typeface="Arial" panose="020B0604020202020204" pitchFamily="34" charset="0"/>
+                <a:cs typeface="Arial" panose="020B0604020202020204" pitchFamily="34" charset="0"/>
+              </a:rPr>
+              <a:t> y 25,2% </a:t>
+            </a:r>
+            <a:r>
+              <a:rPr lang="en-US" sz="1200" dirty="0" err="1">
+                <a:latin typeface="Arial" panose="020B0604020202020204" pitchFamily="34" charset="0"/>
+                <a:cs typeface="Arial" panose="020B0604020202020204" pitchFamily="34" charset="0"/>
+              </a:rPr>
+              <a:t>en</a:t>
+            </a:r>
+            <a:r>
+              <a:rPr lang="en-US" sz="1200" dirty="0">
+                <a:latin typeface="Arial" panose="020B0604020202020204" pitchFamily="34" charset="0"/>
+                <a:cs typeface="Arial" panose="020B0604020202020204" pitchFamily="34" charset="0"/>
+              </a:rPr>
+              <a:t> los </a:t>
+            </a:r>
+            <a:r>
+              <a:rPr lang="en-US" sz="1200" dirty="0" err="1">
+                <a:latin typeface="Arial" panose="020B0604020202020204" pitchFamily="34" charset="0"/>
+                <a:cs typeface="Arial" panose="020B0604020202020204" pitchFamily="34" charset="0"/>
+              </a:rPr>
+              <a:t>interiores</a:t>
+            </a:r>
+            <a:r>
+              <a:rPr lang="en-US" sz="1200" dirty="0">
+                <a:latin typeface="Arial" panose="020B0604020202020204" pitchFamily="34" charset="0"/>
+                <a:cs typeface="Arial" panose="020B0604020202020204" pitchFamily="34" charset="0"/>
+              </a:rPr>
+              <a:t>. </a:t>
+            </a:r>
           </a:p>
           <a:p>
             <a:pPr algn="just"/>
@@ -7866,7 +8432,7 @@
           <p:nvPr>
             <p:extLst>
               <p:ext uri="{D42A27DB-BD31-4B8C-83A1-F6EECF244321}">
-                <p14:modId xmlns:p14="http://schemas.microsoft.com/office/powerpoint/2010/main" val="27380287"/>
+                <p14:modId xmlns:p14="http://schemas.microsoft.com/office/powerpoint/2010/main" val="3406811996"/>
               </p:ext>
             </p:extLst>
           </p:nvPr>
@@ -8093,7 +8659,7 @@
                     <a:p>
                       <a:r>
                         <a:rPr lang="es-ES" dirty="0"/>
-                        <a:t>13.2</a:t>
+                        <a:t>1</a:t>
                       </a:r>
                     </a:p>
                   </a:txBody>
@@ -8482,21 +9048,7 @@
                 <a:latin typeface="Arial" panose="020B0604020202020204" pitchFamily="34" charset="0"/>
                 <a:cs typeface="Arial" panose="020B0604020202020204" pitchFamily="34" charset="0"/>
               </a:rPr>
-              <a:t>Repeat all the design </a:t>
-            </a:r>
-            <a:r>
-              <a:rPr lang="en-US" sz="1200">
-                <a:latin typeface="Arial" panose="020B0604020202020204" pitchFamily="34" charset="0"/>
-                <a:cs typeface="Arial" panose="020B0604020202020204" pitchFamily="34" charset="0"/>
-              </a:rPr>
-              <a:t>process for a </a:t>
-            </a:r>
-            <a:r>
-              <a:rPr lang="en-US" sz="1200" dirty="0">
-                <a:latin typeface="Arial" panose="020B0604020202020204" pitchFamily="34" charset="0"/>
-                <a:cs typeface="Arial" panose="020B0604020202020204" pitchFamily="34" charset="0"/>
-              </a:rPr>
-              <a:t>1x4 MMI Coupler.  </a:t>
+              <a:t>Repeat all the design process for a 1x4 MMI Coupler.  </a:t>
             </a:r>
           </a:p>
           <a:p>
@@ -8508,24 +9060,352 @@
           </a:p>
           <a:p>
             <a:pPr algn="just"/>
-            <a:endParaRPr lang="en-US" sz="1200" dirty="0">
-              <a:latin typeface="Arial" panose="020B0604020202020204" pitchFamily="34" charset="0"/>
-              <a:cs typeface="Arial" panose="020B0604020202020204" pitchFamily="34" charset="0"/>
-            </a:endParaRPr>
+            <a:r>
+              <a:rPr lang="en-US" sz="1200" dirty="0">
+                <a:latin typeface="Arial" panose="020B0604020202020204" pitchFamily="34" charset="0"/>
+                <a:cs typeface="Arial" panose="020B0604020202020204" pitchFamily="34" charset="0"/>
+              </a:rPr>
+              <a:t>Al </a:t>
+            </a:r>
+            <a:r>
+              <a:rPr lang="en-US" sz="1200" dirty="0" err="1">
+                <a:latin typeface="Arial" panose="020B0604020202020204" pitchFamily="34" charset="0"/>
+                <a:cs typeface="Arial" panose="020B0604020202020204" pitchFamily="34" charset="0"/>
+              </a:rPr>
+              <a:t>igual</a:t>
+            </a:r>
+            <a:r>
+              <a:rPr lang="en-US" sz="1200" dirty="0">
+                <a:latin typeface="Arial" panose="020B0604020202020204" pitchFamily="34" charset="0"/>
+                <a:cs typeface="Arial" panose="020B0604020202020204" pitchFamily="34" charset="0"/>
+              </a:rPr>
+              <a:t> que </a:t>
+            </a:r>
+            <a:r>
+              <a:rPr lang="en-US" sz="1200" dirty="0" err="1">
+                <a:latin typeface="Arial" panose="020B0604020202020204" pitchFamily="34" charset="0"/>
+                <a:cs typeface="Arial" panose="020B0604020202020204" pitchFamily="34" charset="0"/>
+              </a:rPr>
+              <a:t>en</a:t>
+            </a:r>
+            <a:r>
+              <a:rPr lang="en-US" sz="1200" dirty="0">
+                <a:latin typeface="Arial" panose="020B0604020202020204" pitchFamily="34" charset="0"/>
+                <a:cs typeface="Arial" panose="020B0604020202020204" pitchFamily="34" charset="0"/>
+              </a:rPr>
+              <a:t> </a:t>
+            </a:r>
+            <a:r>
+              <a:rPr lang="en-US" sz="1200" dirty="0" err="1">
+                <a:latin typeface="Arial" panose="020B0604020202020204" pitchFamily="34" charset="0"/>
+                <a:cs typeface="Arial" panose="020B0604020202020204" pitchFamily="34" charset="0"/>
+              </a:rPr>
+              <a:t>el</a:t>
+            </a:r>
+            <a:r>
+              <a:rPr lang="en-US" sz="1200" dirty="0">
+                <a:latin typeface="Arial" panose="020B0604020202020204" pitchFamily="34" charset="0"/>
+                <a:cs typeface="Arial" panose="020B0604020202020204" pitchFamily="34" charset="0"/>
+              </a:rPr>
+              <a:t> 2x2 </a:t>
+            </a:r>
+            <a:r>
+              <a:rPr lang="en-US" sz="1200" dirty="0" err="1">
+                <a:latin typeface="Arial" panose="020B0604020202020204" pitchFamily="34" charset="0"/>
+                <a:cs typeface="Arial" panose="020B0604020202020204" pitchFamily="34" charset="0"/>
+              </a:rPr>
+              <a:t>el</a:t>
+            </a:r>
+            <a:r>
+              <a:rPr lang="en-US" sz="1200" dirty="0">
+                <a:latin typeface="Arial" panose="020B0604020202020204" pitchFamily="34" charset="0"/>
+                <a:cs typeface="Arial" panose="020B0604020202020204" pitchFamily="34" charset="0"/>
+              </a:rPr>
+              <a:t> factor que </a:t>
+            </a:r>
+            <a:r>
+              <a:rPr lang="en-US" sz="1200" dirty="0" err="1">
+                <a:latin typeface="Arial" panose="020B0604020202020204" pitchFamily="34" charset="0"/>
+                <a:cs typeface="Arial" panose="020B0604020202020204" pitchFamily="34" charset="0"/>
+              </a:rPr>
+              <a:t>nos</a:t>
+            </a:r>
+            <a:r>
+              <a:rPr lang="en-US" sz="1200" dirty="0">
+                <a:latin typeface="Arial" panose="020B0604020202020204" pitchFamily="34" charset="0"/>
+                <a:cs typeface="Arial" panose="020B0604020202020204" pitchFamily="34" charset="0"/>
+              </a:rPr>
+              <a:t> </a:t>
+            </a:r>
+            <a:r>
+              <a:rPr lang="en-US" sz="1200" dirty="0" err="1">
+                <a:latin typeface="Arial" panose="020B0604020202020204" pitchFamily="34" charset="0"/>
+                <a:cs typeface="Arial" panose="020B0604020202020204" pitchFamily="34" charset="0"/>
+              </a:rPr>
+              <a:t>permite</a:t>
+            </a:r>
+            <a:r>
+              <a:rPr lang="en-US" sz="1200" dirty="0">
+                <a:latin typeface="Arial" panose="020B0604020202020204" pitchFamily="34" charset="0"/>
+                <a:cs typeface="Arial" panose="020B0604020202020204" pitchFamily="34" charset="0"/>
+              </a:rPr>
+              <a:t> </a:t>
+            </a:r>
+            <a:r>
+              <a:rPr lang="en-US" sz="1200" dirty="0" err="1">
+                <a:latin typeface="Arial" panose="020B0604020202020204" pitchFamily="34" charset="0"/>
+                <a:cs typeface="Arial" panose="020B0604020202020204" pitchFamily="34" charset="0"/>
+              </a:rPr>
+              <a:t>hacer</a:t>
+            </a:r>
+            <a:r>
+              <a:rPr lang="en-US" sz="1200" dirty="0">
+                <a:latin typeface="Arial" panose="020B0604020202020204" pitchFamily="34" charset="0"/>
+                <a:cs typeface="Arial" panose="020B0604020202020204" pitchFamily="34" charset="0"/>
+              </a:rPr>
+              <a:t> una gran </a:t>
+            </a:r>
+            <a:r>
+              <a:rPr lang="en-US" sz="1200" dirty="0" err="1">
+                <a:latin typeface="Arial" panose="020B0604020202020204" pitchFamily="34" charset="0"/>
+                <a:cs typeface="Arial" panose="020B0604020202020204" pitchFamily="34" charset="0"/>
+              </a:rPr>
+              <a:t>optimización</a:t>
+            </a:r>
+            <a:r>
+              <a:rPr lang="en-US" sz="1200" dirty="0">
+                <a:latin typeface="Arial" panose="020B0604020202020204" pitchFamily="34" charset="0"/>
+                <a:cs typeface="Arial" panose="020B0604020202020204" pitchFamily="34" charset="0"/>
+              </a:rPr>
+              <a:t>, es </a:t>
+            </a:r>
+            <a:r>
+              <a:rPr lang="en-US" sz="1200" dirty="0" err="1">
+                <a:latin typeface="Arial" panose="020B0604020202020204" pitchFamily="34" charset="0"/>
+                <a:cs typeface="Arial" panose="020B0604020202020204" pitchFamily="34" charset="0"/>
+              </a:rPr>
+              <a:t>ensanchar</a:t>
+            </a:r>
+            <a:r>
+              <a:rPr lang="en-US" sz="1200" dirty="0">
+                <a:latin typeface="Arial" panose="020B0604020202020204" pitchFamily="34" charset="0"/>
+                <a:cs typeface="Arial" panose="020B0604020202020204" pitchFamily="34" charset="0"/>
+              </a:rPr>
+              <a:t> las </a:t>
+            </a:r>
+            <a:r>
+              <a:rPr lang="en-US" sz="1200" dirty="0" err="1">
+                <a:latin typeface="Arial" panose="020B0604020202020204" pitchFamily="34" charset="0"/>
+                <a:cs typeface="Arial" panose="020B0604020202020204" pitchFamily="34" charset="0"/>
+              </a:rPr>
+              <a:t>guías</a:t>
+            </a:r>
+            <a:r>
+              <a:rPr lang="en-US" sz="1200" dirty="0">
+                <a:latin typeface="Arial" panose="020B0604020202020204" pitchFamily="34" charset="0"/>
+                <a:cs typeface="Arial" panose="020B0604020202020204" pitchFamily="34" charset="0"/>
+              </a:rPr>
+              <a:t> de entrada y </a:t>
+            </a:r>
+            <a:r>
+              <a:rPr lang="en-US" sz="1200" dirty="0" err="1">
+                <a:latin typeface="Arial" panose="020B0604020202020204" pitchFamily="34" charset="0"/>
+                <a:cs typeface="Arial" panose="020B0604020202020204" pitchFamily="34" charset="0"/>
+              </a:rPr>
+              <a:t>salida</a:t>
+            </a:r>
+            <a:r>
+              <a:rPr lang="en-US" sz="1200" dirty="0">
+                <a:latin typeface="Arial" panose="020B0604020202020204" pitchFamily="34" charset="0"/>
+                <a:cs typeface="Arial" panose="020B0604020202020204" pitchFamily="34" charset="0"/>
+              </a:rPr>
+              <a:t>. </a:t>
+            </a:r>
+            <a:r>
+              <a:rPr lang="en-US" sz="1200" dirty="0" err="1">
+                <a:latin typeface="Arial" panose="020B0604020202020204" pitchFamily="34" charset="0"/>
+                <a:cs typeface="Arial" panose="020B0604020202020204" pitchFamily="34" charset="0"/>
+              </a:rPr>
+              <a:t>En</a:t>
+            </a:r>
+            <a:r>
+              <a:rPr lang="en-US" sz="1200" dirty="0">
+                <a:latin typeface="Arial" panose="020B0604020202020204" pitchFamily="34" charset="0"/>
+                <a:cs typeface="Arial" panose="020B0604020202020204" pitchFamily="34" charset="0"/>
+              </a:rPr>
+              <a:t> </a:t>
+            </a:r>
+            <a:r>
+              <a:rPr lang="en-US" sz="1200" dirty="0" err="1">
+                <a:latin typeface="Arial" panose="020B0604020202020204" pitchFamily="34" charset="0"/>
+                <a:cs typeface="Arial" panose="020B0604020202020204" pitchFamily="34" charset="0"/>
+              </a:rPr>
+              <a:t>este</a:t>
+            </a:r>
+            <a:r>
+              <a:rPr lang="en-US" sz="1200" dirty="0">
+                <a:latin typeface="Arial" panose="020B0604020202020204" pitchFamily="34" charset="0"/>
+                <a:cs typeface="Arial" panose="020B0604020202020204" pitchFamily="34" charset="0"/>
+              </a:rPr>
+              <a:t> </a:t>
+            </a:r>
+            <a:r>
+              <a:rPr lang="en-US" sz="1200" dirty="0" err="1">
+                <a:latin typeface="Arial" panose="020B0604020202020204" pitchFamily="34" charset="0"/>
+                <a:cs typeface="Arial" panose="020B0604020202020204" pitchFamily="34" charset="0"/>
+              </a:rPr>
+              <a:t>caso</a:t>
+            </a:r>
+            <a:r>
+              <a:rPr lang="en-US" sz="1200" dirty="0">
+                <a:latin typeface="Arial" panose="020B0604020202020204" pitchFamily="34" charset="0"/>
+                <a:cs typeface="Arial" panose="020B0604020202020204" pitchFamily="34" charset="0"/>
+              </a:rPr>
+              <a:t> con un </a:t>
+            </a:r>
+            <a:r>
+              <a:rPr lang="en-US" sz="1200" dirty="0" err="1">
+                <a:latin typeface="Arial" panose="020B0604020202020204" pitchFamily="34" charset="0"/>
+                <a:cs typeface="Arial" panose="020B0604020202020204" pitchFamily="34" charset="0"/>
+              </a:rPr>
+              <a:t>incremento</a:t>
+            </a:r>
+            <a:r>
+              <a:rPr lang="en-US" sz="1200" dirty="0">
+                <a:latin typeface="Arial" panose="020B0604020202020204" pitchFamily="34" charset="0"/>
+                <a:cs typeface="Arial" panose="020B0604020202020204" pitchFamily="34" charset="0"/>
+              </a:rPr>
+              <a:t> de 1.5. </a:t>
+            </a:r>
+            <a:r>
+              <a:rPr lang="en-US" sz="1200" dirty="0" err="1">
+                <a:latin typeface="Arial" panose="020B0604020202020204" pitchFamily="34" charset="0"/>
+                <a:cs typeface="Arial" panose="020B0604020202020204" pitchFamily="34" charset="0"/>
+              </a:rPr>
+              <a:t>Hemos</a:t>
+            </a:r>
+            <a:r>
+              <a:rPr lang="en-US" sz="1200" dirty="0">
+                <a:latin typeface="Arial" panose="020B0604020202020204" pitchFamily="34" charset="0"/>
+                <a:cs typeface="Arial" panose="020B0604020202020204" pitchFamily="34" charset="0"/>
+              </a:rPr>
+              <a:t> </a:t>
+            </a:r>
+            <a:r>
+              <a:rPr lang="en-US" sz="1200" dirty="0" err="1">
+                <a:latin typeface="Arial" panose="020B0604020202020204" pitchFamily="34" charset="0"/>
+                <a:cs typeface="Arial" panose="020B0604020202020204" pitchFamily="34" charset="0"/>
+              </a:rPr>
+              <a:t>conseguido</a:t>
+            </a:r>
+            <a:r>
+              <a:rPr lang="en-US" sz="1200" dirty="0">
+                <a:latin typeface="Arial" panose="020B0604020202020204" pitchFamily="34" charset="0"/>
+                <a:cs typeface="Arial" panose="020B0604020202020204" pitchFamily="34" charset="0"/>
+              </a:rPr>
+              <a:t> una </a:t>
+            </a:r>
+            <a:r>
+              <a:rPr lang="en-US" sz="1200" dirty="0" err="1">
+                <a:latin typeface="Arial" panose="020B0604020202020204" pitchFamily="34" charset="0"/>
+                <a:cs typeface="Arial" panose="020B0604020202020204" pitchFamily="34" charset="0"/>
+              </a:rPr>
+              <a:t>potencia</a:t>
+            </a:r>
+            <a:r>
+              <a:rPr lang="en-US" sz="1200" dirty="0">
+                <a:latin typeface="Arial" panose="020B0604020202020204" pitchFamily="34" charset="0"/>
+                <a:cs typeface="Arial" panose="020B0604020202020204" pitchFamily="34" charset="0"/>
+              </a:rPr>
+              <a:t> de </a:t>
+            </a:r>
+            <a:r>
+              <a:rPr lang="en-US" sz="1200" dirty="0" err="1">
+                <a:latin typeface="Arial" panose="020B0604020202020204" pitchFamily="34" charset="0"/>
+                <a:cs typeface="Arial" panose="020B0604020202020204" pitchFamily="34" charset="0"/>
+              </a:rPr>
+              <a:t>salida</a:t>
+            </a:r>
+            <a:r>
+              <a:rPr lang="en-US" sz="1200" dirty="0">
+                <a:latin typeface="Arial" panose="020B0604020202020204" pitchFamily="34" charset="0"/>
+                <a:cs typeface="Arial" panose="020B0604020202020204" pitchFamily="34" charset="0"/>
+              </a:rPr>
+              <a:t> de 0.9925 que </a:t>
+            </a:r>
+            <a:r>
+              <a:rPr lang="en-US" sz="1200" dirty="0" err="1">
+                <a:latin typeface="Arial" panose="020B0604020202020204" pitchFamily="34" charset="0"/>
+                <a:cs typeface="Arial" panose="020B0604020202020204" pitchFamily="34" charset="0"/>
+              </a:rPr>
+              <a:t>corresponde</a:t>
+            </a:r>
+            <a:r>
+              <a:rPr lang="en-US" sz="1200" dirty="0">
+                <a:latin typeface="Arial" panose="020B0604020202020204" pitchFamily="34" charset="0"/>
+                <a:cs typeface="Arial" panose="020B0604020202020204" pitchFamily="34" charset="0"/>
+              </a:rPr>
+              <a:t> con 0.0326 dB de </a:t>
+            </a:r>
+            <a:r>
+              <a:rPr lang="en-US" sz="1200" dirty="0" err="1">
+                <a:latin typeface="Arial" panose="020B0604020202020204" pitchFamily="34" charset="0"/>
+                <a:cs typeface="Arial" panose="020B0604020202020204" pitchFamily="34" charset="0"/>
+              </a:rPr>
+              <a:t>pérdidas</a:t>
+            </a:r>
+            <a:r>
+              <a:rPr lang="en-US" sz="1200" dirty="0">
+                <a:latin typeface="Arial" panose="020B0604020202020204" pitchFamily="34" charset="0"/>
+                <a:cs typeface="Arial" panose="020B0604020202020204" pitchFamily="34" charset="0"/>
+              </a:rPr>
+              <a:t>. </a:t>
+            </a:r>
           </a:p>
           <a:p>
             <a:pPr algn="just"/>
-            <a:endParaRPr lang="en-US" sz="1200" dirty="0">
-              <a:latin typeface="Arial" panose="020B0604020202020204" pitchFamily="34" charset="0"/>
-              <a:cs typeface="Arial" panose="020B0604020202020204" pitchFamily="34" charset="0"/>
-            </a:endParaRPr>
-          </a:p>
-          <a:p>
-            <a:pPr algn="just"/>
-            <a:endParaRPr lang="en-US" sz="1200" dirty="0">
-              <a:latin typeface="Arial" panose="020B0604020202020204" pitchFamily="34" charset="0"/>
-              <a:cs typeface="Arial" panose="020B0604020202020204" pitchFamily="34" charset="0"/>
-            </a:endParaRPr>
+            <a:r>
+              <a:rPr lang="en-US" sz="1200" dirty="0" err="1">
+                <a:latin typeface="Arial" panose="020B0604020202020204" pitchFamily="34" charset="0"/>
+                <a:cs typeface="Arial" panose="020B0604020202020204" pitchFamily="34" charset="0"/>
+              </a:rPr>
+              <a:t>Hemos</a:t>
+            </a:r>
+            <a:r>
+              <a:rPr lang="en-US" sz="1200" dirty="0">
+                <a:latin typeface="Arial" panose="020B0604020202020204" pitchFamily="34" charset="0"/>
+                <a:cs typeface="Arial" panose="020B0604020202020204" pitchFamily="34" charset="0"/>
+              </a:rPr>
+              <a:t> </a:t>
+            </a:r>
+            <a:r>
+              <a:rPr lang="en-US" sz="1200" dirty="0" err="1">
+                <a:latin typeface="Arial" panose="020B0604020202020204" pitchFamily="34" charset="0"/>
+                <a:cs typeface="Arial" panose="020B0604020202020204" pitchFamily="34" charset="0"/>
+              </a:rPr>
+              <a:t>mantenido</a:t>
+            </a:r>
+            <a:r>
+              <a:rPr lang="en-US" sz="1200" dirty="0">
+                <a:latin typeface="Arial" panose="020B0604020202020204" pitchFamily="34" charset="0"/>
+                <a:cs typeface="Arial" panose="020B0604020202020204" pitchFamily="34" charset="0"/>
+              </a:rPr>
+              <a:t> un </a:t>
+            </a:r>
+            <a:r>
+              <a:rPr lang="en-US" sz="1200" dirty="0" err="1">
+                <a:latin typeface="Arial" panose="020B0604020202020204" pitchFamily="34" charset="0"/>
+                <a:cs typeface="Arial" panose="020B0604020202020204" pitchFamily="34" charset="0"/>
+              </a:rPr>
+              <a:t>buen</a:t>
+            </a:r>
+            <a:r>
+              <a:rPr lang="en-US" sz="1200" dirty="0">
+                <a:latin typeface="Arial" panose="020B0604020202020204" pitchFamily="34" charset="0"/>
+                <a:cs typeface="Arial" panose="020B0604020202020204" pitchFamily="34" charset="0"/>
+              </a:rPr>
+              <a:t> ratio de 24.4% / 25.6%.</a:t>
+            </a:r>
           </a:p>
           <a:p>
             <a:pPr algn="just"/>
@@ -8603,7 +9483,7 @@
           <p:nvPr>
             <p:extLst>
               <p:ext uri="{D42A27DB-BD31-4B8C-83A1-F6EECF244321}">
-                <p14:modId xmlns:p14="http://schemas.microsoft.com/office/powerpoint/2010/main" val="222850975"/>
+                <p14:modId xmlns:p14="http://schemas.microsoft.com/office/powerpoint/2010/main" val="3798149823"/>
               </p:ext>
             </p:extLst>
           </p:nvPr>
@@ -8830,7 +9710,7 @@
                     <a:p>
                       <a:r>
                         <a:rPr lang="es-ES" dirty="0"/>
-                        <a:t>13.2 + 1.35</a:t>
+                        <a:t>1 + 1.5</a:t>
                       </a:r>
                     </a:p>
                   </a:txBody>
